--- a/presentation/GeoGuard.pptx
+++ b/presentation/GeoGuard.pptx
@@ -2,23 +2,25 @@
 <file path=ppt/presentation.xml><?xml version="1.0" encoding="utf-8"?>
 <p:presentation xmlns:p="http://schemas.openxmlformats.org/presentationml/2006/main">
   <p:sldMasterIdLst>
-    <p:sldMasterId xmlns:r="http://schemas.openxmlformats.org/officeDocument/2006/relationships" id="2147483648" r:id="Rbe52e388f519498b"/>
+    <p:sldMasterId xmlns:r="http://schemas.openxmlformats.org/officeDocument/2006/relationships" id="2147483648" r:id="R59753d3cbd3b4160"/>
   </p:sldMasterIdLst>
   <p:notesMasterIdLst>
-    <p:notesMasterId xmlns:r="http://schemas.openxmlformats.org/officeDocument/2006/relationships" r:id="R8b0462208cc745db"/>
+    <p:notesMasterId xmlns:r="http://schemas.openxmlformats.org/officeDocument/2006/relationships" r:id="R8aa82f9e74a14696"/>
   </p:notesMasterIdLst>
   <p:sldIdLst>
-    <p:sldId xmlns:r="http://schemas.openxmlformats.org/officeDocument/2006/relationships" id="256" r:id="Rc3ae761f7baf4ec2"/>
-    <p:sldId xmlns:r="http://schemas.openxmlformats.org/officeDocument/2006/relationships" id="257" r:id="R8594446a29a94c8e"/>
-    <p:sldId xmlns:r="http://schemas.openxmlformats.org/officeDocument/2006/relationships" id="258" r:id="R19775bfd2849480e"/>
-    <p:sldId xmlns:r="http://schemas.openxmlformats.org/officeDocument/2006/relationships" id="259" r:id="R5e2abb468f9747ce"/>
-    <p:sldId xmlns:r="http://schemas.openxmlformats.org/officeDocument/2006/relationships" id="260" r:id="R35b7226213a349ba"/>
-    <p:sldId xmlns:r="http://schemas.openxmlformats.org/officeDocument/2006/relationships" id="261" r:id="R34443920c497424e"/>
-    <p:sldId xmlns:r="http://schemas.openxmlformats.org/officeDocument/2006/relationships" id="262" r:id="Rb23ce8d0f4a847e9"/>
-    <p:sldId xmlns:r="http://schemas.openxmlformats.org/officeDocument/2006/relationships" id="263" r:id="Rac63162ccfc84134"/>
-    <p:sldId xmlns:r="http://schemas.openxmlformats.org/officeDocument/2006/relationships" id="264" r:id="Rdfd1c625986244fc"/>
-    <p:sldId xmlns:r="http://schemas.openxmlformats.org/officeDocument/2006/relationships" id="265" r:id="R683c86ab2dc2447e"/>
-    <p:sldId xmlns:r="http://schemas.openxmlformats.org/officeDocument/2006/relationships" id="266" r:id="R93e80029bdb5430d"/>
+    <p:sldId xmlns:r="http://schemas.openxmlformats.org/officeDocument/2006/relationships" id="256" r:id="R3d62b40e5427459b"/>
+    <p:sldId xmlns:r="http://schemas.openxmlformats.org/officeDocument/2006/relationships" id="257" r:id="R95fad0d398a84dee"/>
+    <p:sldId xmlns:r="http://schemas.openxmlformats.org/officeDocument/2006/relationships" id="258" r:id="R01be252ab9074992"/>
+    <p:sldId xmlns:r="http://schemas.openxmlformats.org/officeDocument/2006/relationships" id="259" r:id="Rda825094e9294128"/>
+    <p:sldId xmlns:r="http://schemas.openxmlformats.org/officeDocument/2006/relationships" id="260" r:id="Re94d39905815428a"/>
+    <p:sldId xmlns:r="http://schemas.openxmlformats.org/officeDocument/2006/relationships" id="261" r:id="R9b9bebaff3834896"/>
+    <p:sldId xmlns:r="http://schemas.openxmlformats.org/officeDocument/2006/relationships" id="262" r:id="R8d52800434a34079"/>
+    <p:sldId xmlns:r="http://schemas.openxmlformats.org/officeDocument/2006/relationships" id="263" r:id="R835c13802a064267"/>
+    <p:sldId xmlns:r="http://schemas.openxmlformats.org/officeDocument/2006/relationships" id="264" r:id="R79926f1bf45f435d"/>
+    <p:sldId xmlns:r="http://schemas.openxmlformats.org/officeDocument/2006/relationships" id="265" r:id="Re7fd04ecfc734bb2"/>
+    <p:sldId xmlns:r="http://schemas.openxmlformats.org/officeDocument/2006/relationships" id="266" r:id="R414d5e84c67b4133"/>
+    <p:sldId xmlns:r="http://schemas.openxmlformats.org/officeDocument/2006/relationships" id="267" r:id="R21b2fcb3490c41fc"/>
+    <p:sldId xmlns:r="http://schemas.openxmlformats.org/officeDocument/2006/relationships" id="268" r:id="R81e007cfdf0d41e4"/>
   </p:sldIdLst>
   <p:sldSz cx="12192000" cy="6858000"/>
   <p:notesSz cx="6858000" cy="9144000"/>
@@ -532,7 +534,7 @@
           </a:p>
           <a:p xmlns:a="http://schemas.openxmlformats.org/drawingml/2006/main">
             <a:r>
-              <a:t>Report contribution headings and references. Zainab: supplied Geoguard.pdf; Raseel: Earth Engine mapping; Abdulaziz: AI screening and integration. Model terms: MARS-S2L CC BY-NC-SA 4.0; CloudSEN12 weights CC BY-NC 4.0; packages LGPLv3. Team-authored material has no blanket licence asserted.</a:t>
+              <a:t>Report section 4.3 and repository VALIDATION.md. All 30 full-environment local tests passed; lightweight CI may skip optional widget tests. Fresh authenticated Python queries and independent UAE accuracy are not established by these checks.</a:t>
             </a:r>
           </a:p>
         </p:txBody>
@@ -602,6 +604,151 @@
           <a:lstStyle xmlns:a="http://schemas.openxmlformats.org/drawingml/2006/main"/>
           <a:p xmlns:a="http://schemas.openxmlformats.org/drawingml/2006/main">
             <a:r>
+              <a:t>Proposed plan, not achieved results. Full protocol: https://github.com/losth6wz/Geoguard/blob/main/VALIDATION.md . Need independent labels, event definitions and matching tolerances before scoring; false alarm targets require partner agreement. At least three real-user contacts support orientation bonus, page21, supplied AYSH orientation. No interview or benchmark claimed.</a:t>
+            </a:r>
+          </a:p>
+        </p:txBody>
+      </p:sp>
+      <p:sp>
+        <p:nvSpPr>
+          <p:cNvPr id="4" name="Slide Number Placeholder 3"/>
+          <p:cNvSpPr>
+            <a:spLocks xmlns:a="http://schemas.openxmlformats.org/drawingml/2006/main" noGrp="1"/>
+          </p:cNvSpPr>
+          <p:nvPr>
+            <p:ph type="sldNum" idx="5"/>
+          </p:nvPr>
+        </p:nvSpPr>
+        <p:spPr/>
+        <p:txBody>
+          <a:bodyPr xmlns:a="http://schemas.openxmlformats.org/drawingml/2006/main"/>
+          <a:lstStyle xmlns:a="http://schemas.openxmlformats.org/drawingml/2006/main"/>
+          <a:p xmlns:a="http://schemas.openxmlformats.org/drawingml/2006/main"/>
+        </p:txBody>
+      </p:sp>
+    </p:spTree>
+  </p:cSld>
+  <p:clrMapOvr>
+    <a:masterClrMapping xmlns:a="http://schemas.openxmlformats.org/drawingml/2006/main"/>
+  </p:clrMapOvr>
+</p:notes>
+</file>
+
+<file path=ppt/notesSlides/notesSlide12.xml><?xml version="1.0" encoding="utf-8"?>
+<p:notes xmlns:p="http://schemas.openxmlformats.org/presentationml/2006/main">
+  <p:cSld>
+    <p:spTree>
+      <p:nvGrpSpPr>
+        <p:cNvPr id="1" name=""/>
+        <p:cNvGrpSpPr/>
+        <p:nvPr/>
+      </p:nvGrpSpPr>
+      <p:grpSpPr>
+        <a:xfrm xmlns:a="http://schemas.openxmlformats.org/drawingml/2006/main"/>
+      </p:grpSpPr>
+      <p:sp>
+        <p:nvSpPr>
+          <p:cNvPr id="2" name="Slide Image Placeholder 1"/>
+          <p:cNvSpPr>
+            <a:spLocks xmlns:a="http://schemas.openxmlformats.org/drawingml/2006/main" noGrp="1"/>
+          </p:cNvSpPr>
+          <p:nvPr>
+            <p:ph type="sldImg" idx="0"/>
+          </p:nvPr>
+        </p:nvSpPr>
+        <p:spPr/>
+      </p:sp>
+      <p:sp>
+        <p:nvSpPr>
+          <p:cNvPr id="3" name="Notes Placeholder 2"/>
+          <p:cNvSpPr>
+            <a:spLocks xmlns:a="http://schemas.openxmlformats.org/drawingml/2006/main" noGrp="1"/>
+          </p:cNvSpPr>
+          <p:nvPr>
+            <p:ph type="body" idx="1"/>
+          </p:nvPr>
+        </p:nvSpPr>
+        <p:spPr/>
+        <p:txBody>
+          <a:bodyPr xmlns:a="http://schemas.openxmlformats.org/drawingml/2006/main"/>
+          <a:lstStyle xmlns:a="http://schemas.openxmlformats.org/drawingml/2006/main"/>
+          <a:p xmlns:a="http://schemas.openxmlformats.org/drawingml/2006/main">
+            <a:r>
+              <a:t>Source: GeoGuard report, sections 1–4, 7 October 2026. https://docs.google.com/document/d/1m8BmXCIb25mvpgSxf2ykUxtepey_wdF7z4WF1vljtgs/edit</a:t>
+            </a:r>
+          </a:p>
+          <a:p xmlns:a="http://schemas.openxmlformats.org/drawingml/2006/main">
+            <a:r>
+              <a:t>Report contribution headings and references. Zainab: supplied Geoguard.pdf; Raseel: Earth Engine mapping; Abdulaziz: AI screening and integration. Model terms: MARS-S2L CC BY-NC-SA 4.0; CloudSEN12 weights CC BY-NC 4.0; packages LGPLv3. Team-authored material has no blanket licence asserted.</a:t>
+            </a:r>
+          </a:p>
+        </p:txBody>
+      </p:sp>
+      <p:sp>
+        <p:nvSpPr>
+          <p:cNvPr id="4" name="Slide Number Placeholder 3"/>
+          <p:cNvSpPr>
+            <a:spLocks xmlns:a="http://schemas.openxmlformats.org/drawingml/2006/main" noGrp="1"/>
+          </p:cNvSpPr>
+          <p:nvPr>
+            <p:ph type="sldNum" idx="5"/>
+          </p:nvPr>
+        </p:nvSpPr>
+        <p:spPr/>
+        <p:txBody>
+          <a:bodyPr xmlns:a="http://schemas.openxmlformats.org/drawingml/2006/main"/>
+          <a:lstStyle xmlns:a="http://schemas.openxmlformats.org/drawingml/2006/main"/>
+          <a:p xmlns:a="http://schemas.openxmlformats.org/drawingml/2006/main"/>
+        </p:txBody>
+      </p:sp>
+    </p:spTree>
+  </p:cSld>
+  <p:clrMapOvr>
+    <a:masterClrMapping xmlns:a="http://schemas.openxmlformats.org/drawingml/2006/main"/>
+  </p:clrMapOvr>
+</p:notes>
+</file>
+
+<file path=ppt/notesSlides/notesSlide13.xml><?xml version="1.0" encoding="utf-8"?>
+<p:notes xmlns:p="http://schemas.openxmlformats.org/presentationml/2006/main">
+  <p:cSld>
+    <p:spTree>
+      <p:nvGrpSpPr>
+        <p:cNvPr id="1" name=""/>
+        <p:cNvGrpSpPr/>
+        <p:nvPr/>
+      </p:nvGrpSpPr>
+      <p:grpSpPr>
+        <a:xfrm xmlns:a="http://schemas.openxmlformats.org/drawingml/2006/main"/>
+      </p:grpSpPr>
+      <p:sp>
+        <p:nvSpPr>
+          <p:cNvPr id="2" name="Slide Image Placeholder 1"/>
+          <p:cNvSpPr>
+            <a:spLocks xmlns:a="http://schemas.openxmlformats.org/drawingml/2006/main" noGrp="1"/>
+          </p:cNvSpPr>
+          <p:nvPr>
+            <p:ph type="sldImg" idx="0"/>
+          </p:nvPr>
+        </p:nvSpPr>
+        <p:spPr/>
+      </p:sp>
+      <p:sp>
+        <p:nvSpPr>
+          <p:cNvPr id="3" name="Notes Placeholder 2"/>
+          <p:cNvSpPr>
+            <a:spLocks xmlns:a="http://schemas.openxmlformats.org/drawingml/2006/main" noGrp="1"/>
+          </p:cNvSpPr>
+          <p:nvPr>
+            <p:ph type="body" idx="1"/>
+          </p:nvPr>
+        </p:nvSpPr>
+        <p:spPr/>
+        <p:txBody>
+          <a:bodyPr xmlns:a="http://schemas.openxmlformats.org/drawingml/2006/main"/>
+          <a:lstStyle xmlns:a="http://schemas.openxmlformats.org/drawingml/2006/main"/>
+          <a:p xmlns:a="http://schemas.openxmlformats.org/drawingml/2006/main">
+            <a:r>
               <a:t>Source: GeoGuard report, sections 1–4, 7 October 2026. https://docs.google.com/document/d/1m8BmXCIb25mvpgSxf2ykUxtepey_wdF7z4WF1vljtgs/edit</a:t>
             </a:r>
           </a:p>
@@ -752,12 +899,7 @@
           <a:lstStyle xmlns:a="http://schemas.openxmlformats.org/drawingml/2006/main"/>
           <a:p xmlns:a="http://schemas.openxmlformats.org/drawingml/2006/main">
             <a:r>
-              <a:t>Source: GeoGuard report, sections 1–4, 7 October 2026. https://docs.google.com/document/d/1m8BmXCIb25mvpgSxf2ykUxtepey_wdF7z4WF1vljtgs/edit</a:t>
-            </a:r>
-          </a:p>
-          <a:p xmlns:a="http://schemas.openxmlformats.org/drawingml/2006/main">
-            <a:r>
-              <a:t>Report section 1.5 and section 2. Four separate quantities; no combined pollution score. Sentinel-5P catalogs: https://developers.google.com/earth-engine/datasets/catalog/COPERNICUS_S5P_NRTI_L3_NO2 ; corresponding CO, SO2 and OFFL CH4 catalogs.</a:t>
+              <a:t>Team-authored workflow demonstrated in repository and website, 9 October 2026. https://github.com/losth6wz/Geoguard . Proposed benefit; user research and time savings have not been measured. Copernicus observations and unchanged UNEP IMEO MARS-S2L are upstream contributions.</a:t>
             </a:r>
           </a:p>
         </p:txBody>
@@ -832,7 +974,7 @@
           </a:p>
           <a:p xmlns:a="http://schemas.openxmlformats.org/drawingml/2006/main">
             <a:r>
-              <a:t>Report sections 2.2–2.4 and 3.1–3.3. Methane screening uses an approximately 2 × 2 km crop, up to three reference candidates and acquisition-time modeled wind.</a:t>
+              <a:t>Report section 1.5 and section 2. Four separate quantities; no combined pollution score. Sentinel-5P catalogs: https://developers.google.com/earth-engine/datasets/catalog/COPERNICUS_S5P_NRTI_L3_NO2 ; corresponding CO, SO2 and OFFL CH4 catalogs.</a:t>
             </a:r>
           </a:p>
         </p:txBody>
@@ -907,7 +1049,7 @@
           </a:p>
           <a:p xmlns:a="http://schemas.openxmlformats.org/drawingml/2006/main">
             <a:r>
-              <a:t>Report sections 2.3 and 4.2. Actual Earth Engine exports: NO₂ 4 October; CO/SO₂/CH₄ 7 October 2026. Equal weighting of usable daily area means. Raw source exports and exact precision available in repository.</a:t>
+              <a:t>Report sections 2.2–2.4 and 3.1–3.3. Methane screening uses an approximately 2 × 2 km crop, up to three reference candidates and acquisition-time modeled wind.</a:t>
             </a:r>
           </a:p>
         </p:txBody>
@@ -982,7 +1124,7 @@
           </a:p>
           <a:p xmlns:a="http://schemas.openxmlformats.org/drawingml/2006/main">
             <a:r>
-              <a:t>Report sections 3.1–3.3 and 4.2. Image: GeoGuard derived output, Copernicus Sentinel-2 data (2026), pretrained UNEP IMEO MARS-S2L. https://huggingface.co/datasets/UNEP-IMEO/MARS-S2L ; https://github.com/UNEP-IMEO-MARS/marss2l .</a:t>
+              <a:t>Report sections 2.3 and 4.2. Actual Earth Engine exports: NO₂ 4 October; CO/SO₂/CH₄ 7 October 2026. Equal weighting of usable daily area means. Raw source exports and exact precision available in repository.</a:t>
             </a:r>
           </a:p>
         </p:txBody>
@@ -1057,7 +1199,7 @@
           </a:p>
           <a:p xmlns:a="http://schemas.openxmlformats.org/drawingml/2006/main">
             <a:r>
-              <a:t>Report sections 2.4, 3.5 and 4.4. Public demo: https://losth6wz.github.io/Geoguard/ ; fresh queries use the interactive notebook.</a:t>
+              <a:t>Report sections 3.1–3.3 and 4.2. Image: GeoGuard derived output, Copernicus Sentinel-2 data (2026), pretrained UNEP IMEO MARS-S2L. https://huggingface.co/datasets/UNEP-IMEO/MARS-S2L ; https://github.com/UNEP-IMEO-MARS/marss2l .</a:t>
             </a:r>
           </a:p>
         </p:txBody>
@@ -1132,7 +1274,7 @@
           </a:p>
           <a:p xmlns:a="http://schemas.openxmlformats.org/drawingml/2006/main">
             <a:r>
-              <a:t>Report section 4.3 and repository VALIDATION.md. All 30 full-environment local tests passed; lightweight CI may skip optional widget tests. Fresh authenticated Python queries and independent UAE accuracy are not established by these checks.</a:t>
+              <a:t>Report sections 2.4, 3.5 and 4.4. Public demo: https://losth6wz.github.io/Geoguard/ ; fresh queries use the interactive notebook.</a:t>
             </a:r>
           </a:p>
         </p:txBody>
@@ -1202,12 +1344,7 @@
           <a:lstStyle xmlns:a="http://schemas.openxmlformats.org/drawingml/2006/main"/>
           <a:p xmlns:a="http://schemas.openxmlformats.org/drawingml/2006/main">
             <a:r>
-              <a:t>Source: GeoGuard report, sections 1–4, 7 October 2026. https://docs.google.com/document/d/1m8BmXCIb25mvpgSxf2ykUxtepey_wdF7z4WF1vljtgs/edit</a:t>
-            </a:r>
-          </a:p>
-          <a:p xmlns:a="http://schemas.openxmlformats.org/drawingml/2006/main">
-            <a:r>
-              <a:t>Report sections 3.4, 4.5 and conclusion. Regional XCH₄ differs from model scores; 10 m processing does not improve native 20 m SWIR information. Field validation must pair gas-specific observations and held-out dates/locations.</a:t>
+              <a:t>Screenshot: actual GeoGuard browser interface on 9 October 2026, locally verified revision of https://losth6wz.github.io/Geoguard/ . Basemap OpenStreetMap contributors; navigation only. NO2 result from archived authenticated Earth Engine exports.</a:t>
             </a:r>
           </a:p>
         </p:txBody>
@@ -1275,7 +1412,7 @@
   </p:cSld>
   <p:clrMap bg1="lt1" tx1="dk1" bg2="lt2" tx2="dk2" accent1="accent1" accent2="accent2" accent3="accent3" accent4="accent4" accent5="accent5" accent6="accent6" hlink="hlink" folHlink="folHlink"/>
   <p:sldLayoutIdLst>
-    <p:sldLayoutId xmlns:r="http://schemas.openxmlformats.org/officeDocument/2006/relationships" id="2147483649" r:id="R1d0548fcd1914e71"/>
+    <p:sldLayoutId xmlns:r="http://schemas.openxmlformats.org/officeDocument/2006/relationships" id="2147483649" r:id="R01131c271cc24342"/>
   </p:sldLayoutIdLst>
   <p:txStyles>
     <p:titleStyle>
@@ -1855,6 +1992,7 @@
           <a:lstStyle xmlns:a="http://schemas.openxmlformats.org/drawingml/2006/main"/>
           <a:p xmlns:a="http://schemas.openxmlformats.org/drawingml/2006/main">
             <a:pPr>
+              <a:buNone/>
               <a:defRPr sz="6750" b="1">
                 <a:solidFill>
                   <a:srgbClr val="FFFFFF"/>
@@ -1912,6 +2050,7 @@
           <a:lstStyle xmlns:a="http://schemas.openxmlformats.org/drawingml/2006/main"/>
           <a:p xmlns:a="http://schemas.openxmlformats.org/drawingml/2006/main">
             <a:pPr>
+              <a:buNone/>
               <a:defRPr sz="3150" b="0">
                 <a:solidFill>
                   <a:srgbClr val="DCF78E"/>
@@ -1969,6 +2108,7 @@
           <a:lstStyle xmlns:a="http://schemas.openxmlformats.org/drawingml/2006/main"/>
           <a:p xmlns:a="http://schemas.openxmlformats.org/drawingml/2006/main">
             <a:pPr>
+              <a:buNone/>
               <a:defRPr sz="2400" b="0">
                 <a:solidFill>
                   <a:srgbClr val="FFFFFF"/>
@@ -1992,6 +2132,7 @@
           </a:p>
           <a:p xmlns:a="http://schemas.openxmlformats.org/drawingml/2006/main">
             <a:pPr>
+              <a:buNone/>
               <a:defRPr sz="2400" b="0">
                 <a:solidFill>
                   <a:srgbClr val="FFFFFF"/>
@@ -2049,6 +2190,7 @@
           <a:lstStyle xmlns:a="http://schemas.openxmlformats.org/drawingml/2006/main"/>
           <a:p xmlns:a="http://schemas.openxmlformats.org/drawingml/2006/main">
             <a:pPr>
+              <a:buNone/>
               <a:defRPr sz="1725" b="0">
                 <a:solidFill>
                   <a:srgbClr val="FFFFFF"/>
@@ -2103,10 +2245,10 @@
       </p:grpSpPr>
       <p:sp>
         <p:nvSpPr>
-          <p:cNvPr id="14" name="">
-            <a:extLst xmlns:a="http://schemas.openxmlformats.org/drawingml/2006/main">
-              <a:ext uri="{FF2B5EF4-FFF2-40B4-BE49-F238E27FC236}">
-                <a16:creationId xmlns:a16="http://schemas.microsoft.com/office/drawing/2014/main" id="{3809344B-D47B-45C3-96D9-79DC24760DD1}"/>
+          <p:cNvPr id="8" name="">
+            <a:extLst xmlns:a="http://schemas.openxmlformats.org/drawingml/2006/main">
+              <a:ext uri="{FF2B5EF4-FFF2-40B4-BE49-F238E27FC236}">
+                <a16:creationId xmlns:a16="http://schemas.microsoft.com/office/drawing/2014/main" id="{18E20E2A-3350-4105-966E-773BC6EC10C2}"/>
               </a:ext>
             </a:extLst>
           </p:cNvPr>
@@ -2135,6 +2277,7 @@
           <a:lstStyle xmlns:a="http://schemas.openxmlformats.org/drawingml/2006/main"/>
           <a:p xmlns:a="http://schemas.openxmlformats.org/drawingml/2006/main">
             <a:pPr>
+              <a:buNone/>
               <a:defRPr sz="3300" b="1">
                 <a:solidFill>
                   <a:srgbClr val="103D36"/>
@@ -2153,7 +2296,7 @@
                 <a:ea typeface="Arial"/>
                 <a:cs typeface="Arial"/>
               </a:rPr>
-              <a:t>Team and demonstration</a:t>
+              <a:t>Reproducibility and validation</a:t>
             </a:r>
           </a:p>
         </p:txBody>
@@ -2163,7 +2306,7 @@
           <p:cNvPr id="2" name="">
             <a:extLst xmlns:a="http://schemas.openxmlformats.org/drawingml/2006/main">
               <a:ext uri="{FF2B5EF4-FFF2-40B4-BE49-F238E27FC236}">
-                <a16:creationId xmlns:a16="http://schemas.microsoft.com/office/drawing/2014/main" id="{CD173FE0-6703-448A-943C-430371C78A18}"/>
+                <a16:creationId xmlns:a16="http://schemas.microsoft.com/office/drawing/2014/main" id="{93F6DA17-7753-4F49-B07F-1CB3771D8416}"/>
               </a:ext>
             </a:extLst>
           </p:cNvPr>
@@ -2193,7 +2336,7 @@
           <p:cNvPr id="3" name="">
             <a:extLst xmlns:a="http://schemas.openxmlformats.org/drawingml/2006/main">
               <a:ext uri="{FF2B5EF4-FFF2-40B4-BE49-F238E27FC236}">
-                <a16:creationId xmlns:a16="http://schemas.microsoft.com/office/drawing/2014/main" id="{25B1942B-C05C-41CB-BBBB-EA73F97D08C2}"/>
+                <a16:creationId xmlns:a16="http://schemas.microsoft.com/office/drawing/2014/main" id="{0D2F6BE0-C900-4F20-95E6-38278730A2C1}"/>
               </a:ext>
             </a:extLst>
           </p:cNvPr>
@@ -2222,6 +2365,7 @@
           <a:lstStyle xmlns:a="http://schemas.openxmlformats.org/drawingml/2006/main"/>
           <a:p xmlns:a="http://schemas.openxmlformats.org/drawingml/2006/main">
             <a:pPr>
+              <a:buNone/>
               <a:defRPr sz="1200" b="0">
                 <a:solidFill>
                   <a:srgbClr val="53716A"/>
@@ -2250,19 +2394,19 @@
           <p:cNvPr id="4" name="">
             <a:extLst xmlns:a="http://schemas.openxmlformats.org/drawingml/2006/main">
               <a:ext uri="{FF2B5EF4-FFF2-40B4-BE49-F238E27FC236}">
-                <a16:creationId xmlns:a16="http://schemas.microsoft.com/office/drawing/2014/main" id="{2988259A-9C54-4E8C-A38E-3693518FEDE8}"/>
-              </a:ext>
-            </a:extLst>
-          </p:cNvPr>
-          <p:cNvSpPr>
-            <a:spLocks xmlns:a="http://schemas.openxmlformats.org/drawingml/2006/main" noGrp="1"/>
-          </p:cNvSpPr>
-          <p:nvPr/>
-        </p:nvSpPr>
-        <p:spPr>
-          <a:xfrm xmlns:a="http://schemas.openxmlformats.org/drawingml/2006/main">
-            <a:off x="609600" y="1933575"/>
-            <a:ext cx="3333750" cy="457200"/>
+                <a16:creationId xmlns:a16="http://schemas.microsoft.com/office/drawing/2014/main" id="{28EC5850-F949-40DB-8EC1-60A5E2242B39}"/>
+              </a:ext>
+            </a:extLst>
+          </p:cNvPr>
+          <p:cNvSpPr>
+            <a:spLocks xmlns:a="http://schemas.openxmlformats.org/drawingml/2006/main" noGrp="1"/>
+          </p:cNvSpPr>
+          <p:nvPr/>
+        </p:nvSpPr>
+        <p:spPr>
+          <a:xfrm xmlns:a="http://schemas.openxmlformats.org/drawingml/2006/main">
+            <a:off x="609600" y="1828800"/>
+            <a:ext cx="10477500" cy="666750"/>
           </a:xfrm>
           <a:prstGeom xmlns:a="http://schemas.openxmlformats.org/drawingml/2006/main" prst="rect">
             <a:avLst/>
@@ -2279,7 +2423,8 @@
           <a:lstStyle xmlns:a="http://schemas.openxmlformats.org/drawingml/2006/main"/>
           <a:p xmlns:a="http://schemas.openxmlformats.org/drawingml/2006/main">
             <a:pPr>
-              <a:defRPr sz="2400" b="1">
+              <a:buNone/>
+              <a:defRPr sz="3225" b="1">
                 <a:solidFill>
                   <a:srgbClr val="0C554E"/>
                 </a:solidFill>
@@ -2289,7 +2434,7 @@
               </a:defRPr>
             </a:pPr>
             <a:r>
-              <a:rPr sz="2400" b="1">
+              <a:rPr sz="3225" b="1">
                 <a:solidFill>
                   <a:srgbClr val="0C554E"/>
                 </a:solidFill>
@@ -2297,7 +2442,7 @@
                 <a:ea typeface="Arial"/>
                 <a:cs typeface="Arial"/>
               </a:rPr>
-              <a:t>Zainab</a:t>
+              <a:t>Reproducible data workflow</a:t>
             </a:r>
           </a:p>
         </p:txBody>
@@ -2307,19 +2452,19 @@
           <p:cNvPr id="5" name="">
             <a:extLst xmlns:a="http://schemas.openxmlformats.org/drawingml/2006/main">
               <a:ext uri="{FF2B5EF4-FFF2-40B4-BE49-F238E27FC236}">
-                <a16:creationId xmlns:a16="http://schemas.microsoft.com/office/drawing/2014/main" id="{35AB1F19-6D03-4397-B91A-B199AC0543C1}"/>
-              </a:ext>
-            </a:extLst>
-          </p:cNvPr>
-          <p:cNvSpPr>
-            <a:spLocks xmlns:a="http://schemas.openxmlformats.org/drawingml/2006/main" noGrp="1"/>
-          </p:cNvSpPr>
-          <p:nvPr/>
-        </p:nvSpPr>
-        <p:spPr>
-          <a:xfrm xmlns:a="http://schemas.openxmlformats.org/drawingml/2006/main">
-            <a:off x="609600" y="2571750"/>
-            <a:ext cx="3333750" cy="1000125"/>
+                <a16:creationId xmlns:a16="http://schemas.microsoft.com/office/drawing/2014/main" id="{93B0921D-CB87-402C-B23E-6A8F0CBDD158}"/>
+              </a:ext>
+            </a:extLst>
+          </p:cNvPr>
+          <p:cNvSpPr>
+            <a:spLocks xmlns:a="http://schemas.openxmlformats.org/drawingml/2006/main" noGrp="1"/>
+          </p:cNvSpPr>
+          <p:nvPr/>
+        </p:nvSpPr>
+        <p:spPr>
+          <a:xfrm xmlns:a="http://schemas.openxmlformats.org/drawingml/2006/main">
+            <a:off x="609600" y="2819400"/>
+            <a:ext cx="10858500" cy="1047750"/>
           </a:xfrm>
           <a:prstGeom xmlns:a="http://schemas.openxmlformats.org/drawingml/2006/main" prst="rect">
             <a:avLst/>
@@ -2336,48 +2481,50 @@
           <a:lstStyle xmlns:a="http://schemas.openxmlformats.org/drawingml/2006/main"/>
           <a:p xmlns:a="http://schemas.openxmlformats.org/drawingml/2006/main">
             <a:pPr>
-              <a:defRPr sz="2100" b="0">
-                <a:solidFill>
-                  <a:srgbClr val="103D36"/>
-                </a:solidFill>
-                <a:latin typeface="Arial"/>
-                <a:ea typeface="Arial"/>
-                <a:cs typeface="Arial"/>
-              </a:defRPr>
-            </a:pPr>
-            <a:r>
-              <a:rPr sz="2100" b="0">
-                <a:solidFill>
-                  <a:srgbClr val="103D36"/>
-                </a:solidFill>
-                <a:latin typeface="Arial"/>
-                <a:ea typeface="Arial"/>
-                <a:cs typeface="Arial"/>
-              </a:rPr>
-              <a:t>Pollutants, sources</a:t>
-            </a:r>
-          </a:p>
-          <a:p xmlns:a="http://schemas.openxmlformats.org/drawingml/2006/main">
-            <a:pPr>
-              <a:defRPr sz="2100" b="0">
-                <a:solidFill>
-                  <a:srgbClr val="103D36"/>
-                </a:solidFill>
-                <a:latin typeface="Arial"/>
-                <a:ea typeface="Arial"/>
-                <a:cs typeface="Arial"/>
-              </a:defRPr>
-            </a:pPr>
-            <a:r>
-              <a:rPr sz="2100" b="0">
-                <a:solidFill>
-                  <a:srgbClr val="103D36"/>
-                </a:solidFill>
-                <a:latin typeface="Arial"/>
-                <a:ea typeface="Arial"/>
-                <a:cs typeface="Arial"/>
-              </a:rPr>
-              <a:t>and sensing methods</a:t>
+              <a:buNone/>
+              <a:defRPr sz="2250" b="0">
+                <a:solidFill>
+                  <a:srgbClr val="103D36"/>
+                </a:solidFill>
+                <a:latin typeface="Arial"/>
+                <a:ea typeface="Arial"/>
+                <a:cs typeface="Arial"/>
+              </a:defRPr>
+            </a:pPr>
+            <a:r>
+              <a:rPr sz="2250" b="0">
+                <a:solidFill>
+                  <a:srgbClr val="103D36"/>
+                </a:solidFill>
+                <a:latin typeface="Arial"/>
+                <a:ea typeface="Arial"/>
+                <a:cs typeface="Arial"/>
+              </a:rPr>
+              <a:t>The pinned PoC recalculates archived atmospheric inputs and replays methane evidence.</a:t>
+            </a:r>
+          </a:p>
+          <a:p xmlns:a="http://schemas.openxmlformats.org/drawingml/2006/main">
+            <a:pPr>
+              <a:buNone/>
+              <a:defRPr sz="2250" b="0">
+                <a:solidFill>
+                  <a:srgbClr val="103D36"/>
+                </a:solidFill>
+                <a:latin typeface="Arial"/>
+                <a:ea typeface="Arial"/>
+                <a:cs typeface="Arial"/>
+              </a:defRPr>
+            </a:pPr>
+            <a:r>
+              <a:rPr sz="2250" b="0">
+                <a:solidFill>
+                  <a:srgbClr val="103D36"/>
+                </a:solidFill>
+                <a:latin typeface="Arial"/>
+                <a:ea typeface="Arial"/>
+                <a:cs typeface="Arial"/>
+              </a:rPr>
+              <a:t>Daily, monthly and period summaries match the exported observations.</a:t>
             </a:r>
           </a:p>
         </p:txBody>
@@ -2387,19 +2534,19 @@
           <p:cNvPr id="6" name="">
             <a:extLst xmlns:a="http://schemas.openxmlformats.org/drawingml/2006/main">
               <a:ext uri="{FF2B5EF4-FFF2-40B4-BE49-F238E27FC236}">
-                <a16:creationId xmlns:a16="http://schemas.microsoft.com/office/drawing/2014/main" id="{F60D1ABC-F2A5-479E-BAEA-4C1708D65FD0}"/>
-              </a:ext>
-            </a:extLst>
-          </p:cNvPr>
-          <p:cNvSpPr>
-            <a:spLocks xmlns:a="http://schemas.openxmlformats.org/drawingml/2006/main" noGrp="1"/>
-          </p:cNvSpPr>
-          <p:nvPr/>
-        </p:nvSpPr>
-        <p:spPr>
-          <a:xfrm xmlns:a="http://schemas.openxmlformats.org/drawingml/2006/main">
-            <a:off x="4429125" y="1933575"/>
-            <a:ext cx="3333750" cy="457200"/>
+                <a16:creationId xmlns:a16="http://schemas.microsoft.com/office/drawing/2014/main" id="{60522B0C-05A1-456F-AEDD-D4212DCEAF40}"/>
+              </a:ext>
+            </a:extLst>
+          </p:cNvPr>
+          <p:cNvSpPr>
+            <a:spLocks xmlns:a="http://schemas.openxmlformats.org/drawingml/2006/main" noGrp="1"/>
+          </p:cNvSpPr>
+          <p:nvPr/>
+        </p:nvSpPr>
+        <p:spPr>
+          <a:xfrm xmlns:a="http://schemas.openxmlformats.org/drawingml/2006/main">
+            <a:off x="609600" y="4267200"/>
+            <a:ext cx="10858500" cy="1000125"/>
           </a:xfrm>
           <a:prstGeom xmlns:a="http://schemas.openxmlformats.org/drawingml/2006/main" prst="rect">
             <a:avLst/>
@@ -2416,25 +2563,50 @@
           <a:lstStyle xmlns:a="http://schemas.openxmlformats.org/drawingml/2006/main"/>
           <a:p xmlns:a="http://schemas.openxmlformats.org/drawingml/2006/main">
             <a:pPr>
-              <a:defRPr sz="2400" b="1">
-                <a:solidFill>
-                  <a:srgbClr val="0C554E"/>
-                </a:solidFill>
-                <a:latin typeface="Arial"/>
-                <a:ea typeface="Arial"/>
-                <a:cs typeface="Arial"/>
-              </a:defRPr>
-            </a:pPr>
-            <a:r>
-              <a:rPr sz="2400" b="1">
-                <a:solidFill>
-                  <a:srgbClr val="0C554E"/>
-                </a:solidFill>
-                <a:latin typeface="Arial"/>
-                <a:ea typeface="Arial"/>
-                <a:cs typeface="Arial"/>
-              </a:rPr>
-              <a:t>Raseel</a:t>
+              <a:buNone/>
+              <a:defRPr sz="2250" b="0">
+                <a:solidFill>
+                  <a:srgbClr val="103D36"/>
+                </a:solidFill>
+                <a:latin typeface="Arial"/>
+                <a:ea typeface="Arial"/>
+                <a:cs typeface="Arial"/>
+              </a:defRPr>
+            </a:pPr>
+            <a:r>
+              <a:rPr sz="2250" b="0">
+                <a:solidFill>
+                  <a:srgbClr val="103D36"/>
+                </a:solidFill>
+                <a:latin typeface="Arial"/>
+                <a:ea typeface="Arial"/>
+                <a:cs typeface="Arial"/>
+              </a:rPr>
+              <a:t>30 software tests passed on 7 October 2026; outputs are available for review.</a:t>
+            </a:r>
+          </a:p>
+          <a:p xmlns:a="http://schemas.openxmlformats.org/drawingml/2006/main">
+            <a:pPr>
+              <a:buNone/>
+              <a:defRPr sz="2250" b="0">
+                <a:solidFill>
+                  <a:srgbClr val="103D36"/>
+                </a:solidFill>
+                <a:latin typeface="Arial"/>
+                <a:ea typeface="Arial"/>
+                <a:cs typeface="Arial"/>
+              </a:defRPr>
+            </a:pPr>
+            <a:r>
+              <a:rPr sz="2250" b="0">
+                <a:solidFill>
+                  <a:srgbClr val="103D36"/>
+                </a:solidFill>
+                <a:latin typeface="Arial"/>
+                <a:ea typeface="Arial"/>
+                <a:cs typeface="Arial"/>
+              </a:rPr>
+              <a:t>Reviewed methane-positive/negative cases and false-alarm performance are not established.</a:t>
             </a:r>
           </a:p>
         </p:txBody>
@@ -2444,19 +2616,19 @@
           <p:cNvPr id="7" name="">
             <a:extLst xmlns:a="http://schemas.openxmlformats.org/drawingml/2006/main">
               <a:ext uri="{FF2B5EF4-FFF2-40B4-BE49-F238E27FC236}">
-                <a16:creationId xmlns:a16="http://schemas.microsoft.com/office/drawing/2014/main" id="{8AF972B0-D21A-4B5F-A0B6-316AC851895D}"/>
-              </a:ext>
-            </a:extLst>
-          </p:cNvPr>
-          <p:cNvSpPr>
-            <a:spLocks xmlns:a="http://schemas.openxmlformats.org/drawingml/2006/main" noGrp="1"/>
-          </p:cNvSpPr>
-          <p:nvPr/>
-        </p:nvSpPr>
-        <p:spPr>
-          <a:xfrm xmlns:a="http://schemas.openxmlformats.org/drawingml/2006/main">
-            <a:off x="4429125" y="2571750"/>
-            <a:ext cx="3333750" cy="1000125"/>
+                <a16:creationId xmlns:a16="http://schemas.microsoft.com/office/drawing/2014/main" id="{DC0242EB-C710-4674-BCA3-B6913D4066D3}"/>
+              </a:ext>
+            </a:extLst>
+          </p:cNvPr>
+          <p:cNvSpPr>
+            <a:spLocks xmlns:a="http://schemas.openxmlformats.org/drawingml/2006/main" noGrp="1"/>
+          </p:cNvSpPr>
+          <p:nvPr/>
+        </p:nvSpPr>
+        <p:spPr>
+          <a:xfrm xmlns:a="http://schemas.openxmlformats.org/drawingml/2006/main">
+            <a:off x="609600" y="5857875"/>
+            <a:ext cx="10953750" cy="381000"/>
           </a:xfrm>
           <a:prstGeom xmlns:a="http://schemas.openxmlformats.org/drawingml/2006/main" prst="rect">
             <a:avLst/>
@@ -2473,224 +2645,8 @@
           <a:lstStyle xmlns:a="http://schemas.openxmlformats.org/drawingml/2006/main"/>
           <a:p xmlns:a="http://schemas.openxmlformats.org/drawingml/2006/main">
             <a:pPr>
-              <a:defRPr sz="2100" b="0">
-                <a:solidFill>
-                  <a:srgbClr val="103D36"/>
-                </a:solidFill>
-                <a:latin typeface="Arial"/>
-                <a:ea typeface="Arial"/>
-                <a:cs typeface="Arial"/>
-              </a:defRPr>
-            </a:pPr>
-            <a:r>
-              <a:rPr sz="2100" b="0">
-                <a:solidFill>
-                  <a:srgbClr val="103D36"/>
-                </a:solidFill>
-                <a:latin typeface="Arial"/>
-                <a:ea typeface="Arial"/>
-                <a:cs typeface="Arial"/>
-              </a:rPr>
-              <a:t>Earth Engine mapping</a:t>
-            </a:r>
-          </a:p>
-          <a:p xmlns:a="http://schemas.openxmlformats.org/drawingml/2006/main">
-            <a:pPr>
-              <a:defRPr sz="2100" b="0">
-                <a:solidFill>
-                  <a:srgbClr val="103D36"/>
-                </a:solidFill>
-                <a:latin typeface="Arial"/>
-                <a:ea typeface="Arial"/>
-                <a:cs typeface="Arial"/>
-              </a:defRPr>
-            </a:pPr>
-            <a:r>
-              <a:rPr sz="2100" b="0">
-                <a:solidFill>
-                  <a:srgbClr val="103D36"/>
-                </a:solidFill>
-                <a:latin typeface="Arial"/>
-                <a:ea typeface="Arial"/>
-                <a:cs typeface="Arial"/>
-              </a:rPr>
-              <a:t>and comparison areas</a:t>
-            </a:r>
-          </a:p>
-        </p:txBody>
-      </p:sp>
-      <p:sp>
-        <p:nvSpPr>
-          <p:cNvPr id="8" name="">
-            <a:extLst xmlns:a="http://schemas.openxmlformats.org/drawingml/2006/main">
-              <a:ext uri="{FF2B5EF4-FFF2-40B4-BE49-F238E27FC236}">
-                <a16:creationId xmlns:a16="http://schemas.microsoft.com/office/drawing/2014/main" id="{C0E8DC95-BD76-467E-9E61-042947449A9B}"/>
-              </a:ext>
-            </a:extLst>
-          </p:cNvPr>
-          <p:cNvSpPr>
-            <a:spLocks xmlns:a="http://schemas.openxmlformats.org/drawingml/2006/main" noGrp="1"/>
-          </p:cNvSpPr>
-          <p:nvPr/>
-        </p:nvSpPr>
-        <p:spPr>
-          <a:xfrm xmlns:a="http://schemas.openxmlformats.org/drawingml/2006/main">
-            <a:off x="8267700" y="1933575"/>
-            <a:ext cx="3333750" cy="457200"/>
-          </a:xfrm>
-          <a:prstGeom xmlns:a="http://schemas.openxmlformats.org/drawingml/2006/main" prst="rect">
-            <a:avLst/>
-          </a:prstGeom>
-          <a:noFill xmlns:a="http://schemas.openxmlformats.org/drawingml/2006/main"/>
-          <a:ln xmlns:a="http://schemas.openxmlformats.org/drawingml/2006/main" w="0">
-            <a:noFill/>
-          </a:ln>
-        </p:spPr>
-        <p:txBody>
-          <a:bodyPr xmlns:a="http://schemas.openxmlformats.org/drawingml/2006/main">
-            <a:noAutofit/>
-          </a:bodyPr>
-          <a:lstStyle xmlns:a="http://schemas.openxmlformats.org/drawingml/2006/main"/>
-          <a:p xmlns:a="http://schemas.openxmlformats.org/drawingml/2006/main">
-            <a:pPr>
-              <a:defRPr sz="2400" b="1">
-                <a:solidFill>
-                  <a:srgbClr val="0C554E"/>
-                </a:solidFill>
-                <a:latin typeface="Arial"/>
-                <a:ea typeface="Arial"/>
-                <a:cs typeface="Arial"/>
-              </a:defRPr>
-            </a:pPr>
-            <a:r>
-              <a:rPr sz="2400" b="1">
-                <a:solidFill>
-                  <a:srgbClr val="0C554E"/>
-                </a:solidFill>
-                <a:latin typeface="Arial"/>
-                <a:ea typeface="Arial"/>
-                <a:cs typeface="Arial"/>
-              </a:rPr>
-              <a:t>Abdulaziz</a:t>
-            </a:r>
-          </a:p>
-        </p:txBody>
-      </p:sp>
-      <p:sp>
-        <p:nvSpPr>
-          <p:cNvPr id="9" name="">
-            <a:extLst xmlns:a="http://schemas.openxmlformats.org/drawingml/2006/main">
-              <a:ext uri="{FF2B5EF4-FFF2-40B4-BE49-F238E27FC236}">
-                <a16:creationId xmlns:a16="http://schemas.microsoft.com/office/drawing/2014/main" id="{F1D27D3F-83AE-4E4B-B069-4FA43DEBE12F}"/>
-              </a:ext>
-            </a:extLst>
-          </p:cNvPr>
-          <p:cNvSpPr>
-            <a:spLocks xmlns:a="http://schemas.openxmlformats.org/drawingml/2006/main" noGrp="1"/>
-          </p:cNvSpPr>
-          <p:nvPr/>
-        </p:nvSpPr>
-        <p:spPr>
-          <a:xfrm xmlns:a="http://schemas.openxmlformats.org/drawingml/2006/main">
-            <a:off x="8267700" y="2571750"/>
-            <a:ext cx="3333750" cy="1000125"/>
-          </a:xfrm>
-          <a:prstGeom xmlns:a="http://schemas.openxmlformats.org/drawingml/2006/main" prst="rect">
-            <a:avLst/>
-          </a:prstGeom>
-          <a:noFill xmlns:a="http://schemas.openxmlformats.org/drawingml/2006/main"/>
-          <a:ln xmlns:a="http://schemas.openxmlformats.org/drawingml/2006/main" w="0">
-            <a:noFill/>
-          </a:ln>
-        </p:spPr>
-        <p:txBody>
-          <a:bodyPr xmlns:a="http://schemas.openxmlformats.org/drawingml/2006/main">
-            <a:noAutofit/>
-          </a:bodyPr>
-          <a:lstStyle xmlns:a="http://schemas.openxmlformats.org/drawingml/2006/main"/>
-          <a:p xmlns:a="http://schemas.openxmlformats.org/drawingml/2006/main">
-            <a:pPr>
-              <a:defRPr sz="2100" b="0">
-                <a:solidFill>
-                  <a:srgbClr val="103D36"/>
-                </a:solidFill>
-                <a:latin typeface="Arial"/>
-                <a:ea typeface="Arial"/>
-                <a:cs typeface="Arial"/>
-              </a:defRPr>
-            </a:pPr>
-            <a:r>
-              <a:rPr sz="2100" b="0">
-                <a:solidFill>
-                  <a:srgbClr val="103D36"/>
-                </a:solidFill>
-                <a:latin typeface="Arial"/>
-                <a:ea typeface="Arial"/>
-                <a:cs typeface="Arial"/>
-              </a:rPr>
-              <a:t>AI methane screening</a:t>
-            </a:r>
-          </a:p>
-          <a:p xmlns:a="http://schemas.openxmlformats.org/drawingml/2006/main">
-            <a:pPr>
-              <a:defRPr sz="2100" b="0">
-                <a:solidFill>
-                  <a:srgbClr val="103D36"/>
-                </a:solidFill>
-                <a:latin typeface="Arial"/>
-                <a:ea typeface="Arial"/>
-                <a:cs typeface="Arial"/>
-              </a:defRPr>
-            </a:pPr>
-            <a:r>
-              <a:rPr sz="2100" b="0">
-                <a:solidFill>
-                  <a:srgbClr val="103D36"/>
-                </a:solidFill>
-                <a:latin typeface="Arial"/>
-                <a:ea typeface="Arial"/>
-                <a:cs typeface="Arial"/>
-              </a:rPr>
-              <a:t>and project integration</a:t>
-            </a:r>
-          </a:p>
-        </p:txBody>
-      </p:sp>
-      <p:sp>
-        <p:nvSpPr>
-          <p:cNvPr id="10" name="">
-            <a:extLst xmlns:a="http://schemas.openxmlformats.org/drawingml/2006/main">
-              <a:ext uri="{FF2B5EF4-FFF2-40B4-BE49-F238E27FC236}">
-                <a16:creationId xmlns:a16="http://schemas.microsoft.com/office/drawing/2014/main" id="{79C310D5-2FC6-42CF-8B4F-BC47070BDF75}"/>
-              </a:ext>
-            </a:extLst>
-          </p:cNvPr>
-          <p:cNvSpPr>
-            <a:spLocks xmlns:a="http://schemas.openxmlformats.org/drawingml/2006/main" noGrp="1"/>
-          </p:cNvSpPr>
-          <p:nvPr/>
-        </p:nvSpPr>
-        <p:spPr>
-          <a:xfrm xmlns:a="http://schemas.openxmlformats.org/drawingml/2006/main">
-            <a:off x="609600" y="4057650"/>
-            <a:ext cx="2381250" cy="381000"/>
-          </a:xfrm>
-          <a:prstGeom xmlns:a="http://schemas.openxmlformats.org/drawingml/2006/main" prst="rect">
-            <a:avLst/>
-          </a:prstGeom>
-          <a:noFill xmlns:a="http://schemas.openxmlformats.org/drawingml/2006/main"/>
-          <a:ln xmlns:a="http://schemas.openxmlformats.org/drawingml/2006/main" w="0">
-            <a:noFill/>
-          </a:ln>
-        </p:spPr>
-        <p:txBody>
-          <a:bodyPr xmlns:a="http://schemas.openxmlformats.org/drawingml/2006/main">
-            <a:noAutofit/>
-          </a:bodyPr>
-          <a:lstStyle xmlns:a="http://schemas.openxmlformats.org/drawingml/2006/main"/>
-          <a:p xmlns:a="http://schemas.openxmlformats.org/drawingml/2006/main">
-            <a:pPr>
-              <a:defRPr sz="1875" b="1">
+              <a:buNone/>
+              <a:defRPr sz="1950" b="0">
                 <a:solidFill>
                   <a:srgbClr val="53716A"/>
                 </a:solidFill>
@@ -2700,7 +2656,7 @@
               </a:defRPr>
             </a:pPr>
             <a:r>
-              <a:rPr sz="1875" b="1">
+              <a:rPr sz="1950" b="0">
                 <a:solidFill>
                   <a:srgbClr val="53716A"/>
                 </a:solidFill>
@@ -2708,178 +2664,7 @@
                 <a:ea typeface="Arial"/>
                 <a:cs typeface="Arial"/>
               </a:rPr>
-              <a:t>Website</a:t>
-            </a:r>
-          </a:p>
-        </p:txBody>
-      </p:sp>
-      <p:sp>
-        <p:nvSpPr>
-          <p:cNvPr id="11" name="">
-            <a:extLst xmlns:a="http://schemas.openxmlformats.org/drawingml/2006/main">
-              <a:ext uri="{FF2B5EF4-FFF2-40B4-BE49-F238E27FC236}">
-                <a16:creationId xmlns:a16="http://schemas.microsoft.com/office/drawing/2014/main" id="{69CD7CEA-EEE0-45E2-B1CB-6B52B4C27378}"/>
-              </a:ext>
-            </a:extLst>
-          </p:cNvPr>
-          <p:cNvSpPr>
-            <a:spLocks xmlns:a="http://schemas.openxmlformats.org/drawingml/2006/main" noGrp="1"/>
-          </p:cNvSpPr>
-          <p:nvPr/>
-        </p:nvSpPr>
-        <p:spPr>
-          <a:xfrm xmlns:a="http://schemas.openxmlformats.org/drawingml/2006/main">
-            <a:off x="609600" y="4552950"/>
-            <a:ext cx="10906125" cy="523875"/>
-          </a:xfrm>
-          <a:prstGeom xmlns:a="http://schemas.openxmlformats.org/drawingml/2006/main" prst="rect">
-            <a:avLst/>
-          </a:prstGeom>
-          <a:noFill xmlns:a="http://schemas.openxmlformats.org/drawingml/2006/main"/>
-          <a:ln xmlns:a="http://schemas.openxmlformats.org/drawingml/2006/main" w="0">
-            <a:noFill/>
-          </a:ln>
-        </p:spPr>
-        <p:txBody>
-          <a:bodyPr xmlns:a="http://schemas.openxmlformats.org/drawingml/2006/main">
-            <a:noAutofit/>
-          </a:bodyPr>
-          <a:lstStyle xmlns:a="http://schemas.openxmlformats.org/drawingml/2006/main"/>
-          <a:p xmlns:a="http://schemas.openxmlformats.org/drawingml/2006/main">
-            <a:pPr>
-              <a:defRPr sz="2625" b="0">
-                <a:solidFill>
-                  <a:srgbClr val="0C554E"/>
-                </a:solidFill>
-                <a:latin typeface="Arial"/>
-                <a:ea typeface="Arial"/>
-                <a:cs typeface="Arial"/>
-              </a:defRPr>
-            </a:pPr>
-            <a:r>
-              <a:rPr sz="2625" b="0">
-                <a:solidFill>
-                  <a:srgbClr val="0C554E"/>
-                </a:solidFill>
-                <a:latin typeface="Arial"/>
-                <a:ea typeface="Arial"/>
-                <a:cs typeface="Arial"/>
-              </a:rPr>
-              <a:t>losth6wz.github.io/Geoguard/</a:t>
-            </a:r>
-          </a:p>
-        </p:txBody>
-      </p:sp>
-      <p:sp>
-        <p:nvSpPr>
-          <p:cNvPr id="12" name="">
-            <a:extLst xmlns:a="http://schemas.openxmlformats.org/drawingml/2006/main">
-              <a:ext uri="{FF2B5EF4-FFF2-40B4-BE49-F238E27FC236}">
-                <a16:creationId xmlns:a16="http://schemas.microsoft.com/office/drawing/2014/main" id="{0B3BEEF5-605C-4E1B-B57F-F294F9D6932B}"/>
-              </a:ext>
-            </a:extLst>
-          </p:cNvPr>
-          <p:cNvSpPr>
-            <a:spLocks xmlns:a="http://schemas.openxmlformats.org/drawingml/2006/main" noGrp="1"/>
-          </p:cNvSpPr>
-          <p:nvPr/>
-        </p:nvSpPr>
-        <p:spPr>
-          <a:xfrm xmlns:a="http://schemas.openxmlformats.org/drawingml/2006/main">
-            <a:off x="609600" y="5324475"/>
-            <a:ext cx="6667500" cy="333375"/>
-          </a:xfrm>
-          <a:prstGeom xmlns:a="http://schemas.openxmlformats.org/drawingml/2006/main" prst="rect">
-            <a:avLst/>
-          </a:prstGeom>
-          <a:noFill xmlns:a="http://schemas.openxmlformats.org/drawingml/2006/main"/>
-          <a:ln xmlns:a="http://schemas.openxmlformats.org/drawingml/2006/main" w="0">
-            <a:noFill/>
-          </a:ln>
-        </p:spPr>
-        <p:txBody>
-          <a:bodyPr xmlns:a="http://schemas.openxmlformats.org/drawingml/2006/main">
-            <a:noAutofit/>
-          </a:bodyPr>
-          <a:lstStyle xmlns:a="http://schemas.openxmlformats.org/drawingml/2006/main"/>
-          <a:p xmlns:a="http://schemas.openxmlformats.org/drawingml/2006/main">
-            <a:pPr>
-              <a:defRPr sz="1875" b="1">
-                <a:solidFill>
-                  <a:srgbClr val="53716A"/>
-                </a:solidFill>
-                <a:latin typeface="Arial"/>
-                <a:ea typeface="Arial"/>
-                <a:cs typeface="Arial"/>
-              </a:defRPr>
-            </a:pPr>
-            <a:r>
-              <a:rPr sz="1875" b="1">
-                <a:solidFill>
-                  <a:srgbClr val="53716A"/>
-                </a:solidFill>
-                <a:latin typeface="Arial"/>
-                <a:ea typeface="Arial"/>
-                <a:cs typeface="Arial"/>
-              </a:rPr>
-              <a:t>Repository and reproducible PoC</a:t>
-            </a:r>
-          </a:p>
-        </p:txBody>
-      </p:sp>
-      <p:sp>
-        <p:nvSpPr>
-          <p:cNvPr id="13" name="">
-            <a:extLst xmlns:a="http://schemas.openxmlformats.org/drawingml/2006/main">
-              <a:ext uri="{FF2B5EF4-FFF2-40B4-BE49-F238E27FC236}">
-                <a16:creationId xmlns:a16="http://schemas.microsoft.com/office/drawing/2014/main" id="{19B7D17E-EE60-462F-B018-43ADDF6E78C2}"/>
-              </a:ext>
-            </a:extLst>
-          </p:cNvPr>
-          <p:cNvSpPr>
-            <a:spLocks xmlns:a="http://schemas.openxmlformats.org/drawingml/2006/main" noGrp="1"/>
-          </p:cNvSpPr>
-          <p:nvPr/>
-        </p:nvSpPr>
-        <p:spPr>
-          <a:xfrm xmlns:a="http://schemas.openxmlformats.org/drawingml/2006/main">
-            <a:off x="609600" y="5743575"/>
-            <a:ext cx="10906125" cy="428625"/>
-          </a:xfrm>
-          <a:prstGeom xmlns:a="http://schemas.openxmlformats.org/drawingml/2006/main" prst="rect">
-            <a:avLst/>
-          </a:prstGeom>
-          <a:noFill xmlns:a="http://schemas.openxmlformats.org/drawingml/2006/main"/>
-          <a:ln xmlns:a="http://schemas.openxmlformats.org/drawingml/2006/main" w="0">
-            <a:noFill/>
-          </a:ln>
-        </p:spPr>
-        <p:txBody>
-          <a:bodyPr xmlns:a="http://schemas.openxmlformats.org/drawingml/2006/main">
-            <a:noAutofit/>
-          </a:bodyPr>
-          <a:lstStyle xmlns:a="http://schemas.openxmlformats.org/drawingml/2006/main"/>
-          <a:p xmlns:a="http://schemas.openxmlformats.org/drawingml/2006/main">
-            <a:pPr>
-              <a:defRPr sz="2400" b="0">
-                <a:solidFill>
-                  <a:srgbClr val="0C554E"/>
-                </a:solidFill>
-                <a:latin typeface="Arial"/>
-                <a:ea typeface="Arial"/>
-                <a:cs typeface="Arial"/>
-              </a:defRPr>
-            </a:pPr>
-            <a:r>
-              <a:rPr sz="2400" b="0">
-                <a:solidFill>
-                  <a:srgbClr val="0C554E"/>
-                </a:solidFill>
-                <a:latin typeface="Arial"/>
-                <a:ea typeface="Arial"/>
-                <a:cs typeface="Arial"/>
-              </a:rPr>
-              <a:t>github.com/losth6wz/Geoguard</a:t>
+              <a:t>Software verification does not establish independent UAE detection accuracy.</a:t>
             </a:r>
           </a:p>
         </p:txBody>
@@ -2887,7 +2672,7 @@
     </p:spTree>
     <p:extLst>
       <p:ext uri="{BB962C8B-B14F-4D97-AF65-F5344CB8AC3E}">
-        <p14:creationId xmlns:p14="http://schemas.microsoft.com/office/powerpoint/2010/main" val="593054554"/>
+        <p14:creationId xmlns:p14="http://schemas.microsoft.com/office/powerpoint/2010/main" val="391857399"/>
       </p:ext>
     </p:extLst>
   </p:cSld>
@@ -2915,10 +2700,10 @@
       </p:grpSpPr>
       <p:sp>
         <p:nvSpPr>
-          <p:cNvPr id="11" name="">
-            <a:extLst xmlns:a="http://schemas.openxmlformats.org/drawingml/2006/main">
-              <a:ext uri="{FF2B5EF4-FFF2-40B4-BE49-F238E27FC236}">
-                <a16:creationId xmlns:a16="http://schemas.microsoft.com/office/drawing/2014/main" id="{F99B98C8-04B2-4059-BA15-4A023D60678F}"/>
+          <p:cNvPr id="9" name="">
+            <a:extLst xmlns:a="http://schemas.openxmlformats.org/drawingml/2006/main">
+              <a:ext uri="{FF2B5EF4-FFF2-40B4-BE49-F238E27FC236}">
+                <a16:creationId xmlns:a16="http://schemas.microsoft.com/office/drawing/2014/main" id="{80A40963-52AB-42D5-9BB6-8167894B4EAE}"/>
               </a:ext>
             </a:extLst>
           </p:cNvPr>
@@ -2947,6 +2732,7 @@
           <a:lstStyle xmlns:a="http://schemas.openxmlformats.org/drawingml/2006/main"/>
           <a:p xmlns:a="http://schemas.openxmlformats.org/drawingml/2006/main">
             <a:pPr>
+              <a:buNone/>
               <a:defRPr sz="3300" b="1">
                 <a:solidFill>
                   <a:srgbClr val="103D36"/>
@@ -2965,7 +2751,7 @@
                 <a:ea typeface="Arial"/>
                 <a:cs typeface="Arial"/>
               </a:rPr>
-              <a:t>Data and model attribution</a:t>
+              <a:t>Proposed validation pilot</a:t>
             </a:r>
           </a:p>
         </p:txBody>
@@ -2975,7 +2761,7 @@
           <p:cNvPr id="2" name="">
             <a:extLst xmlns:a="http://schemas.openxmlformats.org/drawingml/2006/main">
               <a:ext uri="{FF2B5EF4-FFF2-40B4-BE49-F238E27FC236}">
-                <a16:creationId xmlns:a16="http://schemas.microsoft.com/office/drawing/2014/main" id="{2E2133BB-EE80-4C1A-8E45-F7CFFA3EF1CF}"/>
+                <a16:creationId xmlns:a16="http://schemas.microsoft.com/office/drawing/2014/main" id="{6D84353A-5732-4E62-8552-93175C187544}"/>
               </a:ext>
             </a:extLst>
           </p:cNvPr>
@@ -3005,7 +2791,7 @@
           <p:cNvPr id="3" name="">
             <a:extLst xmlns:a="http://schemas.openxmlformats.org/drawingml/2006/main">
               <a:ext uri="{FF2B5EF4-FFF2-40B4-BE49-F238E27FC236}">
-                <a16:creationId xmlns:a16="http://schemas.microsoft.com/office/drawing/2014/main" id="{1358990B-CFF0-4AB8-B454-4D8395DF91DB}"/>
+                <a16:creationId xmlns:a16="http://schemas.microsoft.com/office/drawing/2014/main" id="{29F20556-D136-49FF-8883-0D60F0156555}"/>
               </a:ext>
             </a:extLst>
           </p:cNvPr>
@@ -3034,6 +2820,7 @@
           <a:lstStyle xmlns:a="http://schemas.openxmlformats.org/drawingml/2006/main"/>
           <a:p xmlns:a="http://schemas.openxmlformats.org/drawingml/2006/main">
             <a:pPr>
+              <a:buNone/>
               <a:defRPr sz="1200" b="0">
                 <a:solidFill>
                   <a:srgbClr val="53716A"/>
@@ -3062,19 +2849,19 @@
           <p:cNvPr id="4" name="">
             <a:extLst xmlns:a="http://schemas.openxmlformats.org/drawingml/2006/main">
               <a:ext uri="{FF2B5EF4-FFF2-40B4-BE49-F238E27FC236}">
-                <a16:creationId xmlns:a16="http://schemas.microsoft.com/office/drawing/2014/main" id="{66E51337-499C-42D2-9480-A7B2A4A50DC9}"/>
-              </a:ext>
-            </a:extLst>
-          </p:cNvPr>
-          <p:cNvSpPr>
-            <a:spLocks xmlns:a="http://schemas.openxmlformats.org/drawingml/2006/main" noGrp="1"/>
-          </p:cNvSpPr>
-          <p:nvPr/>
-        </p:nvSpPr>
-        <p:spPr>
-          <a:xfrm xmlns:a="http://schemas.openxmlformats.org/drawingml/2006/main">
-            <a:off x="609600" y="1771650"/>
-            <a:ext cx="10906125" cy="381000"/>
+                <a16:creationId xmlns:a16="http://schemas.microsoft.com/office/drawing/2014/main" id="{6A63C40C-1C58-4860-971E-E6F299D0C9CF}"/>
+              </a:ext>
+            </a:extLst>
+          </p:cNvPr>
+          <p:cNvSpPr>
+            <a:spLocks xmlns:a="http://schemas.openxmlformats.org/drawingml/2006/main" noGrp="1"/>
+          </p:cNvSpPr>
+          <p:nvPr/>
+        </p:nvSpPr>
+        <p:spPr>
+          <a:xfrm xmlns:a="http://schemas.openxmlformats.org/drawingml/2006/main">
+            <a:off x="609600" y="1790700"/>
+            <a:ext cx="5048250" cy="523875"/>
           </a:xfrm>
           <a:prstGeom xmlns:a="http://schemas.openxmlformats.org/drawingml/2006/main" prst="rect">
             <a:avLst/>
@@ -3091,7 +2878,8 @@
           <a:lstStyle xmlns:a="http://schemas.openxmlformats.org/drawingml/2006/main"/>
           <a:p xmlns:a="http://schemas.openxmlformats.org/drawingml/2006/main">
             <a:pPr>
-              <a:defRPr sz="2175" b="1">
+              <a:buNone/>
+              <a:defRPr sz="2400" b="1">
                 <a:solidFill>
                   <a:srgbClr val="0C554E"/>
                 </a:solidFill>
@@ -3101,7 +2889,7 @@
               </a:defRPr>
             </a:pPr>
             <a:r>
-              <a:rPr sz="2175" b="1">
+              <a:rPr sz="2400" b="1">
                 <a:solidFill>
                   <a:srgbClr val="0C554E"/>
                 </a:solidFill>
@@ -3109,7 +2897,7 @@
                 <a:ea typeface="Arial"/>
                 <a:cs typeface="Arial"/>
               </a:rPr>
-              <a:t>Copernicus Sentinel-5P / Sentinel-2</a:t>
+              <a:t>Scientific evaluation</a:t>
             </a:r>
           </a:p>
         </p:txBody>
@@ -3119,19 +2907,19 @@
           <p:cNvPr id="5" name="">
             <a:extLst xmlns:a="http://schemas.openxmlformats.org/drawingml/2006/main">
               <a:ext uri="{FF2B5EF4-FFF2-40B4-BE49-F238E27FC236}">
-                <a16:creationId xmlns:a16="http://schemas.microsoft.com/office/drawing/2014/main" id="{EB8044DB-CBB8-4735-AD50-05EE5AB21893}"/>
-              </a:ext>
-            </a:extLst>
-          </p:cNvPr>
-          <p:cNvSpPr>
-            <a:spLocks xmlns:a="http://schemas.openxmlformats.org/drawingml/2006/main" noGrp="1"/>
-          </p:cNvSpPr>
-          <p:nvPr/>
-        </p:nvSpPr>
-        <p:spPr>
-          <a:xfrm xmlns:a="http://schemas.openxmlformats.org/drawingml/2006/main">
-            <a:off x="609600" y="2238375"/>
-            <a:ext cx="10906125" cy="428625"/>
+                <a16:creationId xmlns:a16="http://schemas.microsoft.com/office/drawing/2014/main" id="{DEF8A415-831F-4902-A395-E34B1226FF74}"/>
+              </a:ext>
+            </a:extLst>
+          </p:cNvPr>
+          <p:cNvSpPr>
+            <a:spLocks xmlns:a="http://schemas.openxmlformats.org/drawingml/2006/main" noGrp="1"/>
+          </p:cNvSpPr>
+          <p:nvPr/>
+        </p:nvSpPr>
+        <p:spPr>
+          <a:xfrm xmlns:a="http://schemas.openxmlformats.org/drawingml/2006/main">
+            <a:off x="609600" y="2571750"/>
+            <a:ext cx="5219700" cy="2667000"/>
           </a:xfrm>
           <a:prstGeom xmlns:a="http://schemas.openxmlformats.org/drawingml/2006/main" prst="rect">
             <a:avLst/>
@@ -3148,25 +2936,156 @@
           <a:lstStyle xmlns:a="http://schemas.openxmlformats.org/drawingml/2006/main"/>
           <a:p xmlns:a="http://schemas.openxmlformats.org/drawingml/2006/main">
             <a:pPr>
-              <a:defRPr sz="1950" b="0">
-                <a:solidFill>
-                  <a:srgbClr val="103D36"/>
-                </a:solidFill>
-                <a:latin typeface="Arial"/>
-                <a:ea typeface="Arial"/>
-                <a:cs typeface="Arial"/>
-              </a:defRPr>
-            </a:pPr>
-            <a:r>
-              <a:rPr sz="1950" b="0">
-                <a:solidFill>
-                  <a:srgbClr val="103D36"/>
-                </a:solidFill>
-                <a:latin typeface="Arial"/>
-                <a:ea typeface="Arial"/>
-                <a:cs typeface="Arial"/>
-              </a:rPr>
-              <a:t>2026 satellite observations; Earth Engine and public imagery archives</a:t>
+              <a:buNone/>
+              <a:defRPr sz="2025" b="0">
+                <a:solidFill>
+                  <a:srgbClr val="103D36"/>
+                </a:solidFill>
+                <a:latin typeface="Arial"/>
+                <a:ea typeface="Arial"/>
+                <a:cs typeface="Arial"/>
+              </a:defRPr>
+            </a:pPr>
+            <a:r>
+              <a:rPr sz="2025" b="0">
+                <a:solidFill>
+                  <a:srgbClr val="103D36"/>
+                </a:solidFill>
+                <a:latin typeface="Arial"/>
+                <a:ea typeface="Arial"/>
+                <a:cs typeface="Arial"/>
+              </a:rPr>
+              <a:t>One willing monitoring partner, one area;</a:t>
+            </a:r>
+          </a:p>
+          <a:p xmlns:a="http://schemas.openxmlformats.org/drawingml/2006/main">
+            <a:pPr>
+              <a:buNone/>
+              <a:defRPr sz="2025" b="0">
+                <a:solidFill>
+                  <a:srgbClr val="103D36"/>
+                </a:solidFill>
+                <a:latin typeface="Arial"/>
+                <a:ea typeface="Arial"/>
+                <a:cs typeface="Arial"/>
+              </a:defRPr>
+            </a:pPr>
+            <a:r>
+              <a:rPr sz="2025" b="0">
+                <a:solidFill>
+                  <a:srgbClr val="103D36"/>
+                </a:solidFill>
+                <a:latin typeface="Arial"/>
+                <a:ea typeface="Arial"/>
+                <a:cs typeface="Arial"/>
+              </a:rPr>
+              <a:t>four weeks after data access is arranged.</a:t>
+            </a:r>
+          </a:p>
+          <a:p xmlns:a="http://schemas.openxmlformats.org/drawingml/2006/main">
+            <a:r>
+              <a:t/>
+            </a:r>
+          </a:p>
+          <a:p xmlns:a="http://schemas.openxmlformats.org/drawingml/2006/main">
+            <a:pPr>
+              <a:buNone/>
+              <a:defRPr sz="2025" b="0">
+                <a:solidFill>
+                  <a:srgbClr val="103D36"/>
+                </a:solidFill>
+                <a:latin typeface="Arial"/>
+                <a:ea typeface="Arial"/>
+                <a:cs typeface="Arial"/>
+              </a:defRPr>
+            </a:pPr>
+            <a:r>
+              <a:rPr sz="2025" b="0">
+                <a:solidFill>
+                  <a:srgbClr val="103D36"/>
+                </a:solidFill>
+                <a:latin typeface="Arial"/>
+                <a:ea typeface="Arial"/>
+                <a:cs typeface="Arial"/>
+              </a:rPr>
+              <a:t>Review plume / no-plume and confounder cases.</a:t>
+            </a:r>
+          </a:p>
+          <a:p xmlns:a="http://schemas.openxmlformats.org/drawingml/2006/main">
+            <a:pPr>
+              <a:buNone/>
+              <a:defRPr sz="2025" b="0">
+                <a:solidFill>
+                  <a:srgbClr val="103D36"/>
+                </a:solidFill>
+                <a:latin typeface="Arial"/>
+                <a:ea typeface="Arial"/>
+                <a:cs typeface="Arial"/>
+              </a:defRPr>
+            </a:pPr>
+            <a:r>
+              <a:rPr sz="2025" b="0">
+                <a:solidFill>
+                  <a:srgbClr val="103D36"/>
+                </a:solidFill>
+                <a:latin typeface="Arial"/>
+                <a:ea typeface="Arial"/>
+                <a:cs typeface="Arial"/>
+              </a:rPr>
+              <a:t>Freeze thresholds; hold out dates and locations.</a:t>
+            </a:r>
+          </a:p>
+          <a:p xmlns:a="http://schemas.openxmlformats.org/drawingml/2006/main">
+            <a:r>
+              <a:t/>
+            </a:r>
+          </a:p>
+          <a:p xmlns:a="http://schemas.openxmlformats.org/drawingml/2006/main">
+            <a:pPr>
+              <a:buNone/>
+              <a:defRPr sz="2025" b="0">
+                <a:solidFill>
+                  <a:srgbClr val="103D36"/>
+                </a:solidFill>
+                <a:latin typeface="Arial"/>
+                <a:ea typeface="Arial"/>
+                <a:cs typeface="Arial"/>
+              </a:defRPr>
+            </a:pPr>
+            <a:r>
+              <a:rPr sz="2025" b="0">
+                <a:solidFill>
+                  <a:srgbClr val="103D36"/>
+                </a:solidFill>
+                <a:latin typeface="Arial"/>
+                <a:ea typeface="Arial"/>
+                <a:cs typeface="Arial"/>
+              </a:rPr>
+              <a:t>Report event counts, precision/recall and</a:t>
+            </a:r>
+          </a:p>
+          <a:p xmlns:a="http://schemas.openxmlformats.org/drawingml/2006/main">
+            <a:pPr>
+              <a:buNone/>
+              <a:defRPr sz="2025" b="0">
+                <a:solidFill>
+                  <a:srgbClr val="103D36"/>
+                </a:solidFill>
+                <a:latin typeface="Arial"/>
+                <a:ea typeface="Arial"/>
+                <a:cs typeface="Arial"/>
+              </a:defRPr>
+            </a:pPr>
+            <a:r>
+              <a:rPr sz="2025" b="0">
+                <a:solidFill>
+                  <a:srgbClr val="103D36"/>
+                </a:solidFill>
+                <a:latin typeface="Arial"/>
+                <a:ea typeface="Arial"/>
+                <a:cs typeface="Arial"/>
+              </a:rPr>
+              <a:t>unknown cases where labels support them.</a:t>
             </a:r>
           </a:p>
         </p:txBody>
@@ -3176,19 +3095,19 @@
           <p:cNvPr id="6" name="">
             <a:extLst xmlns:a="http://schemas.openxmlformats.org/drawingml/2006/main">
               <a:ext uri="{FF2B5EF4-FFF2-40B4-BE49-F238E27FC236}">
-                <a16:creationId xmlns:a16="http://schemas.microsoft.com/office/drawing/2014/main" id="{992B0776-CC33-4909-99D8-0380FD85AD1B}"/>
-              </a:ext>
-            </a:extLst>
-          </p:cNvPr>
-          <p:cNvSpPr>
-            <a:spLocks xmlns:a="http://schemas.openxmlformats.org/drawingml/2006/main" noGrp="1"/>
-          </p:cNvSpPr>
-          <p:nvPr/>
-        </p:nvSpPr>
-        <p:spPr>
-          <a:xfrm xmlns:a="http://schemas.openxmlformats.org/drawingml/2006/main">
-            <a:off x="609600" y="3048000"/>
-            <a:ext cx="10906125" cy="381000"/>
+                <a16:creationId xmlns:a16="http://schemas.microsoft.com/office/drawing/2014/main" id="{0FAE7FB8-B268-41BA-B99F-D8CEC4079303}"/>
+              </a:ext>
+            </a:extLst>
+          </p:cNvPr>
+          <p:cNvSpPr>
+            <a:spLocks xmlns:a="http://schemas.openxmlformats.org/drawingml/2006/main" noGrp="1"/>
+          </p:cNvSpPr>
+          <p:nvPr/>
+        </p:nvSpPr>
+        <p:spPr>
+          <a:xfrm xmlns:a="http://schemas.openxmlformats.org/drawingml/2006/main">
+            <a:off x="6477000" y="1790700"/>
+            <a:ext cx="5095875" cy="523875"/>
           </a:xfrm>
           <a:prstGeom xmlns:a="http://schemas.openxmlformats.org/drawingml/2006/main" prst="rect">
             <a:avLst/>
@@ -3205,7 +3124,8 @@
           <a:lstStyle xmlns:a="http://schemas.openxmlformats.org/drawingml/2006/main"/>
           <a:p xmlns:a="http://schemas.openxmlformats.org/drawingml/2006/main">
             <a:pPr>
-              <a:defRPr sz="2175" b="1">
+              <a:buNone/>
+              <a:defRPr sz="2400" b="1">
                 <a:solidFill>
                   <a:srgbClr val="0C554E"/>
                 </a:solidFill>
@@ -3215,7 +3135,7 @@
               </a:defRPr>
             </a:pPr>
             <a:r>
-              <a:rPr sz="2175" b="1">
+              <a:rPr sz="2400" b="1">
                 <a:solidFill>
                   <a:srgbClr val="0C554E"/>
                 </a:solidFill>
@@ -3223,7 +3143,7 @@
                 <a:ea typeface="Arial"/>
                 <a:cs typeface="Arial"/>
               </a:rPr>
-              <a:t>UNEP IMEO MARS-S2L + CloudSEN12</a:t>
+              <a:t>User evaluation and gates</a:t>
             </a:r>
           </a:p>
         </p:txBody>
@@ -3233,19 +3153,19 @@
           <p:cNvPr id="7" name="">
             <a:extLst xmlns:a="http://schemas.openxmlformats.org/drawingml/2006/main">
               <a:ext uri="{FF2B5EF4-FFF2-40B4-BE49-F238E27FC236}">
-                <a16:creationId xmlns:a16="http://schemas.microsoft.com/office/drawing/2014/main" id="{D8E2B77F-6861-4D57-A005-122E47531A4C}"/>
-              </a:ext>
-            </a:extLst>
-          </p:cNvPr>
-          <p:cNvSpPr>
-            <a:spLocks xmlns:a="http://schemas.openxmlformats.org/drawingml/2006/main" noGrp="1"/>
-          </p:cNvSpPr>
-          <p:nvPr/>
-        </p:nvSpPr>
-        <p:spPr>
-          <a:xfrm xmlns:a="http://schemas.openxmlformats.org/drawingml/2006/main">
-            <a:off x="609600" y="3514725"/>
-            <a:ext cx="10906125" cy="619125"/>
+                <a16:creationId xmlns:a16="http://schemas.microsoft.com/office/drawing/2014/main" id="{93FD9B87-B6CE-48B8-920E-C2F5B5EE92CA}"/>
+              </a:ext>
+            </a:extLst>
+          </p:cNvPr>
+          <p:cNvSpPr>
+            <a:spLocks xmlns:a="http://schemas.openxmlformats.org/drawingml/2006/main" noGrp="1"/>
+          </p:cNvSpPr>
+          <p:nvPr/>
+        </p:nvSpPr>
+        <p:spPr>
+          <a:xfrm xmlns:a="http://schemas.openxmlformats.org/drawingml/2006/main">
+            <a:off x="6477000" y="2571750"/>
+            <a:ext cx="5095875" cy="3048000"/>
           </a:xfrm>
           <a:prstGeom xmlns:a="http://schemas.openxmlformats.org/drawingml/2006/main" prst="rect">
             <a:avLst/>
@@ -3262,25 +3182,168 @@
           <a:lstStyle xmlns:a="http://schemas.openxmlformats.org/drawingml/2006/main"/>
           <a:p xmlns:a="http://schemas.openxmlformats.org/drawingml/2006/main">
             <a:pPr>
-              <a:defRPr sz="1875" b="0">
-                <a:solidFill>
-                  <a:srgbClr val="103D36"/>
-                </a:solidFill>
-                <a:latin typeface="Arial"/>
-                <a:ea typeface="Arial"/>
-                <a:cs typeface="Arial"/>
-              </a:defRPr>
-            </a:pPr>
-            <a:r>
-              <a:rPr sz="1875" b="0">
-                <a:solidFill>
-                  <a:srgbClr val="103D36"/>
-                </a:solidFill>
-                <a:latin typeface="Arial"/>
-                <a:ea typeface="Arial"/>
-                <a:cs typeface="Arial"/>
-              </a:rPr>
-              <a:t>Pretrained models; MARS-S2L CC BY-NC-SA 4.0, CloudSEN12 weights CC BY-NC 4.0</a:t>
+              <a:buNone/>
+              <a:defRPr sz="2025" b="0">
+                <a:solidFill>
+                  <a:srgbClr val="103D36"/>
+                </a:solidFill>
+                <a:latin typeface="Arial"/>
+                <a:ea typeface="Arial"/>
+                <a:cs typeface="Arial"/>
+              </a:defRPr>
+            </a:pPr>
+            <a:r>
+              <a:rPr sz="2025" b="0">
+                <a:solidFill>
+                  <a:srgbClr val="103D36"/>
+                </a:solidFill>
+                <a:latin typeface="Arial"/>
+                <a:ea typeface="Arial"/>
+                <a:cs typeface="Arial"/>
+              </a:rPr>
+              <a:t>Three intended users compare review/export</a:t>
+            </a:r>
+          </a:p>
+          <a:p xmlns:a="http://schemas.openxmlformats.org/drawingml/2006/main">
+            <a:pPr>
+              <a:buNone/>
+              <a:defRPr sz="2025" b="0">
+                <a:solidFill>
+                  <a:srgbClr val="103D36"/>
+                </a:solidFill>
+                <a:latin typeface="Arial"/>
+                <a:ea typeface="Arial"/>
+                <a:cs typeface="Arial"/>
+              </a:defRPr>
+            </a:pPr>
+            <a:r>
+              <a:rPr sz="2025" b="0">
+                <a:solidFill>
+                  <a:srgbClr val="103D36"/>
+                </a:solidFill>
+                <a:latin typeface="Arial"/>
+                <a:ea typeface="Arial"/>
+                <a:cs typeface="Arial"/>
+              </a:rPr>
+              <a:t>with their existing workflow. Record time,</a:t>
+            </a:r>
+          </a:p>
+          <a:p xmlns:a="http://schemas.openxmlformats.org/drawingml/2006/main">
+            <a:pPr>
+              <a:defRPr sz="2025">
+                <a:solidFill>
+                  <a:srgbClr val="103D36"/>
+                </a:solidFill>
+                <a:latin typeface="Arial"/>
+                <a:ea typeface="Arial"/>
+                <a:cs typeface="Arial"/>
+              </a:defRPr>
+            </a:pPr>
+            <a:r>
+              <a:rPr sz="2025">
+                <a:solidFill>
+                  <a:srgbClr val="103D36"/>
+                </a:solidFill>
+                <a:latin typeface="Arial"/>
+                <a:ea typeface="Arial"/>
+                <a:cs typeface="Arial"/>
+              </a:rPr>
+              <a:t>completion and interpretation errors.</a:t>
+            </a:r>
+          </a:p>
+          <a:p xmlns:a="http://schemas.openxmlformats.org/drawingml/2006/main">
+            <a:pPr>
+              <a:buNone/>
+              <a:defRPr sz="2100" b="0">
+                <a:solidFill>
+                  <a:srgbClr val="103D36"/>
+                </a:solidFill>
+                <a:latin typeface="Arial"/>
+                <a:ea typeface="Arial"/>
+                <a:cs typeface="Arial"/>
+              </a:defRPr>
+            </a:pPr>
+            <a:r>
+              <a:rPr sz="2100" b="0">
+                <a:solidFill>
+                  <a:srgbClr val="103D36"/>
+                </a:solidFill>
+                <a:latin typeface="Arial"/>
+                <a:ea typeface="Arial"/>
+                <a:cs typeface="Arial"/>
+              </a:rPr>
+              <a:t/>
+            </a:r>
+          </a:p>
+          <a:p xmlns:a="http://schemas.openxmlformats.org/drawingml/2006/main">
+            <a:pPr>
+              <a:buNone/>
+              <a:defRPr sz="2025" b="0">
+                <a:solidFill>
+                  <a:srgbClr val="103D36"/>
+                </a:solidFill>
+                <a:latin typeface="Arial"/>
+                <a:ea typeface="Arial"/>
+                <a:cs typeface="Arial"/>
+              </a:defRPr>
+            </a:pPr>
+            <a:r>
+              <a:rPr sz="2025" b="0">
+                <a:solidFill>
+                  <a:srgbClr val="103D36"/>
+                </a:solidFill>
+                <a:latin typeface="Arial"/>
+                <a:ea typeface="Arial"/>
+                <a:cs typeface="Arial"/>
+              </a:rPr>
+              <a:t>Agree accuracy/false-alarm targets first.</a:t>
+            </a:r>
+          </a:p>
+          <a:p xmlns:a="http://schemas.openxmlformats.org/drawingml/2006/main">
+            <a:pPr>
+              <a:defRPr sz="2025">
+                <a:solidFill>
+                  <a:srgbClr val="103D36"/>
+                </a:solidFill>
+                <a:latin typeface="Arial"/>
+                <a:ea typeface="Arial"/>
+                <a:cs typeface="Arial"/>
+              </a:defRPr>
+            </a:pPr>
+            <a:r>
+              <a:rPr sz="2025">
+                <a:solidFill>
+                  <a:srgbClr val="103D36"/>
+                </a:solidFill>
+                <a:latin typeface="Arial"/>
+                <a:ea typeface="Arial"/>
+                <a:cs typeface="Arial"/>
+              </a:rPr>
+              <a:t>Advance only if targets are met and all three</a:t>
+            </a:r>
+          </a:p>
+          <a:p xmlns:a="http://schemas.openxmlformats.org/drawingml/2006/main">
+            <a:pPr>
+              <a:buNone/>
+              <a:defRPr sz="2025" b="0">
+                <a:solidFill>
+                  <a:srgbClr val="103D36"/>
+                </a:solidFill>
+                <a:latin typeface="Arial"/>
+                <a:ea typeface="Arial"/>
+                <a:cs typeface="Arial"/>
+              </a:defRPr>
+            </a:pPr>
+            <a:r>
+              <a:rPr sz="2025" b="0">
+                <a:solidFill>
+                  <a:srgbClr val="103D36"/>
+                </a:solidFill>
+                <a:latin typeface="Arial"/>
+                <a:ea typeface="Arial"/>
+                <a:cs typeface="Arial"/>
+              </a:rPr>
+              <a:t>users interpret dates, units and unknowns.</a:t>
             </a:r>
           </a:p>
         </p:txBody>
@@ -3290,19 +3353,19 @@
           <p:cNvPr id="8" name="">
             <a:extLst xmlns:a="http://schemas.openxmlformats.org/drawingml/2006/main">
               <a:ext uri="{FF2B5EF4-FFF2-40B4-BE49-F238E27FC236}">
-                <a16:creationId xmlns:a16="http://schemas.microsoft.com/office/drawing/2014/main" id="{0BE44197-4E3A-4CEC-9A6F-C79D892D2BF2}"/>
-              </a:ext>
-            </a:extLst>
-          </p:cNvPr>
-          <p:cNvSpPr>
-            <a:spLocks xmlns:a="http://schemas.openxmlformats.org/drawingml/2006/main" noGrp="1"/>
-          </p:cNvSpPr>
-          <p:nvPr/>
-        </p:nvSpPr>
-        <p:spPr>
-          <a:xfrm xmlns:a="http://schemas.openxmlformats.org/drawingml/2006/main">
-            <a:off x="609600" y="4505325"/>
-            <a:ext cx="10906125" cy="381000"/>
+                <a16:creationId xmlns:a16="http://schemas.microsoft.com/office/drawing/2014/main" id="{28FA1E05-451A-4E3E-8AEF-6503EE335697}"/>
+              </a:ext>
+            </a:extLst>
+          </p:cNvPr>
+          <p:cNvSpPr>
+            <a:spLocks xmlns:a="http://schemas.openxmlformats.org/drawingml/2006/main" noGrp="1"/>
+          </p:cNvSpPr>
+          <p:nvPr/>
+        </p:nvSpPr>
+        <p:spPr>
+          <a:xfrm xmlns:a="http://schemas.openxmlformats.org/drawingml/2006/main">
+            <a:off x="609600" y="6010275"/>
+            <a:ext cx="10953750" cy="381000"/>
           </a:xfrm>
           <a:prstGeom xmlns:a="http://schemas.openxmlformats.org/drawingml/2006/main" prst="rect">
             <a:avLst/>
@@ -3319,47 +3382,77 @@
           <a:lstStyle xmlns:a="http://schemas.openxmlformats.org/drawingml/2006/main"/>
           <a:p xmlns:a="http://schemas.openxmlformats.org/drawingml/2006/main">
             <a:pPr>
-              <a:defRPr sz="2175" b="1">
-                <a:solidFill>
-                  <a:srgbClr val="0C554E"/>
-                </a:solidFill>
-                <a:latin typeface="Arial"/>
-                <a:ea typeface="Arial"/>
-                <a:cs typeface="Arial"/>
-              </a:defRPr>
-            </a:pPr>
-            <a:r>
-              <a:rPr sz="2175" b="1">
-                <a:solidFill>
-                  <a:srgbClr val="0C554E"/>
-                </a:solidFill>
-                <a:latin typeface="Arial"/>
-                <a:ea typeface="Arial"/>
-                <a:cs typeface="Arial"/>
-              </a:rPr>
-              <a:t>NASA GEOS-FP / recorded GFS fallback</a:t>
-            </a:r>
-          </a:p>
-        </p:txBody>
-      </p:sp>
-      <p:sp>
-        <p:nvSpPr>
-          <p:cNvPr id="9" name="">
-            <a:extLst xmlns:a="http://schemas.openxmlformats.org/drawingml/2006/main">
-              <a:ext uri="{FF2B5EF4-FFF2-40B4-BE49-F238E27FC236}">
-                <a16:creationId xmlns:a16="http://schemas.microsoft.com/office/drawing/2014/main" id="{2F798CBE-AACF-4814-9494-2BCCE8749630}"/>
-              </a:ext>
-            </a:extLst>
-          </p:cNvPr>
-          <p:cNvSpPr>
-            <a:spLocks xmlns:a="http://schemas.openxmlformats.org/drawingml/2006/main" noGrp="1"/>
-          </p:cNvSpPr>
-          <p:nvPr/>
-        </p:nvSpPr>
-        <p:spPr>
-          <a:xfrm xmlns:a="http://schemas.openxmlformats.org/drawingml/2006/main">
-            <a:off x="609600" y="4972050"/>
-            <a:ext cx="10906125" cy="428625"/>
+              <a:buNone/>
+              <a:defRPr sz="1950" b="0">
+                <a:solidFill>
+                  <a:srgbClr val="53716A"/>
+                </a:solidFill>
+                <a:latin typeface="Arial"/>
+                <a:ea typeface="Arial"/>
+                <a:cs typeface="Arial"/>
+              </a:defRPr>
+            </a:pPr>
+            <a:r>
+              <a:rPr sz="1950" b="0">
+                <a:solidFill>
+                  <a:srgbClr val="53716A"/>
+                </a:solidFill>
+                <a:latin typeface="Arial"/>
+                <a:ea typeface="Arial"/>
+                <a:cs typeface="Arial"/>
+              </a:rPr>
+              <a:t>Planned: no partner commitment or user feedback yet. Sparse imagery may extend collection.</a:t>
+            </a:r>
+          </a:p>
+        </p:txBody>
+      </p:sp>
+    </p:spTree>
+    <p:extLst>
+      <p:ext uri="{BB962C8B-B14F-4D97-AF65-F5344CB8AC3E}">
+        <p14:creationId xmlns:p14="http://schemas.microsoft.com/office/powerpoint/2010/main" val="424679640"/>
+      </p:ext>
+    </p:extLst>
+  </p:cSld>
+</p:sld>
+</file>
+
+<file path=ppt/slides/slide12.xml><?xml version="1.0" encoding="utf-8"?>
+<p:sld xmlns:p="http://schemas.openxmlformats.org/presentationml/2006/main">
+  <p:cSld>
+    <p:bg>
+      <p:bgPr>
+        <a:solidFill xmlns:a="http://schemas.openxmlformats.org/drawingml/2006/main">
+          <a:srgbClr val="F5F6EE"/>
+        </a:solidFill>
+      </p:bgPr>
+    </p:bg>
+    <p:spTree>
+      <p:nvGrpSpPr>
+        <p:cNvPr id="1" name=""/>
+        <p:cNvGrpSpPr/>
+        <p:nvPr/>
+      </p:nvGrpSpPr>
+      <p:grpSpPr>
+        <a:xfrm xmlns:a="http://schemas.openxmlformats.org/drawingml/2006/main"/>
+      </p:grpSpPr>
+      <p:sp>
+        <p:nvSpPr>
+          <p:cNvPr id="14" name="">
+            <a:extLst xmlns:a="http://schemas.openxmlformats.org/drawingml/2006/main">
+              <a:ext uri="{FF2B5EF4-FFF2-40B4-BE49-F238E27FC236}">
+                <a16:creationId xmlns:a16="http://schemas.microsoft.com/office/drawing/2014/main" id="{3809344B-D47B-45C3-96D9-79DC24760DD1}"/>
+              </a:ext>
+            </a:extLst>
+          </p:cNvPr>
+          <p:cNvSpPr>
+            <a:spLocks xmlns:a="http://schemas.openxmlformats.org/drawingml/2006/main" noGrp="1"/>
+          </p:cNvSpPr>
+          <p:nvPr/>
+        </p:nvSpPr>
+        <p:spPr>
+          <a:xfrm xmlns:a="http://schemas.openxmlformats.org/drawingml/2006/main">
+            <a:off x="609600" y="457200"/>
+            <a:ext cx="10972800" cy="857250"/>
           </a:xfrm>
           <a:prstGeom xmlns:a="http://schemas.openxmlformats.org/drawingml/2006/main" prst="rect">
             <a:avLst/>
@@ -3376,47 +3469,78 @@
           <a:lstStyle xmlns:a="http://schemas.openxmlformats.org/drawingml/2006/main"/>
           <a:p xmlns:a="http://schemas.openxmlformats.org/drawingml/2006/main">
             <a:pPr>
-              <a:defRPr sz="1950" b="0">
-                <a:solidFill>
-                  <a:srgbClr val="103D36"/>
-                </a:solidFill>
-                <a:latin typeface="Arial"/>
-                <a:ea typeface="Arial"/>
-                <a:cs typeface="Arial"/>
-              </a:defRPr>
-            </a:pPr>
-            <a:r>
-              <a:rPr sz="1950" b="0">
-                <a:solidFill>
-                  <a:srgbClr val="103D36"/>
-                </a:solidFill>
-                <a:latin typeface="Arial"/>
-                <a:ea typeface="Arial"/>
-                <a:cs typeface="Arial"/>
-              </a:rPr>
-              <a:t>Modeled wind matched to acquisition time; source and fallback recorded</a:t>
-            </a:r>
-          </a:p>
-        </p:txBody>
-      </p:sp>
-      <p:sp>
-        <p:nvSpPr>
-          <p:cNvPr id="10" name="">
-            <a:extLst xmlns:a="http://schemas.openxmlformats.org/drawingml/2006/main">
-              <a:ext uri="{FF2B5EF4-FFF2-40B4-BE49-F238E27FC236}">
-                <a16:creationId xmlns:a16="http://schemas.microsoft.com/office/drawing/2014/main" id="{6EB00D37-DDD2-4D9D-97FC-AA031B2482CB}"/>
-              </a:ext>
-            </a:extLst>
-          </p:cNvPr>
-          <p:cNvSpPr>
-            <a:spLocks xmlns:a="http://schemas.openxmlformats.org/drawingml/2006/main" noGrp="1"/>
-          </p:cNvSpPr>
-          <p:nvPr/>
-        </p:nvSpPr>
-        <p:spPr>
-          <a:xfrm xmlns:a="http://schemas.openxmlformats.org/drawingml/2006/main">
-            <a:off x="609600" y="5886450"/>
-            <a:ext cx="10906125" cy="381000"/>
+              <a:buNone/>
+              <a:defRPr sz="3300" b="1">
+                <a:solidFill>
+                  <a:srgbClr val="103D36"/>
+                </a:solidFill>
+                <a:latin typeface="Arial"/>
+                <a:ea typeface="Arial"/>
+                <a:cs typeface="Arial"/>
+              </a:defRPr>
+            </a:pPr>
+            <a:r>
+              <a:rPr sz="3300" b="1">
+                <a:solidFill>
+                  <a:srgbClr val="103D36"/>
+                </a:solidFill>
+                <a:latin typeface="Arial"/>
+                <a:ea typeface="Arial"/>
+                <a:cs typeface="Arial"/>
+              </a:rPr>
+              <a:t>Team and pilot support</a:t>
+            </a:r>
+          </a:p>
+        </p:txBody>
+      </p:sp>
+      <p:sp>
+        <p:nvSpPr>
+          <p:cNvPr id="2" name="">
+            <a:extLst xmlns:a="http://schemas.openxmlformats.org/drawingml/2006/main">
+              <a:ext uri="{FF2B5EF4-FFF2-40B4-BE49-F238E27FC236}">
+                <a16:creationId xmlns:a16="http://schemas.microsoft.com/office/drawing/2014/main" id="{CD173FE0-6703-448A-943C-430371C78A18}"/>
+              </a:ext>
+            </a:extLst>
+          </p:cNvPr>
+          <p:cNvSpPr>
+            <a:spLocks xmlns:a="http://schemas.openxmlformats.org/drawingml/2006/main" noGrp="1"/>
+          </p:cNvSpPr>
+          <p:nvPr/>
+        </p:nvSpPr>
+        <p:spPr>
+          <a:xfrm xmlns:a="http://schemas.openxmlformats.org/drawingml/2006/main">
+            <a:off x="609600" y="1362075"/>
+            <a:ext cx="10972800" cy="28575"/>
+          </a:xfrm>
+          <a:prstGeom xmlns:a="http://schemas.openxmlformats.org/drawingml/2006/main" prst="rect">
+            <a:avLst/>
+          </a:prstGeom>
+          <a:solidFill xmlns:a="http://schemas.openxmlformats.org/drawingml/2006/main">
+            <a:srgbClr val="0C554E"/>
+          </a:solidFill>
+          <a:ln xmlns:a="http://schemas.openxmlformats.org/drawingml/2006/main" w="0">
+            <a:noFill/>
+          </a:ln>
+        </p:spPr>
+      </p:sp>
+      <p:sp>
+        <p:nvSpPr>
+          <p:cNvPr id="3" name="">
+            <a:extLst xmlns:a="http://schemas.openxmlformats.org/drawingml/2006/main">
+              <a:ext uri="{FF2B5EF4-FFF2-40B4-BE49-F238E27FC236}">
+                <a16:creationId xmlns:a16="http://schemas.microsoft.com/office/drawing/2014/main" id="{25B1942B-C05C-41CB-BBBB-EA73F97D08C2}"/>
+              </a:ext>
+            </a:extLst>
+          </p:cNvPr>
+          <p:cNvSpPr>
+            <a:spLocks xmlns:a="http://schemas.openxmlformats.org/drawingml/2006/main" noGrp="1"/>
+          </p:cNvSpPr>
+          <p:nvPr/>
+        </p:nvSpPr>
+        <p:spPr>
+          <a:xfrm xmlns:a="http://schemas.openxmlformats.org/drawingml/2006/main">
+            <a:off x="11144250" y="6419850"/>
+            <a:ext cx="476250" cy="228600"/>
           </a:xfrm>
           <a:prstGeom xmlns:a="http://schemas.openxmlformats.org/drawingml/2006/main" prst="rect">
             <a:avLst/>
@@ -3433,6 +3557,1240 @@
           <a:lstStyle xmlns:a="http://schemas.openxmlformats.org/drawingml/2006/main"/>
           <a:p xmlns:a="http://schemas.openxmlformats.org/drawingml/2006/main">
             <a:pPr>
+              <a:buNone/>
+              <a:defRPr sz="1200" b="0">
+                <a:solidFill>
+                  <a:srgbClr val="53716A"/>
+                </a:solidFill>
+                <a:latin typeface="Arial"/>
+                <a:ea typeface="Arial"/>
+                <a:cs typeface="Arial"/>
+              </a:defRPr>
+            </a:pPr>
+            <a:r>
+              <a:rPr sz="1200" b="0">
+                <a:solidFill>
+                  <a:srgbClr val="53716A"/>
+                </a:solidFill>
+                <a:latin typeface="Arial"/>
+                <a:ea typeface="Arial"/>
+                <a:cs typeface="Arial"/>
+              </a:rPr>
+              <a:t>12</a:t>
+            </a:r>
+          </a:p>
+        </p:txBody>
+      </p:sp>
+      <p:sp>
+        <p:nvSpPr>
+          <p:cNvPr id="4" name="">
+            <a:extLst xmlns:a="http://schemas.openxmlformats.org/drawingml/2006/main">
+              <a:ext uri="{FF2B5EF4-FFF2-40B4-BE49-F238E27FC236}">
+                <a16:creationId xmlns:a16="http://schemas.microsoft.com/office/drawing/2014/main" id="{2988259A-9C54-4E8C-A38E-3693518FEDE8}"/>
+              </a:ext>
+            </a:extLst>
+          </p:cNvPr>
+          <p:cNvSpPr>
+            <a:spLocks xmlns:a="http://schemas.openxmlformats.org/drawingml/2006/main" noGrp="1"/>
+          </p:cNvSpPr>
+          <p:nvPr/>
+        </p:nvSpPr>
+        <p:spPr>
+          <a:xfrm xmlns:a="http://schemas.openxmlformats.org/drawingml/2006/main">
+            <a:off x="609600" y="1933575"/>
+            <a:ext cx="3333750" cy="457200"/>
+          </a:xfrm>
+          <a:prstGeom xmlns:a="http://schemas.openxmlformats.org/drawingml/2006/main" prst="rect">
+            <a:avLst/>
+          </a:prstGeom>
+          <a:noFill xmlns:a="http://schemas.openxmlformats.org/drawingml/2006/main"/>
+          <a:ln xmlns:a="http://schemas.openxmlformats.org/drawingml/2006/main" w="0">
+            <a:noFill/>
+          </a:ln>
+        </p:spPr>
+        <p:txBody>
+          <a:bodyPr xmlns:a="http://schemas.openxmlformats.org/drawingml/2006/main">
+            <a:noAutofit/>
+          </a:bodyPr>
+          <a:lstStyle xmlns:a="http://schemas.openxmlformats.org/drawingml/2006/main"/>
+          <a:p xmlns:a="http://schemas.openxmlformats.org/drawingml/2006/main">
+            <a:pPr>
+              <a:buNone/>
+              <a:defRPr sz="2400" b="1">
+                <a:solidFill>
+                  <a:srgbClr val="0C554E"/>
+                </a:solidFill>
+                <a:latin typeface="Arial"/>
+                <a:ea typeface="Arial"/>
+                <a:cs typeface="Arial"/>
+              </a:defRPr>
+            </a:pPr>
+            <a:r>
+              <a:rPr sz="2400" b="1">
+                <a:solidFill>
+                  <a:srgbClr val="0C554E"/>
+                </a:solidFill>
+                <a:latin typeface="Arial"/>
+                <a:ea typeface="Arial"/>
+                <a:cs typeface="Arial"/>
+              </a:rPr>
+              <a:t>Zainab</a:t>
+            </a:r>
+          </a:p>
+        </p:txBody>
+      </p:sp>
+      <p:sp>
+        <p:nvSpPr>
+          <p:cNvPr id="5" name="">
+            <a:extLst xmlns:a="http://schemas.openxmlformats.org/drawingml/2006/main">
+              <a:ext uri="{FF2B5EF4-FFF2-40B4-BE49-F238E27FC236}">
+                <a16:creationId xmlns:a16="http://schemas.microsoft.com/office/drawing/2014/main" id="{35AB1F19-6D03-4397-B91A-B199AC0543C1}"/>
+              </a:ext>
+            </a:extLst>
+          </p:cNvPr>
+          <p:cNvSpPr>
+            <a:spLocks xmlns:a="http://schemas.openxmlformats.org/drawingml/2006/main" noGrp="1"/>
+          </p:cNvSpPr>
+          <p:nvPr/>
+        </p:nvSpPr>
+        <p:spPr>
+          <a:xfrm xmlns:a="http://schemas.openxmlformats.org/drawingml/2006/main">
+            <a:off x="609600" y="2571750"/>
+            <a:ext cx="3333750" cy="1000125"/>
+          </a:xfrm>
+          <a:prstGeom xmlns:a="http://schemas.openxmlformats.org/drawingml/2006/main" prst="rect">
+            <a:avLst/>
+          </a:prstGeom>
+          <a:noFill xmlns:a="http://schemas.openxmlformats.org/drawingml/2006/main"/>
+          <a:ln xmlns:a="http://schemas.openxmlformats.org/drawingml/2006/main" w="0">
+            <a:noFill/>
+          </a:ln>
+        </p:spPr>
+        <p:txBody>
+          <a:bodyPr xmlns:a="http://schemas.openxmlformats.org/drawingml/2006/main">
+            <a:noAutofit/>
+          </a:bodyPr>
+          <a:lstStyle xmlns:a="http://schemas.openxmlformats.org/drawingml/2006/main"/>
+          <a:p xmlns:a="http://schemas.openxmlformats.org/drawingml/2006/main">
+            <a:pPr>
+              <a:buNone/>
+              <a:defRPr sz="2100" b="0">
+                <a:solidFill>
+                  <a:srgbClr val="103D36"/>
+                </a:solidFill>
+                <a:latin typeface="Arial"/>
+                <a:ea typeface="Arial"/>
+                <a:cs typeface="Arial"/>
+              </a:defRPr>
+            </a:pPr>
+            <a:r>
+              <a:rPr sz="2100" b="0">
+                <a:solidFill>
+                  <a:srgbClr val="103D36"/>
+                </a:solidFill>
+                <a:latin typeface="Arial"/>
+                <a:ea typeface="Arial"/>
+                <a:cs typeface="Arial"/>
+              </a:rPr>
+              <a:t>Pollutants, sources</a:t>
+            </a:r>
+          </a:p>
+          <a:p xmlns:a="http://schemas.openxmlformats.org/drawingml/2006/main">
+            <a:pPr>
+              <a:buNone/>
+              <a:defRPr sz="2100" b="0">
+                <a:solidFill>
+                  <a:srgbClr val="103D36"/>
+                </a:solidFill>
+                <a:latin typeface="Arial"/>
+                <a:ea typeface="Arial"/>
+                <a:cs typeface="Arial"/>
+              </a:defRPr>
+            </a:pPr>
+            <a:r>
+              <a:rPr sz="2100" b="0">
+                <a:solidFill>
+                  <a:srgbClr val="103D36"/>
+                </a:solidFill>
+                <a:latin typeface="Arial"/>
+                <a:ea typeface="Arial"/>
+                <a:cs typeface="Arial"/>
+              </a:rPr>
+              <a:t>and sensing methods</a:t>
+            </a:r>
+          </a:p>
+        </p:txBody>
+      </p:sp>
+      <p:sp>
+        <p:nvSpPr>
+          <p:cNvPr id="6" name="">
+            <a:extLst xmlns:a="http://schemas.openxmlformats.org/drawingml/2006/main">
+              <a:ext uri="{FF2B5EF4-FFF2-40B4-BE49-F238E27FC236}">
+                <a16:creationId xmlns:a16="http://schemas.microsoft.com/office/drawing/2014/main" id="{F60D1ABC-F2A5-479E-BAEA-4C1708D65FD0}"/>
+              </a:ext>
+            </a:extLst>
+          </p:cNvPr>
+          <p:cNvSpPr>
+            <a:spLocks xmlns:a="http://schemas.openxmlformats.org/drawingml/2006/main" noGrp="1"/>
+          </p:cNvSpPr>
+          <p:nvPr/>
+        </p:nvSpPr>
+        <p:spPr>
+          <a:xfrm xmlns:a="http://schemas.openxmlformats.org/drawingml/2006/main">
+            <a:off x="4429125" y="1933575"/>
+            <a:ext cx="3333750" cy="457200"/>
+          </a:xfrm>
+          <a:prstGeom xmlns:a="http://schemas.openxmlformats.org/drawingml/2006/main" prst="rect">
+            <a:avLst/>
+          </a:prstGeom>
+          <a:noFill xmlns:a="http://schemas.openxmlformats.org/drawingml/2006/main"/>
+          <a:ln xmlns:a="http://schemas.openxmlformats.org/drawingml/2006/main" w="0">
+            <a:noFill/>
+          </a:ln>
+        </p:spPr>
+        <p:txBody>
+          <a:bodyPr xmlns:a="http://schemas.openxmlformats.org/drawingml/2006/main">
+            <a:noAutofit/>
+          </a:bodyPr>
+          <a:lstStyle xmlns:a="http://schemas.openxmlformats.org/drawingml/2006/main"/>
+          <a:p xmlns:a="http://schemas.openxmlformats.org/drawingml/2006/main">
+            <a:pPr>
+              <a:buNone/>
+              <a:defRPr sz="2400" b="1">
+                <a:solidFill>
+                  <a:srgbClr val="0C554E"/>
+                </a:solidFill>
+                <a:latin typeface="Arial"/>
+                <a:ea typeface="Arial"/>
+                <a:cs typeface="Arial"/>
+              </a:defRPr>
+            </a:pPr>
+            <a:r>
+              <a:rPr sz="2400" b="1">
+                <a:solidFill>
+                  <a:srgbClr val="0C554E"/>
+                </a:solidFill>
+                <a:latin typeface="Arial"/>
+                <a:ea typeface="Arial"/>
+                <a:cs typeface="Arial"/>
+              </a:rPr>
+              <a:t>Raseel</a:t>
+            </a:r>
+          </a:p>
+        </p:txBody>
+      </p:sp>
+      <p:sp>
+        <p:nvSpPr>
+          <p:cNvPr id="7" name="">
+            <a:extLst xmlns:a="http://schemas.openxmlformats.org/drawingml/2006/main">
+              <a:ext uri="{FF2B5EF4-FFF2-40B4-BE49-F238E27FC236}">
+                <a16:creationId xmlns:a16="http://schemas.microsoft.com/office/drawing/2014/main" id="{8AF972B0-D21A-4B5F-A0B6-316AC851895D}"/>
+              </a:ext>
+            </a:extLst>
+          </p:cNvPr>
+          <p:cNvSpPr>
+            <a:spLocks xmlns:a="http://schemas.openxmlformats.org/drawingml/2006/main" noGrp="1"/>
+          </p:cNvSpPr>
+          <p:nvPr/>
+        </p:nvSpPr>
+        <p:spPr>
+          <a:xfrm xmlns:a="http://schemas.openxmlformats.org/drawingml/2006/main">
+            <a:off x="4429125" y="2571750"/>
+            <a:ext cx="3333750" cy="1000125"/>
+          </a:xfrm>
+          <a:prstGeom xmlns:a="http://schemas.openxmlformats.org/drawingml/2006/main" prst="rect">
+            <a:avLst/>
+          </a:prstGeom>
+          <a:noFill xmlns:a="http://schemas.openxmlformats.org/drawingml/2006/main"/>
+          <a:ln xmlns:a="http://schemas.openxmlformats.org/drawingml/2006/main" w="0">
+            <a:noFill/>
+          </a:ln>
+        </p:spPr>
+        <p:txBody>
+          <a:bodyPr xmlns:a="http://schemas.openxmlformats.org/drawingml/2006/main">
+            <a:noAutofit/>
+          </a:bodyPr>
+          <a:lstStyle xmlns:a="http://schemas.openxmlformats.org/drawingml/2006/main"/>
+          <a:p xmlns:a="http://schemas.openxmlformats.org/drawingml/2006/main">
+            <a:pPr>
+              <a:buNone/>
+              <a:defRPr sz="2100" b="0">
+                <a:solidFill>
+                  <a:srgbClr val="103D36"/>
+                </a:solidFill>
+                <a:latin typeface="Arial"/>
+                <a:ea typeface="Arial"/>
+                <a:cs typeface="Arial"/>
+              </a:defRPr>
+            </a:pPr>
+            <a:r>
+              <a:rPr sz="2100" b="0">
+                <a:solidFill>
+                  <a:srgbClr val="103D36"/>
+                </a:solidFill>
+                <a:latin typeface="Arial"/>
+                <a:ea typeface="Arial"/>
+                <a:cs typeface="Arial"/>
+              </a:rPr>
+              <a:t>Earth Engine mapping</a:t>
+            </a:r>
+          </a:p>
+          <a:p xmlns:a="http://schemas.openxmlformats.org/drawingml/2006/main">
+            <a:pPr>
+              <a:buNone/>
+              <a:defRPr sz="2100" b="0">
+                <a:solidFill>
+                  <a:srgbClr val="103D36"/>
+                </a:solidFill>
+                <a:latin typeface="Arial"/>
+                <a:ea typeface="Arial"/>
+                <a:cs typeface="Arial"/>
+              </a:defRPr>
+            </a:pPr>
+            <a:r>
+              <a:rPr sz="2100" b="0">
+                <a:solidFill>
+                  <a:srgbClr val="103D36"/>
+                </a:solidFill>
+                <a:latin typeface="Arial"/>
+                <a:ea typeface="Arial"/>
+                <a:cs typeface="Arial"/>
+              </a:rPr>
+              <a:t>and comparison areas</a:t>
+            </a:r>
+          </a:p>
+        </p:txBody>
+      </p:sp>
+      <p:sp>
+        <p:nvSpPr>
+          <p:cNvPr id="8" name="">
+            <a:extLst xmlns:a="http://schemas.openxmlformats.org/drawingml/2006/main">
+              <a:ext uri="{FF2B5EF4-FFF2-40B4-BE49-F238E27FC236}">
+                <a16:creationId xmlns:a16="http://schemas.microsoft.com/office/drawing/2014/main" id="{C0E8DC95-BD76-467E-9E61-042947449A9B}"/>
+              </a:ext>
+            </a:extLst>
+          </p:cNvPr>
+          <p:cNvSpPr>
+            <a:spLocks xmlns:a="http://schemas.openxmlformats.org/drawingml/2006/main" noGrp="1"/>
+          </p:cNvSpPr>
+          <p:nvPr/>
+        </p:nvSpPr>
+        <p:spPr>
+          <a:xfrm xmlns:a="http://schemas.openxmlformats.org/drawingml/2006/main">
+            <a:off x="8267700" y="1933575"/>
+            <a:ext cx="3333750" cy="457200"/>
+          </a:xfrm>
+          <a:prstGeom xmlns:a="http://schemas.openxmlformats.org/drawingml/2006/main" prst="rect">
+            <a:avLst/>
+          </a:prstGeom>
+          <a:noFill xmlns:a="http://schemas.openxmlformats.org/drawingml/2006/main"/>
+          <a:ln xmlns:a="http://schemas.openxmlformats.org/drawingml/2006/main" w="0">
+            <a:noFill/>
+          </a:ln>
+        </p:spPr>
+        <p:txBody>
+          <a:bodyPr xmlns:a="http://schemas.openxmlformats.org/drawingml/2006/main">
+            <a:noAutofit/>
+          </a:bodyPr>
+          <a:lstStyle xmlns:a="http://schemas.openxmlformats.org/drawingml/2006/main"/>
+          <a:p xmlns:a="http://schemas.openxmlformats.org/drawingml/2006/main">
+            <a:pPr>
+              <a:buNone/>
+              <a:defRPr sz="2400" b="1">
+                <a:solidFill>
+                  <a:srgbClr val="0C554E"/>
+                </a:solidFill>
+                <a:latin typeface="Arial"/>
+                <a:ea typeface="Arial"/>
+                <a:cs typeface="Arial"/>
+              </a:defRPr>
+            </a:pPr>
+            <a:r>
+              <a:rPr sz="2400" b="1">
+                <a:solidFill>
+                  <a:srgbClr val="0C554E"/>
+                </a:solidFill>
+                <a:latin typeface="Arial"/>
+                <a:ea typeface="Arial"/>
+                <a:cs typeface="Arial"/>
+              </a:rPr>
+              <a:t>Abdulaziz</a:t>
+            </a:r>
+          </a:p>
+        </p:txBody>
+      </p:sp>
+      <p:sp>
+        <p:nvSpPr>
+          <p:cNvPr id="9" name="">
+            <a:extLst xmlns:a="http://schemas.openxmlformats.org/drawingml/2006/main">
+              <a:ext uri="{FF2B5EF4-FFF2-40B4-BE49-F238E27FC236}">
+                <a16:creationId xmlns:a16="http://schemas.microsoft.com/office/drawing/2014/main" id="{F1D27D3F-83AE-4E4B-B069-4FA43DEBE12F}"/>
+              </a:ext>
+            </a:extLst>
+          </p:cNvPr>
+          <p:cNvSpPr>
+            <a:spLocks xmlns:a="http://schemas.openxmlformats.org/drawingml/2006/main" noGrp="1"/>
+          </p:cNvSpPr>
+          <p:nvPr/>
+        </p:nvSpPr>
+        <p:spPr>
+          <a:xfrm xmlns:a="http://schemas.openxmlformats.org/drawingml/2006/main">
+            <a:off x="8267700" y="2571750"/>
+            <a:ext cx="3333750" cy="1000125"/>
+          </a:xfrm>
+          <a:prstGeom xmlns:a="http://schemas.openxmlformats.org/drawingml/2006/main" prst="rect">
+            <a:avLst/>
+          </a:prstGeom>
+          <a:noFill xmlns:a="http://schemas.openxmlformats.org/drawingml/2006/main"/>
+          <a:ln xmlns:a="http://schemas.openxmlformats.org/drawingml/2006/main" w="0">
+            <a:noFill/>
+          </a:ln>
+        </p:spPr>
+        <p:txBody>
+          <a:bodyPr xmlns:a="http://schemas.openxmlformats.org/drawingml/2006/main">
+            <a:noAutofit/>
+          </a:bodyPr>
+          <a:lstStyle xmlns:a="http://schemas.openxmlformats.org/drawingml/2006/main"/>
+          <a:p xmlns:a="http://schemas.openxmlformats.org/drawingml/2006/main">
+            <a:pPr>
+              <a:buNone/>
+              <a:defRPr sz="2100" b="0">
+                <a:solidFill>
+                  <a:srgbClr val="103D36"/>
+                </a:solidFill>
+                <a:latin typeface="Arial"/>
+                <a:ea typeface="Arial"/>
+                <a:cs typeface="Arial"/>
+              </a:defRPr>
+            </a:pPr>
+            <a:r>
+              <a:rPr sz="2100" b="0">
+                <a:solidFill>
+                  <a:srgbClr val="103D36"/>
+                </a:solidFill>
+                <a:latin typeface="Arial"/>
+                <a:ea typeface="Arial"/>
+                <a:cs typeface="Arial"/>
+              </a:rPr>
+              <a:t>AI methane screening</a:t>
+            </a:r>
+          </a:p>
+          <a:p xmlns:a="http://schemas.openxmlformats.org/drawingml/2006/main">
+            <a:pPr>
+              <a:buNone/>
+              <a:defRPr sz="2100" b="0">
+                <a:solidFill>
+                  <a:srgbClr val="103D36"/>
+                </a:solidFill>
+                <a:latin typeface="Arial"/>
+                <a:ea typeface="Arial"/>
+                <a:cs typeface="Arial"/>
+              </a:defRPr>
+            </a:pPr>
+            <a:r>
+              <a:rPr sz="2100" b="0">
+                <a:solidFill>
+                  <a:srgbClr val="103D36"/>
+                </a:solidFill>
+                <a:latin typeface="Arial"/>
+                <a:ea typeface="Arial"/>
+                <a:cs typeface="Arial"/>
+              </a:rPr>
+              <a:t>and project integration</a:t>
+            </a:r>
+          </a:p>
+        </p:txBody>
+      </p:sp>
+      <p:sp>
+        <p:nvSpPr>
+          <p:cNvPr id="10" name="">
+            <a:extLst xmlns:a="http://schemas.openxmlformats.org/drawingml/2006/main">
+              <a:ext uri="{FF2B5EF4-FFF2-40B4-BE49-F238E27FC236}">
+                <a16:creationId xmlns:a16="http://schemas.microsoft.com/office/drawing/2014/main" id="{79C310D5-2FC6-42CF-8B4F-BC47070BDF75}"/>
+              </a:ext>
+            </a:extLst>
+          </p:cNvPr>
+          <p:cNvSpPr>
+            <a:spLocks xmlns:a="http://schemas.openxmlformats.org/drawingml/2006/main" noGrp="1"/>
+          </p:cNvSpPr>
+          <p:nvPr/>
+        </p:nvSpPr>
+        <p:spPr>
+          <a:xfrm xmlns:a="http://schemas.openxmlformats.org/drawingml/2006/main">
+            <a:off x="609600" y="4057650"/>
+            <a:ext cx="2381250" cy="381000"/>
+          </a:xfrm>
+          <a:prstGeom xmlns:a="http://schemas.openxmlformats.org/drawingml/2006/main" prst="rect">
+            <a:avLst/>
+          </a:prstGeom>
+          <a:noFill xmlns:a="http://schemas.openxmlformats.org/drawingml/2006/main"/>
+          <a:ln xmlns:a="http://schemas.openxmlformats.org/drawingml/2006/main" w="0">
+            <a:noFill/>
+          </a:ln>
+        </p:spPr>
+        <p:txBody>
+          <a:bodyPr xmlns:a="http://schemas.openxmlformats.org/drawingml/2006/main">
+            <a:noAutofit/>
+          </a:bodyPr>
+          <a:lstStyle xmlns:a="http://schemas.openxmlformats.org/drawingml/2006/main"/>
+          <a:p xmlns:a="http://schemas.openxmlformats.org/drawingml/2006/main">
+            <a:pPr>
+              <a:buNone/>
+              <a:defRPr sz="1875" b="1">
+                <a:solidFill>
+                  <a:srgbClr val="53716A"/>
+                </a:solidFill>
+                <a:latin typeface="Arial"/>
+                <a:ea typeface="Arial"/>
+                <a:cs typeface="Arial"/>
+              </a:defRPr>
+            </a:pPr>
+            <a:r>
+              <a:rPr sz="1875" b="1">
+                <a:solidFill>
+                  <a:srgbClr val="53716A"/>
+                </a:solidFill>
+                <a:latin typeface="Arial"/>
+                <a:ea typeface="Arial"/>
+                <a:cs typeface="Arial"/>
+              </a:rPr>
+              <a:t>Requested support</a:t>
+            </a:r>
+          </a:p>
+        </p:txBody>
+      </p:sp>
+      <p:sp>
+        <p:nvSpPr>
+          <p:cNvPr id="11" name="">
+            <a:extLst xmlns:a="http://schemas.openxmlformats.org/drawingml/2006/main">
+              <a:ext uri="{FF2B5EF4-FFF2-40B4-BE49-F238E27FC236}">
+                <a16:creationId xmlns:a16="http://schemas.microsoft.com/office/drawing/2014/main" id="{69CD7CEA-EEE0-45E2-B1CB-6B52B4C27378}"/>
+              </a:ext>
+            </a:extLst>
+          </p:cNvPr>
+          <p:cNvSpPr>
+            <a:spLocks xmlns:a="http://schemas.openxmlformats.org/drawingml/2006/main" noGrp="1"/>
+          </p:cNvSpPr>
+          <p:nvPr/>
+        </p:nvSpPr>
+        <p:spPr>
+          <a:xfrm xmlns:a="http://schemas.openxmlformats.org/drawingml/2006/main">
+            <a:off x="609600" y="4552950"/>
+            <a:ext cx="10906125" cy="523875"/>
+          </a:xfrm>
+          <a:prstGeom xmlns:a="http://schemas.openxmlformats.org/drawingml/2006/main" prst="rect">
+            <a:avLst/>
+          </a:prstGeom>
+          <a:noFill xmlns:a="http://schemas.openxmlformats.org/drawingml/2006/main"/>
+          <a:ln xmlns:a="http://schemas.openxmlformats.org/drawingml/2006/main" w="0">
+            <a:noFill/>
+          </a:ln>
+        </p:spPr>
+        <p:txBody>
+          <a:bodyPr xmlns:a="http://schemas.openxmlformats.org/drawingml/2006/main">
+            <a:noAutofit/>
+          </a:bodyPr>
+          <a:lstStyle xmlns:a="http://schemas.openxmlformats.org/drawingml/2006/main"/>
+          <a:p xmlns:a="http://schemas.openxmlformats.org/drawingml/2006/main">
+            <a:pPr>
+              <a:buNone/>
+              <a:defRPr sz="2025" b="0">
+                <a:solidFill>
+                  <a:srgbClr val="0C554E"/>
+                </a:solidFill>
+                <a:latin typeface="Arial"/>
+                <a:ea typeface="Arial"/>
+                <a:cs typeface="Arial"/>
+              </a:defRPr>
+            </a:pPr>
+            <a:r>
+              <a:rPr sz="2025" b="0">
+                <a:solidFill>
+                  <a:srgbClr val="0C554E"/>
+                </a:solidFill>
+                <a:latin typeface="Arial"/>
+                <a:ea typeface="Arial"/>
+                <a:cs typeface="Arial"/>
+              </a:rPr>
+              <a:t>A monitoring partner, independently reviewed cases and analyst feedback</a:t>
+            </a:r>
+          </a:p>
+        </p:txBody>
+      </p:sp>
+      <p:sp>
+        <p:nvSpPr>
+          <p:cNvPr id="12" name="">
+            <a:extLst xmlns:a="http://schemas.openxmlformats.org/drawingml/2006/main">
+              <a:ext uri="{FF2B5EF4-FFF2-40B4-BE49-F238E27FC236}">
+                <a16:creationId xmlns:a16="http://schemas.microsoft.com/office/drawing/2014/main" id="{0B3BEEF5-605C-4E1B-B57F-F294F9D6932B}"/>
+              </a:ext>
+            </a:extLst>
+          </p:cNvPr>
+          <p:cNvSpPr>
+            <a:spLocks xmlns:a="http://schemas.openxmlformats.org/drawingml/2006/main" noGrp="1"/>
+          </p:cNvSpPr>
+          <p:nvPr/>
+        </p:nvSpPr>
+        <p:spPr>
+          <a:xfrm xmlns:a="http://schemas.openxmlformats.org/drawingml/2006/main">
+            <a:off x="609600" y="5324475"/>
+            <a:ext cx="6667500" cy="333375"/>
+          </a:xfrm>
+          <a:prstGeom xmlns:a="http://schemas.openxmlformats.org/drawingml/2006/main" prst="rect">
+            <a:avLst/>
+          </a:prstGeom>
+          <a:noFill xmlns:a="http://schemas.openxmlformats.org/drawingml/2006/main"/>
+          <a:ln xmlns:a="http://schemas.openxmlformats.org/drawingml/2006/main" w="0">
+            <a:noFill/>
+          </a:ln>
+        </p:spPr>
+        <p:txBody>
+          <a:bodyPr xmlns:a="http://schemas.openxmlformats.org/drawingml/2006/main">
+            <a:noAutofit/>
+          </a:bodyPr>
+          <a:lstStyle xmlns:a="http://schemas.openxmlformats.org/drawingml/2006/main"/>
+          <a:p xmlns:a="http://schemas.openxmlformats.org/drawingml/2006/main">
+            <a:pPr>
+              <a:buNone/>
+              <a:defRPr sz="1875" b="1">
+                <a:solidFill>
+                  <a:srgbClr val="53716A"/>
+                </a:solidFill>
+                <a:latin typeface="Arial"/>
+                <a:ea typeface="Arial"/>
+                <a:cs typeface="Arial"/>
+              </a:defRPr>
+            </a:pPr>
+            <a:r>
+              <a:rPr sz="1875" b="1">
+                <a:solidFill>
+                  <a:srgbClr val="53716A"/>
+                </a:solidFill>
+                <a:latin typeface="Arial"/>
+                <a:ea typeface="Arial"/>
+                <a:cs typeface="Arial"/>
+              </a:rPr>
+              <a:t>Demo and reproducible PoC</a:t>
+            </a:r>
+          </a:p>
+        </p:txBody>
+      </p:sp>
+      <p:sp>
+        <p:nvSpPr>
+          <p:cNvPr id="13" name="">
+            <a:extLst xmlns:a="http://schemas.openxmlformats.org/drawingml/2006/main">
+              <a:ext uri="{FF2B5EF4-FFF2-40B4-BE49-F238E27FC236}">
+                <a16:creationId xmlns:a16="http://schemas.microsoft.com/office/drawing/2014/main" id="{19B7D17E-EE60-462F-B018-43ADDF6E78C2}"/>
+              </a:ext>
+            </a:extLst>
+          </p:cNvPr>
+          <p:cNvSpPr>
+            <a:spLocks xmlns:a="http://schemas.openxmlformats.org/drawingml/2006/main" noGrp="1"/>
+          </p:cNvSpPr>
+          <p:nvPr/>
+        </p:nvSpPr>
+        <p:spPr>
+          <a:xfrm xmlns:a="http://schemas.openxmlformats.org/drawingml/2006/main">
+            <a:off x="609600" y="5743575"/>
+            <a:ext cx="10906125" cy="428625"/>
+          </a:xfrm>
+          <a:prstGeom xmlns:a="http://schemas.openxmlformats.org/drawingml/2006/main" prst="rect">
+            <a:avLst/>
+          </a:prstGeom>
+          <a:noFill xmlns:a="http://schemas.openxmlformats.org/drawingml/2006/main"/>
+          <a:ln xmlns:a="http://schemas.openxmlformats.org/drawingml/2006/main" w="0">
+            <a:noFill/>
+          </a:ln>
+        </p:spPr>
+        <p:txBody>
+          <a:bodyPr xmlns:a="http://schemas.openxmlformats.org/drawingml/2006/main">
+            <a:noAutofit/>
+          </a:bodyPr>
+          <a:lstStyle xmlns:a="http://schemas.openxmlformats.org/drawingml/2006/main"/>
+          <a:p xmlns:a="http://schemas.openxmlformats.org/drawingml/2006/main">
+            <a:pPr>
+              <a:buNone/>
+              <a:defRPr sz="1875" b="0">
+                <a:solidFill>
+                  <a:srgbClr val="0C554E"/>
+                </a:solidFill>
+                <a:latin typeface="Arial"/>
+                <a:ea typeface="Arial"/>
+                <a:cs typeface="Arial"/>
+              </a:defRPr>
+            </a:pPr>
+            <a:r>
+              <a:rPr sz="1875" b="0">
+                <a:solidFill>
+                  <a:srgbClr val="0C554E"/>
+                </a:solidFill>
+                <a:latin typeface="Arial"/>
+                <a:ea typeface="Arial"/>
+                <a:cs typeface="Arial"/>
+              </a:rPr>
+              <a:t>losth6wz.github.io/Geoguard/  ·  github.com/losth6wz/Geoguard</a:t>
+            </a:r>
+          </a:p>
+        </p:txBody>
+      </p:sp>
+    </p:spTree>
+    <p:extLst>
+      <p:ext uri="{BB962C8B-B14F-4D97-AF65-F5344CB8AC3E}">
+        <p14:creationId xmlns:p14="http://schemas.microsoft.com/office/powerpoint/2010/main" val="593054554"/>
+      </p:ext>
+    </p:extLst>
+  </p:cSld>
+</p:sld>
+</file>
+
+<file path=ppt/slides/slide13.xml><?xml version="1.0" encoding="utf-8"?>
+<p:sld xmlns:p="http://schemas.openxmlformats.org/presentationml/2006/main">
+  <p:cSld>
+    <p:bg>
+      <p:bgPr>
+        <a:solidFill xmlns:a="http://schemas.openxmlformats.org/drawingml/2006/main">
+          <a:srgbClr val="F5F6EE"/>
+        </a:solidFill>
+      </p:bgPr>
+    </p:bg>
+    <p:spTree>
+      <p:nvGrpSpPr>
+        <p:cNvPr id="1" name=""/>
+        <p:cNvGrpSpPr/>
+        <p:nvPr/>
+      </p:nvGrpSpPr>
+      <p:grpSpPr>
+        <a:xfrm xmlns:a="http://schemas.openxmlformats.org/drawingml/2006/main"/>
+      </p:grpSpPr>
+      <p:sp>
+        <p:nvSpPr>
+          <p:cNvPr id="11" name="">
+            <a:extLst xmlns:a="http://schemas.openxmlformats.org/drawingml/2006/main">
+              <a:ext uri="{FF2B5EF4-FFF2-40B4-BE49-F238E27FC236}">
+                <a16:creationId xmlns:a16="http://schemas.microsoft.com/office/drawing/2014/main" id="{F99B98C8-04B2-4059-BA15-4A023D60678F}"/>
+              </a:ext>
+            </a:extLst>
+          </p:cNvPr>
+          <p:cNvSpPr>
+            <a:spLocks xmlns:a="http://schemas.openxmlformats.org/drawingml/2006/main" noGrp="1"/>
+          </p:cNvSpPr>
+          <p:nvPr/>
+        </p:nvSpPr>
+        <p:spPr>
+          <a:xfrm xmlns:a="http://schemas.openxmlformats.org/drawingml/2006/main">
+            <a:off x="609600" y="457200"/>
+            <a:ext cx="10972800" cy="857250"/>
+          </a:xfrm>
+          <a:prstGeom xmlns:a="http://schemas.openxmlformats.org/drawingml/2006/main" prst="rect">
+            <a:avLst/>
+          </a:prstGeom>
+          <a:noFill xmlns:a="http://schemas.openxmlformats.org/drawingml/2006/main"/>
+          <a:ln xmlns:a="http://schemas.openxmlformats.org/drawingml/2006/main" w="0">
+            <a:noFill/>
+          </a:ln>
+        </p:spPr>
+        <p:txBody>
+          <a:bodyPr xmlns:a="http://schemas.openxmlformats.org/drawingml/2006/main">
+            <a:noAutofit/>
+          </a:bodyPr>
+          <a:lstStyle xmlns:a="http://schemas.openxmlformats.org/drawingml/2006/main"/>
+          <a:p xmlns:a="http://schemas.openxmlformats.org/drawingml/2006/main">
+            <a:pPr>
+              <a:buNone/>
+              <a:defRPr sz="3300" b="1">
+                <a:solidFill>
+                  <a:srgbClr val="103D36"/>
+                </a:solidFill>
+                <a:latin typeface="Arial"/>
+                <a:ea typeface="Arial"/>
+                <a:cs typeface="Arial"/>
+              </a:defRPr>
+            </a:pPr>
+            <a:r>
+              <a:rPr sz="3300" b="1">
+                <a:solidFill>
+                  <a:srgbClr val="103D36"/>
+                </a:solidFill>
+                <a:latin typeface="Arial"/>
+                <a:ea typeface="Arial"/>
+                <a:cs typeface="Arial"/>
+              </a:rPr>
+              <a:t>Data and model attribution</a:t>
+            </a:r>
+          </a:p>
+        </p:txBody>
+      </p:sp>
+      <p:sp>
+        <p:nvSpPr>
+          <p:cNvPr id="2" name="">
+            <a:extLst xmlns:a="http://schemas.openxmlformats.org/drawingml/2006/main">
+              <a:ext uri="{FF2B5EF4-FFF2-40B4-BE49-F238E27FC236}">
+                <a16:creationId xmlns:a16="http://schemas.microsoft.com/office/drawing/2014/main" id="{2E2133BB-EE80-4C1A-8E45-F7CFFA3EF1CF}"/>
+              </a:ext>
+            </a:extLst>
+          </p:cNvPr>
+          <p:cNvSpPr>
+            <a:spLocks xmlns:a="http://schemas.openxmlformats.org/drawingml/2006/main" noGrp="1"/>
+          </p:cNvSpPr>
+          <p:nvPr/>
+        </p:nvSpPr>
+        <p:spPr>
+          <a:xfrm xmlns:a="http://schemas.openxmlformats.org/drawingml/2006/main">
+            <a:off x="609600" y="1362075"/>
+            <a:ext cx="10972800" cy="28575"/>
+          </a:xfrm>
+          <a:prstGeom xmlns:a="http://schemas.openxmlformats.org/drawingml/2006/main" prst="rect">
+            <a:avLst/>
+          </a:prstGeom>
+          <a:solidFill xmlns:a="http://schemas.openxmlformats.org/drawingml/2006/main">
+            <a:srgbClr val="0C554E"/>
+          </a:solidFill>
+          <a:ln xmlns:a="http://schemas.openxmlformats.org/drawingml/2006/main" w="0">
+            <a:noFill/>
+          </a:ln>
+        </p:spPr>
+      </p:sp>
+      <p:sp>
+        <p:nvSpPr>
+          <p:cNvPr id="3" name="">
+            <a:extLst xmlns:a="http://schemas.openxmlformats.org/drawingml/2006/main">
+              <a:ext uri="{FF2B5EF4-FFF2-40B4-BE49-F238E27FC236}">
+                <a16:creationId xmlns:a16="http://schemas.microsoft.com/office/drawing/2014/main" id="{1358990B-CFF0-4AB8-B454-4D8395DF91DB}"/>
+              </a:ext>
+            </a:extLst>
+          </p:cNvPr>
+          <p:cNvSpPr>
+            <a:spLocks xmlns:a="http://schemas.openxmlformats.org/drawingml/2006/main" noGrp="1"/>
+          </p:cNvSpPr>
+          <p:nvPr/>
+        </p:nvSpPr>
+        <p:spPr>
+          <a:xfrm xmlns:a="http://schemas.openxmlformats.org/drawingml/2006/main">
+            <a:off x="11144250" y="6419850"/>
+            <a:ext cx="476250" cy="228600"/>
+          </a:xfrm>
+          <a:prstGeom xmlns:a="http://schemas.openxmlformats.org/drawingml/2006/main" prst="rect">
+            <a:avLst/>
+          </a:prstGeom>
+          <a:noFill xmlns:a="http://schemas.openxmlformats.org/drawingml/2006/main"/>
+          <a:ln xmlns:a="http://schemas.openxmlformats.org/drawingml/2006/main" w="0">
+            <a:noFill/>
+          </a:ln>
+        </p:spPr>
+        <p:txBody>
+          <a:bodyPr xmlns:a="http://schemas.openxmlformats.org/drawingml/2006/main">
+            <a:noAutofit/>
+          </a:bodyPr>
+          <a:lstStyle xmlns:a="http://schemas.openxmlformats.org/drawingml/2006/main"/>
+          <a:p xmlns:a="http://schemas.openxmlformats.org/drawingml/2006/main">
+            <a:pPr>
+              <a:buNone/>
+              <a:defRPr sz="1200" b="0">
+                <a:solidFill>
+                  <a:srgbClr val="53716A"/>
+                </a:solidFill>
+                <a:latin typeface="Arial"/>
+                <a:ea typeface="Arial"/>
+                <a:cs typeface="Arial"/>
+              </a:defRPr>
+            </a:pPr>
+            <a:r>
+              <a:rPr sz="1200" b="0">
+                <a:solidFill>
+                  <a:srgbClr val="53716A"/>
+                </a:solidFill>
+                <a:latin typeface="Arial"/>
+                <a:ea typeface="Arial"/>
+                <a:cs typeface="Arial"/>
+              </a:rPr>
+              <a:t>13</a:t>
+            </a:r>
+          </a:p>
+        </p:txBody>
+      </p:sp>
+      <p:sp>
+        <p:nvSpPr>
+          <p:cNvPr id="4" name="">
+            <a:extLst xmlns:a="http://schemas.openxmlformats.org/drawingml/2006/main">
+              <a:ext uri="{FF2B5EF4-FFF2-40B4-BE49-F238E27FC236}">
+                <a16:creationId xmlns:a16="http://schemas.microsoft.com/office/drawing/2014/main" id="{66E51337-499C-42D2-9480-A7B2A4A50DC9}"/>
+              </a:ext>
+            </a:extLst>
+          </p:cNvPr>
+          <p:cNvSpPr>
+            <a:spLocks xmlns:a="http://schemas.openxmlformats.org/drawingml/2006/main" noGrp="1"/>
+          </p:cNvSpPr>
+          <p:nvPr/>
+        </p:nvSpPr>
+        <p:spPr>
+          <a:xfrm xmlns:a="http://schemas.openxmlformats.org/drawingml/2006/main">
+            <a:off x="609600" y="1771650"/>
+            <a:ext cx="10906125" cy="381000"/>
+          </a:xfrm>
+          <a:prstGeom xmlns:a="http://schemas.openxmlformats.org/drawingml/2006/main" prst="rect">
+            <a:avLst/>
+          </a:prstGeom>
+          <a:noFill xmlns:a="http://schemas.openxmlformats.org/drawingml/2006/main"/>
+          <a:ln xmlns:a="http://schemas.openxmlformats.org/drawingml/2006/main" w="0">
+            <a:noFill/>
+          </a:ln>
+        </p:spPr>
+        <p:txBody>
+          <a:bodyPr xmlns:a="http://schemas.openxmlformats.org/drawingml/2006/main">
+            <a:noAutofit/>
+          </a:bodyPr>
+          <a:lstStyle xmlns:a="http://schemas.openxmlformats.org/drawingml/2006/main"/>
+          <a:p xmlns:a="http://schemas.openxmlformats.org/drawingml/2006/main">
+            <a:pPr>
+              <a:buNone/>
+              <a:defRPr sz="2175" b="1">
+                <a:solidFill>
+                  <a:srgbClr val="0C554E"/>
+                </a:solidFill>
+                <a:latin typeface="Arial"/>
+                <a:ea typeface="Arial"/>
+                <a:cs typeface="Arial"/>
+              </a:defRPr>
+            </a:pPr>
+            <a:r>
+              <a:rPr sz="2175" b="1">
+                <a:solidFill>
+                  <a:srgbClr val="0C554E"/>
+                </a:solidFill>
+                <a:latin typeface="Arial"/>
+                <a:ea typeface="Arial"/>
+                <a:cs typeface="Arial"/>
+              </a:rPr>
+              <a:t>Copernicus Sentinel-5P / Sentinel-2</a:t>
+            </a:r>
+          </a:p>
+        </p:txBody>
+      </p:sp>
+      <p:sp>
+        <p:nvSpPr>
+          <p:cNvPr id="5" name="">
+            <a:extLst xmlns:a="http://schemas.openxmlformats.org/drawingml/2006/main">
+              <a:ext uri="{FF2B5EF4-FFF2-40B4-BE49-F238E27FC236}">
+                <a16:creationId xmlns:a16="http://schemas.microsoft.com/office/drawing/2014/main" id="{EB8044DB-CBB8-4735-AD50-05EE5AB21893}"/>
+              </a:ext>
+            </a:extLst>
+          </p:cNvPr>
+          <p:cNvSpPr>
+            <a:spLocks xmlns:a="http://schemas.openxmlformats.org/drawingml/2006/main" noGrp="1"/>
+          </p:cNvSpPr>
+          <p:nvPr/>
+        </p:nvSpPr>
+        <p:spPr>
+          <a:xfrm xmlns:a="http://schemas.openxmlformats.org/drawingml/2006/main">
+            <a:off x="609600" y="2238375"/>
+            <a:ext cx="10906125" cy="428625"/>
+          </a:xfrm>
+          <a:prstGeom xmlns:a="http://schemas.openxmlformats.org/drawingml/2006/main" prst="rect">
+            <a:avLst/>
+          </a:prstGeom>
+          <a:noFill xmlns:a="http://schemas.openxmlformats.org/drawingml/2006/main"/>
+          <a:ln xmlns:a="http://schemas.openxmlformats.org/drawingml/2006/main" w="0">
+            <a:noFill/>
+          </a:ln>
+        </p:spPr>
+        <p:txBody>
+          <a:bodyPr xmlns:a="http://schemas.openxmlformats.org/drawingml/2006/main">
+            <a:noAutofit/>
+          </a:bodyPr>
+          <a:lstStyle xmlns:a="http://schemas.openxmlformats.org/drawingml/2006/main"/>
+          <a:p xmlns:a="http://schemas.openxmlformats.org/drawingml/2006/main">
+            <a:pPr>
+              <a:buNone/>
+              <a:defRPr sz="1950" b="0">
+                <a:solidFill>
+                  <a:srgbClr val="103D36"/>
+                </a:solidFill>
+                <a:latin typeface="Arial"/>
+                <a:ea typeface="Arial"/>
+                <a:cs typeface="Arial"/>
+              </a:defRPr>
+            </a:pPr>
+            <a:r>
+              <a:rPr sz="1950" b="0">
+                <a:solidFill>
+                  <a:srgbClr val="103D36"/>
+                </a:solidFill>
+                <a:latin typeface="Arial"/>
+                <a:ea typeface="Arial"/>
+                <a:cs typeface="Arial"/>
+              </a:rPr>
+              <a:t>2026 satellite observations; Earth Engine and public imagery archives</a:t>
+            </a:r>
+          </a:p>
+        </p:txBody>
+      </p:sp>
+      <p:sp>
+        <p:nvSpPr>
+          <p:cNvPr id="6" name="">
+            <a:extLst xmlns:a="http://schemas.openxmlformats.org/drawingml/2006/main">
+              <a:ext uri="{FF2B5EF4-FFF2-40B4-BE49-F238E27FC236}">
+                <a16:creationId xmlns:a16="http://schemas.microsoft.com/office/drawing/2014/main" id="{992B0776-CC33-4909-99D8-0380FD85AD1B}"/>
+              </a:ext>
+            </a:extLst>
+          </p:cNvPr>
+          <p:cNvSpPr>
+            <a:spLocks xmlns:a="http://schemas.openxmlformats.org/drawingml/2006/main" noGrp="1"/>
+          </p:cNvSpPr>
+          <p:nvPr/>
+        </p:nvSpPr>
+        <p:spPr>
+          <a:xfrm xmlns:a="http://schemas.openxmlformats.org/drawingml/2006/main">
+            <a:off x="609600" y="3048000"/>
+            <a:ext cx="10906125" cy="381000"/>
+          </a:xfrm>
+          <a:prstGeom xmlns:a="http://schemas.openxmlformats.org/drawingml/2006/main" prst="rect">
+            <a:avLst/>
+          </a:prstGeom>
+          <a:noFill xmlns:a="http://schemas.openxmlformats.org/drawingml/2006/main"/>
+          <a:ln xmlns:a="http://schemas.openxmlformats.org/drawingml/2006/main" w="0">
+            <a:noFill/>
+          </a:ln>
+        </p:spPr>
+        <p:txBody>
+          <a:bodyPr xmlns:a="http://schemas.openxmlformats.org/drawingml/2006/main">
+            <a:noAutofit/>
+          </a:bodyPr>
+          <a:lstStyle xmlns:a="http://schemas.openxmlformats.org/drawingml/2006/main"/>
+          <a:p xmlns:a="http://schemas.openxmlformats.org/drawingml/2006/main">
+            <a:pPr>
+              <a:buNone/>
+              <a:defRPr sz="2175" b="1">
+                <a:solidFill>
+                  <a:srgbClr val="0C554E"/>
+                </a:solidFill>
+                <a:latin typeface="Arial"/>
+                <a:ea typeface="Arial"/>
+                <a:cs typeface="Arial"/>
+              </a:defRPr>
+            </a:pPr>
+            <a:r>
+              <a:rPr sz="2175" b="1">
+                <a:solidFill>
+                  <a:srgbClr val="0C554E"/>
+                </a:solidFill>
+                <a:latin typeface="Arial"/>
+                <a:ea typeface="Arial"/>
+                <a:cs typeface="Arial"/>
+              </a:rPr>
+              <a:t>UNEP IMEO MARS-S2L + CloudSEN12</a:t>
+            </a:r>
+          </a:p>
+        </p:txBody>
+      </p:sp>
+      <p:sp>
+        <p:nvSpPr>
+          <p:cNvPr id="7" name="">
+            <a:extLst xmlns:a="http://schemas.openxmlformats.org/drawingml/2006/main">
+              <a:ext uri="{FF2B5EF4-FFF2-40B4-BE49-F238E27FC236}">
+                <a16:creationId xmlns:a16="http://schemas.microsoft.com/office/drawing/2014/main" id="{D8E2B77F-6861-4D57-A005-122E47531A4C}"/>
+              </a:ext>
+            </a:extLst>
+          </p:cNvPr>
+          <p:cNvSpPr>
+            <a:spLocks xmlns:a="http://schemas.openxmlformats.org/drawingml/2006/main" noGrp="1"/>
+          </p:cNvSpPr>
+          <p:nvPr/>
+        </p:nvSpPr>
+        <p:spPr>
+          <a:xfrm xmlns:a="http://schemas.openxmlformats.org/drawingml/2006/main">
+            <a:off x="609600" y="3514725"/>
+            <a:ext cx="10906125" cy="619125"/>
+          </a:xfrm>
+          <a:prstGeom xmlns:a="http://schemas.openxmlformats.org/drawingml/2006/main" prst="rect">
+            <a:avLst/>
+          </a:prstGeom>
+          <a:noFill xmlns:a="http://schemas.openxmlformats.org/drawingml/2006/main"/>
+          <a:ln xmlns:a="http://schemas.openxmlformats.org/drawingml/2006/main" w="0">
+            <a:noFill/>
+          </a:ln>
+        </p:spPr>
+        <p:txBody>
+          <a:bodyPr xmlns:a="http://schemas.openxmlformats.org/drawingml/2006/main">
+            <a:noAutofit/>
+          </a:bodyPr>
+          <a:lstStyle xmlns:a="http://schemas.openxmlformats.org/drawingml/2006/main"/>
+          <a:p xmlns:a="http://schemas.openxmlformats.org/drawingml/2006/main">
+            <a:pPr>
+              <a:buNone/>
+              <a:defRPr sz="1875" b="0">
+                <a:solidFill>
+                  <a:srgbClr val="103D36"/>
+                </a:solidFill>
+                <a:latin typeface="Arial"/>
+                <a:ea typeface="Arial"/>
+                <a:cs typeface="Arial"/>
+              </a:defRPr>
+            </a:pPr>
+            <a:r>
+              <a:rPr sz="1875" b="0">
+                <a:solidFill>
+                  <a:srgbClr val="103D36"/>
+                </a:solidFill>
+                <a:latin typeface="Arial"/>
+                <a:ea typeface="Arial"/>
+                <a:cs typeface="Arial"/>
+              </a:rPr>
+              <a:t>Pretrained models; MARS-S2L CC BY-NC-SA 4.0, CloudSEN12 weights CC BY-NC 4.0</a:t>
+            </a:r>
+          </a:p>
+        </p:txBody>
+      </p:sp>
+      <p:sp>
+        <p:nvSpPr>
+          <p:cNvPr id="8" name="">
+            <a:extLst xmlns:a="http://schemas.openxmlformats.org/drawingml/2006/main">
+              <a:ext uri="{FF2B5EF4-FFF2-40B4-BE49-F238E27FC236}">
+                <a16:creationId xmlns:a16="http://schemas.microsoft.com/office/drawing/2014/main" id="{0BE44197-4E3A-4CEC-9A6F-C79D892D2BF2}"/>
+              </a:ext>
+            </a:extLst>
+          </p:cNvPr>
+          <p:cNvSpPr>
+            <a:spLocks xmlns:a="http://schemas.openxmlformats.org/drawingml/2006/main" noGrp="1"/>
+          </p:cNvSpPr>
+          <p:nvPr/>
+        </p:nvSpPr>
+        <p:spPr>
+          <a:xfrm xmlns:a="http://schemas.openxmlformats.org/drawingml/2006/main">
+            <a:off x="609600" y="4505325"/>
+            <a:ext cx="10906125" cy="381000"/>
+          </a:xfrm>
+          <a:prstGeom xmlns:a="http://schemas.openxmlformats.org/drawingml/2006/main" prst="rect">
+            <a:avLst/>
+          </a:prstGeom>
+          <a:noFill xmlns:a="http://schemas.openxmlformats.org/drawingml/2006/main"/>
+          <a:ln xmlns:a="http://schemas.openxmlformats.org/drawingml/2006/main" w="0">
+            <a:noFill/>
+          </a:ln>
+        </p:spPr>
+        <p:txBody>
+          <a:bodyPr xmlns:a="http://schemas.openxmlformats.org/drawingml/2006/main">
+            <a:noAutofit/>
+          </a:bodyPr>
+          <a:lstStyle xmlns:a="http://schemas.openxmlformats.org/drawingml/2006/main"/>
+          <a:p xmlns:a="http://schemas.openxmlformats.org/drawingml/2006/main">
+            <a:pPr>
+              <a:buNone/>
+              <a:defRPr sz="2175" b="1">
+                <a:solidFill>
+                  <a:srgbClr val="0C554E"/>
+                </a:solidFill>
+                <a:latin typeface="Arial"/>
+                <a:ea typeface="Arial"/>
+                <a:cs typeface="Arial"/>
+              </a:defRPr>
+            </a:pPr>
+            <a:r>
+              <a:rPr sz="2175" b="1">
+                <a:solidFill>
+                  <a:srgbClr val="0C554E"/>
+                </a:solidFill>
+                <a:latin typeface="Arial"/>
+                <a:ea typeface="Arial"/>
+                <a:cs typeface="Arial"/>
+              </a:rPr>
+              <a:t>NASA GEOS-FP / recorded GFS fallback</a:t>
+            </a:r>
+          </a:p>
+        </p:txBody>
+      </p:sp>
+      <p:sp>
+        <p:nvSpPr>
+          <p:cNvPr id="9" name="">
+            <a:extLst xmlns:a="http://schemas.openxmlformats.org/drawingml/2006/main">
+              <a:ext uri="{FF2B5EF4-FFF2-40B4-BE49-F238E27FC236}">
+                <a16:creationId xmlns:a16="http://schemas.microsoft.com/office/drawing/2014/main" id="{2F798CBE-AACF-4814-9494-2BCCE8749630}"/>
+              </a:ext>
+            </a:extLst>
+          </p:cNvPr>
+          <p:cNvSpPr>
+            <a:spLocks xmlns:a="http://schemas.openxmlformats.org/drawingml/2006/main" noGrp="1"/>
+          </p:cNvSpPr>
+          <p:nvPr/>
+        </p:nvSpPr>
+        <p:spPr>
+          <a:xfrm xmlns:a="http://schemas.openxmlformats.org/drawingml/2006/main">
+            <a:off x="609600" y="4972050"/>
+            <a:ext cx="10906125" cy="428625"/>
+          </a:xfrm>
+          <a:prstGeom xmlns:a="http://schemas.openxmlformats.org/drawingml/2006/main" prst="rect">
+            <a:avLst/>
+          </a:prstGeom>
+          <a:noFill xmlns:a="http://schemas.openxmlformats.org/drawingml/2006/main"/>
+          <a:ln xmlns:a="http://schemas.openxmlformats.org/drawingml/2006/main" w="0">
+            <a:noFill/>
+          </a:ln>
+        </p:spPr>
+        <p:txBody>
+          <a:bodyPr xmlns:a="http://schemas.openxmlformats.org/drawingml/2006/main">
+            <a:noAutofit/>
+          </a:bodyPr>
+          <a:lstStyle xmlns:a="http://schemas.openxmlformats.org/drawingml/2006/main"/>
+          <a:p xmlns:a="http://schemas.openxmlformats.org/drawingml/2006/main">
+            <a:pPr>
+              <a:buNone/>
+              <a:defRPr sz="1950" b="0">
+                <a:solidFill>
+                  <a:srgbClr val="103D36"/>
+                </a:solidFill>
+                <a:latin typeface="Arial"/>
+                <a:ea typeface="Arial"/>
+                <a:cs typeface="Arial"/>
+              </a:defRPr>
+            </a:pPr>
+            <a:r>
+              <a:rPr sz="1950" b="0">
+                <a:solidFill>
+                  <a:srgbClr val="103D36"/>
+                </a:solidFill>
+                <a:latin typeface="Arial"/>
+                <a:ea typeface="Arial"/>
+                <a:cs typeface="Arial"/>
+              </a:rPr>
+              <a:t>Modeled wind matched to acquisition time; source and fallback recorded</a:t>
+            </a:r>
+          </a:p>
+        </p:txBody>
+      </p:sp>
+      <p:sp>
+        <p:nvSpPr>
+          <p:cNvPr id="10" name="">
+            <a:extLst xmlns:a="http://schemas.openxmlformats.org/drawingml/2006/main">
+              <a:ext uri="{FF2B5EF4-FFF2-40B4-BE49-F238E27FC236}">
+                <a16:creationId xmlns:a16="http://schemas.microsoft.com/office/drawing/2014/main" id="{6EB00D37-DDD2-4D9D-97FC-AA031B2482CB}"/>
+              </a:ext>
+            </a:extLst>
+          </p:cNvPr>
+          <p:cNvSpPr>
+            <a:spLocks xmlns:a="http://schemas.openxmlformats.org/drawingml/2006/main" noGrp="1"/>
+          </p:cNvSpPr>
+          <p:nvPr/>
+        </p:nvSpPr>
+        <p:spPr>
+          <a:xfrm xmlns:a="http://schemas.openxmlformats.org/drawingml/2006/main">
+            <a:off x="609600" y="5886450"/>
+            <a:ext cx="10906125" cy="381000"/>
+          </a:xfrm>
+          <a:prstGeom xmlns:a="http://schemas.openxmlformats.org/drawingml/2006/main" prst="rect">
+            <a:avLst/>
+          </a:prstGeom>
+          <a:noFill xmlns:a="http://schemas.openxmlformats.org/drawingml/2006/main"/>
+          <a:ln xmlns:a="http://schemas.openxmlformats.org/drawingml/2006/main" w="0">
+            <a:noFill/>
+          </a:ln>
+        </p:spPr>
+        <p:txBody>
+          <a:bodyPr xmlns:a="http://schemas.openxmlformats.org/drawingml/2006/main">
+            <a:noAutofit/>
+          </a:bodyPr>
+          <a:lstStyle xmlns:a="http://schemas.openxmlformats.org/drawingml/2006/main"/>
+          <a:p xmlns:a="http://schemas.openxmlformats.org/drawingml/2006/main">
+            <a:pPr>
+              <a:buNone/>
               <a:defRPr sz="1800" b="0">
                 <a:solidFill>
                   <a:srgbClr val="53716A"/>
@@ -3519,6 +4877,7 @@
           <a:lstStyle xmlns:a="http://schemas.openxmlformats.org/drawingml/2006/main"/>
           <a:p xmlns:a="http://schemas.openxmlformats.org/drawingml/2006/main">
             <a:pPr>
+              <a:buNone/>
               <a:defRPr sz="3300" b="1">
                 <a:solidFill>
                   <a:srgbClr val="103D36"/>
@@ -3606,6 +4965,7 @@
           <a:lstStyle xmlns:a="http://schemas.openxmlformats.org/drawingml/2006/main"/>
           <a:p xmlns:a="http://schemas.openxmlformats.org/drawingml/2006/main">
             <a:pPr>
+              <a:buNone/>
               <a:defRPr sz="1200" b="0">
                 <a:solidFill>
                   <a:srgbClr val="53716A"/>
@@ -3663,6 +5023,7 @@
           <a:lstStyle xmlns:a="http://schemas.openxmlformats.org/drawingml/2006/main"/>
           <a:p xmlns:a="http://schemas.openxmlformats.org/drawingml/2006/main">
             <a:pPr>
+              <a:buNone/>
               <a:defRPr sz="1875" b="1">
                 <a:solidFill>
                   <a:srgbClr val="53716A"/>
@@ -3720,6 +5081,7 @@
           <a:lstStyle xmlns:a="http://schemas.openxmlformats.org/drawingml/2006/main"/>
           <a:p xmlns:a="http://schemas.openxmlformats.org/drawingml/2006/main">
             <a:pPr>
+              <a:buNone/>
               <a:defRPr sz="2775" b="1">
                 <a:solidFill>
                   <a:srgbClr val="103D36"/>
@@ -3743,6 +5105,7 @@
           </a:p>
           <a:p xmlns:a="http://schemas.openxmlformats.org/drawingml/2006/main">
             <a:pPr>
+              <a:buNone/>
               <a:defRPr sz="2775" b="1">
                 <a:solidFill>
                   <a:srgbClr val="103D36"/>
@@ -3800,6 +5163,7 @@
           <a:lstStyle xmlns:a="http://schemas.openxmlformats.org/drawingml/2006/main"/>
           <a:p xmlns:a="http://schemas.openxmlformats.org/drawingml/2006/main">
             <a:pPr>
+              <a:buNone/>
               <a:defRPr sz="1875" b="1">
                 <a:solidFill>
                   <a:srgbClr val="53716A"/>
@@ -3857,6 +5221,7 @@
           <a:lstStyle xmlns:a="http://schemas.openxmlformats.org/drawingml/2006/main"/>
           <a:p xmlns:a="http://schemas.openxmlformats.org/drawingml/2006/main">
             <a:pPr>
+              <a:buNone/>
               <a:defRPr sz="2625" b="1">
                 <a:solidFill>
                   <a:srgbClr val="103D36"/>
@@ -3880,6 +5245,7 @@
           </a:p>
           <a:p xmlns:a="http://schemas.openxmlformats.org/drawingml/2006/main">
             <a:pPr>
+              <a:buNone/>
               <a:defRPr sz="2625" b="1">
                 <a:solidFill>
                   <a:srgbClr val="103D36"/>
@@ -3903,6 +5269,7 @@
           </a:p>
           <a:p xmlns:a="http://schemas.openxmlformats.org/drawingml/2006/main">
             <a:pPr>
+              <a:buNone/>
               <a:defRPr sz="2625" b="1">
                 <a:solidFill>
                   <a:srgbClr val="103D36"/>
@@ -3960,6 +5327,7 @@
           <a:lstStyle xmlns:a="http://schemas.openxmlformats.org/drawingml/2006/main"/>
           <a:p xmlns:a="http://schemas.openxmlformats.org/drawingml/2006/main">
             <a:pPr>
+              <a:buNone/>
               <a:defRPr sz="1875" b="1">
                 <a:solidFill>
                   <a:srgbClr val="53716A"/>
@@ -3978,7 +5346,7 @@
                 <a:ea typeface="Arial"/>
                 <a:cs typeface="Arial"/>
               </a:rPr>
-              <a:t>The problem</a:t>
+              <a:t>Investigation scenario</a:t>
             </a:r>
           </a:p>
         </p:txBody>
@@ -4017,6 +5385,7 @@
           <a:lstStyle xmlns:a="http://schemas.openxmlformats.org/drawingml/2006/main"/>
           <a:p xmlns:a="http://schemas.openxmlformats.org/drawingml/2006/main">
             <a:pPr>
+              <a:buNone/>
               <a:defRPr sz="2175" b="0">
                 <a:solidFill>
                   <a:srgbClr val="103D36"/>
@@ -4035,11 +5404,12 @@
                 <a:ea typeface="Arial"/>
                 <a:cs typeface="Arial"/>
               </a:rPr>
-              <a:t>Separate products, mixed units and missing observations complicate comparisons.</a:t>
-            </a:r>
-          </a:p>
-          <a:p xmlns:a="http://schemas.openxmlformats.org/drawingml/2006/main">
-            <a:pPr>
+              <a:t>An analyst reviews an area before requesting gas-specific field observations.</a:t>
+            </a:r>
+          </a:p>
+          <a:p xmlns:a="http://schemas.openxmlformats.org/drawingml/2006/main">
+            <a:pPr>
+              <a:buNone/>
               <a:defRPr sz="2175" b="0">
                 <a:solidFill>
                   <a:srgbClr val="103D36"/>
@@ -4058,7 +5428,7 @@
                 <a:ea typeface="Arial"/>
                 <a:cs typeface="Arial"/>
               </a:rPr>
-              <a:t>Satellite coverage provides regional context; dated evidence supports closer review.</a:t>
+              <a:t>Separate products and missing dates complicate that review; no user interview is claimed.</a:t>
             </a:r>
           </a:p>
         </p:txBody>
@@ -4094,10 +5464,10 @@
       </p:grpSpPr>
       <p:sp>
         <p:nvSpPr>
-          <p:cNvPr id="7" name="">
-            <a:extLst xmlns:a="http://schemas.openxmlformats.org/drawingml/2006/main">
-              <a:ext uri="{FF2B5EF4-FFF2-40B4-BE49-F238E27FC236}">
-                <a16:creationId xmlns:a16="http://schemas.microsoft.com/office/drawing/2014/main" id="{E9471C58-A8A8-4948-8B90-148C6D28CB91}"/>
+          <p:cNvPr id="9" name="">
+            <a:extLst xmlns:a="http://schemas.openxmlformats.org/drawingml/2006/main">
+              <a:ext uri="{FF2B5EF4-FFF2-40B4-BE49-F238E27FC236}">
+                <a16:creationId xmlns:a16="http://schemas.microsoft.com/office/drawing/2014/main" id="{E106C940-DD0D-4ACF-8723-E84499939F3D}"/>
               </a:ext>
             </a:extLst>
           </p:cNvPr>
@@ -4144,7 +5514,7 @@
                 <a:ea typeface="Arial"/>
                 <a:cs typeface="Arial"/>
               </a:rPr>
-              <a:t>Measurements in the PoC</a:t>
+              <a:t>GeoGuard’s contribution</a:t>
             </a:r>
           </a:p>
         </p:txBody>
@@ -4154,7 +5524,7 @@
           <p:cNvPr id="2" name="">
             <a:extLst xmlns:a="http://schemas.openxmlformats.org/drawingml/2006/main">
               <a:ext uri="{FF2B5EF4-FFF2-40B4-BE49-F238E27FC236}">
-                <a16:creationId xmlns:a16="http://schemas.microsoft.com/office/drawing/2014/main" id="{EF318D67-ED8E-44A6-9102-604B6D382BD6}"/>
+                <a16:creationId xmlns:a16="http://schemas.microsoft.com/office/drawing/2014/main" id="{70AC330C-6C7F-4CDD-AFB8-B03E58F64314}"/>
               </a:ext>
             </a:extLst>
           </p:cNvPr>
@@ -4184,7 +5554,7 @@
           <p:cNvPr id="3" name="">
             <a:extLst xmlns:a="http://schemas.openxmlformats.org/drawingml/2006/main">
               <a:ext uri="{FF2B5EF4-FFF2-40B4-BE49-F238E27FC236}">
-                <a16:creationId xmlns:a16="http://schemas.microsoft.com/office/drawing/2014/main" id="{4827FAAD-D397-4910-8134-4279B3931617}"/>
+                <a16:creationId xmlns:a16="http://schemas.microsoft.com/office/drawing/2014/main" id="{B1285734-D2FD-492F-A607-58F340E31656}"/>
               </a:ext>
             </a:extLst>
           </p:cNvPr>
@@ -4236,9 +5606,599 @@
           </a:p>
         </p:txBody>
       </p:sp>
+      <p:sp>
+        <p:nvSpPr>
+          <p:cNvPr id="4" name="">
+            <a:extLst xmlns:a="http://schemas.openxmlformats.org/drawingml/2006/main">
+              <a:ext uri="{FF2B5EF4-FFF2-40B4-BE49-F238E27FC236}">
+                <a16:creationId xmlns:a16="http://schemas.microsoft.com/office/drawing/2014/main" id="{41CB3B77-5E1D-4204-8D4E-27DEA9E0F0EB}"/>
+              </a:ext>
+            </a:extLst>
+          </p:cNvPr>
+          <p:cNvSpPr>
+            <a:spLocks xmlns:a="http://schemas.openxmlformats.org/drawingml/2006/main" noGrp="1"/>
+          </p:cNvSpPr>
+          <p:nvPr/>
+        </p:nvSpPr>
+        <p:spPr>
+          <a:xfrm xmlns:a="http://schemas.openxmlformats.org/drawingml/2006/main">
+            <a:off x="609600" y="1790700"/>
+            <a:ext cx="5000625" cy="476250"/>
+          </a:xfrm>
+          <a:prstGeom xmlns:a="http://schemas.openxmlformats.org/drawingml/2006/main" prst="rect">
+            <a:avLst/>
+          </a:prstGeom>
+          <a:noFill xmlns:a="http://schemas.openxmlformats.org/drawingml/2006/main"/>
+          <a:ln xmlns:a="http://schemas.openxmlformats.org/drawingml/2006/main" w="0">
+            <a:noFill/>
+          </a:ln>
+        </p:spPr>
+        <p:txBody>
+          <a:bodyPr xmlns:a="http://schemas.openxmlformats.org/drawingml/2006/main">
+            <a:noAutofit/>
+          </a:bodyPr>
+          <a:lstStyle xmlns:a="http://schemas.openxmlformats.org/drawingml/2006/main"/>
+          <a:p xmlns:a="http://schemas.openxmlformats.org/drawingml/2006/main">
+            <a:pPr>
+              <a:defRPr sz="2400" b="1">
+                <a:solidFill>
+                  <a:srgbClr val="0C554E"/>
+                </a:solidFill>
+                <a:latin typeface="Arial"/>
+                <a:ea typeface="Arial"/>
+                <a:cs typeface="Arial"/>
+              </a:defRPr>
+            </a:pPr>
+            <a:r>
+              <a:rPr sz="2400" b="1">
+                <a:solidFill>
+                  <a:srgbClr val="0C554E"/>
+                </a:solidFill>
+                <a:latin typeface="Arial"/>
+                <a:ea typeface="Arial"/>
+                <a:cs typeface="Arial"/>
+              </a:rPr>
+              <a:t>Existing inputs</a:t>
+            </a:r>
+          </a:p>
+        </p:txBody>
+      </p:sp>
+      <p:sp>
+        <p:nvSpPr>
+          <p:cNvPr id="5" name="">
+            <a:extLst xmlns:a="http://schemas.openxmlformats.org/drawingml/2006/main">
+              <a:ext uri="{FF2B5EF4-FFF2-40B4-BE49-F238E27FC236}">
+                <a16:creationId xmlns:a16="http://schemas.microsoft.com/office/drawing/2014/main" id="{1D8EA754-9C5A-468D-800A-D28E1BA574AB}"/>
+              </a:ext>
+            </a:extLst>
+          </p:cNvPr>
+          <p:cNvSpPr>
+            <a:spLocks xmlns:a="http://schemas.openxmlformats.org/drawingml/2006/main" noGrp="1"/>
+          </p:cNvSpPr>
+          <p:nvPr/>
+        </p:nvSpPr>
+        <p:spPr>
+          <a:xfrm xmlns:a="http://schemas.openxmlformats.org/drawingml/2006/main">
+            <a:off x="609600" y="2543175"/>
+            <a:ext cx="5191125" cy="1809750"/>
+          </a:xfrm>
+          <a:prstGeom xmlns:a="http://schemas.openxmlformats.org/drawingml/2006/main" prst="rect">
+            <a:avLst/>
+          </a:prstGeom>
+          <a:noFill xmlns:a="http://schemas.openxmlformats.org/drawingml/2006/main"/>
+          <a:ln xmlns:a="http://schemas.openxmlformats.org/drawingml/2006/main" w="0">
+            <a:noFill/>
+          </a:ln>
+        </p:spPr>
+        <p:txBody>
+          <a:bodyPr xmlns:a="http://schemas.openxmlformats.org/drawingml/2006/main">
+            <a:noAutofit/>
+          </a:bodyPr>
+          <a:lstStyle xmlns:a="http://schemas.openxmlformats.org/drawingml/2006/main"/>
+          <a:p xmlns:a="http://schemas.openxmlformats.org/drawingml/2006/main">
+            <a:pPr>
+              <a:defRPr sz="2175" b="0">
+                <a:solidFill>
+                  <a:srgbClr val="103D36"/>
+                </a:solidFill>
+                <a:latin typeface="Arial"/>
+                <a:ea typeface="Arial"/>
+                <a:cs typeface="Arial"/>
+              </a:defRPr>
+            </a:pPr>
+            <a:r>
+              <a:rPr sz="2175" b="0">
+                <a:solidFill>
+                  <a:srgbClr val="103D36"/>
+                </a:solidFill>
+                <a:latin typeface="Arial"/>
+                <a:ea typeface="Arial"/>
+                <a:cs typeface="Arial"/>
+              </a:rPr>
+              <a:t>Copernicus supplies satellite observations.</a:t>
+            </a:r>
+          </a:p>
+          <a:p xmlns:a="http://schemas.openxmlformats.org/drawingml/2006/main">
+            <a:pPr>
+              <a:defRPr sz="2175" b="0">
+                <a:solidFill>
+                  <a:srgbClr val="103D36"/>
+                </a:solidFill>
+                <a:latin typeface="Arial"/>
+                <a:ea typeface="Arial"/>
+                <a:cs typeface="Arial"/>
+              </a:defRPr>
+            </a:pPr>
+            <a:r>
+              <a:rPr sz="2175" b="0">
+                <a:solidFill>
+                  <a:srgbClr val="103D36"/>
+                </a:solidFill>
+                <a:latin typeface="Arial"/>
+                <a:ea typeface="Arial"/>
+                <a:cs typeface="Arial"/>
+              </a:rPr>
+              <a:t>UNEP IMEO supplies the pretrained detector.</a:t>
+            </a:r>
+          </a:p>
+          <a:p xmlns:a="http://schemas.openxmlformats.org/drawingml/2006/main">
+            <a:r>
+              <a:t/>
+            </a:r>
+          </a:p>
+          <a:p xmlns:a="http://schemas.openxmlformats.org/drawingml/2006/main">
+            <a:pPr>
+              <a:defRPr sz="2175" b="0">
+                <a:solidFill>
+                  <a:srgbClr val="103D36"/>
+                </a:solidFill>
+                <a:latin typeface="Arial"/>
+                <a:ea typeface="Arial"/>
+                <a:cs typeface="Arial"/>
+              </a:defRPr>
+            </a:pPr>
+            <a:r>
+              <a:rPr sz="2175" b="0">
+                <a:solidFill>
+                  <a:srgbClr val="103D36"/>
+                </a:solidFill>
+                <a:latin typeface="Arial"/>
+                <a:ea typeface="Arial"/>
+                <a:cs typeface="Arial"/>
+              </a:rPr>
+              <a:t>These are the foundations we use.</a:t>
+            </a:r>
+          </a:p>
+        </p:txBody>
+      </p:sp>
+      <p:sp>
+        <p:nvSpPr>
+          <p:cNvPr id="6" name="">
+            <a:extLst xmlns:a="http://schemas.openxmlformats.org/drawingml/2006/main">
+              <a:ext uri="{FF2B5EF4-FFF2-40B4-BE49-F238E27FC236}">
+                <a16:creationId xmlns:a16="http://schemas.microsoft.com/office/drawing/2014/main" id="{A1D169F1-4D32-44CD-83D3-992535DA137B}"/>
+              </a:ext>
+            </a:extLst>
+          </p:cNvPr>
+          <p:cNvSpPr>
+            <a:spLocks xmlns:a="http://schemas.openxmlformats.org/drawingml/2006/main" noGrp="1"/>
+          </p:cNvSpPr>
+          <p:nvPr/>
+        </p:nvSpPr>
+        <p:spPr>
+          <a:xfrm xmlns:a="http://schemas.openxmlformats.org/drawingml/2006/main">
+            <a:off x="6429375" y="1790700"/>
+            <a:ext cx="5143500" cy="476250"/>
+          </a:xfrm>
+          <a:prstGeom xmlns:a="http://schemas.openxmlformats.org/drawingml/2006/main" prst="rect">
+            <a:avLst/>
+          </a:prstGeom>
+          <a:noFill xmlns:a="http://schemas.openxmlformats.org/drawingml/2006/main"/>
+          <a:ln xmlns:a="http://schemas.openxmlformats.org/drawingml/2006/main" w="0">
+            <a:noFill/>
+          </a:ln>
+        </p:spPr>
+        <p:txBody>
+          <a:bodyPr xmlns:a="http://schemas.openxmlformats.org/drawingml/2006/main">
+            <a:noAutofit/>
+          </a:bodyPr>
+          <a:lstStyle xmlns:a="http://schemas.openxmlformats.org/drawingml/2006/main"/>
+          <a:p xmlns:a="http://schemas.openxmlformats.org/drawingml/2006/main">
+            <a:pPr>
+              <a:defRPr sz="2400" b="1">
+                <a:solidFill>
+                  <a:srgbClr val="0C554E"/>
+                </a:solidFill>
+                <a:latin typeface="Arial"/>
+                <a:ea typeface="Arial"/>
+                <a:cs typeface="Arial"/>
+              </a:defRPr>
+            </a:pPr>
+            <a:r>
+              <a:rPr sz="2400" b="1">
+                <a:solidFill>
+                  <a:srgbClr val="0C554E"/>
+                </a:solidFill>
+                <a:latin typeface="Arial"/>
+                <a:ea typeface="Arial"/>
+                <a:cs typeface="Arial"/>
+              </a:rPr>
+              <a:t>Our implemented workflow</a:t>
+            </a:r>
+          </a:p>
+        </p:txBody>
+      </p:sp>
+      <p:sp>
+        <p:nvSpPr>
+          <p:cNvPr id="7" name="">
+            <a:extLst xmlns:a="http://schemas.openxmlformats.org/drawingml/2006/main">
+              <a:ext uri="{FF2B5EF4-FFF2-40B4-BE49-F238E27FC236}">
+                <a16:creationId xmlns:a16="http://schemas.microsoft.com/office/drawing/2014/main" id="{54820E75-07D2-4CE4-9067-183B56A4EB1B}"/>
+              </a:ext>
+            </a:extLst>
+          </p:cNvPr>
+          <p:cNvSpPr>
+            <a:spLocks xmlns:a="http://schemas.openxmlformats.org/drawingml/2006/main" noGrp="1"/>
+          </p:cNvSpPr>
+          <p:nvPr/>
+        </p:nvSpPr>
+        <p:spPr>
+          <a:xfrm xmlns:a="http://schemas.openxmlformats.org/drawingml/2006/main">
+            <a:off x="6429375" y="2543175"/>
+            <a:ext cx="5095875" cy="2571750"/>
+          </a:xfrm>
+          <a:prstGeom xmlns:a="http://schemas.openxmlformats.org/drawingml/2006/main" prst="rect">
+            <a:avLst/>
+          </a:prstGeom>
+          <a:noFill xmlns:a="http://schemas.openxmlformats.org/drawingml/2006/main"/>
+          <a:ln xmlns:a="http://schemas.openxmlformats.org/drawingml/2006/main" w="0">
+            <a:noFill/>
+          </a:ln>
+        </p:spPr>
+        <p:txBody>
+          <a:bodyPr xmlns:a="http://schemas.openxmlformats.org/drawingml/2006/main">
+            <a:noAutofit/>
+          </a:bodyPr>
+          <a:lstStyle xmlns:a="http://schemas.openxmlformats.org/drawingml/2006/main"/>
+          <a:p xmlns:a="http://schemas.openxmlformats.org/drawingml/2006/main">
+            <a:pPr>
+              <a:defRPr sz="2100" b="0">
+                <a:solidFill>
+                  <a:srgbClr val="103D36"/>
+                </a:solidFill>
+                <a:latin typeface="Arial"/>
+                <a:ea typeface="Arial"/>
+                <a:cs typeface="Arial"/>
+              </a:defRPr>
+            </a:pPr>
+            <a:r>
+              <a:rPr sz="2100" b="0">
+                <a:solidFill>
+                  <a:srgbClr val="103D36"/>
+                </a:solidFill>
+                <a:latin typeface="Arial"/>
+                <a:ea typeface="Arial"/>
+                <a:cs typeface="Arial"/>
+              </a:rPr>
+              <a:t>Quantity changes retain units, dates and coverage.</a:t>
+            </a:r>
+          </a:p>
+          <a:p xmlns:a="http://schemas.openxmlformats.org/drawingml/2006/main">
+            <a:r>
+              <a:t/>
+            </a:r>
+          </a:p>
+          <a:p xmlns:a="http://schemas.openxmlformats.org/drawingml/2006/main">
+            <a:pPr>
+              <a:defRPr sz="2100" b="0">
+                <a:solidFill>
+                  <a:srgbClr val="103D36"/>
+                </a:solidFill>
+                <a:latin typeface="Arial"/>
+                <a:ea typeface="Arial"/>
+                <a:cs typeface="Arial"/>
+              </a:defRPr>
+            </a:pPr>
+            <a:r>
+              <a:rPr sz="2100" b="0">
+                <a:solidFill>
+                  <a:srgbClr val="103D36"/>
+                </a:solidFill>
+                <a:latin typeface="Arial"/>
+                <a:ea typeface="Arial"/>
+                <a:cs typeface="Arial"/>
+              </a:rPr>
+              <a:t>Evidence remains tied to its recorded location.</a:t>
+            </a:r>
+          </a:p>
+          <a:p xmlns:a="http://schemas.openxmlformats.org/drawingml/2006/main">
+            <a:r>
+              <a:t/>
+            </a:r>
+          </a:p>
+          <a:p xmlns:a="http://schemas.openxmlformats.org/drawingml/2006/main">
+            <a:pPr>
+              <a:defRPr sz="2100" b="0">
+                <a:solidFill>
+                  <a:srgbClr val="103D36"/>
+                </a:solidFill>
+                <a:latin typeface="Arial"/>
+                <a:ea typeface="Arial"/>
+                <a:cs typeface="Arial"/>
+              </a:defRPr>
+            </a:pPr>
+            <a:r>
+              <a:rPr sz="2100" b="0">
+                <a:solidFill>
+                  <a:srgbClr val="103D36"/>
+                </a:solidFill>
+                <a:latin typeface="Arial"/>
+                <a:ea typeface="Arial"/>
+                <a:cs typeface="Arial"/>
+              </a:rPr>
+              <a:t>An export carries the record into analyst review.</a:t>
+            </a:r>
+          </a:p>
+        </p:txBody>
+      </p:sp>
+      <p:sp>
+        <p:nvSpPr>
+          <p:cNvPr id="8" name="">
+            <a:extLst xmlns:a="http://schemas.openxmlformats.org/drawingml/2006/main">
+              <a:ext uri="{FF2B5EF4-FFF2-40B4-BE49-F238E27FC236}">
+                <a16:creationId xmlns:a16="http://schemas.microsoft.com/office/drawing/2014/main" id="{38AF1D14-4179-4CAE-A90F-BEC2DAE8E823}"/>
+              </a:ext>
+            </a:extLst>
+          </p:cNvPr>
+          <p:cNvSpPr>
+            <a:spLocks xmlns:a="http://schemas.openxmlformats.org/drawingml/2006/main" noGrp="1"/>
+          </p:cNvSpPr>
+          <p:nvPr/>
+        </p:nvSpPr>
+        <p:spPr>
+          <a:xfrm xmlns:a="http://schemas.openxmlformats.org/drawingml/2006/main">
+            <a:off x="609600" y="5495925"/>
+            <a:ext cx="10953750" cy="762000"/>
+          </a:xfrm>
+          <a:prstGeom xmlns:a="http://schemas.openxmlformats.org/drawingml/2006/main" prst="rect">
+            <a:avLst/>
+          </a:prstGeom>
+          <a:noFill xmlns:a="http://schemas.openxmlformats.org/drawingml/2006/main"/>
+          <a:ln xmlns:a="http://schemas.openxmlformats.org/drawingml/2006/main" w="0">
+            <a:noFill/>
+          </a:ln>
+        </p:spPr>
+        <p:txBody>
+          <a:bodyPr xmlns:a="http://schemas.openxmlformats.org/drawingml/2006/main">
+            <a:noAutofit/>
+          </a:bodyPr>
+          <a:lstStyle xmlns:a="http://schemas.openxmlformats.org/drawingml/2006/main"/>
+          <a:p xmlns:a="http://schemas.openxmlformats.org/drawingml/2006/main">
+            <a:pPr>
+              <a:defRPr sz="2025" b="0">
+                <a:solidFill>
+                  <a:srgbClr val="53716A"/>
+                </a:solidFill>
+                <a:latin typeface="Arial"/>
+                <a:ea typeface="Arial"/>
+                <a:cs typeface="Arial"/>
+              </a:defRPr>
+            </a:pPr>
+            <a:r>
+              <a:rPr sz="2025" b="0">
+                <a:solidFill>
+                  <a:srgbClr val="53716A"/>
+                </a:solidFill>
+                <a:latin typeface="Arial"/>
+                <a:ea typeface="Arial"/>
+                <a:cs typeface="Arial"/>
+              </a:rPr>
+              <a:t>Proposed benefit: easier evidence assembly before field follow-up.</a:t>
+            </a:r>
+          </a:p>
+          <a:p xmlns:a="http://schemas.openxmlformats.org/drawingml/2006/main">
+            <a:pPr>
+              <a:defRPr sz="2025" b="0">
+                <a:solidFill>
+                  <a:srgbClr val="53716A"/>
+                </a:solidFill>
+                <a:latin typeface="Arial"/>
+                <a:ea typeface="Arial"/>
+                <a:cs typeface="Arial"/>
+              </a:defRPr>
+            </a:pPr>
+            <a:r>
+              <a:rPr sz="2025" b="0">
+                <a:solidFill>
+                  <a:srgbClr val="53716A"/>
+                </a:solidFill>
+                <a:latin typeface="Arial"/>
+                <a:ea typeface="Arial"/>
+                <a:cs typeface="Arial"/>
+              </a:rPr>
+              <a:t>Review time and better decisions still need measurement with intended users.</a:t>
+            </a:r>
+          </a:p>
+        </p:txBody>
+      </p:sp>
+    </p:spTree>
+    <p:extLst>
+      <p:ext uri="{BB962C8B-B14F-4D97-AF65-F5344CB8AC3E}">
+        <p14:creationId xmlns:p14="http://schemas.microsoft.com/office/powerpoint/2010/main" val="993510542"/>
+      </p:ext>
+    </p:extLst>
+  </p:cSld>
+</p:sld>
+</file>
+
+<file path=ppt/slides/slide4.xml><?xml version="1.0" encoding="utf-8"?>
+<p:sld xmlns:p="http://schemas.openxmlformats.org/presentationml/2006/main">
+  <p:cSld>
+    <p:bg>
+      <p:bgPr>
+        <a:solidFill xmlns:a="http://schemas.openxmlformats.org/drawingml/2006/main">
+          <a:srgbClr val="F5F6EE"/>
+        </a:solidFill>
+      </p:bgPr>
+    </p:bg>
+    <p:spTree>
+      <p:nvGrpSpPr>
+        <p:cNvPr id="1" name=""/>
+        <p:cNvGrpSpPr/>
+        <p:nvPr/>
+      </p:nvGrpSpPr>
+      <p:grpSpPr>
+        <a:xfrm xmlns:a="http://schemas.openxmlformats.org/drawingml/2006/main"/>
+      </p:grpSpPr>
+      <p:sp>
+        <p:nvSpPr>
+          <p:cNvPr id="7" name="">
+            <a:extLst xmlns:a="http://schemas.openxmlformats.org/drawingml/2006/main">
+              <a:ext uri="{FF2B5EF4-FFF2-40B4-BE49-F238E27FC236}">
+                <a16:creationId xmlns:a16="http://schemas.microsoft.com/office/drawing/2014/main" id="{E9471C58-A8A8-4948-8B90-148C6D28CB91}"/>
+              </a:ext>
+            </a:extLst>
+          </p:cNvPr>
+          <p:cNvSpPr>
+            <a:spLocks xmlns:a="http://schemas.openxmlformats.org/drawingml/2006/main" noGrp="1"/>
+          </p:cNvSpPr>
+          <p:nvPr/>
+        </p:nvSpPr>
+        <p:spPr>
+          <a:xfrm xmlns:a="http://schemas.openxmlformats.org/drawingml/2006/main">
+            <a:off x="609600" y="457200"/>
+            <a:ext cx="10972800" cy="857250"/>
+          </a:xfrm>
+          <a:prstGeom xmlns:a="http://schemas.openxmlformats.org/drawingml/2006/main" prst="rect">
+            <a:avLst/>
+          </a:prstGeom>
+          <a:noFill xmlns:a="http://schemas.openxmlformats.org/drawingml/2006/main"/>
+          <a:ln xmlns:a="http://schemas.openxmlformats.org/drawingml/2006/main" w="0">
+            <a:noFill/>
+          </a:ln>
+        </p:spPr>
+        <p:txBody>
+          <a:bodyPr xmlns:a="http://schemas.openxmlformats.org/drawingml/2006/main">
+            <a:noAutofit/>
+          </a:bodyPr>
+          <a:lstStyle xmlns:a="http://schemas.openxmlformats.org/drawingml/2006/main"/>
+          <a:p xmlns:a="http://schemas.openxmlformats.org/drawingml/2006/main">
+            <a:pPr>
+              <a:buNone/>
+              <a:defRPr sz="3300" b="1">
+                <a:solidFill>
+                  <a:srgbClr val="103D36"/>
+                </a:solidFill>
+                <a:latin typeface="Arial"/>
+                <a:ea typeface="Arial"/>
+                <a:cs typeface="Arial"/>
+              </a:defRPr>
+            </a:pPr>
+            <a:r>
+              <a:rPr sz="3300" b="1">
+                <a:solidFill>
+                  <a:srgbClr val="103D36"/>
+                </a:solidFill>
+                <a:latin typeface="Arial"/>
+                <a:ea typeface="Arial"/>
+                <a:cs typeface="Arial"/>
+              </a:rPr>
+              <a:t>Measurements in the PoC</a:t>
+            </a:r>
+          </a:p>
+        </p:txBody>
+      </p:sp>
+      <p:sp>
+        <p:nvSpPr>
+          <p:cNvPr id="2" name="">
+            <a:extLst xmlns:a="http://schemas.openxmlformats.org/drawingml/2006/main">
+              <a:ext uri="{FF2B5EF4-FFF2-40B4-BE49-F238E27FC236}">
+                <a16:creationId xmlns:a16="http://schemas.microsoft.com/office/drawing/2014/main" id="{EF318D67-ED8E-44A6-9102-604B6D382BD6}"/>
+              </a:ext>
+            </a:extLst>
+          </p:cNvPr>
+          <p:cNvSpPr>
+            <a:spLocks xmlns:a="http://schemas.openxmlformats.org/drawingml/2006/main" noGrp="1"/>
+          </p:cNvSpPr>
+          <p:nvPr/>
+        </p:nvSpPr>
+        <p:spPr>
+          <a:xfrm xmlns:a="http://schemas.openxmlformats.org/drawingml/2006/main">
+            <a:off x="609600" y="1362075"/>
+            <a:ext cx="10972800" cy="28575"/>
+          </a:xfrm>
+          <a:prstGeom xmlns:a="http://schemas.openxmlformats.org/drawingml/2006/main" prst="rect">
+            <a:avLst/>
+          </a:prstGeom>
+          <a:solidFill xmlns:a="http://schemas.openxmlformats.org/drawingml/2006/main">
+            <a:srgbClr val="0C554E"/>
+          </a:solidFill>
+          <a:ln xmlns:a="http://schemas.openxmlformats.org/drawingml/2006/main" w="0">
+            <a:noFill/>
+          </a:ln>
+        </p:spPr>
+      </p:sp>
+      <p:sp>
+        <p:nvSpPr>
+          <p:cNvPr id="3" name="">
+            <a:extLst xmlns:a="http://schemas.openxmlformats.org/drawingml/2006/main">
+              <a:ext uri="{FF2B5EF4-FFF2-40B4-BE49-F238E27FC236}">
+                <a16:creationId xmlns:a16="http://schemas.microsoft.com/office/drawing/2014/main" id="{4827FAAD-D397-4910-8134-4279B3931617}"/>
+              </a:ext>
+            </a:extLst>
+          </p:cNvPr>
+          <p:cNvSpPr>
+            <a:spLocks xmlns:a="http://schemas.openxmlformats.org/drawingml/2006/main" noGrp="1"/>
+          </p:cNvSpPr>
+          <p:nvPr/>
+        </p:nvSpPr>
+        <p:spPr>
+          <a:xfrm xmlns:a="http://schemas.openxmlformats.org/drawingml/2006/main">
+            <a:off x="11144250" y="6419850"/>
+            <a:ext cx="476250" cy="228600"/>
+          </a:xfrm>
+          <a:prstGeom xmlns:a="http://schemas.openxmlformats.org/drawingml/2006/main" prst="rect">
+            <a:avLst/>
+          </a:prstGeom>
+          <a:noFill xmlns:a="http://schemas.openxmlformats.org/drawingml/2006/main"/>
+          <a:ln xmlns:a="http://schemas.openxmlformats.org/drawingml/2006/main" w="0">
+            <a:noFill/>
+          </a:ln>
+        </p:spPr>
+        <p:txBody>
+          <a:bodyPr xmlns:a="http://schemas.openxmlformats.org/drawingml/2006/main">
+            <a:noAutofit/>
+          </a:bodyPr>
+          <a:lstStyle xmlns:a="http://schemas.openxmlformats.org/drawingml/2006/main"/>
+          <a:p xmlns:a="http://schemas.openxmlformats.org/drawingml/2006/main">
+            <a:pPr>
+              <a:buNone/>
+              <a:defRPr sz="1200" b="0">
+                <a:solidFill>
+                  <a:srgbClr val="53716A"/>
+                </a:solidFill>
+                <a:latin typeface="Arial"/>
+                <a:ea typeface="Arial"/>
+                <a:cs typeface="Arial"/>
+              </a:defRPr>
+            </a:pPr>
+            <a:r>
+              <a:rPr sz="1200" b="0">
+                <a:solidFill>
+                  <a:srgbClr val="53716A"/>
+                </a:solidFill>
+                <a:latin typeface="Arial"/>
+                <a:ea typeface="Arial"/>
+                <a:cs typeface="Arial"/>
+              </a:rPr>
+              <a:t>04</a:t>
+            </a:r>
+          </a:p>
+        </p:txBody>
+      </p:sp>
       <p:graphicFrame>
         <p:nvGraphicFramePr>
-          <p:cNvPr id="10" name=""/>
+          <p:cNvPr id="12" name=""/>
           <p:cNvGraphicFramePr/>
           <p:nvPr/>
         </p:nvGraphicFramePr>
@@ -4663,6 +6623,7 @@
           <a:lstStyle xmlns:a="http://schemas.openxmlformats.org/drawingml/2006/main"/>
           <a:p xmlns:a="http://schemas.openxmlformats.org/drawingml/2006/main">
             <a:pPr>
+              <a:buNone/>
               <a:defRPr sz="2175" b="1">
                 <a:solidFill>
                   <a:srgbClr val="0C554E"/>
@@ -4720,6 +6681,7 @@
           <a:lstStyle xmlns:a="http://schemas.openxmlformats.org/drawingml/2006/main"/>
           <a:p xmlns:a="http://schemas.openxmlformats.org/drawingml/2006/main">
             <a:pPr>
+              <a:buNone/>
               <a:defRPr sz="1725" b="0">
                 <a:solidFill>
                   <a:srgbClr val="53716A"/>
@@ -4747,1332 +6709,6 @@
     <p:extLst>
       <p:ext uri="{BB962C8B-B14F-4D97-AF65-F5344CB8AC3E}">
         <p14:creationId xmlns:p14="http://schemas.microsoft.com/office/powerpoint/2010/main" val="657620750"/>
-      </p:ext>
-    </p:extLst>
-  </p:cSld>
-</p:sld>
-</file>
-
-<file path=ppt/slides/slide4.xml><?xml version="1.0" encoding="utf-8"?>
-<p:sld xmlns:p="http://schemas.openxmlformats.org/presentationml/2006/main">
-  <p:cSld>
-    <p:bg>
-      <p:bgPr>
-        <a:solidFill xmlns:a="http://schemas.openxmlformats.org/drawingml/2006/main">
-          <a:srgbClr val="F5F6EE"/>
-        </a:solidFill>
-      </p:bgPr>
-    </p:bg>
-    <p:spTree>
-      <p:nvGrpSpPr>
-        <p:cNvPr id="1" name=""/>
-        <p:cNvGrpSpPr/>
-        <p:nvPr/>
-      </p:nvGrpSpPr>
-      <p:grpSpPr>
-        <a:xfrm xmlns:a="http://schemas.openxmlformats.org/drawingml/2006/main"/>
-      </p:grpSpPr>
-      <p:sp>
-        <p:nvSpPr>
-          <p:cNvPr id="21" name="">
-            <a:extLst xmlns:a="http://schemas.openxmlformats.org/drawingml/2006/main">
-              <a:ext uri="{FF2B5EF4-FFF2-40B4-BE49-F238E27FC236}">
-                <a16:creationId xmlns:a16="http://schemas.microsoft.com/office/drawing/2014/main" id="{CE2BD2DB-BFDE-4DEA-8523-717345AFB86E}"/>
-              </a:ext>
-            </a:extLst>
-          </p:cNvPr>
-          <p:cNvSpPr>
-            <a:spLocks xmlns:a="http://schemas.openxmlformats.org/drawingml/2006/main" noGrp="1"/>
-          </p:cNvSpPr>
-          <p:nvPr/>
-        </p:nvSpPr>
-        <p:spPr>
-          <a:xfrm xmlns:a="http://schemas.openxmlformats.org/drawingml/2006/main">
-            <a:off x="609600" y="457200"/>
-            <a:ext cx="10972800" cy="857250"/>
-          </a:xfrm>
-          <a:prstGeom xmlns:a="http://schemas.openxmlformats.org/drawingml/2006/main" prst="rect">
-            <a:avLst/>
-          </a:prstGeom>
-          <a:noFill xmlns:a="http://schemas.openxmlformats.org/drawingml/2006/main"/>
-          <a:ln xmlns:a="http://schemas.openxmlformats.org/drawingml/2006/main" w="0">
-            <a:noFill/>
-          </a:ln>
-        </p:spPr>
-        <p:txBody>
-          <a:bodyPr xmlns:a="http://schemas.openxmlformats.org/drawingml/2006/main">
-            <a:noAutofit/>
-          </a:bodyPr>
-          <a:lstStyle xmlns:a="http://schemas.openxmlformats.org/drawingml/2006/main"/>
-          <a:p xmlns:a="http://schemas.openxmlformats.org/drawingml/2006/main">
-            <a:pPr>
-              <a:defRPr sz="3300" b="1">
-                <a:solidFill>
-                  <a:srgbClr val="103D36"/>
-                </a:solidFill>
-                <a:latin typeface="Arial"/>
-                <a:ea typeface="Arial"/>
-                <a:cs typeface="Arial"/>
-              </a:defRPr>
-            </a:pPr>
-            <a:r>
-              <a:rPr sz="3300" b="1">
-                <a:solidFill>
-                  <a:srgbClr val="103D36"/>
-                </a:solidFill>
-                <a:latin typeface="Arial"/>
-                <a:ea typeface="Arial"/>
-                <a:cs typeface="Arial"/>
-              </a:rPr>
-              <a:t>Satellite evidence workflow</a:t>
-            </a:r>
-          </a:p>
-        </p:txBody>
-      </p:sp>
-      <p:sp>
-        <p:nvSpPr>
-          <p:cNvPr id="2" name="">
-            <a:extLst xmlns:a="http://schemas.openxmlformats.org/drawingml/2006/main">
-              <a:ext uri="{FF2B5EF4-FFF2-40B4-BE49-F238E27FC236}">
-                <a16:creationId xmlns:a16="http://schemas.microsoft.com/office/drawing/2014/main" id="{AC1B9797-A29B-4B5B-9116-B8F992BDB43D}"/>
-              </a:ext>
-            </a:extLst>
-          </p:cNvPr>
-          <p:cNvSpPr>
-            <a:spLocks xmlns:a="http://schemas.openxmlformats.org/drawingml/2006/main" noGrp="1"/>
-          </p:cNvSpPr>
-          <p:nvPr/>
-        </p:nvSpPr>
-        <p:spPr>
-          <a:xfrm xmlns:a="http://schemas.openxmlformats.org/drawingml/2006/main">
-            <a:off x="609600" y="1362075"/>
-            <a:ext cx="10972800" cy="28575"/>
-          </a:xfrm>
-          <a:prstGeom xmlns:a="http://schemas.openxmlformats.org/drawingml/2006/main" prst="rect">
-            <a:avLst/>
-          </a:prstGeom>
-          <a:solidFill xmlns:a="http://schemas.openxmlformats.org/drawingml/2006/main">
-            <a:srgbClr val="0C554E"/>
-          </a:solidFill>
-          <a:ln xmlns:a="http://schemas.openxmlformats.org/drawingml/2006/main" w="0">
-            <a:noFill/>
-          </a:ln>
-        </p:spPr>
-      </p:sp>
-      <p:sp>
-        <p:nvSpPr>
-          <p:cNvPr id="3" name="">
-            <a:extLst xmlns:a="http://schemas.openxmlformats.org/drawingml/2006/main">
-              <a:ext uri="{FF2B5EF4-FFF2-40B4-BE49-F238E27FC236}">
-                <a16:creationId xmlns:a16="http://schemas.microsoft.com/office/drawing/2014/main" id="{C4AA342C-6DD8-4163-8471-1A0793ED25DF}"/>
-              </a:ext>
-            </a:extLst>
-          </p:cNvPr>
-          <p:cNvSpPr>
-            <a:spLocks xmlns:a="http://schemas.openxmlformats.org/drawingml/2006/main" noGrp="1"/>
-          </p:cNvSpPr>
-          <p:nvPr/>
-        </p:nvSpPr>
-        <p:spPr>
-          <a:xfrm xmlns:a="http://schemas.openxmlformats.org/drawingml/2006/main">
-            <a:off x="11144250" y="6419850"/>
-            <a:ext cx="476250" cy="228600"/>
-          </a:xfrm>
-          <a:prstGeom xmlns:a="http://schemas.openxmlformats.org/drawingml/2006/main" prst="rect">
-            <a:avLst/>
-          </a:prstGeom>
-          <a:noFill xmlns:a="http://schemas.openxmlformats.org/drawingml/2006/main"/>
-          <a:ln xmlns:a="http://schemas.openxmlformats.org/drawingml/2006/main" w="0">
-            <a:noFill/>
-          </a:ln>
-        </p:spPr>
-        <p:txBody>
-          <a:bodyPr xmlns:a="http://schemas.openxmlformats.org/drawingml/2006/main">
-            <a:noAutofit/>
-          </a:bodyPr>
-          <a:lstStyle xmlns:a="http://schemas.openxmlformats.org/drawingml/2006/main"/>
-          <a:p xmlns:a="http://schemas.openxmlformats.org/drawingml/2006/main">
-            <a:pPr>
-              <a:defRPr sz="1200" b="0">
-                <a:solidFill>
-                  <a:srgbClr val="53716A"/>
-                </a:solidFill>
-                <a:latin typeface="Arial"/>
-                <a:ea typeface="Arial"/>
-                <a:cs typeface="Arial"/>
-              </a:defRPr>
-            </a:pPr>
-            <a:r>
-              <a:rPr sz="1200" b="0">
-                <a:solidFill>
-                  <a:srgbClr val="53716A"/>
-                </a:solidFill>
-                <a:latin typeface="Arial"/>
-                <a:ea typeface="Arial"/>
-                <a:cs typeface="Arial"/>
-              </a:rPr>
-              <a:t>04</a:t>
-            </a:r>
-          </a:p>
-        </p:txBody>
-      </p:sp>
-      <p:sp>
-        <p:nvSpPr>
-          <p:cNvPr id="4" name="">
-            <a:extLst xmlns:a="http://schemas.openxmlformats.org/drawingml/2006/main">
-              <a:ext uri="{FF2B5EF4-FFF2-40B4-BE49-F238E27FC236}">
-                <a16:creationId xmlns:a16="http://schemas.microsoft.com/office/drawing/2014/main" id="{15BBEBC4-DC81-4174-A6DB-78FC8BB3CFD8}"/>
-              </a:ext>
-            </a:extLst>
-          </p:cNvPr>
-          <p:cNvSpPr>
-            <a:spLocks xmlns:a="http://schemas.openxmlformats.org/drawingml/2006/main" noGrp="1"/>
-          </p:cNvSpPr>
-          <p:nvPr/>
-        </p:nvSpPr>
-        <p:spPr>
-          <a:xfrm xmlns:a="http://schemas.openxmlformats.org/drawingml/2006/main">
-            <a:off x="609600" y="1743075"/>
-            <a:ext cx="10477500" cy="476250"/>
-          </a:xfrm>
-          <a:prstGeom xmlns:a="http://schemas.openxmlformats.org/drawingml/2006/main" prst="rect">
-            <a:avLst/>
-          </a:prstGeom>
-          <a:noFill xmlns:a="http://schemas.openxmlformats.org/drawingml/2006/main"/>
-          <a:ln xmlns:a="http://schemas.openxmlformats.org/drawingml/2006/main" w="0">
-            <a:noFill/>
-          </a:ln>
-        </p:spPr>
-        <p:txBody>
-          <a:bodyPr xmlns:a="http://schemas.openxmlformats.org/drawingml/2006/main">
-            <a:noAutofit/>
-          </a:bodyPr>
-          <a:lstStyle xmlns:a="http://schemas.openxmlformats.org/drawingml/2006/main"/>
-          <a:p xmlns:a="http://schemas.openxmlformats.org/drawingml/2006/main">
-            <a:pPr>
-              <a:defRPr sz="2400" b="1">
-                <a:solidFill>
-                  <a:srgbClr val="0C554E"/>
-                </a:solidFill>
-                <a:latin typeface="Arial"/>
-                <a:ea typeface="Arial"/>
-                <a:cs typeface="Arial"/>
-              </a:defRPr>
-            </a:pPr>
-            <a:r>
-              <a:rPr sz="2400" b="1">
-                <a:solidFill>
-                  <a:srgbClr val="0C554E"/>
-                </a:solidFill>
-                <a:latin typeface="Arial"/>
-                <a:ea typeface="Arial"/>
-                <a:cs typeface="Arial"/>
-              </a:rPr>
-              <a:t>Atmospheric measurements</a:t>
-            </a:r>
-          </a:p>
-        </p:txBody>
-      </p:sp>
-      <p:sp>
-        <p:nvSpPr>
-          <p:cNvPr id="5" name="">
-            <a:extLst xmlns:a="http://schemas.openxmlformats.org/drawingml/2006/main">
-              <a:ext uri="{FF2B5EF4-FFF2-40B4-BE49-F238E27FC236}">
-                <a16:creationId xmlns:a16="http://schemas.microsoft.com/office/drawing/2014/main" id="{9F8D6CF7-45CB-4BF9-B5DF-C400540364A0}"/>
-              </a:ext>
-            </a:extLst>
-          </p:cNvPr>
-          <p:cNvSpPr>
-            <a:spLocks xmlns:a="http://schemas.openxmlformats.org/drawingml/2006/main" noGrp="1"/>
-          </p:cNvSpPr>
-          <p:nvPr/>
-        </p:nvSpPr>
-        <p:spPr>
-          <a:xfrm xmlns:a="http://schemas.openxmlformats.org/drawingml/2006/main">
-            <a:off x="609600" y="2524125"/>
-            <a:ext cx="2524125" cy="952500"/>
-          </a:xfrm>
-          <a:prstGeom xmlns:a="http://schemas.openxmlformats.org/drawingml/2006/main" prst="rect">
-            <a:avLst/>
-          </a:prstGeom>
-          <a:noFill xmlns:a="http://schemas.openxmlformats.org/drawingml/2006/main"/>
-          <a:ln xmlns:a="http://schemas.openxmlformats.org/drawingml/2006/main" w="0">
-            <a:noFill/>
-          </a:ln>
-        </p:spPr>
-        <p:txBody>
-          <a:bodyPr xmlns:a="http://schemas.openxmlformats.org/drawingml/2006/main">
-            <a:noAutofit/>
-          </a:bodyPr>
-          <a:lstStyle xmlns:a="http://schemas.openxmlformats.org/drawingml/2006/main"/>
-          <a:p xmlns:a="http://schemas.openxmlformats.org/drawingml/2006/main">
-            <a:pPr>
-              <a:defRPr sz="2025" b="0">
-                <a:solidFill>
-                  <a:srgbClr val="103D36"/>
-                </a:solidFill>
-                <a:latin typeface="Arial"/>
-                <a:ea typeface="Arial"/>
-                <a:cs typeface="Arial"/>
-              </a:defRPr>
-            </a:pPr>
-            <a:r>
-              <a:rPr sz="2025" b="0">
-                <a:solidFill>
-                  <a:srgbClr val="103D36"/>
-                </a:solidFill>
-                <a:latin typeface="Arial"/>
-                <a:ea typeface="Arial"/>
-                <a:cs typeface="Arial"/>
-              </a:rPr>
-              <a:t>Sentinel-5P</a:t>
-            </a:r>
-          </a:p>
-          <a:p xmlns:a="http://schemas.openxmlformats.org/drawingml/2006/main">
-            <a:pPr>
-              <a:defRPr sz="2025" b="0">
-                <a:solidFill>
-                  <a:srgbClr val="103D36"/>
-                </a:solidFill>
-                <a:latin typeface="Arial"/>
-                <a:ea typeface="Arial"/>
-                <a:cs typeface="Arial"/>
-              </a:defRPr>
-            </a:pPr>
-            <a:r>
-              <a:rPr sz="2025" b="0">
-                <a:solidFill>
-                  <a:srgbClr val="103D36"/>
-                </a:solidFill>
-                <a:latin typeface="Arial"/>
-                <a:ea typeface="Arial"/>
-                <a:cs typeface="Arial"/>
-              </a:rPr>
-              <a:t>quality masks</a:t>
-            </a:r>
-          </a:p>
-        </p:txBody>
-      </p:sp>
-      <p:sp>
-        <p:nvSpPr>
-          <p:cNvPr id="6" name="">
-            <a:extLst xmlns:a="http://schemas.openxmlformats.org/drawingml/2006/main">
-              <a:ext uri="{FF2B5EF4-FFF2-40B4-BE49-F238E27FC236}">
-                <a16:creationId xmlns:a16="http://schemas.microsoft.com/office/drawing/2014/main" id="{4568967A-E596-49CF-A18F-706FEDB85D39}"/>
-              </a:ext>
-            </a:extLst>
-          </p:cNvPr>
-          <p:cNvSpPr>
-            <a:spLocks xmlns:a="http://schemas.openxmlformats.org/drawingml/2006/main" noGrp="1"/>
-          </p:cNvSpPr>
-          <p:nvPr/>
-        </p:nvSpPr>
-        <p:spPr>
-          <a:xfrm xmlns:a="http://schemas.openxmlformats.org/drawingml/2006/main">
-            <a:off x="3076575" y="2667000"/>
-            <a:ext cx="333375" cy="428625"/>
-          </a:xfrm>
-          <a:prstGeom xmlns:a="http://schemas.openxmlformats.org/drawingml/2006/main" prst="rect">
-            <a:avLst/>
-          </a:prstGeom>
-          <a:noFill xmlns:a="http://schemas.openxmlformats.org/drawingml/2006/main"/>
-          <a:ln xmlns:a="http://schemas.openxmlformats.org/drawingml/2006/main" w="0">
-            <a:noFill/>
-          </a:ln>
-        </p:spPr>
-        <p:txBody>
-          <a:bodyPr xmlns:a="http://schemas.openxmlformats.org/drawingml/2006/main">
-            <a:noAutofit/>
-          </a:bodyPr>
-          <a:lstStyle xmlns:a="http://schemas.openxmlformats.org/drawingml/2006/main"/>
-          <a:p xmlns:a="http://schemas.openxmlformats.org/drawingml/2006/main">
-            <a:pPr>
-              <a:defRPr sz="2100" b="0">
-                <a:solidFill>
-                  <a:srgbClr val="0C554E"/>
-                </a:solidFill>
-                <a:latin typeface="Arial"/>
-                <a:ea typeface="Arial"/>
-                <a:cs typeface="Arial"/>
-              </a:defRPr>
-            </a:pPr>
-            <a:r>
-              <a:rPr sz="2100" b="0">
-                <a:solidFill>
-                  <a:srgbClr val="0C554E"/>
-                </a:solidFill>
-                <a:latin typeface="Arial"/>
-                <a:ea typeface="Arial"/>
-                <a:cs typeface="Arial"/>
-              </a:rPr>
-              <a:t>→</a:t>
-            </a:r>
-          </a:p>
-        </p:txBody>
-      </p:sp>
-      <p:sp>
-        <p:nvSpPr>
-          <p:cNvPr id="7" name="">
-            <a:extLst xmlns:a="http://schemas.openxmlformats.org/drawingml/2006/main">
-              <a:ext uri="{FF2B5EF4-FFF2-40B4-BE49-F238E27FC236}">
-                <a16:creationId xmlns:a16="http://schemas.microsoft.com/office/drawing/2014/main" id="{2FFFC474-1C38-4350-B556-F800EA8CD3CF}"/>
-              </a:ext>
-            </a:extLst>
-          </p:cNvPr>
-          <p:cNvSpPr>
-            <a:spLocks xmlns:a="http://schemas.openxmlformats.org/drawingml/2006/main" noGrp="1"/>
-          </p:cNvSpPr>
-          <p:nvPr/>
-        </p:nvSpPr>
-        <p:spPr>
-          <a:xfrm xmlns:a="http://schemas.openxmlformats.org/drawingml/2006/main">
-            <a:off x="3390900" y="2524125"/>
-            <a:ext cx="2524125" cy="952500"/>
-          </a:xfrm>
-          <a:prstGeom xmlns:a="http://schemas.openxmlformats.org/drawingml/2006/main" prst="rect">
-            <a:avLst/>
-          </a:prstGeom>
-          <a:noFill xmlns:a="http://schemas.openxmlformats.org/drawingml/2006/main"/>
-          <a:ln xmlns:a="http://schemas.openxmlformats.org/drawingml/2006/main" w="0">
-            <a:noFill/>
-          </a:ln>
-        </p:spPr>
-        <p:txBody>
-          <a:bodyPr xmlns:a="http://schemas.openxmlformats.org/drawingml/2006/main">
-            <a:noAutofit/>
-          </a:bodyPr>
-          <a:lstStyle xmlns:a="http://schemas.openxmlformats.org/drawingml/2006/main"/>
-          <a:p xmlns:a="http://schemas.openxmlformats.org/drawingml/2006/main">
-            <a:pPr>
-              <a:defRPr sz="2025" b="0">
-                <a:solidFill>
-                  <a:srgbClr val="103D36"/>
-                </a:solidFill>
-                <a:latin typeface="Arial"/>
-                <a:ea typeface="Arial"/>
-                <a:cs typeface="Arial"/>
-              </a:defRPr>
-            </a:pPr>
-            <a:r>
-              <a:rPr sz="2025" b="0">
-                <a:solidFill>
-                  <a:srgbClr val="103D36"/>
-                </a:solidFill>
-                <a:latin typeface="Arial"/>
-                <a:ea typeface="Arial"/>
-                <a:cs typeface="Arial"/>
-              </a:rPr>
-              <a:t>Daily area</a:t>
-            </a:r>
-          </a:p>
-          <a:p xmlns:a="http://schemas.openxmlformats.org/drawingml/2006/main">
-            <a:pPr>
-              <a:defRPr sz="2025" b="0">
-                <a:solidFill>
-                  <a:srgbClr val="103D36"/>
-                </a:solidFill>
-                <a:latin typeface="Arial"/>
-                <a:ea typeface="Arial"/>
-                <a:cs typeface="Arial"/>
-              </a:defRPr>
-            </a:pPr>
-            <a:r>
-              <a:rPr sz="2025" b="0">
-                <a:solidFill>
-                  <a:srgbClr val="103D36"/>
-                </a:solidFill>
-                <a:latin typeface="Arial"/>
-                <a:ea typeface="Arial"/>
-                <a:cs typeface="Arial"/>
-              </a:rPr>
-              <a:t>values</a:t>
-            </a:r>
-          </a:p>
-        </p:txBody>
-      </p:sp>
-      <p:sp>
-        <p:nvSpPr>
-          <p:cNvPr id="8" name="">
-            <a:extLst xmlns:a="http://schemas.openxmlformats.org/drawingml/2006/main">
-              <a:ext uri="{FF2B5EF4-FFF2-40B4-BE49-F238E27FC236}">
-                <a16:creationId xmlns:a16="http://schemas.microsoft.com/office/drawing/2014/main" id="{BF933C62-165F-47F1-AE1D-62EA0B051827}"/>
-              </a:ext>
-            </a:extLst>
-          </p:cNvPr>
-          <p:cNvSpPr>
-            <a:spLocks xmlns:a="http://schemas.openxmlformats.org/drawingml/2006/main" noGrp="1"/>
-          </p:cNvSpPr>
-          <p:nvPr/>
-        </p:nvSpPr>
-        <p:spPr>
-          <a:xfrm xmlns:a="http://schemas.openxmlformats.org/drawingml/2006/main">
-            <a:off x="5857875" y="2667000"/>
-            <a:ext cx="333375" cy="428625"/>
-          </a:xfrm>
-          <a:prstGeom xmlns:a="http://schemas.openxmlformats.org/drawingml/2006/main" prst="rect">
-            <a:avLst/>
-          </a:prstGeom>
-          <a:noFill xmlns:a="http://schemas.openxmlformats.org/drawingml/2006/main"/>
-          <a:ln xmlns:a="http://schemas.openxmlformats.org/drawingml/2006/main" w="0">
-            <a:noFill/>
-          </a:ln>
-        </p:spPr>
-        <p:txBody>
-          <a:bodyPr xmlns:a="http://schemas.openxmlformats.org/drawingml/2006/main">
-            <a:noAutofit/>
-          </a:bodyPr>
-          <a:lstStyle xmlns:a="http://schemas.openxmlformats.org/drawingml/2006/main"/>
-          <a:p xmlns:a="http://schemas.openxmlformats.org/drawingml/2006/main">
-            <a:pPr>
-              <a:defRPr sz="2100" b="0">
-                <a:solidFill>
-                  <a:srgbClr val="0C554E"/>
-                </a:solidFill>
-                <a:latin typeface="Arial"/>
-                <a:ea typeface="Arial"/>
-                <a:cs typeface="Arial"/>
-              </a:defRPr>
-            </a:pPr>
-            <a:r>
-              <a:rPr sz="2100" b="0">
-                <a:solidFill>
-                  <a:srgbClr val="0C554E"/>
-                </a:solidFill>
-                <a:latin typeface="Arial"/>
-                <a:ea typeface="Arial"/>
-                <a:cs typeface="Arial"/>
-              </a:rPr>
-              <a:t>→</a:t>
-            </a:r>
-          </a:p>
-        </p:txBody>
-      </p:sp>
-      <p:sp>
-        <p:nvSpPr>
-          <p:cNvPr id="9" name="">
-            <a:extLst xmlns:a="http://schemas.openxmlformats.org/drawingml/2006/main">
-              <a:ext uri="{FF2B5EF4-FFF2-40B4-BE49-F238E27FC236}">
-                <a16:creationId xmlns:a16="http://schemas.microsoft.com/office/drawing/2014/main" id="{8C787306-18B5-4013-B78C-BFD0EEC84A6C}"/>
-              </a:ext>
-            </a:extLst>
-          </p:cNvPr>
-          <p:cNvSpPr>
-            <a:spLocks xmlns:a="http://schemas.openxmlformats.org/drawingml/2006/main" noGrp="1"/>
-          </p:cNvSpPr>
-          <p:nvPr/>
-        </p:nvSpPr>
-        <p:spPr>
-          <a:xfrm xmlns:a="http://schemas.openxmlformats.org/drawingml/2006/main">
-            <a:off x="6172200" y="2524125"/>
-            <a:ext cx="2524125" cy="952500"/>
-          </a:xfrm>
-          <a:prstGeom xmlns:a="http://schemas.openxmlformats.org/drawingml/2006/main" prst="rect">
-            <a:avLst/>
-          </a:prstGeom>
-          <a:noFill xmlns:a="http://schemas.openxmlformats.org/drawingml/2006/main"/>
-          <a:ln xmlns:a="http://schemas.openxmlformats.org/drawingml/2006/main" w="0">
-            <a:noFill/>
-          </a:ln>
-        </p:spPr>
-        <p:txBody>
-          <a:bodyPr xmlns:a="http://schemas.openxmlformats.org/drawingml/2006/main">
-            <a:noAutofit/>
-          </a:bodyPr>
-          <a:lstStyle xmlns:a="http://schemas.openxmlformats.org/drawingml/2006/main"/>
-          <a:p xmlns:a="http://schemas.openxmlformats.org/drawingml/2006/main">
-            <a:pPr>
-              <a:defRPr sz="2025" b="0">
-                <a:solidFill>
-                  <a:srgbClr val="103D36"/>
-                </a:solidFill>
-                <a:latin typeface="Arial"/>
-                <a:ea typeface="Arial"/>
-                <a:cs typeface="Arial"/>
-              </a:defRPr>
-            </a:pPr>
-            <a:r>
-              <a:rPr sz="2025" b="0">
-                <a:solidFill>
-                  <a:srgbClr val="103D36"/>
-                </a:solidFill>
-                <a:latin typeface="Arial"/>
-                <a:ea typeface="Arial"/>
-                <a:cs typeface="Arial"/>
-              </a:rPr>
-              <a:t>Monthly / period</a:t>
-            </a:r>
-          </a:p>
-          <a:p xmlns:a="http://schemas.openxmlformats.org/drawingml/2006/main">
-            <a:pPr>
-              <a:defRPr sz="2025" b="0">
-                <a:solidFill>
-                  <a:srgbClr val="103D36"/>
-                </a:solidFill>
-                <a:latin typeface="Arial"/>
-                <a:ea typeface="Arial"/>
-                <a:cs typeface="Arial"/>
-              </a:defRPr>
-            </a:pPr>
-            <a:r>
-              <a:rPr sz="2025" b="0">
-                <a:solidFill>
-                  <a:srgbClr val="103D36"/>
-                </a:solidFill>
-                <a:latin typeface="Arial"/>
-                <a:ea typeface="Arial"/>
-                <a:cs typeface="Arial"/>
-              </a:rPr>
-              <a:t>summaries</a:t>
-            </a:r>
-          </a:p>
-        </p:txBody>
-      </p:sp>
-      <p:sp>
-        <p:nvSpPr>
-          <p:cNvPr id="10" name="">
-            <a:extLst xmlns:a="http://schemas.openxmlformats.org/drawingml/2006/main">
-              <a:ext uri="{FF2B5EF4-FFF2-40B4-BE49-F238E27FC236}">
-                <a16:creationId xmlns:a16="http://schemas.microsoft.com/office/drawing/2014/main" id="{C4B159BC-2C98-4A4B-AC9F-D9D67314762C}"/>
-              </a:ext>
-            </a:extLst>
-          </p:cNvPr>
-          <p:cNvSpPr>
-            <a:spLocks xmlns:a="http://schemas.openxmlformats.org/drawingml/2006/main" noGrp="1"/>
-          </p:cNvSpPr>
-          <p:nvPr/>
-        </p:nvSpPr>
-        <p:spPr>
-          <a:xfrm xmlns:a="http://schemas.openxmlformats.org/drawingml/2006/main">
-            <a:off x="8639175" y="2667000"/>
-            <a:ext cx="333375" cy="428625"/>
-          </a:xfrm>
-          <a:prstGeom xmlns:a="http://schemas.openxmlformats.org/drawingml/2006/main" prst="rect">
-            <a:avLst/>
-          </a:prstGeom>
-          <a:noFill xmlns:a="http://schemas.openxmlformats.org/drawingml/2006/main"/>
-          <a:ln xmlns:a="http://schemas.openxmlformats.org/drawingml/2006/main" w="0">
-            <a:noFill/>
-          </a:ln>
-        </p:spPr>
-        <p:txBody>
-          <a:bodyPr xmlns:a="http://schemas.openxmlformats.org/drawingml/2006/main">
-            <a:noAutofit/>
-          </a:bodyPr>
-          <a:lstStyle xmlns:a="http://schemas.openxmlformats.org/drawingml/2006/main"/>
-          <a:p xmlns:a="http://schemas.openxmlformats.org/drawingml/2006/main">
-            <a:pPr>
-              <a:defRPr sz="2100" b="0">
-                <a:solidFill>
-                  <a:srgbClr val="0C554E"/>
-                </a:solidFill>
-                <a:latin typeface="Arial"/>
-                <a:ea typeface="Arial"/>
-                <a:cs typeface="Arial"/>
-              </a:defRPr>
-            </a:pPr>
-            <a:r>
-              <a:rPr sz="2100" b="0">
-                <a:solidFill>
-                  <a:srgbClr val="0C554E"/>
-                </a:solidFill>
-                <a:latin typeface="Arial"/>
-                <a:ea typeface="Arial"/>
-                <a:cs typeface="Arial"/>
-              </a:rPr>
-              <a:t>→</a:t>
-            </a:r>
-          </a:p>
-        </p:txBody>
-      </p:sp>
-      <p:sp>
-        <p:nvSpPr>
-          <p:cNvPr id="11" name="">
-            <a:extLst xmlns:a="http://schemas.openxmlformats.org/drawingml/2006/main">
-              <a:ext uri="{FF2B5EF4-FFF2-40B4-BE49-F238E27FC236}">
-                <a16:creationId xmlns:a16="http://schemas.microsoft.com/office/drawing/2014/main" id="{076D891A-D02D-4D5E-8E76-2B980EA244BB}"/>
-              </a:ext>
-            </a:extLst>
-          </p:cNvPr>
-          <p:cNvSpPr>
-            <a:spLocks xmlns:a="http://schemas.openxmlformats.org/drawingml/2006/main" noGrp="1"/>
-          </p:cNvSpPr>
-          <p:nvPr/>
-        </p:nvSpPr>
-        <p:spPr>
-          <a:xfrm xmlns:a="http://schemas.openxmlformats.org/drawingml/2006/main">
-            <a:off x="8953500" y="2524125"/>
-            <a:ext cx="2524125" cy="952500"/>
-          </a:xfrm>
-          <a:prstGeom xmlns:a="http://schemas.openxmlformats.org/drawingml/2006/main" prst="rect">
-            <a:avLst/>
-          </a:prstGeom>
-          <a:noFill xmlns:a="http://schemas.openxmlformats.org/drawingml/2006/main"/>
-          <a:ln xmlns:a="http://schemas.openxmlformats.org/drawingml/2006/main" w="0">
-            <a:noFill/>
-          </a:ln>
-        </p:spPr>
-        <p:txBody>
-          <a:bodyPr xmlns:a="http://schemas.openxmlformats.org/drawingml/2006/main">
-            <a:noAutofit/>
-          </a:bodyPr>
-          <a:lstStyle xmlns:a="http://schemas.openxmlformats.org/drawingml/2006/main"/>
-          <a:p xmlns:a="http://schemas.openxmlformats.org/drawingml/2006/main">
-            <a:pPr>
-              <a:defRPr sz="2025" b="0">
-                <a:solidFill>
-                  <a:srgbClr val="103D36"/>
-                </a:solidFill>
-                <a:latin typeface="Arial"/>
-                <a:ea typeface="Arial"/>
-                <a:cs typeface="Arial"/>
-              </a:defRPr>
-            </a:pPr>
-            <a:r>
-              <a:rPr sz="2025" b="0">
-                <a:solidFill>
-                  <a:srgbClr val="103D36"/>
-                </a:solidFill>
-                <a:latin typeface="Arial"/>
-                <a:ea typeface="Arial"/>
-                <a:cs typeface="Arial"/>
-              </a:rPr>
-              <a:t>Dated JSON / CSV</a:t>
-            </a:r>
-          </a:p>
-          <a:p xmlns:a="http://schemas.openxmlformats.org/drawingml/2006/main">
-            <a:pPr>
-              <a:defRPr sz="2025" b="0">
-                <a:solidFill>
-                  <a:srgbClr val="103D36"/>
-                </a:solidFill>
-                <a:latin typeface="Arial"/>
-                <a:ea typeface="Arial"/>
-                <a:cs typeface="Arial"/>
-              </a:defRPr>
-            </a:pPr>
-            <a:r>
-              <a:rPr sz="2025" b="0">
-                <a:solidFill>
-                  <a:srgbClr val="103D36"/>
-                </a:solidFill>
-                <a:latin typeface="Arial"/>
-                <a:ea typeface="Arial"/>
-                <a:cs typeface="Arial"/>
-              </a:rPr>
-              <a:t>and display</a:t>
-            </a:r>
-          </a:p>
-        </p:txBody>
-      </p:sp>
-      <p:sp>
-        <p:nvSpPr>
-          <p:cNvPr id="12" name="">
-            <a:extLst xmlns:a="http://schemas.openxmlformats.org/drawingml/2006/main">
-              <a:ext uri="{FF2B5EF4-FFF2-40B4-BE49-F238E27FC236}">
-                <a16:creationId xmlns:a16="http://schemas.microsoft.com/office/drawing/2014/main" id="{E8605C33-739C-44BA-8A87-8E681354A536}"/>
-              </a:ext>
-            </a:extLst>
-          </p:cNvPr>
-          <p:cNvSpPr>
-            <a:spLocks xmlns:a="http://schemas.openxmlformats.org/drawingml/2006/main" noGrp="1"/>
-          </p:cNvSpPr>
-          <p:nvPr/>
-        </p:nvSpPr>
-        <p:spPr>
-          <a:xfrm xmlns:a="http://schemas.openxmlformats.org/drawingml/2006/main">
-            <a:off x="609600" y="3848100"/>
-            <a:ext cx="10477500" cy="476250"/>
-          </a:xfrm>
-          <a:prstGeom xmlns:a="http://schemas.openxmlformats.org/drawingml/2006/main" prst="rect">
-            <a:avLst/>
-          </a:prstGeom>
-          <a:noFill xmlns:a="http://schemas.openxmlformats.org/drawingml/2006/main"/>
-          <a:ln xmlns:a="http://schemas.openxmlformats.org/drawingml/2006/main" w="0">
-            <a:noFill/>
-          </a:ln>
-        </p:spPr>
-        <p:txBody>
-          <a:bodyPr xmlns:a="http://schemas.openxmlformats.org/drawingml/2006/main">
-            <a:noAutofit/>
-          </a:bodyPr>
-          <a:lstStyle xmlns:a="http://schemas.openxmlformats.org/drawingml/2006/main"/>
-          <a:p xmlns:a="http://schemas.openxmlformats.org/drawingml/2006/main">
-            <a:pPr>
-              <a:defRPr sz="2400" b="1">
-                <a:solidFill>
-                  <a:srgbClr val="0C554E"/>
-                </a:solidFill>
-                <a:latin typeface="Arial"/>
-                <a:ea typeface="Arial"/>
-                <a:cs typeface="Arial"/>
-              </a:defRPr>
-            </a:pPr>
-            <a:r>
-              <a:rPr sz="2400" b="1">
-                <a:solidFill>
-                  <a:srgbClr val="0C554E"/>
-                </a:solidFill>
-                <a:latin typeface="Arial"/>
-                <a:ea typeface="Arial"/>
-                <a:cs typeface="Arial"/>
-              </a:rPr>
-              <a:t>Methane screening</a:t>
-            </a:r>
-          </a:p>
-        </p:txBody>
-      </p:sp>
-      <p:sp>
-        <p:nvSpPr>
-          <p:cNvPr id="13" name="">
-            <a:extLst xmlns:a="http://schemas.openxmlformats.org/drawingml/2006/main">
-              <a:ext uri="{FF2B5EF4-FFF2-40B4-BE49-F238E27FC236}">
-                <a16:creationId xmlns:a16="http://schemas.microsoft.com/office/drawing/2014/main" id="{97E2AFDB-BA43-4371-98DA-EF5EBEF548A5}"/>
-              </a:ext>
-            </a:extLst>
-          </p:cNvPr>
-          <p:cNvSpPr>
-            <a:spLocks xmlns:a="http://schemas.openxmlformats.org/drawingml/2006/main" noGrp="1"/>
-          </p:cNvSpPr>
-          <p:nvPr/>
-        </p:nvSpPr>
-        <p:spPr>
-          <a:xfrm xmlns:a="http://schemas.openxmlformats.org/drawingml/2006/main">
-            <a:off x="609600" y="4629150"/>
-            <a:ext cx="2524125" cy="952500"/>
-          </a:xfrm>
-          <a:prstGeom xmlns:a="http://schemas.openxmlformats.org/drawingml/2006/main" prst="rect">
-            <a:avLst/>
-          </a:prstGeom>
-          <a:noFill xmlns:a="http://schemas.openxmlformats.org/drawingml/2006/main"/>
-          <a:ln xmlns:a="http://schemas.openxmlformats.org/drawingml/2006/main" w="0">
-            <a:noFill/>
-          </a:ln>
-        </p:spPr>
-        <p:txBody>
-          <a:bodyPr xmlns:a="http://schemas.openxmlformats.org/drawingml/2006/main">
-            <a:noAutofit/>
-          </a:bodyPr>
-          <a:lstStyle xmlns:a="http://schemas.openxmlformats.org/drawingml/2006/main"/>
-          <a:p xmlns:a="http://schemas.openxmlformats.org/drawingml/2006/main">
-            <a:pPr>
-              <a:defRPr sz="2025" b="0">
-                <a:solidFill>
-                  <a:srgbClr val="103D36"/>
-                </a:solidFill>
-                <a:latin typeface="Arial"/>
-                <a:ea typeface="Arial"/>
-                <a:cs typeface="Arial"/>
-              </a:defRPr>
-            </a:pPr>
-            <a:r>
-              <a:rPr sz="2025" b="0">
-                <a:solidFill>
-                  <a:srgbClr val="103D36"/>
-                </a:solidFill>
-                <a:latin typeface="Arial"/>
-                <a:ea typeface="Arial"/>
-                <a:cs typeface="Arial"/>
-              </a:rPr>
-              <a:t>Observation +</a:t>
-            </a:r>
-          </a:p>
-          <a:p xmlns:a="http://schemas.openxmlformats.org/drawingml/2006/main">
-            <a:pPr>
-              <a:defRPr sz="2025" b="0">
-                <a:solidFill>
-                  <a:srgbClr val="103D36"/>
-                </a:solidFill>
-                <a:latin typeface="Arial"/>
-                <a:ea typeface="Arial"/>
-                <a:cs typeface="Arial"/>
-              </a:defRPr>
-            </a:pPr>
-            <a:r>
-              <a:rPr sz="2025" b="0">
-                <a:solidFill>
-                  <a:srgbClr val="103D36"/>
-                </a:solidFill>
-                <a:latin typeface="Arial"/>
-                <a:ea typeface="Arial"/>
-                <a:cs typeface="Arial"/>
-              </a:rPr>
-              <a:t>reference imagery</a:t>
-            </a:r>
-          </a:p>
-        </p:txBody>
-      </p:sp>
-      <p:sp>
-        <p:nvSpPr>
-          <p:cNvPr id="14" name="">
-            <a:extLst xmlns:a="http://schemas.openxmlformats.org/drawingml/2006/main">
-              <a:ext uri="{FF2B5EF4-FFF2-40B4-BE49-F238E27FC236}">
-                <a16:creationId xmlns:a16="http://schemas.microsoft.com/office/drawing/2014/main" id="{9FC43A45-9B29-439D-AF9F-CE9C6E6412CF}"/>
-              </a:ext>
-            </a:extLst>
-          </p:cNvPr>
-          <p:cNvSpPr>
-            <a:spLocks xmlns:a="http://schemas.openxmlformats.org/drawingml/2006/main" noGrp="1"/>
-          </p:cNvSpPr>
-          <p:nvPr/>
-        </p:nvSpPr>
-        <p:spPr>
-          <a:xfrm xmlns:a="http://schemas.openxmlformats.org/drawingml/2006/main">
-            <a:off x="3076575" y="4772025"/>
-            <a:ext cx="333375" cy="428625"/>
-          </a:xfrm>
-          <a:prstGeom xmlns:a="http://schemas.openxmlformats.org/drawingml/2006/main" prst="rect">
-            <a:avLst/>
-          </a:prstGeom>
-          <a:noFill xmlns:a="http://schemas.openxmlformats.org/drawingml/2006/main"/>
-          <a:ln xmlns:a="http://schemas.openxmlformats.org/drawingml/2006/main" w="0">
-            <a:noFill/>
-          </a:ln>
-        </p:spPr>
-        <p:txBody>
-          <a:bodyPr xmlns:a="http://schemas.openxmlformats.org/drawingml/2006/main">
-            <a:noAutofit/>
-          </a:bodyPr>
-          <a:lstStyle xmlns:a="http://schemas.openxmlformats.org/drawingml/2006/main"/>
-          <a:p xmlns:a="http://schemas.openxmlformats.org/drawingml/2006/main">
-            <a:pPr>
-              <a:defRPr sz="2100" b="0">
-                <a:solidFill>
-                  <a:srgbClr val="0C554E"/>
-                </a:solidFill>
-                <a:latin typeface="Arial"/>
-                <a:ea typeface="Arial"/>
-                <a:cs typeface="Arial"/>
-              </a:defRPr>
-            </a:pPr>
-            <a:r>
-              <a:rPr sz="2100" b="0">
-                <a:solidFill>
-                  <a:srgbClr val="0C554E"/>
-                </a:solidFill>
-                <a:latin typeface="Arial"/>
-                <a:ea typeface="Arial"/>
-                <a:cs typeface="Arial"/>
-              </a:rPr>
-              <a:t>→</a:t>
-            </a:r>
-          </a:p>
-        </p:txBody>
-      </p:sp>
-      <p:sp>
-        <p:nvSpPr>
-          <p:cNvPr id="15" name="">
-            <a:extLst xmlns:a="http://schemas.openxmlformats.org/drawingml/2006/main">
-              <a:ext uri="{FF2B5EF4-FFF2-40B4-BE49-F238E27FC236}">
-                <a16:creationId xmlns:a16="http://schemas.microsoft.com/office/drawing/2014/main" id="{27C02152-6F61-46FD-B0B3-0068F461E6EA}"/>
-              </a:ext>
-            </a:extLst>
-          </p:cNvPr>
-          <p:cNvSpPr>
-            <a:spLocks xmlns:a="http://schemas.openxmlformats.org/drawingml/2006/main" noGrp="1"/>
-          </p:cNvSpPr>
-          <p:nvPr/>
-        </p:nvSpPr>
-        <p:spPr>
-          <a:xfrm xmlns:a="http://schemas.openxmlformats.org/drawingml/2006/main">
-            <a:off x="3390900" y="4629150"/>
-            <a:ext cx="2524125" cy="952500"/>
-          </a:xfrm>
-          <a:prstGeom xmlns:a="http://schemas.openxmlformats.org/drawingml/2006/main" prst="rect">
-            <a:avLst/>
-          </a:prstGeom>
-          <a:noFill xmlns:a="http://schemas.openxmlformats.org/drawingml/2006/main"/>
-          <a:ln xmlns:a="http://schemas.openxmlformats.org/drawingml/2006/main" w="0">
-            <a:noFill/>
-          </a:ln>
-        </p:spPr>
-        <p:txBody>
-          <a:bodyPr xmlns:a="http://schemas.openxmlformats.org/drawingml/2006/main">
-            <a:noAutofit/>
-          </a:bodyPr>
-          <a:lstStyle xmlns:a="http://schemas.openxmlformats.org/drawingml/2006/main"/>
-          <a:p xmlns:a="http://schemas.openxmlformats.org/drawingml/2006/main">
-            <a:pPr>
-              <a:defRPr sz="2025" b="0">
-                <a:solidFill>
-                  <a:srgbClr val="103D36"/>
-                </a:solidFill>
-                <a:latin typeface="Arial"/>
-                <a:ea typeface="Arial"/>
-                <a:cs typeface="Arial"/>
-              </a:defRPr>
-            </a:pPr>
-            <a:r>
-              <a:rPr sz="2025" b="0">
-                <a:solidFill>
-                  <a:srgbClr val="103D36"/>
-                </a:solidFill>
-                <a:latin typeface="Arial"/>
-                <a:ea typeface="Arial"/>
-                <a:cs typeface="Arial"/>
-              </a:rPr>
-              <a:t>Cloud / valid mask</a:t>
-            </a:r>
-          </a:p>
-          <a:p xmlns:a="http://schemas.openxmlformats.org/drawingml/2006/main">
-            <a:pPr>
-              <a:defRPr sz="2025" b="0">
-                <a:solidFill>
-                  <a:srgbClr val="103D36"/>
-                </a:solidFill>
-                <a:latin typeface="Arial"/>
-                <a:ea typeface="Arial"/>
-                <a:cs typeface="Arial"/>
-              </a:defRPr>
-            </a:pPr>
-            <a:r>
-              <a:rPr sz="2025" b="0">
-                <a:solidFill>
-                  <a:srgbClr val="103D36"/>
-                </a:solidFill>
-                <a:latin typeface="Arial"/>
-                <a:ea typeface="Arial"/>
-                <a:cs typeface="Arial"/>
-              </a:rPr>
-              <a:t>alignment + wind</a:t>
-            </a:r>
-          </a:p>
-        </p:txBody>
-      </p:sp>
-      <p:sp>
-        <p:nvSpPr>
-          <p:cNvPr id="16" name="">
-            <a:extLst xmlns:a="http://schemas.openxmlformats.org/drawingml/2006/main">
-              <a:ext uri="{FF2B5EF4-FFF2-40B4-BE49-F238E27FC236}">
-                <a16:creationId xmlns:a16="http://schemas.microsoft.com/office/drawing/2014/main" id="{20608477-983C-408B-8904-14A36912DFF4}"/>
-              </a:ext>
-            </a:extLst>
-          </p:cNvPr>
-          <p:cNvSpPr>
-            <a:spLocks xmlns:a="http://schemas.openxmlformats.org/drawingml/2006/main" noGrp="1"/>
-          </p:cNvSpPr>
-          <p:nvPr/>
-        </p:nvSpPr>
-        <p:spPr>
-          <a:xfrm xmlns:a="http://schemas.openxmlformats.org/drawingml/2006/main">
-            <a:off x="5857875" y="4772025"/>
-            <a:ext cx="333375" cy="428625"/>
-          </a:xfrm>
-          <a:prstGeom xmlns:a="http://schemas.openxmlformats.org/drawingml/2006/main" prst="rect">
-            <a:avLst/>
-          </a:prstGeom>
-          <a:noFill xmlns:a="http://schemas.openxmlformats.org/drawingml/2006/main"/>
-          <a:ln xmlns:a="http://schemas.openxmlformats.org/drawingml/2006/main" w="0">
-            <a:noFill/>
-          </a:ln>
-        </p:spPr>
-        <p:txBody>
-          <a:bodyPr xmlns:a="http://schemas.openxmlformats.org/drawingml/2006/main">
-            <a:noAutofit/>
-          </a:bodyPr>
-          <a:lstStyle xmlns:a="http://schemas.openxmlformats.org/drawingml/2006/main"/>
-          <a:p xmlns:a="http://schemas.openxmlformats.org/drawingml/2006/main">
-            <a:pPr>
-              <a:defRPr sz="2100" b="0">
-                <a:solidFill>
-                  <a:srgbClr val="0C554E"/>
-                </a:solidFill>
-                <a:latin typeface="Arial"/>
-                <a:ea typeface="Arial"/>
-                <a:cs typeface="Arial"/>
-              </a:defRPr>
-            </a:pPr>
-            <a:r>
-              <a:rPr sz="2100" b="0">
-                <a:solidFill>
-                  <a:srgbClr val="0C554E"/>
-                </a:solidFill>
-                <a:latin typeface="Arial"/>
-                <a:ea typeface="Arial"/>
-                <a:cs typeface="Arial"/>
-              </a:rPr>
-              <a:t>→</a:t>
-            </a:r>
-          </a:p>
-        </p:txBody>
-      </p:sp>
-      <p:sp>
-        <p:nvSpPr>
-          <p:cNvPr id="17" name="">
-            <a:extLst xmlns:a="http://schemas.openxmlformats.org/drawingml/2006/main">
-              <a:ext uri="{FF2B5EF4-FFF2-40B4-BE49-F238E27FC236}">
-                <a16:creationId xmlns:a16="http://schemas.microsoft.com/office/drawing/2014/main" id="{850A4479-FBF8-4B74-9829-D0B595EBCCC1}"/>
-              </a:ext>
-            </a:extLst>
-          </p:cNvPr>
-          <p:cNvSpPr>
-            <a:spLocks xmlns:a="http://schemas.openxmlformats.org/drawingml/2006/main" noGrp="1"/>
-          </p:cNvSpPr>
-          <p:nvPr/>
-        </p:nvSpPr>
-        <p:spPr>
-          <a:xfrm xmlns:a="http://schemas.openxmlformats.org/drawingml/2006/main">
-            <a:off x="6172200" y="4629150"/>
-            <a:ext cx="2524125" cy="952500"/>
-          </a:xfrm>
-          <a:prstGeom xmlns:a="http://schemas.openxmlformats.org/drawingml/2006/main" prst="rect">
-            <a:avLst/>
-          </a:prstGeom>
-          <a:noFill xmlns:a="http://schemas.openxmlformats.org/drawingml/2006/main"/>
-          <a:ln xmlns:a="http://schemas.openxmlformats.org/drawingml/2006/main" w="0">
-            <a:noFill/>
-          </a:ln>
-        </p:spPr>
-        <p:txBody>
-          <a:bodyPr xmlns:a="http://schemas.openxmlformats.org/drawingml/2006/main">
-            <a:noAutofit/>
-          </a:bodyPr>
-          <a:lstStyle xmlns:a="http://schemas.openxmlformats.org/drawingml/2006/main"/>
-          <a:p xmlns:a="http://schemas.openxmlformats.org/drawingml/2006/main">
-            <a:pPr>
-              <a:defRPr sz="2025" b="0">
-                <a:solidFill>
-                  <a:srgbClr val="103D36"/>
-                </a:solidFill>
-                <a:latin typeface="Arial"/>
-                <a:ea typeface="Arial"/>
-                <a:cs typeface="Arial"/>
-              </a:defRPr>
-            </a:pPr>
-            <a:r>
-              <a:rPr sz="2025" b="0">
-                <a:solidFill>
-                  <a:srgbClr val="103D36"/>
-                </a:solidFill>
-                <a:latin typeface="Arial"/>
-                <a:ea typeface="Arial"/>
-                <a:cs typeface="Arial"/>
-              </a:rPr>
-              <a:t>Pretrained</a:t>
-            </a:r>
-          </a:p>
-          <a:p xmlns:a="http://schemas.openxmlformats.org/drawingml/2006/main">
-            <a:pPr>
-              <a:defRPr sz="2025" b="0">
-                <a:solidFill>
-                  <a:srgbClr val="103D36"/>
-                </a:solidFill>
-                <a:latin typeface="Arial"/>
-                <a:ea typeface="Arial"/>
-                <a:cs typeface="Arial"/>
-              </a:defRPr>
-            </a:pPr>
-            <a:r>
-              <a:rPr sz="2025" b="0">
-                <a:solidFill>
-                  <a:srgbClr val="103D36"/>
-                </a:solidFill>
-                <a:latin typeface="Arial"/>
-                <a:ea typeface="Arial"/>
-                <a:cs typeface="Arial"/>
-              </a:rPr>
-              <a:t>MARS-S2L</a:t>
-            </a:r>
-          </a:p>
-        </p:txBody>
-      </p:sp>
-      <p:sp>
-        <p:nvSpPr>
-          <p:cNvPr id="18" name="">
-            <a:extLst xmlns:a="http://schemas.openxmlformats.org/drawingml/2006/main">
-              <a:ext uri="{FF2B5EF4-FFF2-40B4-BE49-F238E27FC236}">
-                <a16:creationId xmlns:a16="http://schemas.microsoft.com/office/drawing/2014/main" id="{22A6A921-D1CF-4E9D-A2CC-7A845E19A840}"/>
-              </a:ext>
-            </a:extLst>
-          </p:cNvPr>
-          <p:cNvSpPr>
-            <a:spLocks xmlns:a="http://schemas.openxmlformats.org/drawingml/2006/main" noGrp="1"/>
-          </p:cNvSpPr>
-          <p:nvPr/>
-        </p:nvSpPr>
-        <p:spPr>
-          <a:xfrm xmlns:a="http://schemas.openxmlformats.org/drawingml/2006/main">
-            <a:off x="8639175" y="4772025"/>
-            <a:ext cx="333375" cy="428625"/>
-          </a:xfrm>
-          <a:prstGeom xmlns:a="http://schemas.openxmlformats.org/drawingml/2006/main" prst="rect">
-            <a:avLst/>
-          </a:prstGeom>
-          <a:noFill xmlns:a="http://schemas.openxmlformats.org/drawingml/2006/main"/>
-          <a:ln xmlns:a="http://schemas.openxmlformats.org/drawingml/2006/main" w="0">
-            <a:noFill/>
-          </a:ln>
-        </p:spPr>
-        <p:txBody>
-          <a:bodyPr xmlns:a="http://schemas.openxmlformats.org/drawingml/2006/main">
-            <a:noAutofit/>
-          </a:bodyPr>
-          <a:lstStyle xmlns:a="http://schemas.openxmlformats.org/drawingml/2006/main"/>
-          <a:p xmlns:a="http://schemas.openxmlformats.org/drawingml/2006/main">
-            <a:pPr>
-              <a:defRPr sz="2100" b="0">
-                <a:solidFill>
-                  <a:srgbClr val="0C554E"/>
-                </a:solidFill>
-                <a:latin typeface="Arial"/>
-                <a:ea typeface="Arial"/>
-                <a:cs typeface="Arial"/>
-              </a:defRPr>
-            </a:pPr>
-            <a:r>
-              <a:rPr sz="2100" b="0">
-                <a:solidFill>
-                  <a:srgbClr val="0C554E"/>
-                </a:solidFill>
-                <a:latin typeface="Arial"/>
-                <a:ea typeface="Arial"/>
-                <a:cs typeface="Arial"/>
-              </a:rPr>
-              <a:t>→</a:t>
-            </a:r>
-          </a:p>
-        </p:txBody>
-      </p:sp>
-      <p:sp>
-        <p:nvSpPr>
-          <p:cNvPr id="19" name="">
-            <a:extLst xmlns:a="http://schemas.openxmlformats.org/drawingml/2006/main">
-              <a:ext uri="{FF2B5EF4-FFF2-40B4-BE49-F238E27FC236}">
-                <a16:creationId xmlns:a16="http://schemas.microsoft.com/office/drawing/2014/main" id="{9892F48E-B4E1-4F62-B504-4777FE2B7ADF}"/>
-              </a:ext>
-            </a:extLst>
-          </p:cNvPr>
-          <p:cNvSpPr>
-            <a:spLocks xmlns:a="http://schemas.openxmlformats.org/drawingml/2006/main" noGrp="1"/>
-          </p:cNvSpPr>
-          <p:nvPr/>
-        </p:nvSpPr>
-        <p:spPr>
-          <a:xfrm xmlns:a="http://schemas.openxmlformats.org/drawingml/2006/main">
-            <a:off x="8953500" y="4629150"/>
-            <a:ext cx="2524125" cy="952500"/>
-          </a:xfrm>
-          <a:prstGeom xmlns:a="http://schemas.openxmlformats.org/drawingml/2006/main" prst="rect">
-            <a:avLst/>
-          </a:prstGeom>
-          <a:noFill xmlns:a="http://schemas.openxmlformats.org/drawingml/2006/main"/>
-          <a:ln xmlns:a="http://schemas.openxmlformats.org/drawingml/2006/main" w="0">
-            <a:noFill/>
-          </a:ln>
-        </p:spPr>
-        <p:txBody>
-          <a:bodyPr xmlns:a="http://schemas.openxmlformats.org/drawingml/2006/main">
-            <a:noAutofit/>
-          </a:bodyPr>
-          <a:lstStyle xmlns:a="http://schemas.openxmlformats.org/drawingml/2006/main"/>
-          <a:p xmlns:a="http://schemas.openxmlformats.org/drawingml/2006/main">
-            <a:pPr>
-              <a:defRPr sz="2025" b="0">
-                <a:solidFill>
-                  <a:srgbClr val="103D36"/>
-                </a:solidFill>
-                <a:latin typeface="Arial"/>
-                <a:ea typeface="Arial"/>
-                <a:cs typeface="Arial"/>
-              </a:defRPr>
-            </a:pPr>
-            <a:r>
-              <a:rPr sz="2025" b="0">
-                <a:solidFill>
-                  <a:srgbClr val="103D36"/>
-                </a:solidFill>
-                <a:latin typeface="Arial"/>
-                <a:ea typeface="Arial"/>
-                <a:cs typeface="Arial"/>
-              </a:rPr>
-              <a:t>Candidate flag +</a:t>
-            </a:r>
-          </a:p>
-          <a:p xmlns:a="http://schemas.openxmlformats.org/drawingml/2006/main">
-            <a:pPr>
-              <a:defRPr sz="2025" b="0">
-                <a:solidFill>
-                  <a:srgbClr val="103D36"/>
-                </a:solidFill>
-                <a:latin typeface="Arial"/>
-                <a:ea typeface="Arial"/>
-                <a:cs typeface="Arial"/>
-              </a:defRPr>
-            </a:pPr>
-            <a:r>
-              <a:rPr sz="2025" b="0">
-                <a:solidFill>
-                  <a:srgbClr val="103D36"/>
-                </a:solidFill>
-                <a:latin typeface="Arial"/>
-                <a:ea typeface="Arial"/>
-                <a:cs typeface="Arial"/>
-              </a:rPr>
-              <a:t>evidence history</a:t>
-            </a:r>
-          </a:p>
-        </p:txBody>
-      </p:sp>
-      <p:sp>
-        <p:nvSpPr>
-          <p:cNvPr id="20" name="">
-            <a:extLst xmlns:a="http://schemas.openxmlformats.org/drawingml/2006/main">
-              <a:ext uri="{FF2B5EF4-FFF2-40B4-BE49-F238E27FC236}">
-                <a16:creationId xmlns:a16="http://schemas.microsoft.com/office/drawing/2014/main" id="{986CE1AA-4D36-42BD-8442-078DB3E3343C}"/>
-              </a:ext>
-            </a:extLst>
-          </p:cNvPr>
-          <p:cNvSpPr>
-            <a:spLocks xmlns:a="http://schemas.openxmlformats.org/drawingml/2006/main" noGrp="1"/>
-          </p:cNvSpPr>
-          <p:nvPr/>
-        </p:nvSpPr>
-        <p:spPr>
-          <a:xfrm xmlns:a="http://schemas.openxmlformats.org/drawingml/2006/main">
-            <a:off x="609600" y="6000750"/>
-            <a:ext cx="10953750" cy="342900"/>
-          </a:xfrm>
-          <a:prstGeom xmlns:a="http://schemas.openxmlformats.org/drawingml/2006/main" prst="rect">
-            <a:avLst/>
-          </a:prstGeom>
-          <a:noFill xmlns:a="http://schemas.openxmlformats.org/drawingml/2006/main"/>
-          <a:ln xmlns:a="http://schemas.openxmlformats.org/drawingml/2006/main" w="0">
-            <a:noFill/>
-          </a:ln>
-        </p:spPr>
-        <p:txBody>
-          <a:bodyPr xmlns:a="http://schemas.openxmlformats.org/drawingml/2006/main">
-            <a:noAutofit/>
-          </a:bodyPr>
-          <a:lstStyle xmlns:a="http://schemas.openxmlformats.org/drawingml/2006/main"/>
-          <a:p xmlns:a="http://schemas.openxmlformats.org/drawingml/2006/main">
-            <a:pPr>
-              <a:defRPr sz="1650" b="0">
-                <a:solidFill>
-                  <a:srgbClr val="53716A"/>
-                </a:solidFill>
-                <a:latin typeface="Arial"/>
-                <a:ea typeface="Arial"/>
-                <a:cs typeface="Arial"/>
-              </a:defRPr>
-            </a:pPr>
-            <a:r>
-              <a:rPr sz="1650" b="0">
-                <a:solidFill>
-                  <a:srgbClr val="53716A"/>
-                </a:solidFill>
-                <a:latin typeface="Arial"/>
-                <a:ea typeface="Arial"/>
-                <a:cs typeface="Arial"/>
-              </a:rPr>
-              <a:t>Different quantities and footprints remain separate. Missing observations stay unknown.</a:t>
-            </a:r>
-          </a:p>
-        </p:txBody>
-      </p:sp>
-    </p:spTree>
-    <p:extLst>
-      <p:ext uri="{BB962C8B-B14F-4D97-AF65-F5344CB8AC3E}">
-        <p14:creationId xmlns:p14="http://schemas.microsoft.com/office/powerpoint/2010/main" val="1177117794"/>
       </p:ext>
     </p:extLst>
   </p:cSld>
@@ -6100,10 +6736,10 @@
       </p:grpSpPr>
       <p:sp>
         <p:nvSpPr>
-          <p:cNvPr id="7" name="">
-            <a:extLst xmlns:a="http://schemas.openxmlformats.org/drawingml/2006/main">
-              <a:ext uri="{FF2B5EF4-FFF2-40B4-BE49-F238E27FC236}">
-                <a16:creationId xmlns:a16="http://schemas.microsoft.com/office/drawing/2014/main" id="{100A9114-098C-4A52-BCA0-65C715962670}"/>
+          <p:cNvPr id="21" name="">
+            <a:extLst xmlns:a="http://schemas.openxmlformats.org/drawingml/2006/main">
+              <a:ext uri="{FF2B5EF4-FFF2-40B4-BE49-F238E27FC236}">
+                <a16:creationId xmlns:a16="http://schemas.microsoft.com/office/drawing/2014/main" id="{CE2BD2DB-BFDE-4DEA-8523-717345AFB86E}"/>
               </a:ext>
             </a:extLst>
           </p:cNvPr>
@@ -6132,6 +6768,7 @@
           <a:lstStyle xmlns:a="http://schemas.openxmlformats.org/drawingml/2006/main"/>
           <a:p xmlns:a="http://schemas.openxmlformats.org/drawingml/2006/main">
             <a:pPr>
+              <a:buNone/>
               <a:defRPr sz="3300" b="1">
                 <a:solidFill>
                   <a:srgbClr val="103D36"/>
@@ -6150,7 +6787,7 @@
                 <a:ea typeface="Arial"/>
                 <a:cs typeface="Arial"/>
               </a:rPr>
-              <a:t>UAE atmospheric comparison</a:t>
+              <a:t>Satellite evidence workflow</a:t>
             </a:r>
           </a:p>
         </p:txBody>
@@ -6160,7 +6797,7 @@
           <p:cNvPr id="2" name="">
             <a:extLst xmlns:a="http://schemas.openxmlformats.org/drawingml/2006/main">
               <a:ext uri="{FF2B5EF4-FFF2-40B4-BE49-F238E27FC236}">
-                <a16:creationId xmlns:a16="http://schemas.microsoft.com/office/drawing/2014/main" id="{64DE6263-FC7B-40BF-BEBE-B13E5D49958D}"/>
+                <a16:creationId xmlns:a16="http://schemas.microsoft.com/office/drawing/2014/main" id="{AC1B9797-A29B-4B5B-9116-B8F992BDB43D}"/>
               </a:ext>
             </a:extLst>
           </p:cNvPr>
@@ -6190,7 +6827,7 @@
           <p:cNvPr id="3" name="">
             <a:extLst xmlns:a="http://schemas.openxmlformats.org/drawingml/2006/main">
               <a:ext uri="{FF2B5EF4-FFF2-40B4-BE49-F238E27FC236}">
-                <a16:creationId xmlns:a16="http://schemas.microsoft.com/office/drawing/2014/main" id="{53CA7B3A-93CC-4725-9DE8-A3C530D32D90}"/>
+                <a16:creationId xmlns:a16="http://schemas.microsoft.com/office/drawing/2014/main" id="{C4AA342C-6DD8-4163-8471-1A0793ED25DF}"/>
               </a:ext>
             </a:extLst>
           </p:cNvPr>
@@ -6219,6 +6856,7 @@
           <a:lstStyle xmlns:a="http://schemas.openxmlformats.org/drawingml/2006/main"/>
           <a:p xmlns:a="http://schemas.openxmlformats.org/drawingml/2006/main">
             <a:pPr>
+              <a:buNone/>
               <a:defRPr sz="1200" b="0">
                 <a:solidFill>
                   <a:srgbClr val="53716A"/>
@@ -6247,19 +6885,19 @@
           <p:cNvPr id="4" name="">
             <a:extLst xmlns:a="http://schemas.openxmlformats.org/drawingml/2006/main">
               <a:ext uri="{FF2B5EF4-FFF2-40B4-BE49-F238E27FC236}">
-                <a16:creationId xmlns:a16="http://schemas.microsoft.com/office/drawing/2014/main" id="{D05FDCAA-0A3F-44CE-8828-CB298E942A9E}"/>
-              </a:ext>
-            </a:extLst>
-          </p:cNvPr>
-          <p:cNvSpPr>
-            <a:spLocks xmlns:a="http://schemas.openxmlformats.org/drawingml/2006/main" noGrp="1"/>
-          </p:cNvSpPr>
-          <p:nvPr/>
-        </p:nvSpPr>
-        <p:spPr>
-          <a:xfrm xmlns:a="http://schemas.openxmlformats.org/drawingml/2006/main">
-            <a:off x="609600" y="1619250"/>
-            <a:ext cx="10953750" cy="428625"/>
+                <a16:creationId xmlns:a16="http://schemas.microsoft.com/office/drawing/2014/main" id="{15BBEBC4-DC81-4174-A6DB-78FC8BB3CFD8}"/>
+              </a:ext>
+            </a:extLst>
+          </p:cNvPr>
+          <p:cNvSpPr>
+            <a:spLocks xmlns:a="http://schemas.openxmlformats.org/drawingml/2006/main" noGrp="1"/>
+          </p:cNvSpPr>
+          <p:nvPr/>
+        </p:nvSpPr>
+        <p:spPr>
+          <a:xfrm xmlns:a="http://schemas.openxmlformats.org/drawingml/2006/main">
+            <a:off x="609600" y="1743075"/>
+            <a:ext cx="10477500" cy="476250"/>
           </a:xfrm>
           <a:prstGeom xmlns:a="http://schemas.openxmlformats.org/drawingml/2006/main" prst="rect">
             <a:avLst/>
@@ -6276,6 +6914,1360 @@
           <a:lstStyle xmlns:a="http://schemas.openxmlformats.org/drawingml/2006/main"/>
           <a:p xmlns:a="http://schemas.openxmlformats.org/drawingml/2006/main">
             <a:pPr>
+              <a:buNone/>
+              <a:defRPr sz="2400" b="1">
+                <a:solidFill>
+                  <a:srgbClr val="0C554E"/>
+                </a:solidFill>
+                <a:latin typeface="Arial"/>
+                <a:ea typeface="Arial"/>
+                <a:cs typeface="Arial"/>
+              </a:defRPr>
+            </a:pPr>
+            <a:r>
+              <a:rPr sz="2400" b="1">
+                <a:solidFill>
+                  <a:srgbClr val="0C554E"/>
+                </a:solidFill>
+                <a:latin typeface="Arial"/>
+                <a:ea typeface="Arial"/>
+                <a:cs typeface="Arial"/>
+              </a:rPr>
+              <a:t>Atmospheric measurements</a:t>
+            </a:r>
+          </a:p>
+        </p:txBody>
+      </p:sp>
+      <p:sp>
+        <p:nvSpPr>
+          <p:cNvPr id="5" name="">
+            <a:extLst xmlns:a="http://schemas.openxmlformats.org/drawingml/2006/main">
+              <a:ext uri="{FF2B5EF4-FFF2-40B4-BE49-F238E27FC236}">
+                <a16:creationId xmlns:a16="http://schemas.microsoft.com/office/drawing/2014/main" id="{9F8D6CF7-45CB-4BF9-B5DF-C400540364A0}"/>
+              </a:ext>
+            </a:extLst>
+          </p:cNvPr>
+          <p:cNvSpPr>
+            <a:spLocks xmlns:a="http://schemas.openxmlformats.org/drawingml/2006/main" noGrp="1"/>
+          </p:cNvSpPr>
+          <p:nvPr/>
+        </p:nvSpPr>
+        <p:spPr>
+          <a:xfrm xmlns:a="http://schemas.openxmlformats.org/drawingml/2006/main">
+            <a:off x="609600" y="2524125"/>
+            <a:ext cx="2524125" cy="952500"/>
+          </a:xfrm>
+          <a:prstGeom xmlns:a="http://schemas.openxmlformats.org/drawingml/2006/main" prst="rect">
+            <a:avLst/>
+          </a:prstGeom>
+          <a:noFill xmlns:a="http://schemas.openxmlformats.org/drawingml/2006/main"/>
+          <a:ln xmlns:a="http://schemas.openxmlformats.org/drawingml/2006/main" w="0">
+            <a:noFill/>
+          </a:ln>
+        </p:spPr>
+        <p:txBody>
+          <a:bodyPr xmlns:a="http://schemas.openxmlformats.org/drawingml/2006/main">
+            <a:noAutofit/>
+          </a:bodyPr>
+          <a:lstStyle xmlns:a="http://schemas.openxmlformats.org/drawingml/2006/main"/>
+          <a:p xmlns:a="http://schemas.openxmlformats.org/drawingml/2006/main">
+            <a:pPr>
+              <a:buNone/>
+              <a:defRPr sz="2025" b="0">
+                <a:solidFill>
+                  <a:srgbClr val="103D36"/>
+                </a:solidFill>
+                <a:latin typeface="Arial"/>
+                <a:ea typeface="Arial"/>
+                <a:cs typeface="Arial"/>
+              </a:defRPr>
+            </a:pPr>
+            <a:r>
+              <a:rPr sz="2025" b="0">
+                <a:solidFill>
+                  <a:srgbClr val="103D36"/>
+                </a:solidFill>
+                <a:latin typeface="Arial"/>
+                <a:ea typeface="Arial"/>
+                <a:cs typeface="Arial"/>
+              </a:rPr>
+              <a:t>Sentinel-5P</a:t>
+            </a:r>
+          </a:p>
+          <a:p xmlns:a="http://schemas.openxmlformats.org/drawingml/2006/main">
+            <a:pPr>
+              <a:buNone/>
+              <a:defRPr sz="2025" b="0">
+                <a:solidFill>
+                  <a:srgbClr val="103D36"/>
+                </a:solidFill>
+                <a:latin typeface="Arial"/>
+                <a:ea typeface="Arial"/>
+                <a:cs typeface="Arial"/>
+              </a:defRPr>
+            </a:pPr>
+            <a:r>
+              <a:rPr sz="2025" b="0">
+                <a:solidFill>
+                  <a:srgbClr val="103D36"/>
+                </a:solidFill>
+                <a:latin typeface="Arial"/>
+                <a:ea typeface="Arial"/>
+                <a:cs typeface="Arial"/>
+              </a:rPr>
+              <a:t>quality masks</a:t>
+            </a:r>
+          </a:p>
+        </p:txBody>
+      </p:sp>
+      <p:sp>
+        <p:nvSpPr>
+          <p:cNvPr id="6" name="">
+            <a:extLst xmlns:a="http://schemas.openxmlformats.org/drawingml/2006/main">
+              <a:ext uri="{FF2B5EF4-FFF2-40B4-BE49-F238E27FC236}">
+                <a16:creationId xmlns:a16="http://schemas.microsoft.com/office/drawing/2014/main" id="{4568967A-E596-49CF-A18F-706FEDB85D39}"/>
+              </a:ext>
+            </a:extLst>
+          </p:cNvPr>
+          <p:cNvSpPr>
+            <a:spLocks xmlns:a="http://schemas.openxmlformats.org/drawingml/2006/main" noGrp="1"/>
+          </p:cNvSpPr>
+          <p:nvPr/>
+        </p:nvSpPr>
+        <p:spPr>
+          <a:xfrm xmlns:a="http://schemas.openxmlformats.org/drawingml/2006/main">
+            <a:off x="3076575" y="2667000"/>
+            <a:ext cx="333375" cy="428625"/>
+          </a:xfrm>
+          <a:prstGeom xmlns:a="http://schemas.openxmlformats.org/drawingml/2006/main" prst="rect">
+            <a:avLst/>
+          </a:prstGeom>
+          <a:noFill xmlns:a="http://schemas.openxmlformats.org/drawingml/2006/main"/>
+          <a:ln xmlns:a="http://schemas.openxmlformats.org/drawingml/2006/main" w="0">
+            <a:noFill/>
+          </a:ln>
+        </p:spPr>
+        <p:txBody>
+          <a:bodyPr xmlns:a="http://schemas.openxmlformats.org/drawingml/2006/main">
+            <a:noAutofit/>
+          </a:bodyPr>
+          <a:lstStyle xmlns:a="http://schemas.openxmlformats.org/drawingml/2006/main"/>
+          <a:p xmlns:a="http://schemas.openxmlformats.org/drawingml/2006/main">
+            <a:pPr>
+              <a:buNone/>
+              <a:defRPr sz="2100" b="0">
+                <a:solidFill>
+                  <a:srgbClr val="0C554E"/>
+                </a:solidFill>
+                <a:latin typeface="Arial"/>
+                <a:ea typeface="Arial"/>
+                <a:cs typeface="Arial"/>
+              </a:defRPr>
+            </a:pPr>
+            <a:r>
+              <a:rPr sz="2100" b="0">
+                <a:solidFill>
+                  <a:srgbClr val="0C554E"/>
+                </a:solidFill>
+                <a:latin typeface="Arial"/>
+                <a:ea typeface="Arial"/>
+                <a:cs typeface="Arial"/>
+              </a:rPr>
+              <a:t>→</a:t>
+            </a:r>
+          </a:p>
+        </p:txBody>
+      </p:sp>
+      <p:sp>
+        <p:nvSpPr>
+          <p:cNvPr id="7" name="">
+            <a:extLst xmlns:a="http://schemas.openxmlformats.org/drawingml/2006/main">
+              <a:ext uri="{FF2B5EF4-FFF2-40B4-BE49-F238E27FC236}">
+                <a16:creationId xmlns:a16="http://schemas.microsoft.com/office/drawing/2014/main" id="{2FFFC474-1C38-4350-B556-F800EA8CD3CF}"/>
+              </a:ext>
+            </a:extLst>
+          </p:cNvPr>
+          <p:cNvSpPr>
+            <a:spLocks xmlns:a="http://schemas.openxmlformats.org/drawingml/2006/main" noGrp="1"/>
+          </p:cNvSpPr>
+          <p:nvPr/>
+        </p:nvSpPr>
+        <p:spPr>
+          <a:xfrm xmlns:a="http://schemas.openxmlformats.org/drawingml/2006/main">
+            <a:off x="3390900" y="2524125"/>
+            <a:ext cx="2524125" cy="952500"/>
+          </a:xfrm>
+          <a:prstGeom xmlns:a="http://schemas.openxmlformats.org/drawingml/2006/main" prst="rect">
+            <a:avLst/>
+          </a:prstGeom>
+          <a:noFill xmlns:a="http://schemas.openxmlformats.org/drawingml/2006/main"/>
+          <a:ln xmlns:a="http://schemas.openxmlformats.org/drawingml/2006/main" w="0">
+            <a:noFill/>
+          </a:ln>
+        </p:spPr>
+        <p:txBody>
+          <a:bodyPr xmlns:a="http://schemas.openxmlformats.org/drawingml/2006/main">
+            <a:noAutofit/>
+          </a:bodyPr>
+          <a:lstStyle xmlns:a="http://schemas.openxmlformats.org/drawingml/2006/main"/>
+          <a:p xmlns:a="http://schemas.openxmlformats.org/drawingml/2006/main">
+            <a:pPr>
+              <a:buNone/>
+              <a:defRPr sz="2025" b="0">
+                <a:solidFill>
+                  <a:srgbClr val="103D36"/>
+                </a:solidFill>
+                <a:latin typeface="Arial"/>
+                <a:ea typeface="Arial"/>
+                <a:cs typeface="Arial"/>
+              </a:defRPr>
+            </a:pPr>
+            <a:r>
+              <a:rPr sz="2025" b="0">
+                <a:solidFill>
+                  <a:srgbClr val="103D36"/>
+                </a:solidFill>
+                <a:latin typeface="Arial"/>
+                <a:ea typeface="Arial"/>
+                <a:cs typeface="Arial"/>
+              </a:rPr>
+              <a:t>Daily area</a:t>
+            </a:r>
+          </a:p>
+          <a:p xmlns:a="http://schemas.openxmlformats.org/drawingml/2006/main">
+            <a:pPr>
+              <a:buNone/>
+              <a:defRPr sz="2025" b="0">
+                <a:solidFill>
+                  <a:srgbClr val="103D36"/>
+                </a:solidFill>
+                <a:latin typeface="Arial"/>
+                <a:ea typeface="Arial"/>
+                <a:cs typeface="Arial"/>
+              </a:defRPr>
+            </a:pPr>
+            <a:r>
+              <a:rPr sz="2025" b="0">
+                <a:solidFill>
+                  <a:srgbClr val="103D36"/>
+                </a:solidFill>
+                <a:latin typeface="Arial"/>
+                <a:ea typeface="Arial"/>
+                <a:cs typeface="Arial"/>
+              </a:rPr>
+              <a:t>values</a:t>
+            </a:r>
+          </a:p>
+        </p:txBody>
+      </p:sp>
+      <p:sp>
+        <p:nvSpPr>
+          <p:cNvPr id="8" name="">
+            <a:extLst xmlns:a="http://schemas.openxmlformats.org/drawingml/2006/main">
+              <a:ext uri="{FF2B5EF4-FFF2-40B4-BE49-F238E27FC236}">
+                <a16:creationId xmlns:a16="http://schemas.microsoft.com/office/drawing/2014/main" id="{BF933C62-165F-47F1-AE1D-62EA0B051827}"/>
+              </a:ext>
+            </a:extLst>
+          </p:cNvPr>
+          <p:cNvSpPr>
+            <a:spLocks xmlns:a="http://schemas.openxmlformats.org/drawingml/2006/main" noGrp="1"/>
+          </p:cNvSpPr>
+          <p:nvPr/>
+        </p:nvSpPr>
+        <p:spPr>
+          <a:xfrm xmlns:a="http://schemas.openxmlformats.org/drawingml/2006/main">
+            <a:off x="5857875" y="2667000"/>
+            <a:ext cx="333375" cy="428625"/>
+          </a:xfrm>
+          <a:prstGeom xmlns:a="http://schemas.openxmlformats.org/drawingml/2006/main" prst="rect">
+            <a:avLst/>
+          </a:prstGeom>
+          <a:noFill xmlns:a="http://schemas.openxmlformats.org/drawingml/2006/main"/>
+          <a:ln xmlns:a="http://schemas.openxmlformats.org/drawingml/2006/main" w="0">
+            <a:noFill/>
+          </a:ln>
+        </p:spPr>
+        <p:txBody>
+          <a:bodyPr xmlns:a="http://schemas.openxmlformats.org/drawingml/2006/main">
+            <a:noAutofit/>
+          </a:bodyPr>
+          <a:lstStyle xmlns:a="http://schemas.openxmlformats.org/drawingml/2006/main"/>
+          <a:p xmlns:a="http://schemas.openxmlformats.org/drawingml/2006/main">
+            <a:pPr>
+              <a:buNone/>
+              <a:defRPr sz="2100" b="0">
+                <a:solidFill>
+                  <a:srgbClr val="0C554E"/>
+                </a:solidFill>
+                <a:latin typeface="Arial"/>
+                <a:ea typeface="Arial"/>
+                <a:cs typeface="Arial"/>
+              </a:defRPr>
+            </a:pPr>
+            <a:r>
+              <a:rPr sz="2100" b="0">
+                <a:solidFill>
+                  <a:srgbClr val="0C554E"/>
+                </a:solidFill>
+                <a:latin typeface="Arial"/>
+                <a:ea typeface="Arial"/>
+                <a:cs typeface="Arial"/>
+              </a:rPr>
+              <a:t>→</a:t>
+            </a:r>
+          </a:p>
+        </p:txBody>
+      </p:sp>
+      <p:sp>
+        <p:nvSpPr>
+          <p:cNvPr id="9" name="">
+            <a:extLst xmlns:a="http://schemas.openxmlformats.org/drawingml/2006/main">
+              <a:ext uri="{FF2B5EF4-FFF2-40B4-BE49-F238E27FC236}">
+                <a16:creationId xmlns:a16="http://schemas.microsoft.com/office/drawing/2014/main" id="{8C787306-18B5-4013-B78C-BFD0EEC84A6C}"/>
+              </a:ext>
+            </a:extLst>
+          </p:cNvPr>
+          <p:cNvSpPr>
+            <a:spLocks xmlns:a="http://schemas.openxmlformats.org/drawingml/2006/main" noGrp="1"/>
+          </p:cNvSpPr>
+          <p:nvPr/>
+        </p:nvSpPr>
+        <p:spPr>
+          <a:xfrm xmlns:a="http://schemas.openxmlformats.org/drawingml/2006/main">
+            <a:off x="6172200" y="2524125"/>
+            <a:ext cx="2524125" cy="952500"/>
+          </a:xfrm>
+          <a:prstGeom xmlns:a="http://schemas.openxmlformats.org/drawingml/2006/main" prst="rect">
+            <a:avLst/>
+          </a:prstGeom>
+          <a:noFill xmlns:a="http://schemas.openxmlformats.org/drawingml/2006/main"/>
+          <a:ln xmlns:a="http://schemas.openxmlformats.org/drawingml/2006/main" w="0">
+            <a:noFill/>
+          </a:ln>
+        </p:spPr>
+        <p:txBody>
+          <a:bodyPr xmlns:a="http://schemas.openxmlformats.org/drawingml/2006/main">
+            <a:noAutofit/>
+          </a:bodyPr>
+          <a:lstStyle xmlns:a="http://schemas.openxmlformats.org/drawingml/2006/main"/>
+          <a:p xmlns:a="http://schemas.openxmlformats.org/drawingml/2006/main">
+            <a:pPr>
+              <a:buNone/>
+              <a:defRPr sz="2025" b="0">
+                <a:solidFill>
+                  <a:srgbClr val="103D36"/>
+                </a:solidFill>
+                <a:latin typeface="Arial"/>
+                <a:ea typeface="Arial"/>
+                <a:cs typeface="Arial"/>
+              </a:defRPr>
+            </a:pPr>
+            <a:r>
+              <a:rPr sz="2025" b="0">
+                <a:solidFill>
+                  <a:srgbClr val="103D36"/>
+                </a:solidFill>
+                <a:latin typeface="Arial"/>
+                <a:ea typeface="Arial"/>
+                <a:cs typeface="Arial"/>
+              </a:rPr>
+              <a:t>Monthly / period</a:t>
+            </a:r>
+          </a:p>
+          <a:p xmlns:a="http://schemas.openxmlformats.org/drawingml/2006/main">
+            <a:pPr>
+              <a:buNone/>
+              <a:defRPr sz="2025" b="0">
+                <a:solidFill>
+                  <a:srgbClr val="103D36"/>
+                </a:solidFill>
+                <a:latin typeface="Arial"/>
+                <a:ea typeface="Arial"/>
+                <a:cs typeface="Arial"/>
+              </a:defRPr>
+            </a:pPr>
+            <a:r>
+              <a:rPr sz="2025" b="0">
+                <a:solidFill>
+                  <a:srgbClr val="103D36"/>
+                </a:solidFill>
+                <a:latin typeface="Arial"/>
+                <a:ea typeface="Arial"/>
+                <a:cs typeface="Arial"/>
+              </a:rPr>
+              <a:t>summaries</a:t>
+            </a:r>
+          </a:p>
+        </p:txBody>
+      </p:sp>
+      <p:sp>
+        <p:nvSpPr>
+          <p:cNvPr id="10" name="">
+            <a:extLst xmlns:a="http://schemas.openxmlformats.org/drawingml/2006/main">
+              <a:ext uri="{FF2B5EF4-FFF2-40B4-BE49-F238E27FC236}">
+                <a16:creationId xmlns:a16="http://schemas.microsoft.com/office/drawing/2014/main" id="{C4B159BC-2C98-4A4B-AC9F-D9D67314762C}"/>
+              </a:ext>
+            </a:extLst>
+          </p:cNvPr>
+          <p:cNvSpPr>
+            <a:spLocks xmlns:a="http://schemas.openxmlformats.org/drawingml/2006/main" noGrp="1"/>
+          </p:cNvSpPr>
+          <p:nvPr/>
+        </p:nvSpPr>
+        <p:spPr>
+          <a:xfrm xmlns:a="http://schemas.openxmlformats.org/drawingml/2006/main">
+            <a:off x="8639175" y="2667000"/>
+            <a:ext cx="333375" cy="428625"/>
+          </a:xfrm>
+          <a:prstGeom xmlns:a="http://schemas.openxmlformats.org/drawingml/2006/main" prst="rect">
+            <a:avLst/>
+          </a:prstGeom>
+          <a:noFill xmlns:a="http://schemas.openxmlformats.org/drawingml/2006/main"/>
+          <a:ln xmlns:a="http://schemas.openxmlformats.org/drawingml/2006/main" w="0">
+            <a:noFill/>
+          </a:ln>
+        </p:spPr>
+        <p:txBody>
+          <a:bodyPr xmlns:a="http://schemas.openxmlformats.org/drawingml/2006/main">
+            <a:noAutofit/>
+          </a:bodyPr>
+          <a:lstStyle xmlns:a="http://schemas.openxmlformats.org/drawingml/2006/main"/>
+          <a:p xmlns:a="http://schemas.openxmlformats.org/drawingml/2006/main">
+            <a:pPr>
+              <a:buNone/>
+              <a:defRPr sz="2100" b="0">
+                <a:solidFill>
+                  <a:srgbClr val="0C554E"/>
+                </a:solidFill>
+                <a:latin typeface="Arial"/>
+                <a:ea typeface="Arial"/>
+                <a:cs typeface="Arial"/>
+              </a:defRPr>
+            </a:pPr>
+            <a:r>
+              <a:rPr sz="2100" b="0">
+                <a:solidFill>
+                  <a:srgbClr val="0C554E"/>
+                </a:solidFill>
+                <a:latin typeface="Arial"/>
+                <a:ea typeface="Arial"/>
+                <a:cs typeface="Arial"/>
+              </a:rPr>
+              <a:t>→</a:t>
+            </a:r>
+          </a:p>
+        </p:txBody>
+      </p:sp>
+      <p:sp>
+        <p:nvSpPr>
+          <p:cNvPr id="11" name="">
+            <a:extLst xmlns:a="http://schemas.openxmlformats.org/drawingml/2006/main">
+              <a:ext uri="{FF2B5EF4-FFF2-40B4-BE49-F238E27FC236}">
+                <a16:creationId xmlns:a16="http://schemas.microsoft.com/office/drawing/2014/main" id="{076D891A-D02D-4D5E-8E76-2B980EA244BB}"/>
+              </a:ext>
+            </a:extLst>
+          </p:cNvPr>
+          <p:cNvSpPr>
+            <a:spLocks xmlns:a="http://schemas.openxmlformats.org/drawingml/2006/main" noGrp="1"/>
+          </p:cNvSpPr>
+          <p:nvPr/>
+        </p:nvSpPr>
+        <p:spPr>
+          <a:xfrm xmlns:a="http://schemas.openxmlformats.org/drawingml/2006/main">
+            <a:off x="8953500" y="2524125"/>
+            <a:ext cx="2524125" cy="952500"/>
+          </a:xfrm>
+          <a:prstGeom xmlns:a="http://schemas.openxmlformats.org/drawingml/2006/main" prst="rect">
+            <a:avLst/>
+          </a:prstGeom>
+          <a:noFill xmlns:a="http://schemas.openxmlformats.org/drawingml/2006/main"/>
+          <a:ln xmlns:a="http://schemas.openxmlformats.org/drawingml/2006/main" w="0">
+            <a:noFill/>
+          </a:ln>
+        </p:spPr>
+        <p:txBody>
+          <a:bodyPr xmlns:a="http://schemas.openxmlformats.org/drawingml/2006/main">
+            <a:noAutofit/>
+          </a:bodyPr>
+          <a:lstStyle xmlns:a="http://schemas.openxmlformats.org/drawingml/2006/main"/>
+          <a:p xmlns:a="http://schemas.openxmlformats.org/drawingml/2006/main">
+            <a:pPr>
+              <a:buNone/>
+              <a:defRPr sz="2025" b="0">
+                <a:solidFill>
+                  <a:srgbClr val="103D36"/>
+                </a:solidFill>
+                <a:latin typeface="Arial"/>
+                <a:ea typeface="Arial"/>
+                <a:cs typeface="Arial"/>
+              </a:defRPr>
+            </a:pPr>
+            <a:r>
+              <a:rPr sz="2025" b="0">
+                <a:solidFill>
+                  <a:srgbClr val="103D36"/>
+                </a:solidFill>
+                <a:latin typeface="Arial"/>
+                <a:ea typeface="Arial"/>
+                <a:cs typeface="Arial"/>
+              </a:rPr>
+              <a:t>Dated JSON / CSV</a:t>
+            </a:r>
+          </a:p>
+          <a:p xmlns:a="http://schemas.openxmlformats.org/drawingml/2006/main">
+            <a:pPr>
+              <a:buNone/>
+              <a:defRPr sz="2025" b="0">
+                <a:solidFill>
+                  <a:srgbClr val="103D36"/>
+                </a:solidFill>
+                <a:latin typeface="Arial"/>
+                <a:ea typeface="Arial"/>
+                <a:cs typeface="Arial"/>
+              </a:defRPr>
+            </a:pPr>
+            <a:r>
+              <a:rPr sz="2025" b="0">
+                <a:solidFill>
+                  <a:srgbClr val="103D36"/>
+                </a:solidFill>
+                <a:latin typeface="Arial"/>
+                <a:ea typeface="Arial"/>
+                <a:cs typeface="Arial"/>
+              </a:rPr>
+              <a:t>and display</a:t>
+            </a:r>
+          </a:p>
+        </p:txBody>
+      </p:sp>
+      <p:sp>
+        <p:nvSpPr>
+          <p:cNvPr id="12" name="">
+            <a:extLst xmlns:a="http://schemas.openxmlformats.org/drawingml/2006/main">
+              <a:ext uri="{FF2B5EF4-FFF2-40B4-BE49-F238E27FC236}">
+                <a16:creationId xmlns:a16="http://schemas.microsoft.com/office/drawing/2014/main" id="{E8605C33-739C-44BA-8A87-8E681354A536}"/>
+              </a:ext>
+            </a:extLst>
+          </p:cNvPr>
+          <p:cNvSpPr>
+            <a:spLocks xmlns:a="http://schemas.openxmlformats.org/drawingml/2006/main" noGrp="1"/>
+          </p:cNvSpPr>
+          <p:nvPr/>
+        </p:nvSpPr>
+        <p:spPr>
+          <a:xfrm xmlns:a="http://schemas.openxmlformats.org/drawingml/2006/main">
+            <a:off x="609600" y="3848100"/>
+            <a:ext cx="10477500" cy="476250"/>
+          </a:xfrm>
+          <a:prstGeom xmlns:a="http://schemas.openxmlformats.org/drawingml/2006/main" prst="rect">
+            <a:avLst/>
+          </a:prstGeom>
+          <a:noFill xmlns:a="http://schemas.openxmlformats.org/drawingml/2006/main"/>
+          <a:ln xmlns:a="http://schemas.openxmlformats.org/drawingml/2006/main" w="0">
+            <a:noFill/>
+          </a:ln>
+        </p:spPr>
+        <p:txBody>
+          <a:bodyPr xmlns:a="http://schemas.openxmlformats.org/drawingml/2006/main">
+            <a:noAutofit/>
+          </a:bodyPr>
+          <a:lstStyle xmlns:a="http://schemas.openxmlformats.org/drawingml/2006/main"/>
+          <a:p xmlns:a="http://schemas.openxmlformats.org/drawingml/2006/main">
+            <a:pPr>
+              <a:buNone/>
+              <a:defRPr sz="2400" b="1">
+                <a:solidFill>
+                  <a:srgbClr val="0C554E"/>
+                </a:solidFill>
+                <a:latin typeface="Arial"/>
+                <a:ea typeface="Arial"/>
+                <a:cs typeface="Arial"/>
+              </a:defRPr>
+            </a:pPr>
+            <a:r>
+              <a:rPr sz="2400" b="1">
+                <a:solidFill>
+                  <a:srgbClr val="0C554E"/>
+                </a:solidFill>
+                <a:latin typeface="Arial"/>
+                <a:ea typeface="Arial"/>
+                <a:cs typeface="Arial"/>
+              </a:rPr>
+              <a:t>Methane screening</a:t>
+            </a:r>
+          </a:p>
+        </p:txBody>
+      </p:sp>
+      <p:sp>
+        <p:nvSpPr>
+          <p:cNvPr id="13" name="">
+            <a:extLst xmlns:a="http://schemas.openxmlformats.org/drawingml/2006/main">
+              <a:ext uri="{FF2B5EF4-FFF2-40B4-BE49-F238E27FC236}">
+                <a16:creationId xmlns:a16="http://schemas.microsoft.com/office/drawing/2014/main" id="{97E2AFDB-BA43-4371-98DA-EF5EBEF548A5}"/>
+              </a:ext>
+            </a:extLst>
+          </p:cNvPr>
+          <p:cNvSpPr>
+            <a:spLocks xmlns:a="http://schemas.openxmlformats.org/drawingml/2006/main" noGrp="1"/>
+          </p:cNvSpPr>
+          <p:nvPr/>
+        </p:nvSpPr>
+        <p:spPr>
+          <a:xfrm xmlns:a="http://schemas.openxmlformats.org/drawingml/2006/main">
+            <a:off x="609600" y="4629150"/>
+            <a:ext cx="2524125" cy="952500"/>
+          </a:xfrm>
+          <a:prstGeom xmlns:a="http://schemas.openxmlformats.org/drawingml/2006/main" prst="rect">
+            <a:avLst/>
+          </a:prstGeom>
+          <a:noFill xmlns:a="http://schemas.openxmlformats.org/drawingml/2006/main"/>
+          <a:ln xmlns:a="http://schemas.openxmlformats.org/drawingml/2006/main" w="0">
+            <a:noFill/>
+          </a:ln>
+        </p:spPr>
+        <p:txBody>
+          <a:bodyPr xmlns:a="http://schemas.openxmlformats.org/drawingml/2006/main">
+            <a:noAutofit/>
+          </a:bodyPr>
+          <a:lstStyle xmlns:a="http://schemas.openxmlformats.org/drawingml/2006/main"/>
+          <a:p xmlns:a="http://schemas.openxmlformats.org/drawingml/2006/main">
+            <a:pPr>
+              <a:buNone/>
+              <a:defRPr sz="2025" b="0">
+                <a:solidFill>
+                  <a:srgbClr val="103D36"/>
+                </a:solidFill>
+                <a:latin typeface="Arial"/>
+                <a:ea typeface="Arial"/>
+                <a:cs typeface="Arial"/>
+              </a:defRPr>
+            </a:pPr>
+            <a:r>
+              <a:rPr sz="2025" b="0">
+                <a:solidFill>
+                  <a:srgbClr val="103D36"/>
+                </a:solidFill>
+                <a:latin typeface="Arial"/>
+                <a:ea typeface="Arial"/>
+                <a:cs typeface="Arial"/>
+              </a:rPr>
+              <a:t>Observation +</a:t>
+            </a:r>
+          </a:p>
+          <a:p xmlns:a="http://schemas.openxmlformats.org/drawingml/2006/main">
+            <a:pPr>
+              <a:buNone/>
+              <a:defRPr sz="2025" b="0">
+                <a:solidFill>
+                  <a:srgbClr val="103D36"/>
+                </a:solidFill>
+                <a:latin typeface="Arial"/>
+                <a:ea typeface="Arial"/>
+                <a:cs typeface="Arial"/>
+              </a:defRPr>
+            </a:pPr>
+            <a:r>
+              <a:rPr sz="2025" b="0">
+                <a:solidFill>
+                  <a:srgbClr val="103D36"/>
+                </a:solidFill>
+                <a:latin typeface="Arial"/>
+                <a:ea typeface="Arial"/>
+                <a:cs typeface="Arial"/>
+              </a:rPr>
+              <a:t>reference imagery</a:t>
+            </a:r>
+          </a:p>
+        </p:txBody>
+      </p:sp>
+      <p:sp>
+        <p:nvSpPr>
+          <p:cNvPr id="14" name="">
+            <a:extLst xmlns:a="http://schemas.openxmlformats.org/drawingml/2006/main">
+              <a:ext uri="{FF2B5EF4-FFF2-40B4-BE49-F238E27FC236}">
+                <a16:creationId xmlns:a16="http://schemas.microsoft.com/office/drawing/2014/main" id="{9FC43A45-9B29-439D-AF9F-CE9C6E6412CF}"/>
+              </a:ext>
+            </a:extLst>
+          </p:cNvPr>
+          <p:cNvSpPr>
+            <a:spLocks xmlns:a="http://schemas.openxmlformats.org/drawingml/2006/main" noGrp="1"/>
+          </p:cNvSpPr>
+          <p:nvPr/>
+        </p:nvSpPr>
+        <p:spPr>
+          <a:xfrm xmlns:a="http://schemas.openxmlformats.org/drawingml/2006/main">
+            <a:off x="3076575" y="4772025"/>
+            <a:ext cx="333375" cy="428625"/>
+          </a:xfrm>
+          <a:prstGeom xmlns:a="http://schemas.openxmlformats.org/drawingml/2006/main" prst="rect">
+            <a:avLst/>
+          </a:prstGeom>
+          <a:noFill xmlns:a="http://schemas.openxmlformats.org/drawingml/2006/main"/>
+          <a:ln xmlns:a="http://schemas.openxmlformats.org/drawingml/2006/main" w="0">
+            <a:noFill/>
+          </a:ln>
+        </p:spPr>
+        <p:txBody>
+          <a:bodyPr xmlns:a="http://schemas.openxmlformats.org/drawingml/2006/main">
+            <a:noAutofit/>
+          </a:bodyPr>
+          <a:lstStyle xmlns:a="http://schemas.openxmlformats.org/drawingml/2006/main"/>
+          <a:p xmlns:a="http://schemas.openxmlformats.org/drawingml/2006/main">
+            <a:pPr>
+              <a:buNone/>
+              <a:defRPr sz="2100" b="0">
+                <a:solidFill>
+                  <a:srgbClr val="0C554E"/>
+                </a:solidFill>
+                <a:latin typeface="Arial"/>
+                <a:ea typeface="Arial"/>
+                <a:cs typeface="Arial"/>
+              </a:defRPr>
+            </a:pPr>
+            <a:r>
+              <a:rPr sz="2100" b="0">
+                <a:solidFill>
+                  <a:srgbClr val="0C554E"/>
+                </a:solidFill>
+                <a:latin typeface="Arial"/>
+                <a:ea typeface="Arial"/>
+                <a:cs typeface="Arial"/>
+              </a:rPr>
+              <a:t>→</a:t>
+            </a:r>
+          </a:p>
+        </p:txBody>
+      </p:sp>
+      <p:sp>
+        <p:nvSpPr>
+          <p:cNvPr id="15" name="">
+            <a:extLst xmlns:a="http://schemas.openxmlformats.org/drawingml/2006/main">
+              <a:ext uri="{FF2B5EF4-FFF2-40B4-BE49-F238E27FC236}">
+                <a16:creationId xmlns:a16="http://schemas.microsoft.com/office/drawing/2014/main" id="{27C02152-6F61-46FD-B0B3-0068F461E6EA}"/>
+              </a:ext>
+            </a:extLst>
+          </p:cNvPr>
+          <p:cNvSpPr>
+            <a:spLocks xmlns:a="http://schemas.openxmlformats.org/drawingml/2006/main" noGrp="1"/>
+          </p:cNvSpPr>
+          <p:nvPr/>
+        </p:nvSpPr>
+        <p:spPr>
+          <a:xfrm xmlns:a="http://schemas.openxmlformats.org/drawingml/2006/main">
+            <a:off x="3390900" y="4629150"/>
+            <a:ext cx="2524125" cy="952500"/>
+          </a:xfrm>
+          <a:prstGeom xmlns:a="http://schemas.openxmlformats.org/drawingml/2006/main" prst="rect">
+            <a:avLst/>
+          </a:prstGeom>
+          <a:noFill xmlns:a="http://schemas.openxmlformats.org/drawingml/2006/main"/>
+          <a:ln xmlns:a="http://schemas.openxmlformats.org/drawingml/2006/main" w="0">
+            <a:noFill/>
+          </a:ln>
+        </p:spPr>
+        <p:txBody>
+          <a:bodyPr xmlns:a="http://schemas.openxmlformats.org/drawingml/2006/main">
+            <a:noAutofit/>
+          </a:bodyPr>
+          <a:lstStyle xmlns:a="http://schemas.openxmlformats.org/drawingml/2006/main"/>
+          <a:p xmlns:a="http://schemas.openxmlformats.org/drawingml/2006/main">
+            <a:pPr>
+              <a:buNone/>
+              <a:defRPr sz="2025" b="0">
+                <a:solidFill>
+                  <a:srgbClr val="103D36"/>
+                </a:solidFill>
+                <a:latin typeface="Arial"/>
+                <a:ea typeface="Arial"/>
+                <a:cs typeface="Arial"/>
+              </a:defRPr>
+            </a:pPr>
+            <a:r>
+              <a:rPr sz="2025" b="0">
+                <a:solidFill>
+                  <a:srgbClr val="103D36"/>
+                </a:solidFill>
+                <a:latin typeface="Arial"/>
+                <a:ea typeface="Arial"/>
+                <a:cs typeface="Arial"/>
+              </a:rPr>
+              <a:t>Cloud / valid mask</a:t>
+            </a:r>
+          </a:p>
+          <a:p xmlns:a="http://schemas.openxmlformats.org/drawingml/2006/main">
+            <a:pPr>
+              <a:buNone/>
+              <a:defRPr sz="2025" b="0">
+                <a:solidFill>
+                  <a:srgbClr val="103D36"/>
+                </a:solidFill>
+                <a:latin typeface="Arial"/>
+                <a:ea typeface="Arial"/>
+                <a:cs typeface="Arial"/>
+              </a:defRPr>
+            </a:pPr>
+            <a:r>
+              <a:rPr sz="2025" b="0">
+                <a:solidFill>
+                  <a:srgbClr val="103D36"/>
+                </a:solidFill>
+                <a:latin typeface="Arial"/>
+                <a:ea typeface="Arial"/>
+                <a:cs typeface="Arial"/>
+              </a:rPr>
+              <a:t>alignment + wind</a:t>
+            </a:r>
+          </a:p>
+        </p:txBody>
+      </p:sp>
+      <p:sp>
+        <p:nvSpPr>
+          <p:cNvPr id="16" name="">
+            <a:extLst xmlns:a="http://schemas.openxmlformats.org/drawingml/2006/main">
+              <a:ext uri="{FF2B5EF4-FFF2-40B4-BE49-F238E27FC236}">
+                <a16:creationId xmlns:a16="http://schemas.microsoft.com/office/drawing/2014/main" id="{20608477-983C-408B-8904-14A36912DFF4}"/>
+              </a:ext>
+            </a:extLst>
+          </p:cNvPr>
+          <p:cNvSpPr>
+            <a:spLocks xmlns:a="http://schemas.openxmlformats.org/drawingml/2006/main" noGrp="1"/>
+          </p:cNvSpPr>
+          <p:nvPr/>
+        </p:nvSpPr>
+        <p:spPr>
+          <a:xfrm xmlns:a="http://schemas.openxmlformats.org/drawingml/2006/main">
+            <a:off x="5857875" y="4772025"/>
+            <a:ext cx="333375" cy="428625"/>
+          </a:xfrm>
+          <a:prstGeom xmlns:a="http://schemas.openxmlformats.org/drawingml/2006/main" prst="rect">
+            <a:avLst/>
+          </a:prstGeom>
+          <a:noFill xmlns:a="http://schemas.openxmlformats.org/drawingml/2006/main"/>
+          <a:ln xmlns:a="http://schemas.openxmlformats.org/drawingml/2006/main" w="0">
+            <a:noFill/>
+          </a:ln>
+        </p:spPr>
+        <p:txBody>
+          <a:bodyPr xmlns:a="http://schemas.openxmlformats.org/drawingml/2006/main">
+            <a:noAutofit/>
+          </a:bodyPr>
+          <a:lstStyle xmlns:a="http://schemas.openxmlformats.org/drawingml/2006/main"/>
+          <a:p xmlns:a="http://schemas.openxmlformats.org/drawingml/2006/main">
+            <a:pPr>
+              <a:buNone/>
+              <a:defRPr sz="2100" b="0">
+                <a:solidFill>
+                  <a:srgbClr val="0C554E"/>
+                </a:solidFill>
+                <a:latin typeface="Arial"/>
+                <a:ea typeface="Arial"/>
+                <a:cs typeface="Arial"/>
+              </a:defRPr>
+            </a:pPr>
+            <a:r>
+              <a:rPr sz="2100" b="0">
+                <a:solidFill>
+                  <a:srgbClr val="0C554E"/>
+                </a:solidFill>
+                <a:latin typeface="Arial"/>
+                <a:ea typeface="Arial"/>
+                <a:cs typeface="Arial"/>
+              </a:rPr>
+              <a:t>→</a:t>
+            </a:r>
+          </a:p>
+        </p:txBody>
+      </p:sp>
+      <p:sp>
+        <p:nvSpPr>
+          <p:cNvPr id="17" name="">
+            <a:extLst xmlns:a="http://schemas.openxmlformats.org/drawingml/2006/main">
+              <a:ext uri="{FF2B5EF4-FFF2-40B4-BE49-F238E27FC236}">
+                <a16:creationId xmlns:a16="http://schemas.microsoft.com/office/drawing/2014/main" id="{850A4479-FBF8-4B74-9829-D0B595EBCCC1}"/>
+              </a:ext>
+            </a:extLst>
+          </p:cNvPr>
+          <p:cNvSpPr>
+            <a:spLocks xmlns:a="http://schemas.openxmlformats.org/drawingml/2006/main" noGrp="1"/>
+          </p:cNvSpPr>
+          <p:nvPr/>
+        </p:nvSpPr>
+        <p:spPr>
+          <a:xfrm xmlns:a="http://schemas.openxmlformats.org/drawingml/2006/main">
+            <a:off x="6172200" y="4629150"/>
+            <a:ext cx="2524125" cy="952500"/>
+          </a:xfrm>
+          <a:prstGeom xmlns:a="http://schemas.openxmlformats.org/drawingml/2006/main" prst="rect">
+            <a:avLst/>
+          </a:prstGeom>
+          <a:noFill xmlns:a="http://schemas.openxmlformats.org/drawingml/2006/main"/>
+          <a:ln xmlns:a="http://schemas.openxmlformats.org/drawingml/2006/main" w="0">
+            <a:noFill/>
+          </a:ln>
+        </p:spPr>
+        <p:txBody>
+          <a:bodyPr xmlns:a="http://schemas.openxmlformats.org/drawingml/2006/main">
+            <a:noAutofit/>
+          </a:bodyPr>
+          <a:lstStyle xmlns:a="http://schemas.openxmlformats.org/drawingml/2006/main"/>
+          <a:p xmlns:a="http://schemas.openxmlformats.org/drawingml/2006/main">
+            <a:pPr>
+              <a:buNone/>
+              <a:defRPr sz="2025" b="0">
+                <a:solidFill>
+                  <a:srgbClr val="103D36"/>
+                </a:solidFill>
+                <a:latin typeface="Arial"/>
+                <a:ea typeface="Arial"/>
+                <a:cs typeface="Arial"/>
+              </a:defRPr>
+            </a:pPr>
+            <a:r>
+              <a:rPr sz="2025" b="0">
+                <a:solidFill>
+                  <a:srgbClr val="103D36"/>
+                </a:solidFill>
+                <a:latin typeface="Arial"/>
+                <a:ea typeface="Arial"/>
+                <a:cs typeface="Arial"/>
+              </a:rPr>
+              <a:t>Pretrained</a:t>
+            </a:r>
+          </a:p>
+          <a:p xmlns:a="http://schemas.openxmlformats.org/drawingml/2006/main">
+            <a:pPr>
+              <a:buNone/>
+              <a:defRPr sz="2025" b="0">
+                <a:solidFill>
+                  <a:srgbClr val="103D36"/>
+                </a:solidFill>
+                <a:latin typeface="Arial"/>
+                <a:ea typeface="Arial"/>
+                <a:cs typeface="Arial"/>
+              </a:defRPr>
+            </a:pPr>
+            <a:r>
+              <a:rPr sz="2025" b="0">
+                <a:solidFill>
+                  <a:srgbClr val="103D36"/>
+                </a:solidFill>
+                <a:latin typeface="Arial"/>
+                <a:ea typeface="Arial"/>
+                <a:cs typeface="Arial"/>
+              </a:rPr>
+              <a:t>MARS-S2L</a:t>
+            </a:r>
+          </a:p>
+        </p:txBody>
+      </p:sp>
+      <p:sp>
+        <p:nvSpPr>
+          <p:cNvPr id="18" name="">
+            <a:extLst xmlns:a="http://schemas.openxmlformats.org/drawingml/2006/main">
+              <a:ext uri="{FF2B5EF4-FFF2-40B4-BE49-F238E27FC236}">
+                <a16:creationId xmlns:a16="http://schemas.microsoft.com/office/drawing/2014/main" id="{22A6A921-D1CF-4E9D-A2CC-7A845E19A840}"/>
+              </a:ext>
+            </a:extLst>
+          </p:cNvPr>
+          <p:cNvSpPr>
+            <a:spLocks xmlns:a="http://schemas.openxmlformats.org/drawingml/2006/main" noGrp="1"/>
+          </p:cNvSpPr>
+          <p:nvPr/>
+        </p:nvSpPr>
+        <p:spPr>
+          <a:xfrm xmlns:a="http://schemas.openxmlformats.org/drawingml/2006/main">
+            <a:off x="8639175" y="4772025"/>
+            <a:ext cx="333375" cy="428625"/>
+          </a:xfrm>
+          <a:prstGeom xmlns:a="http://schemas.openxmlformats.org/drawingml/2006/main" prst="rect">
+            <a:avLst/>
+          </a:prstGeom>
+          <a:noFill xmlns:a="http://schemas.openxmlformats.org/drawingml/2006/main"/>
+          <a:ln xmlns:a="http://schemas.openxmlformats.org/drawingml/2006/main" w="0">
+            <a:noFill/>
+          </a:ln>
+        </p:spPr>
+        <p:txBody>
+          <a:bodyPr xmlns:a="http://schemas.openxmlformats.org/drawingml/2006/main">
+            <a:noAutofit/>
+          </a:bodyPr>
+          <a:lstStyle xmlns:a="http://schemas.openxmlformats.org/drawingml/2006/main"/>
+          <a:p xmlns:a="http://schemas.openxmlformats.org/drawingml/2006/main">
+            <a:pPr>
+              <a:buNone/>
+              <a:defRPr sz="2100" b="0">
+                <a:solidFill>
+                  <a:srgbClr val="0C554E"/>
+                </a:solidFill>
+                <a:latin typeface="Arial"/>
+                <a:ea typeface="Arial"/>
+                <a:cs typeface="Arial"/>
+              </a:defRPr>
+            </a:pPr>
+            <a:r>
+              <a:rPr sz="2100" b="0">
+                <a:solidFill>
+                  <a:srgbClr val="0C554E"/>
+                </a:solidFill>
+                <a:latin typeface="Arial"/>
+                <a:ea typeface="Arial"/>
+                <a:cs typeface="Arial"/>
+              </a:rPr>
+              <a:t>→</a:t>
+            </a:r>
+          </a:p>
+        </p:txBody>
+      </p:sp>
+      <p:sp>
+        <p:nvSpPr>
+          <p:cNvPr id="19" name="">
+            <a:extLst xmlns:a="http://schemas.openxmlformats.org/drawingml/2006/main">
+              <a:ext uri="{FF2B5EF4-FFF2-40B4-BE49-F238E27FC236}">
+                <a16:creationId xmlns:a16="http://schemas.microsoft.com/office/drawing/2014/main" id="{9892F48E-B4E1-4F62-B504-4777FE2B7ADF}"/>
+              </a:ext>
+            </a:extLst>
+          </p:cNvPr>
+          <p:cNvSpPr>
+            <a:spLocks xmlns:a="http://schemas.openxmlformats.org/drawingml/2006/main" noGrp="1"/>
+          </p:cNvSpPr>
+          <p:nvPr/>
+        </p:nvSpPr>
+        <p:spPr>
+          <a:xfrm xmlns:a="http://schemas.openxmlformats.org/drawingml/2006/main">
+            <a:off x="8953500" y="4629150"/>
+            <a:ext cx="2524125" cy="952500"/>
+          </a:xfrm>
+          <a:prstGeom xmlns:a="http://schemas.openxmlformats.org/drawingml/2006/main" prst="rect">
+            <a:avLst/>
+          </a:prstGeom>
+          <a:noFill xmlns:a="http://schemas.openxmlformats.org/drawingml/2006/main"/>
+          <a:ln xmlns:a="http://schemas.openxmlformats.org/drawingml/2006/main" w="0">
+            <a:noFill/>
+          </a:ln>
+        </p:spPr>
+        <p:txBody>
+          <a:bodyPr xmlns:a="http://schemas.openxmlformats.org/drawingml/2006/main">
+            <a:noAutofit/>
+          </a:bodyPr>
+          <a:lstStyle xmlns:a="http://schemas.openxmlformats.org/drawingml/2006/main"/>
+          <a:p xmlns:a="http://schemas.openxmlformats.org/drawingml/2006/main">
+            <a:pPr>
+              <a:buNone/>
+              <a:defRPr sz="2025" b="0">
+                <a:solidFill>
+                  <a:srgbClr val="103D36"/>
+                </a:solidFill>
+                <a:latin typeface="Arial"/>
+                <a:ea typeface="Arial"/>
+                <a:cs typeface="Arial"/>
+              </a:defRPr>
+            </a:pPr>
+            <a:r>
+              <a:rPr sz="2025" b="0">
+                <a:solidFill>
+                  <a:srgbClr val="103D36"/>
+                </a:solidFill>
+                <a:latin typeface="Arial"/>
+                <a:ea typeface="Arial"/>
+                <a:cs typeface="Arial"/>
+              </a:rPr>
+              <a:t>Candidate flag +</a:t>
+            </a:r>
+          </a:p>
+          <a:p xmlns:a="http://schemas.openxmlformats.org/drawingml/2006/main">
+            <a:pPr>
+              <a:buNone/>
+              <a:defRPr sz="2025" b="0">
+                <a:solidFill>
+                  <a:srgbClr val="103D36"/>
+                </a:solidFill>
+                <a:latin typeface="Arial"/>
+                <a:ea typeface="Arial"/>
+                <a:cs typeface="Arial"/>
+              </a:defRPr>
+            </a:pPr>
+            <a:r>
+              <a:rPr sz="2025" b="0">
+                <a:solidFill>
+                  <a:srgbClr val="103D36"/>
+                </a:solidFill>
+                <a:latin typeface="Arial"/>
+                <a:ea typeface="Arial"/>
+                <a:cs typeface="Arial"/>
+              </a:rPr>
+              <a:t>evidence history</a:t>
+            </a:r>
+          </a:p>
+        </p:txBody>
+      </p:sp>
+      <p:sp>
+        <p:nvSpPr>
+          <p:cNvPr id="20" name="">
+            <a:extLst xmlns:a="http://schemas.openxmlformats.org/drawingml/2006/main">
+              <a:ext uri="{FF2B5EF4-FFF2-40B4-BE49-F238E27FC236}">
+                <a16:creationId xmlns:a16="http://schemas.microsoft.com/office/drawing/2014/main" id="{986CE1AA-4D36-42BD-8442-078DB3E3343C}"/>
+              </a:ext>
+            </a:extLst>
+          </p:cNvPr>
+          <p:cNvSpPr>
+            <a:spLocks xmlns:a="http://schemas.openxmlformats.org/drawingml/2006/main" noGrp="1"/>
+          </p:cNvSpPr>
+          <p:nvPr/>
+        </p:nvSpPr>
+        <p:spPr>
+          <a:xfrm xmlns:a="http://schemas.openxmlformats.org/drawingml/2006/main">
+            <a:off x="609600" y="6000750"/>
+            <a:ext cx="10953750" cy="342900"/>
+          </a:xfrm>
+          <a:prstGeom xmlns:a="http://schemas.openxmlformats.org/drawingml/2006/main" prst="rect">
+            <a:avLst/>
+          </a:prstGeom>
+          <a:noFill xmlns:a="http://schemas.openxmlformats.org/drawingml/2006/main"/>
+          <a:ln xmlns:a="http://schemas.openxmlformats.org/drawingml/2006/main" w="0">
+            <a:noFill/>
+          </a:ln>
+        </p:spPr>
+        <p:txBody>
+          <a:bodyPr xmlns:a="http://schemas.openxmlformats.org/drawingml/2006/main">
+            <a:noAutofit/>
+          </a:bodyPr>
+          <a:lstStyle xmlns:a="http://schemas.openxmlformats.org/drawingml/2006/main"/>
+          <a:p xmlns:a="http://schemas.openxmlformats.org/drawingml/2006/main">
+            <a:pPr>
+              <a:buNone/>
+              <a:defRPr sz="1650" b="0">
+                <a:solidFill>
+                  <a:srgbClr val="53716A"/>
+                </a:solidFill>
+                <a:latin typeface="Arial"/>
+                <a:ea typeface="Arial"/>
+                <a:cs typeface="Arial"/>
+              </a:defRPr>
+            </a:pPr>
+            <a:r>
+              <a:rPr sz="1650" b="0">
+                <a:solidFill>
+                  <a:srgbClr val="53716A"/>
+                </a:solidFill>
+                <a:latin typeface="Arial"/>
+                <a:ea typeface="Arial"/>
+                <a:cs typeface="Arial"/>
+              </a:rPr>
+              <a:t>Different quantities and footprints remain separate. Missing observations stay unknown.</a:t>
+            </a:r>
+          </a:p>
+        </p:txBody>
+      </p:sp>
+    </p:spTree>
+    <p:extLst>
+      <p:ext uri="{BB962C8B-B14F-4D97-AF65-F5344CB8AC3E}">
+        <p14:creationId xmlns:p14="http://schemas.microsoft.com/office/powerpoint/2010/main" val="1177117794"/>
+      </p:ext>
+    </p:extLst>
+  </p:cSld>
+</p:sld>
+</file>
+
+<file path=ppt/slides/slide6.xml><?xml version="1.0" encoding="utf-8"?>
+<p:sld xmlns:p="http://schemas.openxmlformats.org/presentationml/2006/main">
+  <p:cSld>
+    <p:bg>
+      <p:bgPr>
+        <a:solidFill xmlns:a="http://schemas.openxmlformats.org/drawingml/2006/main">
+          <a:srgbClr val="F5F6EE"/>
+        </a:solidFill>
+      </p:bgPr>
+    </p:bg>
+    <p:spTree>
+      <p:nvGrpSpPr>
+        <p:cNvPr id="1" name=""/>
+        <p:cNvGrpSpPr/>
+        <p:nvPr/>
+      </p:nvGrpSpPr>
+      <p:grpSpPr>
+        <a:xfrm xmlns:a="http://schemas.openxmlformats.org/drawingml/2006/main"/>
+      </p:grpSpPr>
+      <p:sp>
+        <p:nvSpPr>
+          <p:cNvPr id="7" name="">
+            <a:extLst xmlns:a="http://schemas.openxmlformats.org/drawingml/2006/main">
+              <a:ext uri="{FF2B5EF4-FFF2-40B4-BE49-F238E27FC236}">
+                <a16:creationId xmlns:a16="http://schemas.microsoft.com/office/drawing/2014/main" id="{100A9114-098C-4A52-BCA0-65C715962670}"/>
+              </a:ext>
+            </a:extLst>
+          </p:cNvPr>
+          <p:cNvSpPr>
+            <a:spLocks xmlns:a="http://schemas.openxmlformats.org/drawingml/2006/main" noGrp="1"/>
+          </p:cNvSpPr>
+          <p:nvPr/>
+        </p:nvSpPr>
+        <p:spPr>
+          <a:xfrm xmlns:a="http://schemas.openxmlformats.org/drawingml/2006/main">
+            <a:off x="609600" y="457200"/>
+            <a:ext cx="10972800" cy="857250"/>
+          </a:xfrm>
+          <a:prstGeom xmlns:a="http://schemas.openxmlformats.org/drawingml/2006/main" prst="rect">
+            <a:avLst/>
+          </a:prstGeom>
+          <a:noFill xmlns:a="http://schemas.openxmlformats.org/drawingml/2006/main"/>
+          <a:ln xmlns:a="http://schemas.openxmlformats.org/drawingml/2006/main" w="0">
+            <a:noFill/>
+          </a:ln>
+        </p:spPr>
+        <p:txBody>
+          <a:bodyPr xmlns:a="http://schemas.openxmlformats.org/drawingml/2006/main">
+            <a:noAutofit/>
+          </a:bodyPr>
+          <a:lstStyle xmlns:a="http://schemas.openxmlformats.org/drawingml/2006/main"/>
+          <a:p xmlns:a="http://schemas.openxmlformats.org/drawingml/2006/main">
+            <a:pPr>
+              <a:buNone/>
+              <a:defRPr sz="3300" b="1">
+                <a:solidFill>
+                  <a:srgbClr val="103D36"/>
+                </a:solidFill>
+                <a:latin typeface="Arial"/>
+                <a:ea typeface="Arial"/>
+                <a:cs typeface="Arial"/>
+              </a:defRPr>
+            </a:pPr>
+            <a:r>
+              <a:rPr sz="3300" b="1">
+                <a:solidFill>
+                  <a:srgbClr val="103D36"/>
+                </a:solidFill>
+                <a:latin typeface="Arial"/>
+                <a:ea typeface="Arial"/>
+                <a:cs typeface="Arial"/>
+              </a:rPr>
+              <a:t>UAE atmospheric comparison</a:t>
+            </a:r>
+          </a:p>
+        </p:txBody>
+      </p:sp>
+      <p:sp>
+        <p:nvSpPr>
+          <p:cNvPr id="2" name="">
+            <a:extLst xmlns:a="http://schemas.openxmlformats.org/drawingml/2006/main">
+              <a:ext uri="{FF2B5EF4-FFF2-40B4-BE49-F238E27FC236}">
+                <a16:creationId xmlns:a16="http://schemas.microsoft.com/office/drawing/2014/main" id="{64DE6263-FC7B-40BF-BEBE-B13E5D49958D}"/>
+              </a:ext>
+            </a:extLst>
+          </p:cNvPr>
+          <p:cNvSpPr>
+            <a:spLocks xmlns:a="http://schemas.openxmlformats.org/drawingml/2006/main" noGrp="1"/>
+          </p:cNvSpPr>
+          <p:nvPr/>
+        </p:nvSpPr>
+        <p:spPr>
+          <a:xfrm xmlns:a="http://schemas.openxmlformats.org/drawingml/2006/main">
+            <a:off x="609600" y="1362075"/>
+            <a:ext cx="10972800" cy="28575"/>
+          </a:xfrm>
+          <a:prstGeom xmlns:a="http://schemas.openxmlformats.org/drawingml/2006/main" prst="rect">
+            <a:avLst/>
+          </a:prstGeom>
+          <a:solidFill xmlns:a="http://schemas.openxmlformats.org/drawingml/2006/main">
+            <a:srgbClr val="0C554E"/>
+          </a:solidFill>
+          <a:ln xmlns:a="http://schemas.openxmlformats.org/drawingml/2006/main" w="0">
+            <a:noFill/>
+          </a:ln>
+        </p:spPr>
+      </p:sp>
+      <p:sp>
+        <p:nvSpPr>
+          <p:cNvPr id="3" name="">
+            <a:extLst xmlns:a="http://schemas.openxmlformats.org/drawingml/2006/main">
+              <a:ext uri="{FF2B5EF4-FFF2-40B4-BE49-F238E27FC236}">
+                <a16:creationId xmlns:a16="http://schemas.microsoft.com/office/drawing/2014/main" id="{53CA7B3A-93CC-4725-9DE8-A3C530D32D90}"/>
+              </a:ext>
+            </a:extLst>
+          </p:cNvPr>
+          <p:cNvSpPr>
+            <a:spLocks xmlns:a="http://schemas.openxmlformats.org/drawingml/2006/main" noGrp="1"/>
+          </p:cNvSpPr>
+          <p:nvPr/>
+        </p:nvSpPr>
+        <p:spPr>
+          <a:xfrm xmlns:a="http://schemas.openxmlformats.org/drawingml/2006/main">
+            <a:off x="11144250" y="6419850"/>
+            <a:ext cx="476250" cy="228600"/>
+          </a:xfrm>
+          <a:prstGeom xmlns:a="http://schemas.openxmlformats.org/drawingml/2006/main" prst="rect">
+            <a:avLst/>
+          </a:prstGeom>
+          <a:noFill xmlns:a="http://schemas.openxmlformats.org/drawingml/2006/main"/>
+          <a:ln xmlns:a="http://schemas.openxmlformats.org/drawingml/2006/main" w="0">
+            <a:noFill/>
+          </a:ln>
+        </p:spPr>
+        <p:txBody>
+          <a:bodyPr xmlns:a="http://schemas.openxmlformats.org/drawingml/2006/main">
+            <a:noAutofit/>
+          </a:bodyPr>
+          <a:lstStyle xmlns:a="http://schemas.openxmlformats.org/drawingml/2006/main"/>
+          <a:p xmlns:a="http://schemas.openxmlformats.org/drawingml/2006/main">
+            <a:pPr>
+              <a:buNone/>
+              <a:defRPr sz="1200" b="0">
+                <a:solidFill>
+                  <a:srgbClr val="53716A"/>
+                </a:solidFill>
+                <a:latin typeface="Arial"/>
+                <a:ea typeface="Arial"/>
+                <a:cs typeface="Arial"/>
+              </a:defRPr>
+            </a:pPr>
+            <a:r>
+              <a:rPr sz="1200" b="0">
+                <a:solidFill>
+                  <a:srgbClr val="53716A"/>
+                </a:solidFill>
+                <a:latin typeface="Arial"/>
+                <a:ea typeface="Arial"/>
+                <a:cs typeface="Arial"/>
+              </a:rPr>
+              <a:t>06</a:t>
+            </a:r>
+          </a:p>
+        </p:txBody>
+      </p:sp>
+      <p:sp>
+        <p:nvSpPr>
+          <p:cNvPr id="4" name="">
+            <a:extLst xmlns:a="http://schemas.openxmlformats.org/drawingml/2006/main">
+              <a:ext uri="{FF2B5EF4-FFF2-40B4-BE49-F238E27FC236}">
+                <a16:creationId xmlns:a16="http://schemas.microsoft.com/office/drawing/2014/main" id="{D05FDCAA-0A3F-44CE-8828-CB298E942A9E}"/>
+              </a:ext>
+            </a:extLst>
+          </p:cNvPr>
+          <p:cNvSpPr>
+            <a:spLocks xmlns:a="http://schemas.openxmlformats.org/drawingml/2006/main" noGrp="1"/>
+          </p:cNvSpPr>
+          <p:nvPr/>
+        </p:nvSpPr>
+        <p:spPr>
+          <a:xfrm xmlns:a="http://schemas.openxmlformats.org/drawingml/2006/main">
+            <a:off x="609600" y="1619250"/>
+            <a:ext cx="10953750" cy="428625"/>
+          </a:xfrm>
+          <a:prstGeom xmlns:a="http://schemas.openxmlformats.org/drawingml/2006/main" prst="rect">
+            <a:avLst/>
+          </a:prstGeom>
+          <a:noFill xmlns:a="http://schemas.openxmlformats.org/drawingml/2006/main"/>
+          <a:ln xmlns:a="http://schemas.openxmlformats.org/drawingml/2006/main" w="0">
+            <a:noFill/>
+          </a:ln>
+        </p:spPr>
+        <p:txBody>
+          <a:bodyPr xmlns:a="http://schemas.openxmlformats.org/drawingml/2006/main">
+            <a:noAutofit/>
+          </a:bodyPr>
+          <a:lstStyle xmlns:a="http://schemas.openxmlformats.org/drawingml/2006/main"/>
+          <a:p xmlns:a="http://schemas.openxmlformats.org/drawingml/2006/main">
+            <a:pPr>
+              <a:buNone/>
               <a:defRPr sz="2100" b="0">
                 <a:solidFill>
                   <a:srgbClr val="53716A"/>
@@ -6301,7 +8293,7 @@
       </p:sp>
       <p:graphicFrame>
         <p:nvGraphicFramePr>
-          <p:cNvPr id="11" name=""/>
+          <p:cNvPr id="13" name=""/>
           <p:cNvGraphicFramePr/>
           <p:nvPr/>
         </p:nvGraphicFramePr>
@@ -6726,6 +8718,7 @@
           <a:lstStyle xmlns:a="http://schemas.openxmlformats.org/drawingml/2006/main"/>
           <a:p xmlns:a="http://schemas.openxmlformats.org/drawingml/2006/main">
             <a:pPr>
+              <a:buNone/>
               <a:defRPr sz="1950" b="0">
                 <a:solidFill>
                   <a:srgbClr val="53716A"/>
@@ -6749,6 +8742,7 @@
           </a:p>
           <a:p xmlns:a="http://schemas.openxmlformats.org/drawingml/2006/main">
             <a:pPr>
+              <a:buNone/>
               <a:defRPr sz="1950" b="0">
                 <a:solidFill>
                   <a:srgbClr val="53716A"/>
@@ -6776,566 +8770,6 @@
     <p:extLst>
       <p:ext uri="{BB962C8B-B14F-4D97-AF65-F5344CB8AC3E}">
         <p14:creationId xmlns:p14="http://schemas.microsoft.com/office/powerpoint/2010/main" val="1633229823"/>
-      </p:ext>
-    </p:extLst>
-  </p:cSld>
-</p:sld>
-</file>
-
-<file path=ppt/slides/slide6.xml><?xml version="1.0" encoding="utf-8"?>
-<p:sld xmlns:p="http://schemas.openxmlformats.org/presentationml/2006/main">
-  <p:cSld>
-    <p:bg>
-      <p:bgPr>
-        <a:solidFill xmlns:a="http://schemas.openxmlformats.org/drawingml/2006/main">
-          <a:srgbClr val="F5F6EE"/>
-        </a:solidFill>
-      </p:bgPr>
-    </p:bg>
-    <p:spTree>
-      <p:nvGrpSpPr>
-        <p:cNvPr id="1" name=""/>
-        <p:cNvGrpSpPr/>
-        <p:nvPr/>
-      </p:nvGrpSpPr>
-      <p:grpSpPr>
-        <a:xfrm xmlns:a="http://schemas.openxmlformats.org/drawingml/2006/main"/>
-      </p:grpSpPr>
-      <p:sp>
-        <p:nvSpPr>
-          <p:cNvPr id="11" name="">
-            <a:extLst xmlns:a="http://schemas.openxmlformats.org/drawingml/2006/main">
-              <a:ext uri="{FF2B5EF4-FFF2-40B4-BE49-F238E27FC236}">
-                <a16:creationId xmlns:a16="http://schemas.microsoft.com/office/drawing/2014/main" id="{5527E088-C3B0-4956-873D-0AED0492ADD0}"/>
-              </a:ext>
-            </a:extLst>
-          </p:cNvPr>
-          <p:cNvSpPr>
-            <a:spLocks xmlns:a="http://schemas.openxmlformats.org/drawingml/2006/main" noGrp="1"/>
-          </p:cNvSpPr>
-          <p:nvPr/>
-        </p:nvSpPr>
-        <p:spPr>
-          <a:xfrm xmlns:a="http://schemas.openxmlformats.org/drawingml/2006/main">
-            <a:off x="609600" y="457200"/>
-            <a:ext cx="10972800" cy="857250"/>
-          </a:xfrm>
-          <a:prstGeom xmlns:a="http://schemas.openxmlformats.org/drawingml/2006/main" prst="rect">
-            <a:avLst/>
-          </a:prstGeom>
-          <a:noFill xmlns:a="http://schemas.openxmlformats.org/drawingml/2006/main"/>
-          <a:ln xmlns:a="http://schemas.openxmlformats.org/drawingml/2006/main" w="0">
-            <a:noFill/>
-          </a:ln>
-        </p:spPr>
-        <p:txBody>
-          <a:bodyPr xmlns:a="http://schemas.openxmlformats.org/drawingml/2006/main">
-            <a:noAutofit/>
-          </a:bodyPr>
-          <a:lstStyle xmlns:a="http://schemas.openxmlformats.org/drawingml/2006/main"/>
-          <a:p xmlns:a="http://schemas.openxmlformats.org/drawingml/2006/main">
-            <a:pPr>
-              <a:defRPr sz="3300" b="1">
-                <a:solidFill>
-                  <a:srgbClr val="103D36"/>
-                </a:solidFill>
-                <a:latin typeface="Arial"/>
-                <a:ea typeface="Arial"/>
-                <a:cs typeface="Arial"/>
-              </a:defRPr>
-            </a:pPr>
-            <a:r>
-              <a:rPr sz="3300" b="1">
-                <a:solidFill>
-                  <a:srgbClr val="103D36"/>
-                </a:solidFill>
-                <a:latin typeface="Arial"/>
-                <a:ea typeface="Arial"/>
-                <a:cs typeface="Arial"/>
-              </a:rPr>
-              <a:t>Dated methane screening</a:t>
-            </a:r>
-          </a:p>
-        </p:txBody>
-      </p:sp>
-      <p:sp>
-        <p:nvSpPr>
-          <p:cNvPr id="2" name="">
-            <a:extLst xmlns:a="http://schemas.openxmlformats.org/drawingml/2006/main">
-              <a:ext uri="{FF2B5EF4-FFF2-40B4-BE49-F238E27FC236}">
-                <a16:creationId xmlns:a16="http://schemas.microsoft.com/office/drawing/2014/main" id="{E1EE3B0F-839F-4A94-84D5-4AD1A0E236E4}"/>
-              </a:ext>
-            </a:extLst>
-          </p:cNvPr>
-          <p:cNvSpPr>
-            <a:spLocks xmlns:a="http://schemas.openxmlformats.org/drawingml/2006/main" noGrp="1"/>
-          </p:cNvSpPr>
-          <p:nvPr/>
-        </p:nvSpPr>
-        <p:spPr>
-          <a:xfrm xmlns:a="http://schemas.openxmlformats.org/drawingml/2006/main">
-            <a:off x="609600" y="1362075"/>
-            <a:ext cx="10972800" cy="28575"/>
-          </a:xfrm>
-          <a:prstGeom xmlns:a="http://schemas.openxmlformats.org/drawingml/2006/main" prst="rect">
-            <a:avLst/>
-          </a:prstGeom>
-          <a:solidFill xmlns:a="http://schemas.openxmlformats.org/drawingml/2006/main">
-            <a:srgbClr val="0C554E"/>
-          </a:solidFill>
-          <a:ln xmlns:a="http://schemas.openxmlformats.org/drawingml/2006/main" w="0">
-            <a:noFill/>
-          </a:ln>
-        </p:spPr>
-      </p:sp>
-      <p:sp>
-        <p:nvSpPr>
-          <p:cNvPr id="3" name="">
-            <a:extLst xmlns:a="http://schemas.openxmlformats.org/drawingml/2006/main">
-              <a:ext uri="{FF2B5EF4-FFF2-40B4-BE49-F238E27FC236}">
-                <a16:creationId xmlns:a16="http://schemas.microsoft.com/office/drawing/2014/main" id="{BE1F7821-1A15-45F4-956A-79F5BD60151A}"/>
-              </a:ext>
-            </a:extLst>
-          </p:cNvPr>
-          <p:cNvSpPr>
-            <a:spLocks xmlns:a="http://schemas.openxmlformats.org/drawingml/2006/main" noGrp="1"/>
-          </p:cNvSpPr>
-          <p:nvPr/>
-        </p:nvSpPr>
-        <p:spPr>
-          <a:xfrm xmlns:a="http://schemas.openxmlformats.org/drawingml/2006/main">
-            <a:off x="11144250" y="6419850"/>
-            <a:ext cx="476250" cy="228600"/>
-          </a:xfrm>
-          <a:prstGeom xmlns:a="http://schemas.openxmlformats.org/drawingml/2006/main" prst="rect">
-            <a:avLst/>
-          </a:prstGeom>
-          <a:noFill xmlns:a="http://schemas.openxmlformats.org/drawingml/2006/main"/>
-          <a:ln xmlns:a="http://schemas.openxmlformats.org/drawingml/2006/main" w="0">
-            <a:noFill/>
-          </a:ln>
-        </p:spPr>
-        <p:txBody>
-          <a:bodyPr xmlns:a="http://schemas.openxmlformats.org/drawingml/2006/main">
-            <a:noAutofit/>
-          </a:bodyPr>
-          <a:lstStyle xmlns:a="http://schemas.openxmlformats.org/drawingml/2006/main"/>
-          <a:p xmlns:a="http://schemas.openxmlformats.org/drawingml/2006/main">
-            <a:pPr>
-              <a:defRPr sz="1200" b="0">
-                <a:solidFill>
-                  <a:srgbClr val="53716A"/>
-                </a:solidFill>
-                <a:latin typeface="Arial"/>
-                <a:ea typeface="Arial"/>
-                <a:cs typeface="Arial"/>
-              </a:defRPr>
-            </a:pPr>
-            <a:r>
-              <a:rPr sz="1200" b="0">
-                <a:solidFill>
-                  <a:srgbClr val="53716A"/>
-                </a:solidFill>
-                <a:latin typeface="Arial"/>
-                <a:ea typeface="Arial"/>
-                <a:cs typeface="Arial"/>
-              </a:rPr>
-              <a:t>06</a:t>
-            </a:r>
-          </a:p>
-        </p:txBody>
-      </p:sp>
-      <p:sp>
-        <p:nvSpPr>
-          <p:cNvPr id="4" name="">
-            <a:extLst xmlns:a="http://schemas.openxmlformats.org/drawingml/2006/main">
-              <a:ext uri="{FF2B5EF4-FFF2-40B4-BE49-F238E27FC236}">
-                <a16:creationId xmlns:a16="http://schemas.microsoft.com/office/drawing/2014/main" id="{89A5918F-8FE0-49B9-B842-0D09F3911A66}"/>
-              </a:ext>
-            </a:extLst>
-          </p:cNvPr>
-          <p:cNvSpPr>
-            <a:spLocks xmlns:a="http://schemas.openxmlformats.org/drawingml/2006/main" noGrp="1"/>
-          </p:cNvSpPr>
-          <p:nvPr/>
-        </p:nvSpPr>
-        <p:spPr>
-          <a:xfrm xmlns:a="http://schemas.openxmlformats.org/drawingml/2006/main">
-            <a:off x="609600" y="1628775"/>
-            <a:ext cx="10953750" cy="733425"/>
-          </a:xfrm>
-          <a:prstGeom xmlns:a="http://schemas.openxmlformats.org/drawingml/2006/main" prst="rect">
-            <a:avLst/>
-          </a:prstGeom>
-          <a:noFill xmlns:a="http://schemas.openxmlformats.org/drawingml/2006/main"/>
-          <a:ln xmlns:a="http://schemas.openxmlformats.org/drawingml/2006/main" w="0">
-            <a:noFill/>
-          </a:ln>
-        </p:spPr>
-        <p:txBody>
-          <a:bodyPr xmlns:a="http://schemas.openxmlformats.org/drawingml/2006/main">
-            <a:noAutofit/>
-          </a:bodyPr>
-          <a:lstStyle xmlns:a="http://schemas.openxmlformats.org/drawingml/2006/main"/>
-          <a:p xmlns:a="http://schemas.openxmlformats.org/drawingml/2006/main">
-            <a:pPr>
-              <a:defRPr sz="2025" b="0">
-                <a:solidFill>
-                  <a:srgbClr val="53716A"/>
-                </a:solidFill>
-                <a:latin typeface="Arial"/>
-                <a:ea typeface="Arial"/>
-                <a:cs typeface="Arial"/>
-              </a:defRPr>
-            </a:pPr>
-            <a:r>
-              <a:rPr sz="2025" b="0">
-                <a:solidFill>
-                  <a:srgbClr val="53716A"/>
-                </a:solidFill>
-                <a:latin typeface="Arial"/>
-                <a:ea typeface="Arial"/>
-                <a:cs typeface="Arial"/>
-              </a:rPr>
-              <a:t>22 September 2026 observation · 9 September reference</a:t>
-            </a:r>
-          </a:p>
-          <a:p xmlns:a="http://schemas.openxmlformats.org/drawingml/2006/main">
-            <a:pPr>
-              <a:defRPr sz="2025" b="0">
-                <a:solidFill>
-                  <a:srgbClr val="53716A"/>
-                </a:solidFill>
-                <a:latin typeface="Arial"/>
-                <a:ea typeface="Arial"/>
-                <a:cs typeface="Arial"/>
-              </a:defRPr>
-            </a:pPr>
-            <a:r>
-              <a:rPr sz="2025" b="0">
-                <a:solidFill>
-                  <a:srgbClr val="53716A"/>
-                </a:solidFill>
-                <a:latin typeface="Arial"/>
-                <a:ea typeface="Arial"/>
-                <a:cs typeface="Arial"/>
-              </a:rPr>
-              <a:t>23.86479° N, 53.61893° E</a:t>
-            </a:r>
-          </a:p>
-        </p:txBody>
-      </p:sp>
-      <p:pic>
-        <p:nvPicPr>
-          <p:cNvPr id="15" name=""/>
-          <p:cNvPicPr>
-            <a:picLocks xmlns:a="http://schemas.openxmlformats.org/drawingml/2006/main" noChangeAspect="1"/>
-          </p:cNvPicPr>
-          <p:nvPr/>
-        </p:nvPicPr>
-        <p:blipFill>
-          <a:blip xmlns:r="http://schemas.openxmlformats.org/officeDocument/2006/relationships" xmlns:a="http://schemas.openxmlformats.org/drawingml/2006/main" r:embed="R2ba796dc078c4728"/>
-          <a:stretch xmlns:a="http://schemas.openxmlformats.org/drawingml/2006/main"/>
-        </p:blipFill>
-        <p:spPr>
-          <a:xfrm xmlns:a="http://schemas.openxmlformats.org/drawingml/2006/main">
-            <a:off x="609600" y="2571452"/>
-            <a:ext cx="7858125" cy="2848570"/>
-          </a:xfrm>
-          <a:prstGeom xmlns:a="http://schemas.openxmlformats.org/drawingml/2006/main" prst="rect">
-            <a:avLst/>
-          </a:prstGeom>
-        </p:spPr>
-      </p:pic>
-      <p:sp>
-        <p:nvSpPr>
-          <p:cNvPr id="6" name="">
-            <a:extLst xmlns:a="http://schemas.openxmlformats.org/drawingml/2006/main">
-              <a:ext uri="{FF2B5EF4-FFF2-40B4-BE49-F238E27FC236}">
-                <a16:creationId xmlns:a16="http://schemas.microsoft.com/office/drawing/2014/main" id="{37E3F5F3-B4A2-4F15-AC91-9BACD4DDD48D}"/>
-              </a:ext>
-            </a:extLst>
-          </p:cNvPr>
-          <p:cNvSpPr>
-            <a:spLocks xmlns:a="http://schemas.openxmlformats.org/drawingml/2006/main" noGrp="1"/>
-          </p:cNvSpPr>
-          <p:nvPr/>
-        </p:nvSpPr>
-        <p:spPr>
-          <a:xfrm xmlns:a="http://schemas.openxmlformats.org/drawingml/2006/main">
-            <a:off x="8915400" y="2714625"/>
-            <a:ext cx="2476500" cy="809625"/>
-          </a:xfrm>
-          <a:prstGeom xmlns:a="http://schemas.openxmlformats.org/drawingml/2006/main" prst="rect">
-            <a:avLst/>
-          </a:prstGeom>
-          <a:noFill xmlns:a="http://schemas.openxmlformats.org/drawingml/2006/main"/>
-          <a:ln xmlns:a="http://schemas.openxmlformats.org/drawingml/2006/main" w="0">
-            <a:noFill/>
-          </a:ln>
-        </p:spPr>
-        <p:txBody>
-          <a:bodyPr xmlns:a="http://schemas.openxmlformats.org/drawingml/2006/main">
-            <a:noAutofit/>
-          </a:bodyPr>
-          <a:lstStyle xmlns:a="http://schemas.openxmlformats.org/drawingml/2006/main"/>
-          <a:p xmlns:a="http://schemas.openxmlformats.org/drawingml/2006/main">
-            <a:pPr>
-              <a:defRPr sz="5100" b="1">
-                <a:solidFill>
-                  <a:srgbClr val="0C554E"/>
-                </a:solidFill>
-                <a:latin typeface="Arial"/>
-                <a:ea typeface="Arial"/>
-                <a:cs typeface="Arial"/>
-              </a:defRPr>
-            </a:pPr>
-            <a:r>
-              <a:rPr sz="5100" b="1">
-                <a:solidFill>
-                  <a:srgbClr val="0C554E"/>
-                </a:solidFill>
-                <a:latin typeface="Arial"/>
-                <a:ea typeface="Arial"/>
-                <a:cs typeface="Arial"/>
-              </a:rPr>
-              <a:t>0</a:t>
-            </a:r>
-          </a:p>
-        </p:txBody>
-      </p:sp>
-      <p:sp>
-        <p:nvSpPr>
-          <p:cNvPr id="7" name="">
-            <a:extLst xmlns:a="http://schemas.openxmlformats.org/drawingml/2006/main">
-              <a:ext uri="{FF2B5EF4-FFF2-40B4-BE49-F238E27FC236}">
-                <a16:creationId xmlns:a16="http://schemas.microsoft.com/office/drawing/2014/main" id="{34C46E2D-E4A0-4C49-AB77-B7D5F12F4E84}"/>
-              </a:ext>
-            </a:extLst>
-          </p:cNvPr>
-          <p:cNvSpPr>
-            <a:spLocks xmlns:a="http://schemas.openxmlformats.org/drawingml/2006/main" noGrp="1"/>
-          </p:cNvSpPr>
-          <p:nvPr/>
-        </p:nvSpPr>
-        <p:spPr>
-          <a:xfrm xmlns:a="http://schemas.openxmlformats.org/drawingml/2006/main">
-            <a:off x="8915400" y="3552825"/>
-            <a:ext cx="2524125" cy="400050"/>
-          </a:xfrm>
-          <a:prstGeom xmlns:a="http://schemas.openxmlformats.org/drawingml/2006/main" prst="rect">
-            <a:avLst/>
-          </a:prstGeom>
-          <a:noFill xmlns:a="http://schemas.openxmlformats.org/drawingml/2006/main"/>
-          <a:ln xmlns:a="http://schemas.openxmlformats.org/drawingml/2006/main" w="0">
-            <a:noFill/>
-          </a:ln>
-        </p:spPr>
-        <p:txBody>
-          <a:bodyPr xmlns:a="http://schemas.openxmlformats.org/drawingml/2006/main">
-            <a:noAutofit/>
-          </a:bodyPr>
-          <a:lstStyle xmlns:a="http://schemas.openxmlformats.org/drawingml/2006/main"/>
-          <a:p xmlns:a="http://schemas.openxmlformats.org/drawingml/2006/main">
-            <a:pPr>
-              <a:defRPr sz="1875" b="0">
-                <a:solidFill>
-                  <a:srgbClr val="103D36"/>
-                </a:solidFill>
-                <a:latin typeface="Arial"/>
-                <a:ea typeface="Arial"/>
-                <a:cs typeface="Arial"/>
-              </a:defRPr>
-            </a:pPr>
-            <a:r>
-              <a:rPr sz="1875" b="0">
-                <a:solidFill>
-                  <a:srgbClr val="103D36"/>
-                </a:solidFill>
-                <a:latin typeface="Arial"/>
-                <a:ea typeface="Arial"/>
-                <a:cs typeface="Arial"/>
-              </a:rPr>
-              <a:t>candidate pixels</a:t>
-            </a:r>
-          </a:p>
-        </p:txBody>
-      </p:sp>
-      <p:sp>
-        <p:nvSpPr>
-          <p:cNvPr id="8" name="">
-            <a:extLst xmlns:a="http://schemas.openxmlformats.org/drawingml/2006/main">
-              <a:ext uri="{FF2B5EF4-FFF2-40B4-BE49-F238E27FC236}">
-                <a16:creationId xmlns:a16="http://schemas.microsoft.com/office/drawing/2014/main" id="{EBB52AEF-0164-4EA2-9714-D701FB0CC9B3}"/>
-              </a:ext>
-            </a:extLst>
-          </p:cNvPr>
-          <p:cNvSpPr>
-            <a:spLocks xmlns:a="http://schemas.openxmlformats.org/drawingml/2006/main" noGrp="1"/>
-          </p:cNvSpPr>
-          <p:nvPr/>
-        </p:nvSpPr>
-        <p:spPr>
-          <a:xfrm xmlns:a="http://schemas.openxmlformats.org/drawingml/2006/main">
-            <a:off x="8915400" y="4181475"/>
-            <a:ext cx="2571750" cy="552450"/>
-          </a:xfrm>
-          <a:prstGeom xmlns:a="http://schemas.openxmlformats.org/drawingml/2006/main" prst="rect">
-            <a:avLst/>
-          </a:prstGeom>
-          <a:noFill xmlns:a="http://schemas.openxmlformats.org/drawingml/2006/main"/>
-          <a:ln xmlns:a="http://schemas.openxmlformats.org/drawingml/2006/main" w="0">
-            <a:noFill/>
-          </a:ln>
-        </p:spPr>
-        <p:txBody>
-          <a:bodyPr xmlns:a="http://schemas.openxmlformats.org/drawingml/2006/main">
-            <a:noAutofit/>
-          </a:bodyPr>
-          <a:lstStyle xmlns:a="http://schemas.openxmlformats.org/drawingml/2006/main"/>
-          <a:p xmlns:a="http://schemas.openxmlformats.org/drawingml/2006/main">
-            <a:pPr>
-              <a:defRPr sz="3225" b="1">
-                <a:solidFill>
-                  <a:srgbClr val="0C554E"/>
-                </a:solidFill>
-                <a:latin typeface="Arial"/>
-                <a:ea typeface="Arial"/>
-                <a:cs typeface="Arial"/>
-              </a:defRPr>
-            </a:pPr>
-            <a:r>
-              <a:rPr sz="3225" b="1">
-                <a:solidFill>
-                  <a:srgbClr val="0C554E"/>
-                </a:solidFill>
-                <a:latin typeface="Arial"/>
-                <a:ea typeface="Arial"/>
-                <a:cs typeface="Arial"/>
-              </a:rPr>
-              <a:t>96.04%</a:t>
-            </a:r>
-          </a:p>
-        </p:txBody>
-      </p:sp>
-      <p:sp>
-        <p:nvSpPr>
-          <p:cNvPr id="9" name="">
-            <a:extLst xmlns:a="http://schemas.openxmlformats.org/drawingml/2006/main">
-              <a:ext uri="{FF2B5EF4-FFF2-40B4-BE49-F238E27FC236}">
-                <a16:creationId xmlns:a16="http://schemas.microsoft.com/office/drawing/2014/main" id="{05FC77C0-F35D-497D-8BA2-86068FAE3EF7}"/>
-              </a:ext>
-            </a:extLst>
-          </p:cNvPr>
-          <p:cNvSpPr>
-            <a:spLocks xmlns:a="http://schemas.openxmlformats.org/drawingml/2006/main" noGrp="1"/>
-          </p:cNvSpPr>
-          <p:nvPr/>
-        </p:nvSpPr>
-        <p:spPr>
-          <a:xfrm xmlns:a="http://schemas.openxmlformats.org/drawingml/2006/main">
-            <a:off x="8915400" y="4819650"/>
-            <a:ext cx="2524125" cy="381000"/>
-          </a:xfrm>
-          <a:prstGeom xmlns:a="http://schemas.openxmlformats.org/drawingml/2006/main" prst="rect">
-            <a:avLst/>
-          </a:prstGeom>
-          <a:noFill xmlns:a="http://schemas.openxmlformats.org/drawingml/2006/main"/>
-          <a:ln xmlns:a="http://schemas.openxmlformats.org/drawingml/2006/main" w="0">
-            <a:noFill/>
-          </a:ln>
-        </p:spPr>
-        <p:txBody>
-          <a:bodyPr xmlns:a="http://schemas.openxmlformats.org/drawingml/2006/main">
-            <a:noAutofit/>
-          </a:bodyPr>
-          <a:lstStyle xmlns:a="http://schemas.openxmlformats.org/drawingml/2006/main"/>
-          <a:p xmlns:a="http://schemas.openxmlformats.org/drawingml/2006/main">
-            <a:pPr>
-              <a:defRPr sz="1875" b="0">
-                <a:solidFill>
-                  <a:srgbClr val="103D36"/>
-                </a:solidFill>
-                <a:latin typeface="Arial"/>
-                <a:ea typeface="Arial"/>
-                <a:cs typeface="Arial"/>
-              </a:defRPr>
-            </a:pPr>
-            <a:r>
-              <a:rPr sz="1875" b="0">
-                <a:solidFill>
-                  <a:srgbClr val="103D36"/>
-                </a:solidFill>
-                <a:latin typeface="Arial"/>
-                <a:ea typeface="Arial"/>
-                <a:cs typeface="Arial"/>
-              </a:rPr>
-              <a:t>usable coverage</a:t>
-            </a:r>
-          </a:p>
-        </p:txBody>
-      </p:sp>
-      <p:sp>
-        <p:nvSpPr>
-          <p:cNvPr id="10" name="">
-            <a:extLst xmlns:a="http://schemas.openxmlformats.org/drawingml/2006/main">
-              <a:ext uri="{FF2B5EF4-FFF2-40B4-BE49-F238E27FC236}">
-                <a16:creationId xmlns:a16="http://schemas.microsoft.com/office/drawing/2014/main" id="{71DBFFDC-A961-4B0E-BAA9-34A938ADB8C5}"/>
-              </a:ext>
-            </a:extLst>
-          </p:cNvPr>
-          <p:cNvSpPr>
-            <a:spLocks xmlns:a="http://schemas.openxmlformats.org/drawingml/2006/main" noGrp="1"/>
-          </p:cNvSpPr>
-          <p:nvPr/>
-        </p:nvSpPr>
-        <p:spPr>
-          <a:xfrm xmlns:a="http://schemas.openxmlformats.org/drawingml/2006/main">
-            <a:off x="609600" y="5800725"/>
-            <a:ext cx="10953750" cy="466725"/>
-          </a:xfrm>
-          <a:prstGeom xmlns:a="http://schemas.openxmlformats.org/drawingml/2006/main" prst="rect">
-            <a:avLst/>
-          </a:prstGeom>
-          <a:noFill xmlns:a="http://schemas.openxmlformats.org/drawingml/2006/main"/>
-          <a:ln xmlns:a="http://schemas.openxmlformats.org/drawingml/2006/main" w="0">
-            <a:noFill/>
-          </a:ln>
-        </p:spPr>
-        <p:txBody>
-          <a:bodyPr xmlns:a="http://schemas.openxmlformats.org/drawingml/2006/main">
-            <a:noAutofit/>
-          </a:bodyPr>
-          <a:lstStyle xmlns:a="http://schemas.openxmlformats.org/drawingml/2006/main"/>
-          <a:p xmlns:a="http://schemas.openxmlformats.org/drawingml/2006/main">
-            <a:pPr>
-              <a:defRPr sz="1950" b="0">
-                <a:solidFill>
-                  <a:srgbClr val="53716A"/>
-                </a:solidFill>
-                <a:latin typeface="Arial"/>
-                <a:ea typeface="Arial"/>
-                <a:cs typeface="Arial"/>
-              </a:defRPr>
-            </a:pPr>
-            <a:r>
-              <a:rPr sz="1950" b="0">
-                <a:solidFill>
-                  <a:srgbClr val="53716A"/>
-                </a:solidFill>
-                <a:latin typeface="Arial"/>
-                <a:ea typeface="Arial"/>
-                <a:cs typeface="Arial"/>
-              </a:rPr>
-              <a:t>No candidate is not proof of zero methane. Coverage is not model accuracy.</a:t>
-            </a:r>
-          </a:p>
-        </p:txBody>
-      </p:sp>
-    </p:spTree>
-    <p:extLst>
-      <p:ext uri="{BB962C8B-B14F-4D97-AF65-F5344CB8AC3E}">
-        <p14:creationId xmlns:p14="http://schemas.microsoft.com/office/powerpoint/2010/main" val="248704083"/>
       </p:ext>
     </p:extLst>
   </p:cSld>
@@ -7363,10 +8797,10 @@
       </p:grpSpPr>
       <p:sp>
         <p:nvSpPr>
-          <p:cNvPr id="17" name="">
-            <a:extLst xmlns:a="http://schemas.openxmlformats.org/drawingml/2006/main">
-              <a:ext uri="{FF2B5EF4-FFF2-40B4-BE49-F238E27FC236}">
-                <a16:creationId xmlns:a16="http://schemas.microsoft.com/office/drawing/2014/main" id="{B9B43ACC-D32B-4CD0-885D-F2A46CBB51FA}"/>
+          <p:cNvPr id="11" name="">
+            <a:extLst xmlns:a="http://schemas.openxmlformats.org/drawingml/2006/main">
+              <a:ext uri="{FF2B5EF4-FFF2-40B4-BE49-F238E27FC236}">
+                <a16:creationId xmlns:a16="http://schemas.microsoft.com/office/drawing/2014/main" id="{5527E088-C3B0-4956-873D-0AED0492ADD0}"/>
               </a:ext>
             </a:extLst>
           </p:cNvPr>
@@ -7395,6 +8829,7 @@
           <a:lstStyle xmlns:a="http://schemas.openxmlformats.org/drawingml/2006/main"/>
           <a:p xmlns:a="http://schemas.openxmlformats.org/drawingml/2006/main">
             <a:pPr>
+              <a:buNone/>
               <a:defRPr sz="3300" b="1">
                 <a:solidFill>
                   <a:srgbClr val="103D36"/>
@@ -7413,7 +8848,7 @@
                 <a:ea typeface="Arial"/>
                 <a:cs typeface="Arial"/>
               </a:rPr>
-              <a:t>Review an area in GeoGuard</a:t>
+              <a:t>Dated methane screening</a:t>
             </a:r>
           </a:p>
         </p:txBody>
@@ -7423,7 +8858,7 @@
           <p:cNvPr id="2" name="">
             <a:extLst xmlns:a="http://schemas.openxmlformats.org/drawingml/2006/main">
               <a:ext uri="{FF2B5EF4-FFF2-40B4-BE49-F238E27FC236}">
-                <a16:creationId xmlns:a16="http://schemas.microsoft.com/office/drawing/2014/main" id="{A3060114-1ABE-4F64-BC68-D7E83D8E4A07}"/>
+                <a16:creationId xmlns:a16="http://schemas.microsoft.com/office/drawing/2014/main" id="{E1EE3B0F-839F-4A94-84D5-4AD1A0E236E4}"/>
               </a:ext>
             </a:extLst>
           </p:cNvPr>
@@ -7453,7 +8888,7 @@
           <p:cNvPr id="3" name="">
             <a:extLst xmlns:a="http://schemas.openxmlformats.org/drawingml/2006/main">
               <a:ext uri="{FF2B5EF4-FFF2-40B4-BE49-F238E27FC236}">
-                <a16:creationId xmlns:a16="http://schemas.microsoft.com/office/drawing/2014/main" id="{6BD2F857-32BD-41B1-A6B8-84F27069D9BC}"/>
+                <a16:creationId xmlns:a16="http://schemas.microsoft.com/office/drawing/2014/main" id="{BE1F7821-1A15-45F4-956A-79F5BD60151A}"/>
               </a:ext>
             </a:extLst>
           </p:cNvPr>
@@ -7482,6 +8917,7 @@
           <a:lstStyle xmlns:a="http://schemas.openxmlformats.org/drawingml/2006/main"/>
           <a:p xmlns:a="http://schemas.openxmlformats.org/drawingml/2006/main">
             <a:pPr>
+              <a:buNone/>
               <a:defRPr sz="1200" b="0">
                 <a:solidFill>
                   <a:srgbClr val="53716A"/>
@@ -7510,19 +8946,19 @@
           <p:cNvPr id="4" name="">
             <a:extLst xmlns:a="http://schemas.openxmlformats.org/drawingml/2006/main">
               <a:ext uri="{FF2B5EF4-FFF2-40B4-BE49-F238E27FC236}">
-                <a16:creationId xmlns:a16="http://schemas.microsoft.com/office/drawing/2014/main" id="{57DAC837-8819-40C6-B89B-A542D66C541A}"/>
-              </a:ext>
-            </a:extLst>
-          </p:cNvPr>
-          <p:cNvSpPr>
-            <a:spLocks xmlns:a="http://schemas.openxmlformats.org/drawingml/2006/main" noGrp="1"/>
-          </p:cNvSpPr>
-          <p:nvPr/>
-        </p:nvSpPr>
-        <p:spPr>
-          <a:xfrm xmlns:a="http://schemas.openxmlformats.org/drawingml/2006/main">
-            <a:off x="609600" y="1809750"/>
-            <a:ext cx="619125" cy="523875"/>
+                <a16:creationId xmlns:a16="http://schemas.microsoft.com/office/drawing/2014/main" id="{89A5918F-8FE0-49B9-B842-0D09F3911A66}"/>
+              </a:ext>
+            </a:extLst>
+          </p:cNvPr>
+          <p:cNvSpPr>
+            <a:spLocks xmlns:a="http://schemas.openxmlformats.org/drawingml/2006/main" noGrp="1"/>
+          </p:cNvSpPr>
+          <p:nvPr/>
+        </p:nvSpPr>
+        <p:spPr>
+          <a:xfrm xmlns:a="http://schemas.openxmlformats.org/drawingml/2006/main">
+            <a:off x="609600" y="1628775"/>
+            <a:ext cx="10953750" cy="733425"/>
           </a:xfrm>
           <a:prstGeom xmlns:a="http://schemas.openxmlformats.org/drawingml/2006/main" prst="rect">
             <a:avLst/>
@@ -7539,47 +8975,94 @@
           <a:lstStyle xmlns:a="http://schemas.openxmlformats.org/drawingml/2006/main"/>
           <a:p xmlns:a="http://schemas.openxmlformats.org/drawingml/2006/main">
             <a:pPr>
-              <a:defRPr sz="2850" b="1">
-                <a:solidFill>
-                  <a:srgbClr val="0C554E"/>
-                </a:solidFill>
-                <a:latin typeface="Arial"/>
-                <a:ea typeface="Arial"/>
-                <a:cs typeface="Arial"/>
-              </a:defRPr>
-            </a:pPr>
-            <a:r>
-              <a:rPr sz="2850" b="1">
-                <a:solidFill>
-                  <a:srgbClr val="0C554E"/>
-                </a:solidFill>
-                <a:latin typeface="Arial"/>
-                <a:ea typeface="Arial"/>
-                <a:cs typeface="Arial"/>
-              </a:rPr>
-              <a:t>1</a:t>
-            </a:r>
-          </a:p>
-        </p:txBody>
-      </p:sp>
-      <p:sp>
-        <p:nvSpPr>
-          <p:cNvPr id="5" name="">
-            <a:extLst xmlns:a="http://schemas.openxmlformats.org/drawingml/2006/main">
-              <a:ext uri="{FF2B5EF4-FFF2-40B4-BE49-F238E27FC236}">
-                <a16:creationId xmlns:a16="http://schemas.microsoft.com/office/drawing/2014/main" id="{FCD9A5C3-94FB-41C2-9E66-ABFDC2F6B475}"/>
-              </a:ext>
-            </a:extLst>
-          </p:cNvPr>
-          <p:cNvSpPr>
-            <a:spLocks xmlns:a="http://schemas.openxmlformats.org/drawingml/2006/main" noGrp="1"/>
-          </p:cNvSpPr>
-          <p:nvPr/>
-        </p:nvSpPr>
-        <p:spPr>
-          <a:xfrm xmlns:a="http://schemas.openxmlformats.org/drawingml/2006/main">
-            <a:off x="1438275" y="1809750"/>
-            <a:ext cx="4762500" cy="457200"/>
+              <a:buNone/>
+              <a:defRPr sz="2025" b="0">
+                <a:solidFill>
+                  <a:srgbClr val="53716A"/>
+                </a:solidFill>
+                <a:latin typeface="Arial"/>
+                <a:ea typeface="Arial"/>
+                <a:cs typeface="Arial"/>
+              </a:defRPr>
+            </a:pPr>
+            <a:r>
+              <a:rPr sz="2025" b="0">
+                <a:solidFill>
+                  <a:srgbClr val="53716A"/>
+                </a:solidFill>
+                <a:latin typeface="Arial"/>
+                <a:ea typeface="Arial"/>
+                <a:cs typeface="Arial"/>
+              </a:rPr>
+              <a:t>22 September 2026 observation · 9 September reference</a:t>
+            </a:r>
+          </a:p>
+          <a:p xmlns:a="http://schemas.openxmlformats.org/drawingml/2006/main">
+            <a:pPr>
+              <a:buNone/>
+              <a:defRPr sz="2025" b="0">
+                <a:solidFill>
+                  <a:srgbClr val="53716A"/>
+                </a:solidFill>
+                <a:latin typeface="Arial"/>
+                <a:ea typeface="Arial"/>
+                <a:cs typeface="Arial"/>
+              </a:defRPr>
+            </a:pPr>
+            <a:r>
+              <a:rPr sz="2025" b="0">
+                <a:solidFill>
+                  <a:srgbClr val="53716A"/>
+                </a:solidFill>
+                <a:latin typeface="Arial"/>
+                <a:ea typeface="Arial"/>
+                <a:cs typeface="Arial"/>
+              </a:rPr>
+              <a:t>23.86479° N, 53.61893° E</a:t>
+            </a:r>
+          </a:p>
+        </p:txBody>
+      </p:sp>
+      <p:pic>
+        <p:nvPicPr>
+          <p:cNvPr id="17" name=""/>
+          <p:cNvPicPr>
+            <a:picLocks xmlns:a="http://schemas.openxmlformats.org/drawingml/2006/main" noChangeAspect="1"/>
+          </p:cNvPicPr>
+          <p:nvPr/>
+        </p:nvPicPr>
+        <p:blipFill>
+          <a:blip xmlns:r="http://schemas.openxmlformats.org/officeDocument/2006/relationships" xmlns:a="http://schemas.openxmlformats.org/drawingml/2006/main" r:embed="R04c2459abb234318"/>
+          <a:stretch xmlns:a="http://schemas.openxmlformats.org/drawingml/2006/main"/>
+        </p:blipFill>
+        <p:spPr>
+          <a:xfrm xmlns:a="http://schemas.openxmlformats.org/drawingml/2006/main">
+            <a:off x="609600" y="2571452"/>
+            <a:ext cx="7858125" cy="2848570"/>
+          </a:xfrm>
+          <a:prstGeom xmlns:a="http://schemas.openxmlformats.org/drawingml/2006/main" prst="rect">
+            <a:avLst/>
+          </a:prstGeom>
+        </p:spPr>
+      </p:pic>
+      <p:sp>
+        <p:nvSpPr>
+          <p:cNvPr id="6" name="">
+            <a:extLst xmlns:a="http://schemas.openxmlformats.org/drawingml/2006/main">
+              <a:ext uri="{FF2B5EF4-FFF2-40B4-BE49-F238E27FC236}">
+                <a16:creationId xmlns:a16="http://schemas.microsoft.com/office/drawing/2014/main" id="{37E3F5F3-B4A2-4F15-AC91-9BACD4DDD48D}"/>
+              </a:ext>
+            </a:extLst>
+          </p:cNvPr>
+          <p:cNvSpPr>
+            <a:spLocks xmlns:a="http://schemas.openxmlformats.org/drawingml/2006/main" noGrp="1"/>
+          </p:cNvSpPr>
+          <p:nvPr/>
+        </p:nvSpPr>
+        <p:spPr>
+          <a:xfrm xmlns:a="http://schemas.openxmlformats.org/drawingml/2006/main">
+            <a:off x="8915400" y="2714625"/>
+            <a:ext cx="2476500" cy="809625"/>
           </a:xfrm>
           <a:prstGeom xmlns:a="http://schemas.openxmlformats.org/drawingml/2006/main" prst="rect">
             <a:avLst/>
@@ -7596,47 +9079,48 @@
           <a:lstStyle xmlns:a="http://schemas.openxmlformats.org/drawingml/2006/main"/>
           <a:p xmlns:a="http://schemas.openxmlformats.org/drawingml/2006/main">
             <a:pPr>
-              <a:defRPr sz="2175" b="1">
-                <a:solidFill>
-                  <a:srgbClr val="103D36"/>
-                </a:solidFill>
-                <a:latin typeface="Arial"/>
-                <a:ea typeface="Arial"/>
-                <a:cs typeface="Arial"/>
-              </a:defRPr>
-            </a:pPr>
-            <a:r>
-              <a:rPr sz="2175" b="1">
-                <a:solidFill>
-                  <a:srgbClr val="103D36"/>
-                </a:solidFill>
-                <a:latin typeface="Arial"/>
-                <a:ea typeface="Arial"/>
-                <a:cs typeface="Arial"/>
-              </a:rPr>
-              <a:t>Choose an area</a:t>
-            </a:r>
-          </a:p>
-        </p:txBody>
-      </p:sp>
-      <p:sp>
-        <p:nvSpPr>
-          <p:cNvPr id="6" name="">
-            <a:extLst xmlns:a="http://schemas.openxmlformats.org/drawingml/2006/main">
-              <a:ext uri="{FF2B5EF4-FFF2-40B4-BE49-F238E27FC236}">
-                <a16:creationId xmlns:a16="http://schemas.microsoft.com/office/drawing/2014/main" id="{D1CB62FA-1CCD-4B82-92F7-469CC0C6D5CE}"/>
-              </a:ext>
-            </a:extLst>
-          </p:cNvPr>
-          <p:cNvSpPr>
-            <a:spLocks xmlns:a="http://schemas.openxmlformats.org/drawingml/2006/main" noGrp="1"/>
-          </p:cNvSpPr>
-          <p:nvPr/>
-        </p:nvSpPr>
-        <p:spPr>
-          <a:xfrm xmlns:a="http://schemas.openxmlformats.org/drawingml/2006/main">
-            <a:off x="1438275" y="2295525"/>
-            <a:ext cx="10001250" cy="400050"/>
+              <a:buNone/>
+              <a:defRPr sz="5100" b="1">
+                <a:solidFill>
+                  <a:srgbClr val="0C554E"/>
+                </a:solidFill>
+                <a:latin typeface="Arial"/>
+                <a:ea typeface="Arial"/>
+                <a:cs typeface="Arial"/>
+              </a:defRPr>
+            </a:pPr>
+            <a:r>
+              <a:rPr sz="5100" b="1">
+                <a:solidFill>
+                  <a:srgbClr val="0C554E"/>
+                </a:solidFill>
+                <a:latin typeface="Arial"/>
+                <a:ea typeface="Arial"/>
+                <a:cs typeface="Arial"/>
+              </a:rPr>
+              <a:t>0</a:t>
+            </a:r>
+          </a:p>
+        </p:txBody>
+      </p:sp>
+      <p:sp>
+        <p:nvSpPr>
+          <p:cNvPr id="7" name="">
+            <a:extLst xmlns:a="http://schemas.openxmlformats.org/drawingml/2006/main">
+              <a:ext uri="{FF2B5EF4-FFF2-40B4-BE49-F238E27FC236}">
+                <a16:creationId xmlns:a16="http://schemas.microsoft.com/office/drawing/2014/main" id="{34C46E2D-E4A0-4C49-AB77-B7D5F12F4E84}"/>
+              </a:ext>
+            </a:extLst>
+          </p:cNvPr>
+          <p:cNvSpPr>
+            <a:spLocks xmlns:a="http://schemas.openxmlformats.org/drawingml/2006/main" noGrp="1"/>
+          </p:cNvSpPr>
+          <p:nvPr/>
+        </p:nvSpPr>
+        <p:spPr>
+          <a:xfrm xmlns:a="http://schemas.openxmlformats.org/drawingml/2006/main">
+            <a:off x="8915400" y="3552825"/>
+            <a:ext cx="2524125" cy="400050"/>
           </a:xfrm>
           <a:prstGeom xmlns:a="http://schemas.openxmlformats.org/drawingml/2006/main" prst="rect">
             <a:avLst/>
@@ -7653,6 +9137,7 @@
           <a:lstStyle xmlns:a="http://schemas.openxmlformats.org/drawingml/2006/main"/>
           <a:p xmlns:a="http://schemas.openxmlformats.org/drawingml/2006/main">
             <a:pPr>
+              <a:buNone/>
               <a:defRPr sz="1875" b="0">
                 <a:solidFill>
                   <a:srgbClr val="103D36"/>
@@ -7671,29 +9156,29 @@
                 <a:ea typeface="Arial"/>
                 <a:cs typeface="Arial"/>
               </a:rPr>
-              <a:t>Select a UAE location and quantity.</a:t>
-            </a:r>
-          </a:p>
-        </p:txBody>
-      </p:sp>
-      <p:sp>
-        <p:nvSpPr>
-          <p:cNvPr id="7" name="">
-            <a:extLst xmlns:a="http://schemas.openxmlformats.org/drawingml/2006/main">
-              <a:ext uri="{FF2B5EF4-FFF2-40B4-BE49-F238E27FC236}">
-                <a16:creationId xmlns:a16="http://schemas.microsoft.com/office/drawing/2014/main" id="{996EC2B9-9430-4547-BF27-8302B17F620C}"/>
-              </a:ext>
-            </a:extLst>
-          </p:cNvPr>
-          <p:cNvSpPr>
-            <a:spLocks xmlns:a="http://schemas.openxmlformats.org/drawingml/2006/main" noGrp="1"/>
-          </p:cNvSpPr>
-          <p:nvPr/>
-        </p:nvSpPr>
-        <p:spPr>
-          <a:xfrm xmlns:a="http://schemas.openxmlformats.org/drawingml/2006/main">
-            <a:off x="609600" y="2838450"/>
-            <a:ext cx="619125" cy="523875"/>
+              <a:t>candidate pixels</a:t>
+            </a:r>
+          </a:p>
+        </p:txBody>
+      </p:sp>
+      <p:sp>
+        <p:nvSpPr>
+          <p:cNvPr id="8" name="">
+            <a:extLst xmlns:a="http://schemas.openxmlformats.org/drawingml/2006/main">
+              <a:ext uri="{FF2B5EF4-FFF2-40B4-BE49-F238E27FC236}">
+                <a16:creationId xmlns:a16="http://schemas.microsoft.com/office/drawing/2014/main" id="{EBB52AEF-0164-4EA2-9714-D701FB0CC9B3}"/>
+              </a:ext>
+            </a:extLst>
+          </p:cNvPr>
+          <p:cNvSpPr>
+            <a:spLocks xmlns:a="http://schemas.openxmlformats.org/drawingml/2006/main" noGrp="1"/>
+          </p:cNvSpPr>
+          <p:nvPr/>
+        </p:nvSpPr>
+        <p:spPr>
+          <a:xfrm xmlns:a="http://schemas.openxmlformats.org/drawingml/2006/main">
+            <a:off x="8915400" y="4181475"/>
+            <a:ext cx="2571750" cy="552450"/>
           </a:xfrm>
           <a:prstGeom xmlns:a="http://schemas.openxmlformats.org/drawingml/2006/main" prst="rect">
             <a:avLst/>
@@ -7710,7 +9195,8 @@
           <a:lstStyle xmlns:a="http://schemas.openxmlformats.org/drawingml/2006/main"/>
           <a:p xmlns:a="http://schemas.openxmlformats.org/drawingml/2006/main">
             <a:pPr>
-              <a:defRPr sz="2850" b="1">
+              <a:buNone/>
+              <a:defRPr sz="3225" b="1">
                 <a:solidFill>
                   <a:srgbClr val="0C554E"/>
                 </a:solidFill>
@@ -7720,7 +9206,7 @@
               </a:defRPr>
             </a:pPr>
             <a:r>
-              <a:rPr sz="2850" b="1">
+              <a:rPr sz="3225" b="1">
                 <a:solidFill>
                   <a:srgbClr val="0C554E"/>
                 </a:solidFill>
@@ -7728,29 +9214,29 @@
                 <a:ea typeface="Arial"/>
                 <a:cs typeface="Arial"/>
               </a:rPr>
-              <a:t>2</a:t>
-            </a:r>
-          </a:p>
-        </p:txBody>
-      </p:sp>
-      <p:sp>
-        <p:nvSpPr>
-          <p:cNvPr id="8" name="">
-            <a:extLst xmlns:a="http://schemas.openxmlformats.org/drawingml/2006/main">
-              <a:ext uri="{FF2B5EF4-FFF2-40B4-BE49-F238E27FC236}">
-                <a16:creationId xmlns:a16="http://schemas.microsoft.com/office/drawing/2014/main" id="{51C1F5FA-8CF9-4E1F-B08B-833CF6264E3E}"/>
-              </a:ext>
-            </a:extLst>
-          </p:cNvPr>
-          <p:cNvSpPr>
-            <a:spLocks xmlns:a="http://schemas.openxmlformats.org/drawingml/2006/main" noGrp="1"/>
-          </p:cNvSpPr>
-          <p:nvPr/>
-        </p:nvSpPr>
-        <p:spPr>
-          <a:xfrm xmlns:a="http://schemas.openxmlformats.org/drawingml/2006/main">
-            <a:off x="1438275" y="2838450"/>
-            <a:ext cx="4762500" cy="457200"/>
+              <a:t>96.04%</a:t>
+            </a:r>
+          </a:p>
+        </p:txBody>
+      </p:sp>
+      <p:sp>
+        <p:nvSpPr>
+          <p:cNvPr id="9" name="">
+            <a:extLst xmlns:a="http://schemas.openxmlformats.org/drawingml/2006/main">
+              <a:ext uri="{FF2B5EF4-FFF2-40B4-BE49-F238E27FC236}">
+                <a16:creationId xmlns:a16="http://schemas.microsoft.com/office/drawing/2014/main" id="{05FC77C0-F35D-497D-8BA2-86068FAE3EF7}"/>
+              </a:ext>
+            </a:extLst>
+          </p:cNvPr>
+          <p:cNvSpPr>
+            <a:spLocks xmlns:a="http://schemas.openxmlformats.org/drawingml/2006/main" noGrp="1"/>
+          </p:cNvSpPr>
+          <p:nvPr/>
+        </p:nvSpPr>
+        <p:spPr>
+          <a:xfrm xmlns:a="http://schemas.openxmlformats.org/drawingml/2006/main">
+            <a:off x="8915400" y="4819650"/>
+            <a:ext cx="2524125" cy="381000"/>
           </a:xfrm>
           <a:prstGeom xmlns:a="http://schemas.openxmlformats.org/drawingml/2006/main" prst="rect">
             <a:avLst/>
@@ -7767,47 +9253,48 @@
           <a:lstStyle xmlns:a="http://schemas.openxmlformats.org/drawingml/2006/main"/>
           <a:p xmlns:a="http://schemas.openxmlformats.org/drawingml/2006/main">
             <a:pPr>
-              <a:defRPr sz="2175" b="1">
-                <a:solidFill>
-                  <a:srgbClr val="103D36"/>
-                </a:solidFill>
-                <a:latin typeface="Arial"/>
-                <a:ea typeface="Arial"/>
-                <a:cs typeface="Arial"/>
-              </a:defRPr>
-            </a:pPr>
-            <a:r>
-              <a:rPr sz="2175" b="1">
-                <a:solidFill>
-                  <a:srgbClr val="103D36"/>
-                </a:solidFill>
-                <a:latin typeface="Arial"/>
-                <a:ea typeface="Arial"/>
-                <a:cs typeface="Arial"/>
-              </a:rPr>
-              <a:t>Read the evidence</a:t>
-            </a:r>
-          </a:p>
-        </p:txBody>
-      </p:sp>
-      <p:sp>
-        <p:nvSpPr>
-          <p:cNvPr id="9" name="">
-            <a:extLst xmlns:a="http://schemas.openxmlformats.org/drawingml/2006/main">
-              <a:ext uri="{FF2B5EF4-FFF2-40B4-BE49-F238E27FC236}">
-                <a16:creationId xmlns:a16="http://schemas.microsoft.com/office/drawing/2014/main" id="{B0156E19-31DA-48B4-9CC6-CDB991BC8275}"/>
-              </a:ext>
-            </a:extLst>
-          </p:cNvPr>
-          <p:cNvSpPr>
-            <a:spLocks xmlns:a="http://schemas.openxmlformats.org/drawingml/2006/main" noGrp="1"/>
-          </p:cNvSpPr>
-          <p:nvPr/>
-        </p:nvSpPr>
-        <p:spPr>
-          <a:xfrm xmlns:a="http://schemas.openxmlformats.org/drawingml/2006/main">
-            <a:off x="1438275" y="3324225"/>
-            <a:ext cx="10001250" cy="400050"/>
+              <a:buNone/>
+              <a:defRPr sz="1875" b="0">
+                <a:solidFill>
+                  <a:srgbClr val="103D36"/>
+                </a:solidFill>
+                <a:latin typeface="Arial"/>
+                <a:ea typeface="Arial"/>
+                <a:cs typeface="Arial"/>
+              </a:defRPr>
+            </a:pPr>
+            <a:r>
+              <a:rPr sz="1875" b="0">
+                <a:solidFill>
+                  <a:srgbClr val="103D36"/>
+                </a:solidFill>
+                <a:latin typeface="Arial"/>
+                <a:ea typeface="Arial"/>
+                <a:cs typeface="Arial"/>
+              </a:rPr>
+              <a:t>usable coverage</a:t>
+            </a:r>
+          </a:p>
+        </p:txBody>
+      </p:sp>
+      <p:sp>
+        <p:nvSpPr>
+          <p:cNvPr id="10" name="">
+            <a:extLst xmlns:a="http://schemas.openxmlformats.org/drawingml/2006/main">
+              <a:ext uri="{FF2B5EF4-FFF2-40B4-BE49-F238E27FC236}">
+                <a16:creationId xmlns:a16="http://schemas.microsoft.com/office/drawing/2014/main" id="{71DBFFDC-A961-4B0E-BAA9-34A938ADB8C5}"/>
+              </a:ext>
+            </a:extLst>
+          </p:cNvPr>
+          <p:cNvSpPr>
+            <a:spLocks xmlns:a="http://schemas.openxmlformats.org/drawingml/2006/main" noGrp="1"/>
+          </p:cNvSpPr>
+          <p:nvPr/>
+        </p:nvSpPr>
+        <p:spPr>
+          <a:xfrm xmlns:a="http://schemas.openxmlformats.org/drawingml/2006/main">
+            <a:off x="609600" y="5800725"/>
+            <a:ext cx="10953750" cy="466725"/>
           </a:xfrm>
           <a:prstGeom xmlns:a="http://schemas.openxmlformats.org/drawingml/2006/main" prst="rect">
             <a:avLst/>
@@ -7824,406 +9311,8 @@
           <a:lstStyle xmlns:a="http://schemas.openxmlformats.org/drawingml/2006/main"/>
           <a:p xmlns:a="http://schemas.openxmlformats.org/drawingml/2006/main">
             <a:pPr>
-              <a:defRPr sz="1875" b="0">
-                <a:solidFill>
-                  <a:srgbClr val="103D36"/>
-                </a:solidFill>
-                <a:latin typeface="Arial"/>
-                <a:ea typeface="Arial"/>
-                <a:cs typeface="Arial"/>
-              </a:defRPr>
-            </a:pPr>
-            <a:r>
-              <a:rPr sz="1875" b="0">
-                <a:solidFill>
-                  <a:srgbClr val="103D36"/>
-                </a:solidFill>
-                <a:latin typeface="Arial"/>
-                <a:ea typeface="Arial"/>
-                <a:cs typeface="Arial"/>
-              </a:rPr>
-              <a:t>Review units, observation dates, coverage and history.</a:t>
-            </a:r>
-          </a:p>
-        </p:txBody>
-      </p:sp>
-      <p:sp>
-        <p:nvSpPr>
-          <p:cNvPr id="10" name="">
-            <a:extLst xmlns:a="http://schemas.openxmlformats.org/drawingml/2006/main">
-              <a:ext uri="{FF2B5EF4-FFF2-40B4-BE49-F238E27FC236}">
-                <a16:creationId xmlns:a16="http://schemas.microsoft.com/office/drawing/2014/main" id="{79F8217C-6E8E-4C4E-B8C5-4B1966815A59}"/>
-              </a:ext>
-            </a:extLst>
-          </p:cNvPr>
-          <p:cNvSpPr>
-            <a:spLocks xmlns:a="http://schemas.openxmlformats.org/drawingml/2006/main" noGrp="1"/>
-          </p:cNvSpPr>
-          <p:nvPr/>
-        </p:nvSpPr>
-        <p:spPr>
-          <a:xfrm xmlns:a="http://schemas.openxmlformats.org/drawingml/2006/main">
-            <a:off x="609600" y="3867150"/>
-            <a:ext cx="619125" cy="523875"/>
-          </a:xfrm>
-          <a:prstGeom xmlns:a="http://schemas.openxmlformats.org/drawingml/2006/main" prst="rect">
-            <a:avLst/>
-          </a:prstGeom>
-          <a:noFill xmlns:a="http://schemas.openxmlformats.org/drawingml/2006/main"/>
-          <a:ln xmlns:a="http://schemas.openxmlformats.org/drawingml/2006/main" w="0">
-            <a:noFill/>
-          </a:ln>
-        </p:spPr>
-        <p:txBody>
-          <a:bodyPr xmlns:a="http://schemas.openxmlformats.org/drawingml/2006/main">
-            <a:noAutofit/>
-          </a:bodyPr>
-          <a:lstStyle xmlns:a="http://schemas.openxmlformats.org/drawingml/2006/main"/>
-          <a:p xmlns:a="http://schemas.openxmlformats.org/drawingml/2006/main">
-            <a:pPr>
-              <a:defRPr sz="2850" b="1">
-                <a:solidFill>
-                  <a:srgbClr val="0C554E"/>
-                </a:solidFill>
-                <a:latin typeface="Arial"/>
-                <a:ea typeface="Arial"/>
-                <a:cs typeface="Arial"/>
-              </a:defRPr>
-            </a:pPr>
-            <a:r>
-              <a:rPr sz="2850" b="1">
-                <a:solidFill>
-                  <a:srgbClr val="0C554E"/>
-                </a:solidFill>
-                <a:latin typeface="Arial"/>
-                <a:ea typeface="Arial"/>
-                <a:cs typeface="Arial"/>
-              </a:rPr>
-              <a:t>3</a:t>
-            </a:r>
-          </a:p>
-        </p:txBody>
-      </p:sp>
-      <p:sp>
-        <p:nvSpPr>
-          <p:cNvPr id="11" name="">
-            <a:extLst xmlns:a="http://schemas.openxmlformats.org/drawingml/2006/main">
-              <a:ext uri="{FF2B5EF4-FFF2-40B4-BE49-F238E27FC236}">
-                <a16:creationId xmlns:a16="http://schemas.microsoft.com/office/drawing/2014/main" id="{27A6ECE5-0D9C-4134-9E53-E698465D17D5}"/>
-              </a:ext>
-            </a:extLst>
-          </p:cNvPr>
-          <p:cNvSpPr>
-            <a:spLocks xmlns:a="http://schemas.openxmlformats.org/drawingml/2006/main" noGrp="1"/>
-          </p:cNvSpPr>
-          <p:nvPr/>
-        </p:nvSpPr>
-        <p:spPr>
-          <a:xfrm xmlns:a="http://schemas.openxmlformats.org/drawingml/2006/main">
-            <a:off x="1438275" y="3867150"/>
-            <a:ext cx="4762500" cy="457200"/>
-          </a:xfrm>
-          <a:prstGeom xmlns:a="http://schemas.openxmlformats.org/drawingml/2006/main" prst="rect">
-            <a:avLst/>
-          </a:prstGeom>
-          <a:noFill xmlns:a="http://schemas.openxmlformats.org/drawingml/2006/main"/>
-          <a:ln xmlns:a="http://schemas.openxmlformats.org/drawingml/2006/main" w="0">
-            <a:noFill/>
-          </a:ln>
-        </p:spPr>
-        <p:txBody>
-          <a:bodyPr xmlns:a="http://schemas.openxmlformats.org/drawingml/2006/main">
-            <a:noAutofit/>
-          </a:bodyPr>
-          <a:lstStyle xmlns:a="http://schemas.openxmlformats.org/drawingml/2006/main"/>
-          <a:p xmlns:a="http://schemas.openxmlformats.org/drawingml/2006/main">
-            <a:pPr>
-              <a:defRPr sz="2175" b="1">
-                <a:solidFill>
-                  <a:srgbClr val="103D36"/>
-                </a:solidFill>
-                <a:latin typeface="Arial"/>
-                <a:ea typeface="Arial"/>
-                <a:cs typeface="Arial"/>
-              </a:defRPr>
-            </a:pPr>
-            <a:r>
-              <a:rPr sz="2175" b="1">
-                <a:solidFill>
-                  <a:srgbClr val="103D36"/>
-                </a:solidFill>
-                <a:latin typeface="Arial"/>
-                <a:ea typeface="Arial"/>
-                <a:cs typeface="Arial"/>
-              </a:rPr>
-              <a:t>Inspect methane candidates</a:t>
-            </a:r>
-          </a:p>
-        </p:txBody>
-      </p:sp>
-      <p:sp>
-        <p:nvSpPr>
-          <p:cNvPr id="12" name="">
-            <a:extLst xmlns:a="http://schemas.openxmlformats.org/drawingml/2006/main">
-              <a:ext uri="{FF2B5EF4-FFF2-40B4-BE49-F238E27FC236}">
-                <a16:creationId xmlns:a16="http://schemas.microsoft.com/office/drawing/2014/main" id="{0A03F3D8-D263-4CCA-831D-F04599053DA3}"/>
-              </a:ext>
-            </a:extLst>
-          </p:cNvPr>
-          <p:cNvSpPr>
-            <a:spLocks xmlns:a="http://schemas.openxmlformats.org/drawingml/2006/main" noGrp="1"/>
-          </p:cNvSpPr>
-          <p:nvPr/>
-        </p:nvSpPr>
-        <p:spPr>
-          <a:xfrm xmlns:a="http://schemas.openxmlformats.org/drawingml/2006/main">
-            <a:off x="1438275" y="4352925"/>
-            <a:ext cx="10001250" cy="400050"/>
-          </a:xfrm>
-          <a:prstGeom xmlns:a="http://schemas.openxmlformats.org/drawingml/2006/main" prst="rect">
-            <a:avLst/>
-          </a:prstGeom>
-          <a:noFill xmlns:a="http://schemas.openxmlformats.org/drawingml/2006/main"/>
-          <a:ln xmlns:a="http://schemas.openxmlformats.org/drawingml/2006/main" w="0">
-            <a:noFill/>
-          </a:ln>
-        </p:spPr>
-        <p:txBody>
-          <a:bodyPr xmlns:a="http://schemas.openxmlformats.org/drawingml/2006/main">
-            <a:noAutofit/>
-          </a:bodyPr>
-          <a:lstStyle xmlns:a="http://schemas.openxmlformats.org/drawingml/2006/main"/>
-          <a:p xmlns:a="http://schemas.openxmlformats.org/drawingml/2006/main">
-            <a:pPr>
-              <a:defRPr sz="1875" b="0">
-                <a:solidFill>
-                  <a:srgbClr val="103D36"/>
-                </a:solidFill>
-                <a:latin typeface="Arial"/>
-                <a:ea typeface="Arial"/>
-                <a:cs typeface="Arial"/>
-              </a:defRPr>
-            </a:pPr>
-            <a:r>
-              <a:rPr sz="1875" b="0">
-                <a:solidFill>
-                  <a:srgbClr val="103D36"/>
-                </a:solidFill>
-                <a:latin typeface="Arial"/>
-                <a:ea typeface="Arial"/>
-                <a:cs typeface="Arial"/>
-              </a:rPr>
-              <a:t>Review dated images and quality information.</a:t>
-            </a:r>
-          </a:p>
-        </p:txBody>
-      </p:sp>
-      <p:sp>
-        <p:nvSpPr>
-          <p:cNvPr id="13" name="">
-            <a:extLst xmlns:a="http://schemas.openxmlformats.org/drawingml/2006/main">
-              <a:ext uri="{FF2B5EF4-FFF2-40B4-BE49-F238E27FC236}">
-                <a16:creationId xmlns:a16="http://schemas.microsoft.com/office/drawing/2014/main" id="{4B44B693-C565-45B1-81D3-9446BA629E40}"/>
-              </a:ext>
-            </a:extLst>
-          </p:cNvPr>
-          <p:cNvSpPr>
-            <a:spLocks xmlns:a="http://schemas.openxmlformats.org/drawingml/2006/main" noGrp="1"/>
-          </p:cNvSpPr>
-          <p:nvPr/>
-        </p:nvSpPr>
-        <p:spPr>
-          <a:xfrm xmlns:a="http://schemas.openxmlformats.org/drawingml/2006/main">
-            <a:off x="609600" y="4895850"/>
-            <a:ext cx="619125" cy="523875"/>
-          </a:xfrm>
-          <a:prstGeom xmlns:a="http://schemas.openxmlformats.org/drawingml/2006/main" prst="rect">
-            <a:avLst/>
-          </a:prstGeom>
-          <a:noFill xmlns:a="http://schemas.openxmlformats.org/drawingml/2006/main"/>
-          <a:ln xmlns:a="http://schemas.openxmlformats.org/drawingml/2006/main" w="0">
-            <a:noFill/>
-          </a:ln>
-        </p:spPr>
-        <p:txBody>
-          <a:bodyPr xmlns:a="http://schemas.openxmlformats.org/drawingml/2006/main">
-            <a:noAutofit/>
-          </a:bodyPr>
-          <a:lstStyle xmlns:a="http://schemas.openxmlformats.org/drawingml/2006/main"/>
-          <a:p xmlns:a="http://schemas.openxmlformats.org/drawingml/2006/main">
-            <a:pPr>
-              <a:defRPr sz="2850" b="1">
-                <a:solidFill>
-                  <a:srgbClr val="0C554E"/>
-                </a:solidFill>
-                <a:latin typeface="Arial"/>
-                <a:ea typeface="Arial"/>
-                <a:cs typeface="Arial"/>
-              </a:defRPr>
-            </a:pPr>
-            <a:r>
-              <a:rPr sz="2850" b="1">
-                <a:solidFill>
-                  <a:srgbClr val="0C554E"/>
-                </a:solidFill>
-                <a:latin typeface="Arial"/>
-                <a:ea typeface="Arial"/>
-                <a:cs typeface="Arial"/>
-              </a:rPr>
-              <a:t>4</a:t>
-            </a:r>
-          </a:p>
-        </p:txBody>
-      </p:sp>
-      <p:sp>
-        <p:nvSpPr>
-          <p:cNvPr id="14" name="">
-            <a:extLst xmlns:a="http://schemas.openxmlformats.org/drawingml/2006/main">
-              <a:ext uri="{FF2B5EF4-FFF2-40B4-BE49-F238E27FC236}">
-                <a16:creationId xmlns:a16="http://schemas.microsoft.com/office/drawing/2014/main" id="{C53AD0E9-8C54-48EA-9C74-76898994EED1}"/>
-              </a:ext>
-            </a:extLst>
-          </p:cNvPr>
-          <p:cNvSpPr>
-            <a:spLocks xmlns:a="http://schemas.openxmlformats.org/drawingml/2006/main" noGrp="1"/>
-          </p:cNvSpPr>
-          <p:nvPr/>
-        </p:nvSpPr>
-        <p:spPr>
-          <a:xfrm xmlns:a="http://schemas.openxmlformats.org/drawingml/2006/main">
-            <a:off x="1438275" y="4895850"/>
-            <a:ext cx="4762500" cy="457200"/>
-          </a:xfrm>
-          <a:prstGeom xmlns:a="http://schemas.openxmlformats.org/drawingml/2006/main" prst="rect">
-            <a:avLst/>
-          </a:prstGeom>
-          <a:noFill xmlns:a="http://schemas.openxmlformats.org/drawingml/2006/main"/>
-          <a:ln xmlns:a="http://schemas.openxmlformats.org/drawingml/2006/main" w="0">
-            <a:noFill/>
-          </a:ln>
-        </p:spPr>
-        <p:txBody>
-          <a:bodyPr xmlns:a="http://schemas.openxmlformats.org/drawingml/2006/main">
-            <a:noAutofit/>
-          </a:bodyPr>
-          <a:lstStyle xmlns:a="http://schemas.openxmlformats.org/drawingml/2006/main"/>
-          <a:p xmlns:a="http://schemas.openxmlformats.org/drawingml/2006/main">
-            <a:pPr>
-              <a:defRPr sz="2175" b="1">
-                <a:solidFill>
-                  <a:srgbClr val="103D36"/>
-                </a:solidFill>
-                <a:latin typeface="Arial"/>
-                <a:ea typeface="Arial"/>
-                <a:cs typeface="Arial"/>
-              </a:defRPr>
-            </a:pPr>
-            <a:r>
-              <a:rPr sz="2175" b="1">
-                <a:solidFill>
-                  <a:srgbClr val="103D36"/>
-                </a:solidFill>
-                <a:latin typeface="Arial"/>
-                <a:ea typeface="Arial"/>
-                <a:cs typeface="Arial"/>
-              </a:rPr>
-              <a:t>Export and follow up</a:t>
-            </a:r>
-          </a:p>
-        </p:txBody>
-      </p:sp>
-      <p:sp>
-        <p:nvSpPr>
-          <p:cNvPr id="15" name="">
-            <a:extLst xmlns:a="http://schemas.openxmlformats.org/drawingml/2006/main">
-              <a:ext uri="{FF2B5EF4-FFF2-40B4-BE49-F238E27FC236}">
-                <a16:creationId xmlns:a16="http://schemas.microsoft.com/office/drawing/2014/main" id="{D2C56C2A-1B70-4F80-B831-89B8A3682A2A}"/>
-              </a:ext>
-            </a:extLst>
-          </p:cNvPr>
-          <p:cNvSpPr>
-            <a:spLocks xmlns:a="http://schemas.openxmlformats.org/drawingml/2006/main" noGrp="1"/>
-          </p:cNvSpPr>
-          <p:nvPr/>
-        </p:nvSpPr>
-        <p:spPr>
-          <a:xfrm xmlns:a="http://schemas.openxmlformats.org/drawingml/2006/main">
-            <a:off x="1438275" y="5381625"/>
-            <a:ext cx="10001250" cy="400050"/>
-          </a:xfrm>
-          <a:prstGeom xmlns:a="http://schemas.openxmlformats.org/drawingml/2006/main" prst="rect">
-            <a:avLst/>
-          </a:prstGeom>
-          <a:noFill xmlns:a="http://schemas.openxmlformats.org/drawingml/2006/main"/>
-          <a:ln xmlns:a="http://schemas.openxmlformats.org/drawingml/2006/main" w="0">
-            <a:noFill/>
-          </a:ln>
-        </p:spPr>
-        <p:txBody>
-          <a:bodyPr xmlns:a="http://schemas.openxmlformats.org/drawingml/2006/main">
-            <a:noAutofit/>
-          </a:bodyPr>
-          <a:lstStyle xmlns:a="http://schemas.openxmlformats.org/drawingml/2006/main"/>
-          <a:p xmlns:a="http://schemas.openxmlformats.org/drawingml/2006/main">
-            <a:pPr>
-              <a:defRPr sz="1875" b="0">
-                <a:solidFill>
-                  <a:srgbClr val="103D36"/>
-                </a:solidFill>
-                <a:latin typeface="Arial"/>
-                <a:ea typeface="Arial"/>
-                <a:cs typeface="Arial"/>
-              </a:defRPr>
-            </a:pPr>
-            <a:r>
-              <a:rPr sz="1875" b="0">
-                <a:solidFill>
-                  <a:srgbClr val="103D36"/>
-                </a:solidFill>
-                <a:latin typeface="Arial"/>
-                <a:ea typeface="Arial"/>
-                <a:cs typeface="Arial"/>
-              </a:rPr>
-              <a:t>Share evidence and request gas-specific field checks.</a:t>
-            </a:r>
-          </a:p>
-        </p:txBody>
-      </p:sp>
-      <p:sp>
-        <p:nvSpPr>
-          <p:cNvPr id="16" name="">
-            <a:extLst xmlns:a="http://schemas.openxmlformats.org/drawingml/2006/main">
-              <a:ext uri="{FF2B5EF4-FFF2-40B4-BE49-F238E27FC236}">
-                <a16:creationId xmlns:a16="http://schemas.microsoft.com/office/drawing/2014/main" id="{3F7CC210-A9CE-4067-B188-AEE3DBE8846C}"/>
-              </a:ext>
-            </a:extLst>
-          </p:cNvPr>
-          <p:cNvSpPr>
-            <a:spLocks xmlns:a="http://schemas.openxmlformats.org/drawingml/2006/main" noGrp="1"/>
-          </p:cNvSpPr>
-          <p:nvPr/>
-        </p:nvSpPr>
-        <p:spPr>
-          <a:xfrm xmlns:a="http://schemas.openxmlformats.org/drawingml/2006/main">
-            <a:off x="609600" y="6191250"/>
-            <a:ext cx="10953750" cy="295275"/>
-          </a:xfrm>
-          <a:prstGeom xmlns:a="http://schemas.openxmlformats.org/drawingml/2006/main" prst="rect">
-            <a:avLst/>
-          </a:prstGeom>
-          <a:noFill xmlns:a="http://schemas.openxmlformats.org/drawingml/2006/main"/>
-          <a:ln xmlns:a="http://schemas.openxmlformats.org/drawingml/2006/main" w="0">
-            <a:noFill/>
-          </a:ln>
-        </p:spPr>
-        <p:txBody>
-          <a:bodyPr xmlns:a="http://schemas.openxmlformats.org/drawingml/2006/main">
-            <a:noAutofit/>
-          </a:bodyPr>
-          <a:lstStyle xmlns:a="http://schemas.openxmlformats.org/drawingml/2006/main"/>
-          <a:p xmlns:a="http://schemas.openxmlformats.org/drawingml/2006/main">
-            <a:pPr>
-              <a:defRPr sz="1500" b="0">
+              <a:buNone/>
+              <a:defRPr sz="1950" b="0">
                 <a:solidFill>
                   <a:srgbClr val="53716A"/>
                 </a:solidFill>
@@ -8233,7 +9322,7 @@
               </a:defRPr>
             </a:pPr>
             <a:r>
-              <a:rPr sz="1500" b="0">
+              <a:rPr sz="1950" b="0">
                 <a:solidFill>
                   <a:srgbClr val="53716A"/>
                 </a:solidFill>
@@ -8241,7 +9330,7 @@
                 <a:ea typeface="Arial"/>
                 <a:cs typeface="Arial"/>
               </a:rPr>
-              <a:t>Bundled NO₂ has area/history results; CO, SO₂ and regional CH₄ include archived map layers.</a:t>
+              <a:t>No candidate is not proof of zero methane. Coverage is not model accuracy.</a:t>
             </a:r>
           </a:p>
         </p:txBody>
@@ -8249,7 +9338,7 @@
     </p:spTree>
     <p:extLst>
       <p:ext uri="{BB962C8B-B14F-4D97-AF65-F5344CB8AC3E}">
-        <p14:creationId xmlns:p14="http://schemas.microsoft.com/office/powerpoint/2010/main" val="1649069850"/>
+        <p14:creationId xmlns:p14="http://schemas.microsoft.com/office/powerpoint/2010/main" val="248704083"/>
       </p:ext>
     </p:extLst>
   </p:cSld>
@@ -8277,10 +9366,10 @@
       </p:grpSpPr>
       <p:sp>
         <p:nvSpPr>
-          <p:cNvPr id="8" name="">
-            <a:extLst xmlns:a="http://schemas.openxmlformats.org/drawingml/2006/main">
-              <a:ext uri="{FF2B5EF4-FFF2-40B4-BE49-F238E27FC236}">
-                <a16:creationId xmlns:a16="http://schemas.microsoft.com/office/drawing/2014/main" id="{18E20E2A-3350-4105-966E-773BC6EC10C2}"/>
+          <p:cNvPr id="17" name="">
+            <a:extLst xmlns:a="http://schemas.openxmlformats.org/drawingml/2006/main">
+              <a:ext uri="{FF2B5EF4-FFF2-40B4-BE49-F238E27FC236}">
+                <a16:creationId xmlns:a16="http://schemas.microsoft.com/office/drawing/2014/main" id="{B9B43ACC-D32B-4CD0-885D-F2A46CBB51FA}"/>
               </a:ext>
             </a:extLst>
           </p:cNvPr>
@@ -8309,6 +9398,7 @@
           <a:lstStyle xmlns:a="http://schemas.openxmlformats.org/drawingml/2006/main"/>
           <a:p xmlns:a="http://schemas.openxmlformats.org/drawingml/2006/main">
             <a:pPr>
+              <a:buNone/>
               <a:defRPr sz="3300" b="1">
                 <a:solidFill>
                   <a:srgbClr val="103D36"/>
@@ -8327,7 +9417,7 @@
                 <a:ea typeface="Arial"/>
                 <a:cs typeface="Arial"/>
               </a:rPr>
-              <a:t>Reproducibility and validation</a:t>
+              <a:t>Review an area in GeoGuard</a:t>
             </a:r>
           </a:p>
         </p:txBody>
@@ -8337,7 +9427,7 @@
           <p:cNvPr id="2" name="">
             <a:extLst xmlns:a="http://schemas.openxmlformats.org/drawingml/2006/main">
               <a:ext uri="{FF2B5EF4-FFF2-40B4-BE49-F238E27FC236}">
-                <a16:creationId xmlns:a16="http://schemas.microsoft.com/office/drawing/2014/main" id="{93F6DA17-7753-4F49-B07F-1CB3771D8416}"/>
+                <a16:creationId xmlns:a16="http://schemas.microsoft.com/office/drawing/2014/main" id="{A3060114-1ABE-4F64-BC68-D7E83D8E4A07}"/>
               </a:ext>
             </a:extLst>
           </p:cNvPr>
@@ -8367,7 +9457,7 @@
           <p:cNvPr id="3" name="">
             <a:extLst xmlns:a="http://schemas.openxmlformats.org/drawingml/2006/main">
               <a:ext uri="{FF2B5EF4-FFF2-40B4-BE49-F238E27FC236}">
-                <a16:creationId xmlns:a16="http://schemas.microsoft.com/office/drawing/2014/main" id="{0D2F6BE0-C900-4F20-95E6-38278730A2C1}"/>
+                <a16:creationId xmlns:a16="http://schemas.microsoft.com/office/drawing/2014/main" id="{6BD2F857-32BD-41B1-A6B8-84F27069D9BC}"/>
               </a:ext>
             </a:extLst>
           </p:cNvPr>
@@ -8396,6 +9486,7 @@
           <a:lstStyle xmlns:a="http://schemas.openxmlformats.org/drawingml/2006/main"/>
           <a:p xmlns:a="http://schemas.openxmlformats.org/drawingml/2006/main">
             <a:pPr>
+              <a:buNone/>
               <a:defRPr sz="1200" b="0">
                 <a:solidFill>
                   <a:srgbClr val="53716A"/>
@@ -8424,19 +9515,19 @@
           <p:cNvPr id="4" name="">
             <a:extLst xmlns:a="http://schemas.openxmlformats.org/drawingml/2006/main">
               <a:ext uri="{FF2B5EF4-FFF2-40B4-BE49-F238E27FC236}">
-                <a16:creationId xmlns:a16="http://schemas.microsoft.com/office/drawing/2014/main" id="{28EC5850-F949-40DB-8EC1-60A5E2242B39}"/>
-              </a:ext>
-            </a:extLst>
-          </p:cNvPr>
-          <p:cNvSpPr>
-            <a:spLocks xmlns:a="http://schemas.openxmlformats.org/drawingml/2006/main" noGrp="1"/>
-          </p:cNvSpPr>
-          <p:nvPr/>
-        </p:nvSpPr>
-        <p:spPr>
-          <a:xfrm xmlns:a="http://schemas.openxmlformats.org/drawingml/2006/main">
-            <a:off x="609600" y="1828800"/>
-            <a:ext cx="10477500" cy="666750"/>
+                <a16:creationId xmlns:a16="http://schemas.microsoft.com/office/drawing/2014/main" id="{57DAC837-8819-40C6-B89B-A542D66C541A}"/>
+              </a:ext>
+            </a:extLst>
+          </p:cNvPr>
+          <p:cNvSpPr>
+            <a:spLocks xmlns:a="http://schemas.openxmlformats.org/drawingml/2006/main" noGrp="1"/>
+          </p:cNvSpPr>
+          <p:nvPr/>
+        </p:nvSpPr>
+        <p:spPr>
+          <a:xfrm xmlns:a="http://schemas.openxmlformats.org/drawingml/2006/main">
+            <a:off x="609600" y="1809750"/>
+            <a:ext cx="619125" cy="523875"/>
           </a:xfrm>
           <a:prstGeom xmlns:a="http://schemas.openxmlformats.org/drawingml/2006/main" prst="rect">
             <a:avLst/>
@@ -8453,7 +9544,8 @@
           <a:lstStyle xmlns:a="http://schemas.openxmlformats.org/drawingml/2006/main"/>
           <a:p xmlns:a="http://schemas.openxmlformats.org/drawingml/2006/main">
             <a:pPr>
-              <a:defRPr sz="3225" b="1">
+              <a:buNone/>
+              <a:defRPr sz="2850" b="1">
                 <a:solidFill>
                   <a:srgbClr val="0C554E"/>
                 </a:solidFill>
@@ -8463,7 +9555,7 @@
               </a:defRPr>
             </a:pPr>
             <a:r>
-              <a:rPr sz="3225" b="1">
+              <a:rPr sz="2850" b="1">
                 <a:solidFill>
                   <a:srgbClr val="0C554E"/>
                 </a:solidFill>
@@ -8471,7 +9563,7 @@
                 <a:ea typeface="Arial"/>
                 <a:cs typeface="Arial"/>
               </a:rPr>
-              <a:t>30 software tests passed</a:t>
+              <a:t>1</a:t>
             </a:r>
           </a:p>
         </p:txBody>
@@ -8481,19 +9573,19 @@
           <p:cNvPr id="5" name="">
             <a:extLst xmlns:a="http://schemas.openxmlformats.org/drawingml/2006/main">
               <a:ext uri="{FF2B5EF4-FFF2-40B4-BE49-F238E27FC236}">
-                <a16:creationId xmlns:a16="http://schemas.microsoft.com/office/drawing/2014/main" id="{93B0921D-CB87-402C-B23E-6A8F0CBDD158}"/>
-              </a:ext>
-            </a:extLst>
-          </p:cNvPr>
-          <p:cNvSpPr>
-            <a:spLocks xmlns:a="http://schemas.openxmlformats.org/drawingml/2006/main" noGrp="1"/>
-          </p:cNvSpPr>
-          <p:nvPr/>
-        </p:nvSpPr>
-        <p:spPr>
-          <a:xfrm xmlns:a="http://schemas.openxmlformats.org/drawingml/2006/main">
-            <a:off x="609600" y="2819400"/>
-            <a:ext cx="10858500" cy="1047750"/>
+                <a16:creationId xmlns:a16="http://schemas.microsoft.com/office/drawing/2014/main" id="{FCD9A5C3-94FB-41C2-9E66-ABFDC2F6B475}"/>
+              </a:ext>
+            </a:extLst>
+          </p:cNvPr>
+          <p:cNvSpPr>
+            <a:spLocks xmlns:a="http://schemas.openxmlformats.org/drawingml/2006/main" noGrp="1"/>
+          </p:cNvSpPr>
+          <p:nvPr/>
+        </p:nvSpPr>
+        <p:spPr>
+          <a:xfrm xmlns:a="http://schemas.openxmlformats.org/drawingml/2006/main">
+            <a:off x="1438275" y="1809750"/>
+            <a:ext cx="4762500" cy="457200"/>
           </a:xfrm>
           <a:prstGeom xmlns:a="http://schemas.openxmlformats.org/drawingml/2006/main" prst="rect">
             <a:avLst/>
@@ -8510,48 +9602,26 @@
           <a:lstStyle xmlns:a="http://schemas.openxmlformats.org/drawingml/2006/main"/>
           <a:p xmlns:a="http://schemas.openxmlformats.org/drawingml/2006/main">
             <a:pPr>
-              <a:defRPr sz="2250" b="0">
-                <a:solidFill>
-                  <a:srgbClr val="103D36"/>
-                </a:solidFill>
-                <a:latin typeface="Arial"/>
-                <a:ea typeface="Arial"/>
-                <a:cs typeface="Arial"/>
-              </a:defRPr>
-            </a:pPr>
-            <a:r>
-              <a:rPr sz="2250" b="0">
-                <a:solidFill>
-                  <a:srgbClr val="103D36"/>
-                </a:solidFill>
-                <a:latin typeface="Arial"/>
-                <a:ea typeface="Arial"/>
-                <a:cs typeface="Arial"/>
-              </a:rPr>
-              <a:t>The PoC runs end to end with pinned dependencies and bundled real inputs.</a:t>
-            </a:r>
-          </a:p>
-          <a:p xmlns:a="http://schemas.openxmlformats.org/drawingml/2006/main">
-            <a:pPr>
-              <a:defRPr sz="2250" b="0">
-                <a:solidFill>
-                  <a:srgbClr val="103D36"/>
-                </a:solidFill>
-                <a:latin typeface="Arial"/>
-                <a:ea typeface="Arial"/>
-                <a:cs typeface="Arial"/>
-              </a:defRPr>
-            </a:pPr>
-            <a:r>
-              <a:rPr sz="2250" b="0">
-                <a:solidFill>
-                  <a:srgbClr val="103D36"/>
-                </a:solidFill>
-                <a:latin typeface="Arial"/>
-                <a:ea typeface="Arial"/>
-                <a:cs typeface="Arial"/>
-              </a:rPr>
-              <a:t>Daily, monthly and period summaries match the archived Earth Engine exports.</a:t>
+              <a:buNone/>
+              <a:defRPr sz="2175" b="1">
+                <a:solidFill>
+                  <a:srgbClr val="103D36"/>
+                </a:solidFill>
+                <a:latin typeface="Arial"/>
+                <a:ea typeface="Arial"/>
+                <a:cs typeface="Arial"/>
+              </a:defRPr>
+            </a:pPr>
+            <a:r>
+              <a:rPr sz="2175" b="1">
+                <a:solidFill>
+                  <a:srgbClr val="103D36"/>
+                </a:solidFill>
+                <a:latin typeface="Arial"/>
+                <a:ea typeface="Arial"/>
+                <a:cs typeface="Arial"/>
+              </a:rPr>
+              <a:t>Choose an area</a:t>
             </a:r>
           </a:p>
         </p:txBody>
@@ -8561,19 +9631,19 @@
           <p:cNvPr id="6" name="">
             <a:extLst xmlns:a="http://schemas.openxmlformats.org/drawingml/2006/main">
               <a:ext uri="{FF2B5EF4-FFF2-40B4-BE49-F238E27FC236}">
-                <a16:creationId xmlns:a16="http://schemas.microsoft.com/office/drawing/2014/main" id="{60522B0C-05A1-456F-AEDD-D4212DCEAF40}"/>
-              </a:ext>
-            </a:extLst>
-          </p:cNvPr>
-          <p:cNvSpPr>
-            <a:spLocks xmlns:a="http://schemas.openxmlformats.org/drawingml/2006/main" noGrp="1"/>
-          </p:cNvSpPr>
-          <p:nvPr/>
-        </p:nvSpPr>
-        <p:spPr>
-          <a:xfrm xmlns:a="http://schemas.openxmlformats.org/drawingml/2006/main">
-            <a:off x="609600" y="4267200"/>
-            <a:ext cx="10858500" cy="1000125"/>
+                <a16:creationId xmlns:a16="http://schemas.microsoft.com/office/drawing/2014/main" id="{D1CB62FA-1CCD-4B82-92F7-469CC0C6D5CE}"/>
+              </a:ext>
+            </a:extLst>
+          </p:cNvPr>
+          <p:cNvSpPr>
+            <a:spLocks xmlns:a="http://schemas.openxmlformats.org/drawingml/2006/main" noGrp="1"/>
+          </p:cNvSpPr>
+          <p:nvPr/>
+        </p:nvSpPr>
+        <p:spPr>
+          <a:xfrm xmlns:a="http://schemas.openxmlformats.org/drawingml/2006/main">
+            <a:off x="1438275" y="2295525"/>
+            <a:ext cx="10001250" cy="400050"/>
           </a:xfrm>
           <a:prstGeom xmlns:a="http://schemas.openxmlformats.org/drawingml/2006/main" prst="rect">
             <a:avLst/>
@@ -8590,48 +9660,26 @@
           <a:lstStyle xmlns:a="http://schemas.openxmlformats.org/drawingml/2006/main"/>
           <a:p xmlns:a="http://schemas.openxmlformats.org/drawingml/2006/main">
             <a:pPr>
-              <a:defRPr sz="2250" b="0">
-                <a:solidFill>
-                  <a:srgbClr val="103D36"/>
-                </a:solidFill>
-                <a:latin typeface="Arial"/>
-                <a:ea typeface="Arial"/>
-                <a:cs typeface="Arial"/>
-              </a:defRPr>
-            </a:pPr>
-            <a:r>
-              <a:rPr sz="2250" b="0">
-                <a:solidFill>
-                  <a:srgbClr val="103D36"/>
-                </a:solidFill>
-                <a:latin typeface="Arial"/>
-                <a:ea typeface="Arial"/>
-                <a:cs typeface="Arial"/>
-              </a:rPr>
-              <a:t>Executed notebook, raw inputs, numerical outputs and evidence are available</a:t>
-            </a:r>
-          </a:p>
-          <a:p xmlns:a="http://schemas.openxmlformats.org/drawingml/2006/main">
-            <a:pPr>
-              <a:defRPr sz="2250" b="0">
-                <a:solidFill>
-                  <a:srgbClr val="103D36"/>
-                </a:solidFill>
-                <a:latin typeface="Arial"/>
-                <a:ea typeface="Arial"/>
-                <a:cs typeface="Arial"/>
-              </a:defRPr>
-            </a:pPr>
-            <a:r>
-              <a:rPr sz="2250" b="0">
-                <a:solidFill>
-                  <a:srgbClr val="103D36"/>
-                </a:solidFill>
-                <a:latin typeface="Arial"/>
-                <a:ea typeface="Arial"/>
-                <a:cs typeface="Arial"/>
-              </a:rPr>
-              <a:t>for review. Website checks cover quantity switching, imports and location matching.</a:t>
+              <a:buNone/>
+              <a:defRPr sz="1875" b="0">
+                <a:solidFill>
+                  <a:srgbClr val="103D36"/>
+                </a:solidFill>
+                <a:latin typeface="Arial"/>
+                <a:ea typeface="Arial"/>
+                <a:cs typeface="Arial"/>
+              </a:defRPr>
+            </a:pPr>
+            <a:r>
+              <a:rPr sz="1875" b="0">
+                <a:solidFill>
+                  <a:srgbClr val="103D36"/>
+                </a:solidFill>
+                <a:latin typeface="Arial"/>
+                <a:ea typeface="Arial"/>
+                <a:cs typeface="Arial"/>
+              </a:rPr>
+              <a:t>Select Dubai and NO₂: inspect the measured column and usable days.</a:t>
             </a:r>
           </a:p>
         </p:txBody>
@@ -8641,19 +9689,19 @@
           <p:cNvPr id="7" name="">
             <a:extLst xmlns:a="http://schemas.openxmlformats.org/drawingml/2006/main">
               <a:ext uri="{FF2B5EF4-FFF2-40B4-BE49-F238E27FC236}">
-                <a16:creationId xmlns:a16="http://schemas.microsoft.com/office/drawing/2014/main" id="{DC0242EB-C710-4674-BCA3-B6913D4066D3}"/>
-              </a:ext>
-            </a:extLst>
-          </p:cNvPr>
-          <p:cNvSpPr>
-            <a:spLocks xmlns:a="http://schemas.openxmlformats.org/drawingml/2006/main" noGrp="1"/>
-          </p:cNvSpPr>
-          <p:nvPr/>
-        </p:nvSpPr>
-        <p:spPr>
-          <a:xfrm xmlns:a="http://schemas.openxmlformats.org/drawingml/2006/main">
-            <a:off x="609600" y="5857875"/>
-            <a:ext cx="10953750" cy="381000"/>
+                <a16:creationId xmlns:a16="http://schemas.microsoft.com/office/drawing/2014/main" id="{996EC2B9-9430-4547-BF27-8302B17F620C}"/>
+              </a:ext>
+            </a:extLst>
+          </p:cNvPr>
+          <p:cNvSpPr>
+            <a:spLocks xmlns:a="http://schemas.openxmlformats.org/drawingml/2006/main" noGrp="1"/>
+          </p:cNvSpPr>
+          <p:nvPr/>
+        </p:nvSpPr>
+        <p:spPr>
+          <a:xfrm xmlns:a="http://schemas.openxmlformats.org/drawingml/2006/main">
+            <a:off x="609600" y="2838450"/>
+            <a:ext cx="619125" cy="523875"/>
           </a:xfrm>
           <a:prstGeom xmlns:a="http://schemas.openxmlformats.org/drawingml/2006/main" prst="rect">
             <a:avLst/>
@@ -8670,7 +9718,530 @@
           <a:lstStyle xmlns:a="http://schemas.openxmlformats.org/drawingml/2006/main"/>
           <a:p xmlns:a="http://schemas.openxmlformats.org/drawingml/2006/main">
             <a:pPr>
-              <a:defRPr sz="1950" b="0">
+              <a:buNone/>
+              <a:defRPr sz="2850" b="1">
+                <a:solidFill>
+                  <a:srgbClr val="0C554E"/>
+                </a:solidFill>
+                <a:latin typeface="Arial"/>
+                <a:ea typeface="Arial"/>
+                <a:cs typeface="Arial"/>
+              </a:defRPr>
+            </a:pPr>
+            <a:r>
+              <a:rPr sz="2850" b="1">
+                <a:solidFill>
+                  <a:srgbClr val="0C554E"/>
+                </a:solidFill>
+                <a:latin typeface="Arial"/>
+                <a:ea typeface="Arial"/>
+                <a:cs typeface="Arial"/>
+              </a:rPr>
+              <a:t>2</a:t>
+            </a:r>
+          </a:p>
+        </p:txBody>
+      </p:sp>
+      <p:sp>
+        <p:nvSpPr>
+          <p:cNvPr id="8" name="">
+            <a:extLst xmlns:a="http://schemas.openxmlformats.org/drawingml/2006/main">
+              <a:ext uri="{FF2B5EF4-FFF2-40B4-BE49-F238E27FC236}">
+                <a16:creationId xmlns:a16="http://schemas.microsoft.com/office/drawing/2014/main" id="{51C1F5FA-8CF9-4E1F-B08B-833CF6264E3E}"/>
+              </a:ext>
+            </a:extLst>
+          </p:cNvPr>
+          <p:cNvSpPr>
+            <a:spLocks xmlns:a="http://schemas.openxmlformats.org/drawingml/2006/main" noGrp="1"/>
+          </p:cNvSpPr>
+          <p:nvPr/>
+        </p:nvSpPr>
+        <p:spPr>
+          <a:xfrm xmlns:a="http://schemas.openxmlformats.org/drawingml/2006/main">
+            <a:off x="1438275" y="2838450"/>
+            <a:ext cx="4762500" cy="457200"/>
+          </a:xfrm>
+          <a:prstGeom xmlns:a="http://schemas.openxmlformats.org/drawingml/2006/main" prst="rect">
+            <a:avLst/>
+          </a:prstGeom>
+          <a:noFill xmlns:a="http://schemas.openxmlformats.org/drawingml/2006/main"/>
+          <a:ln xmlns:a="http://schemas.openxmlformats.org/drawingml/2006/main" w="0">
+            <a:noFill/>
+          </a:ln>
+        </p:spPr>
+        <p:txBody>
+          <a:bodyPr xmlns:a="http://schemas.openxmlformats.org/drawingml/2006/main">
+            <a:noAutofit/>
+          </a:bodyPr>
+          <a:lstStyle xmlns:a="http://schemas.openxmlformats.org/drawingml/2006/main"/>
+          <a:p xmlns:a="http://schemas.openxmlformats.org/drawingml/2006/main">
+            <a:pPr>
+              <a:buNone/>
+              <a:defRPr sz="2175" b="1">
+                <a:solidFill>
+                  <a:srgbClr val="103D36"/>
+                </a:solidFill>
+                <a:latin typeface="Arial"/>
+                <a:ea typeface="Arial"/>
+                <a:cs typeface="Arial"/>
+              </a:defRPr>
+            </a:pPr>
+            <a:r>
+              <a:rPr sz="2175" b="1">
+                <a:solidFill>
+                  <a:srgbClr val="103D36"/>
+                </a:solidFill>
+                <a:latin typeface="Arial"/>
+                <a:ea typeface="Arial"/>
+                <a:cs typeface="Arial"/>
+              </a:rPr>
+              <a:t>Read the evidence</a:t>
+            </a:r>
+          </a:p>
+        </p:txBody>
+      </p:sp>
+      <p:sp>
+        <p:nvSpPr>
+          <p:cNvPr id="9" name="">
+            <a:extLst xmlns:a="http://schemas.openxmlformats.org/drawingml/2006/main">
+              <a:ext uri="{FF2B5EF4-FFF2-40B4-BE49-F238E27FC236}">
+                <a16:creationId xmlns:a16="http://schemas.microsoft.com/office/drawing/2014/main" id="{B0156E19-31DA-48B4-9CC6-CDB991BC8275}"/>
+              </a:ext>
+            </a:extLst>
+          </p:cNvPr>
+          <p:cNvSpPr>
+            <a:spLocks xmlns:a="http://schemas.openxmlformats.org/drawingml/2006/main" noGrp="1"/>
+          </p:cNvSpPr>
+          <p:nvPr/>
+        </p:nvSpPr>
+        <p:spPr>
+          <a:xfrm xmlns:a="http://schemas.openxmlformats.org/drawingml/2006/main">
+            <a:off x="1438275" y="3324225"/>
+            <a:ext cx="10001250" cy="400050"/>
+          </a:xfrm>
+          <a:prstGeom xmlns:a="http://schemas.openxmlformats.org/drawingml/2006/main" prst="rect">
+            <a:avLst/>
+          </a:prstGeom>
+          <a:noFill xmlns:a="http://schemas.openxmlformats.org/drawingml/2006/main"/>
+          <a:ln xmlns:a="http://schemas.openxmlformats.org/drawingml/2006/main" w="0">
+            <a:noFill/>
+          </a:ln>
+        </p:spPr>
+        <p:txBody>
+          <a:bodyPr xmlns:a="http://schemas.openxmlformats.org/drawingml/2006/main">
+            <a:noAutofit/>
+          </a:bodyPr>
+          <a:lstStyle xmlns:a="http://schemas.openxmlformats.org/drawingml/2006/main"/>
+          <a:p xmlns:a="http://schemas.openxmlformats.org/drawingml/2006/main">
+            <a:pPr>
+              <a:buNone/>
+              <a:defRPr sz="1875" b="0">
+                <a:solidFill>
+                  <a:srgbClr val="103D36"/>
+                </a:solidFill>
+                <a:latin typeface="Arial"/>
+                <a:ea typeface="Arial"/>
+                <a:cs typeface="Arial"/>
+              </a:defRPr>
+            </a:pPr>
+            <a:r>
+              <a:rPr sz="1875" b="0">
+                <a:solidFill>
+                  <a:srgbClr val="103D36"/>
+                </a:solidFill>
+                <a:latin typeface="Arial"/>
+                <a:ea typeface="Arial"/>
+                <a:cs typeface="Arial"/>
+              </a:rPr>
+              <a:t>Compare Jebel Ali and monthly history; the mean difference is inconclusive.</a:t>
+            </a:r>
+          </a:p>
+        </p:txBody>
+      </p:sp>
+      <p:sp>
+        <p:nvSpPr>
+          <p:cNvPr id="10" name="">
+            <a:extLst xmlns:a="http://schemas.openxmlformats.org/drawingml/2006/main">
+              <a:ext uri="{FF2B5EF4-FFF2-40B4-BE49-F238E27FC236}">
+                <a16:creationId xmlns:a16="http://schemas.microsoft.com/office/drawing/2014/main" id="{79F8217C-6E8E-4C4E-B8C5-4B1966815A59}"/>
+              </a:ext>
+            </a:extLst>
+          </p:cNvPr>
+          <p:cNvSpPr>
+            <a:spLocks xmlns:a="http://schemas.openxmlformats.org/drawingml/2006/main" noGrp="1"/>
+          </p:cNvSpPr>
+          <p:nvPr/>
+        </p:nvSpPr>
+        <p:spPr>
+          <a:xfrm xmlns:a="http://schemas.openxmlformats.org/drawingml/2006/main">
+            <a:off x="609600" y="3867150"/>
+            <a:ext cx="619125" cy="523875"/>
+          </a:xfrm>
+          <a:prstGeom xmlns:a="http://schemas.openxmlformats.org/drawingml/2006/main" prst="rect">
+            <a:avLst/>
+          </a:prstGeom>
+          <a:noFill xmlns:a="http://schemas.openxmlformats.org/drawingml/2006/main"/>
+          <a:ln xmlns:a="http://schemas.openxmlformats.org/drawingml/2006/main" w="0">
+            <a:noFill/>
+          </a:ln>
+        </p:spPr>
+        <p:txBody>
+          <a:bodyPr xmlns:a="http://schemas.openxmlformats.org/drawingml/2006/main">
+            <a:noAutofit/>
+          </a:bodyPr>
+          <a:lstStyle xmlns:a="http://schemas.openxmlformats.org/drawingml/2006/main"/>
+          <a:p xmlns:a="http://schemas.openxmlformats.org/drawingml/2006/main">
+            <a:pPr>
+              <a:buNone/>
+              <a:defRPr sz="2850" b="1">
+                <a:solidFill>
+                  <a:srgbClr val="0C554E"/>
+                </a:solidFill>
+                <a:latin typeface="Arial"/>
+                <a:ea typeface="Arial"/>
+                <a:cs typeface="Arial"/>
+              </a:defRPr>
+            </a:pPr>
+            <a:r>
+              <a:rPr sz="2850" b="1">
+                <a:solidFill>
+                  <a:srgbClr val="0C554E"/>
+                </a:solidFill>
+                <a:latin typeface="Arial"/>
+                <a:ea typeface="Arial"/>
+                <a:cs typeface="Arial"/>
+              </a:rPr>
+              <a:t>3</a:t>
+            </a:r>
+          </a:p>
+        </p:txBody>
+      </p:sp>
+      <p:sp>
+        <p:nvSpPr>
+          <p:cNvPr id="11" name="">
+            <a:extLst xmlns:a="http://schemas.openxmlformats.org/drawingml/2006/main">
+              <a:ext uri="{FF2B5EF4-FFF2-40B4-BE49-F238E27FC236}">
+                <a16:creationId xmlns:a16="http://schemas.microsoft.com/office/drawing/2014/main" id="{27A6ECE5-0D9C-4134-9E53-E698465D17D5}"/>
+              </a:ext>
+            </a:extLst>
+          </p:cNvPr>
+          <p:cNvSpPr>
+            <a:spLocks xmlns:a="http://schemas.openxmlformats.org/drawingml/2006/main" noGrp="1"/>
+          </p:cNvSpPr>
+          <p:nvPr/>
+        </p:nvSpPr>
+        <p:spPr>
+          <a:xfrm xmlns:a="http://schemas.openxmlformats.org/drawingml/2006/main">
+            <a:off x="1438275" y="3867150"/>
+            <a:ext cx="4762500" cy="457200"/>
+          </a:xfrm>
+          <a:prstGeom xmlns:a="http://schemas.openxmlformats.org/drawingml/2006/main" prst="rect">
+            <a:avLst/>
+          </a:prstGeom>
+          <a:noFill xmlns:a="http://schemas.openxmlformats.org/drawingml/2006/main"/>
+          <a:ln xmlns:a="http://schemas.openxmlformats.org/drawingml/2006/main" w="0">
+            <a:noFill/>
+          </a:ln>
+        </p:spPr>
+        <p:txBody>
+          <a:bodyPr xmlns:a="http://schemas.openxmlformats.org/drawingml/2006/main">
+            <a:noAutofit/>
+          </a:bodyPr>
+          <a:lstStyle xmlns:a="http://schemas.openxmlformats.org/drawingml/2006/main"/>
+          <a:p xmlns:a="http://schemas.openxmlformats.org/drawingml/2006/main">
+            <a:pPr>
+              <a:buNone/>
+              <a:defRPr sz="2175" b="1">
+                <a:solidFill>
+                  <a:srgbClr val="103D36"/>
+                </a:solidFill>
+                <a:latin typeface="Arial"/>
+                <a:ea typeface="Arial"/>
+                <a:cs typeface="Arial"/>
+              </a:defRPr>
+            </a:pPr>
+            <a:r>
+              <a:rPr sz="2175" b="1">
+                <a:solidFill>
+                  <a:srgbClr val="103D36"/>
+                </a:solidFill>
+                <a:latin typeface="Arial"/>
+                <a:ea typeface="Arial"/>
+                <a:cs typeface="Arial"/>
+              </a:rPr>
+              <a:t>Inspect methane candidates</a:t>
+            </a:r>
+          </a:p>
+        </p:txBody>
+      </p:sp>
+      <p:sp>
+        <p:nvSpPr>
+          <p:cNvPr id="12" name="">
+            <a:extLst xmlns:a="http://schemas.openxmlformats.org/drawingml/2006/main">
+              <a:ext uri="{FF2B5EF4-FFF2-40B4-BE49-F238E27FC236}">
+                <a16:creationId xmlns:a16="http://schemas.microsoft.com/office/drawing/2014/main" id="{0A03F3D8-D263-4CCA-831D-F04599053DA3}"/>
+              </a:ext>
+            </a:extLst>
+          </p:cNvPr>
+          <p:cNvSpPr>
+            <a:spLocks xmlns:a="http://schemas.openxmlformats.org/drawingml/2006/main" noGrp="1"/>
+          </p:cNvSpPr>
+          <p:nvPr/>
+        </p:nvSpPr>
+        <p:spPr>
+          <a:xfrm xmlns:a="http://schemas.openxmlformats.org/drawingml/2006/main">
+            <a:off x="1438275" y="4352925"/>
+            <a:ext cx="10001250" cy="400050"/>
+          </a:xfrm>
+          <a:prstGeom xmlns:a="http://schemas.openxmlformats.org/drawingml/2006/main" prst="rect">
+            <a:avLst/>
+          </a:prstGeom>
+          <a:noFill xmlns:a="http://schemas.openxmlformats.org/drawingml/2006/main"/>
+          <a:ln xmlns:a="http://schemas.openxmlformats.org/drawingml/2006/main" w="0">
+            <a:noFill/>
+          </a:ln>
+        </p:spPr>
+        <p:txBody>
+          <a:bodyPr xmlns:a="http://schemas.openxmlformats.org/drawingml/2006/main">
+            <a:noAutofit/>
+          </a:bodyPr>
+          <a:lstStyle xmlns:a="http://schemas.openxmlformats.org/drawingml/2006/main"/>
+          <a:p xmlns:a="http://schemas.openxmlformats.org/drawingml/2006/main">
+            <a:pPr>
+              <a:buNone/>
+              <a:defRPr sz="1875" b="0">
+                <a:solidFill>
+                  <a:srgbClr val="103D36"/>
+                </a:solidFill>
+                <a:latin typeface="Arial"/>
+                <a:ea typeface="Arial"/>
+                <a:cs typeface="Arial"/>
+              </a:defRPr>
+            </a:pPr>
+            <a:r>
+              <a:rPr sz="1875" b="0">
+                <a:solidFill>
+                  <a:srgbClr val="103D36"/>
+                </a:solidFill>
+                <a:latin typeface="Arial"/>
+                <a:ea typeface="Arial"/>
+                <a:cs typeface="Arial"/>
+              </a:rPr>
+              <a:t>Select the separate methane example; 0 candidates does not prove zero methane.</a:t>
+            </a:r>
+          </a:p>
+        </p:txBody>
+      </p:sp>
+      <p:sp>
+        <p:nvSpPr>
+          <p:cNvPr id="13" name="">
+            <a:extLst xmlns:a="http://schemas.openxmlformats.org/drawingml/2006/main">
+              <a:ext uri="{FF2B5EF4-FFF2-40B4-BE49-F238E27FC236}">
+                <a16:creationId xmlns:a16="http://schemas.microsoft.com/office/drawing/2014/main" id="{4B44B693-C565-45B1-81D3-9446BA629E40}"/>
+              </a:ext>
+            </a:extLst>
+          </p:cNvPr>
+          <p:cNvSpPr>
+            <a:spLocks xmlns:a="http://schemas.openxmlformats.org/drawingml/2006/main" noGrp="1"/>
+          </p:cNvSpPr>
+          <p:nvPr/>
+        </p:nvSpPr>
+        <p:spPr>
+          <a:xfrm xmlns:a="http://schemas.openxmlformats.org/drawingml/2006/main">
+            <a:off x="609600" y="4895850"/>
+            <a:ext cx="619125" cy="523875"/>
+          </a:xfrm>
+          <a:prstGeom xmlns:a="http://schemas.openxmlformats.org/drawingml/2006/main" prst="rect">
+            <a:avLst/>
+          </a:prstGeom>
+          <a:noFill xmlns:a="http://schemas.openxmlformats.org/drawingml/2006/main"/>
+          <a:ln xmlns:a="http://schemas.openxmlformats.org/drawingml/2006/main" w="0">
+            <a:noFill/>
+          </a:ln>
+        </p:spPr>
+        <p:txBody>
+          <a:bodyPr xmlns:a="http://schemas.openxmlformats.org/drawingml/2006/main">
+            <a:noAutofit/>
+          </a:bodyPr>
+          <a:lstStyle xmlns:a="http://schemas.openxmlformats.org/drawingml/2006/main"/>
+          <a:p xmlns:a="http://schemas.openxmlformats.org/drawingml/2006/main">
+            <a:pPr>
+              <a:buNone/>
+              <a:defRPr sz="2850" b="1">
+                <a:solidFill>
+                  <a:srgbClr val="0C554E"/>
+                </a:solidFill>
+                <a:latin typeface="Arial"/>
+                <a:ea typeface="Arial"/>
+                <a:cs typeface="Arial"/>
+              </a:defRPr>
+            </a:pPr>
+            <a:r>
+              <a:rPr sz="2850" b="1">
+                <a:solidFill>
+                  <a:srgbClr val="0C554E"/>
+                </a:solidFill>
+                <a:latin typeface="Arial"/>
+                <a:ea typeface="Arial"/>
+                <a:cs typeface="Arial"/>
+              </a:rPr>
+              <a:t>4</a:t>
+            </a:r>
+          </a:p>
+        </p:txBody>
+      </p:sp>
+      <p:sp>
+        <p:nvSpPr>
+          <p:cNvPr id="14" name="">
+            <a:extLst xmlns:a="http://schemas.openxmlformats.org/drawingml/2006/main">
+              <a:ext uri="{FF2B5EF4-FFF2-40B4-BE49-F238E27FC236}">
+                <a16:creationId xmlns:a16="http://schemas.microsoft.com/office/drawing/2014/main" id="{C53AD0E9-8C54-48EA-9C74-76898994EED1}"/>
+              </a:ext>
+            </a:extLst>
+          </p:cNvPr>
+          <p:cNvSpPr>
+            <a:spLocks xmlns:a="http://schemas.openxmlformats.org/drawingml/2006/main" noGrp="1"/>
+          </p:cNvSpPr>
+          <p:nvPr/>
+        </p:nvSpPr>
+        <p:spPr>
+          <a:xfrm xmlns:a="http://schemas.openxmlformats.org/drawingml/2006/main">
+            <a:off x="1438275" y="4895850"/>
+            <a:ext cx="4762500" cy="457200"/>
+          </a:xfrm>
+          <a:prstGeom xmlns:a="http://schemas.openxmlformats.org/drawingml/2006/main" prst="rect">
+            <a:avLst/>
+          </a:prstGeom>
+          <a:noFill xmlns:a="http://schemas.openxmlformats.org/drawingml/2006/main"/>
+          <a:ln xmlns:a="http://schemas.openxmlformats.org/drawingml/2006/main" w="0">
+            <a:noFill/>
+          </a:ln>
+        </p:spPr>
+        <p:txBody>
+          <a:bodyPr xmlns:a="http://schemas.openxmlformats.org/drawingml/2006/main">
+            <a:noAutofit/>
+          </a:bodyPr>
+          <a:lstStyle xmlns:a="http://schemas.openxmlformats.org/drawingml/2006/main"/>
+          <a:p xmlns:a="http://schemas.openxmlformats.org/drawingml/2006/main">
+            <a:pPr>
+              <a:buNone/>
+              <a:defRPr sz="2175" b="1">
+                <a:solidFill>
+                  <a:srgbClr val="103D36"/>
+                </a:solidFill>
+                <a:latin typeface="Arial"/>
+                <a:ea typeface="Arial"/>
+                <a:cs typeface="Arial"/>
+              </a:defRPr>
+            </a:pPr>
+            <a:r>
+              <a:rPr sz="2175" b="1">
+                <a:solidFill>
+                  <a:srgbClr val="103D36"/>
+                </a:solidFill>
+                <a:latin typeface="Arial"/>
+                <a:ea typeface="Arial"/>
+                <a:cs typeface="Arial"/>
+              </a:rPr>
+              <a:t>Export and follow up</a:t>
+            </a:r>
+          </a:p>
+        </p:txBody>
+      </p:sp>
+      <p:sp>
+        <p:nvSpPr>
+          <p:cNvPr id="15" name="">
+            <a:extLst xmlns:a="http://schemas.openxmlformats.org/drawingml/2006/main">
+              <a:ext uri="{FF2B5EF4-FFF2-40B4-BE49-F238E27FC236}">
+                <a16:creationId xmlns:a16="http://schemas.microsoft.com/office/drawing/2014/main" id="{D2C56C2A-1B70-4F80-B831-89B8A3682A2A}"/>
+              </a:ext>
+            </a:extLst>
+          </p:cNvPr>
+          <p:cNvSpPr>
+            <a:spLocks xmlns:a="http://schemas.openxmlformats.org/drawingml/2006/main" noGrp="1"/>
+          </p:cNvSpPr>
+          <p:nvPr/>
+        </p:nvSpPr>
+        <p:spPr>
+          <a:xfrm xmlns:a="http://schemas.openxmlformats.org/drawingml/2006/main">
+            <a:off x="1438275" y="5381625"/>
+            <a:ext cx="10001250" cy="400050"/>
+          </a:xfrm>
+          <a:prstGeom xmlns:a="http://schemas.openxmlformats.org/drawingml/2006/main" prst="rect">
+            <a:avLst/>
+          </a:prstGeom>
+          <a:noFill xmlns:a="http://schemas.openxmlformats.org/drawingml/2006/main"/>
+          <a:ln xmlns:a="http://schemas.openxmlformats.org/drawingml/2006/main" w="0">
+            <a:noFill/>
+          </a:ln>
+        </p:spPr>
+        <p:txBody>
+          <a:bodyPr xmlns:a="http://schemas.openxmlformats.org/drawingml/2006/main">
+            <a:noAutofit/>
+          </a:bodyPr>
+          <a:lstStyle xmlns:a="http://schemas.openxmlformats.org/drawingml/2006/main"/>
+          <a:p xmlns:a="http://schemas.openxmlformats.org/drawingml/2006/main">
+            <a:pPr>
+              <a:buNone/>
+              <a:defRPr sz="1875" b="0">
+                <a:solidFill>
+                  <a:srgbClr val="103D36"/>
+                </a:solidFill>
+                <a:latin typeface="Arial"/>
+                <a:ea typeface="Arial"/>
+                <a:cs typeface="Arial"/>
+              </a:defRPr>
+            </a:pPr>
+            <a:r>
+              <a:rPr sz="1875" b="0">
+                <a:solidFill>
+                  <a:srgbClr val="103D36"/>
+                </a:solidFill>
+                <a:latin typeface="Arial"/>
+                <a:ea typeface="Arial"/>
+                <a:cs typeface="Arial"/>
+              </a:rPr>
+              <a:t>Download current evidence; review it before gas-specific field follow-up.</a:t>
+            </a:r>
+          </a:p>
+        </p:txBody>
+      </p:sp>
+      <p:sp>
+        <p:nvSpPr>
+          <p:cNvPr id="16" name="">
+            <a:extLst xmlns:a="http://schemas.openxmlformats.org/drawingml/2006/main">
+              <a:ext uri="{FF2B5EF4-FFF2-40B4-BE49-F238E27FC236}">
+                <a16:creationId xmlns:a16="http://schemas.microsoft.com/office/drawing/2014/main" id="{3F7CC210-A9CE-4067-B188-AEE3DBE8846C}"/>
+              </a:ext>
+            </a:extLst>
+          </p:cNvPr>
+          <p:cNvSpPr>
+            <a:spLocks xmlns:a="http://schemas.openxmlformats.org/drawingml/2006/main" noGrp="1"/>
+          </p:cNvSpPr>
+          <p:nvPr/>
+        </p:nvSpPr>
+        <p:spPr>
+          <a:xfrm xmlns:a="http://schemas.openxmlformats.org/drawingml/2006/main">
+            <a:off x="609600" y="6191250"/>
+            <a:ext cx="10953750" cy="295275"/>
+          </a:xfrm>
+          <a:prstGeom xmlns:a="http://schemas.openxmlformats.org/drawingml/2006/main" prst="rect">
+            <a:avLst/>
+          </a:prstGeom>
+          <a:noFill xmlns:a="http://schemas.openxmlformats.org/drawingml/2006/main"/>
+          <a:ln xmlns:a="http://schemas.openxmlformats.org/drawingml/2006/main" w="0">
+            <a:noFill/>
+          </a:ln>
+        </p:spPr>
+        <p:txBody>
+          <a:bodyPr xmlns:a="http://schemas.openxmlformats.org/drawingml/2006/main">
+            <a:noAutofit/>
+          </a:bodyPr>
+          <a:lstStyle xmlns:a="http://schemas.openxmlformats.org/drawingml/2006/main"/>
+          <a:p xmlns:a="http://schemas.openxmlformats.org/drawingml/2006/main">
+            <a:pPr>
+              <a:buNone/>
+              <a:defRPr sz="1500" b="0">
                 <a:solidFill>
                   <a:srgbClr val="53716A"/>
                 </a:solidFill>
@@ -8680,7 +10251,7 @@
               </a:defRPr>
             </a:pPr>
             <a:r>
-              <a:rPr sz="1950" b="0">
+              <a:rPr sz="1500" b="0">
                 <a:solidFill>
                   <a:srgbClr val="53716A"/>
                 </a:solidFill>
@@ -8688,7 +10259,7 @@
                 <a:ea typeface="Arial"/>
                 <a:cs typeface="Arial"/>
               </a:rPr>
-              <a:t>Software verification does not establish independent UAE detection accuracy.</a:t>
+              <a:t>Bundled NO₂ has area/history results; CO, SO₂ and regional CH₄ include archived map layers.</a:t>
             </a:r>
           </a:p>
         </p:txBody>
@@ -8696,7 +10267,7 @@
     </p:spTree>
     <p:extLst>
       <p:ext uri="{BB962C8B-B14F-4D97-AF65-F5344CB8AC3E}">
-        <p14:creationId xmlns:p14="http://schemas.microsoft.com/office/powerpoint/2010/main" val="391857399"/>
+        <p14:creationId xmlns:p14="http://schemas.microsoft.com/office/powerpoint/2010/main" val="1649069850"/>
       </p:ext>
     </p:extLst>
   </p:cSld>
@@ -8724,10 +10295,10 @@
       </p:grpSpPr>
       <p:sp>
         <p:nvSpPr>
-          <p:cNvPr id="9" name="">
-            <a:extLst xmlns:a="http://schemas.openxmlformats.org/drawingml/2006/main">
-              <a:ext uri="{FF2B5EF4-FFF2-40B4-BE49-F238E27FC236}">
-                <a16:creationId xmlns:a16="http://schemas.microsoft.com/office/drawing/2014/main" id="{80A40963-52AB-42D5-9BB6-8167894B4EAE}"/>
+          <p:cNvPr id="8" name="">
+            <a:extLst xmlns:a="http://schemas.openxmlformats.org/drawingml/2006/main">
+              <a:ext uri="{FF2B5EF4-FFF2-40B4-BE49-F238E27FC236}">
+                <a16:creationId xmlns:a16="http://schemas.microsoft.com/office/drawing/2014/main" id="{7271D439-67E0-48EF-B59F-0CBD49AB2BD3}"/>
               </a:ext>
             </a:extLst>
           </p:cNvPr>
@@ -8774,7 +10345,7 @@
                 <a:ea typeface="Arial"/>
                 <a:cs typeface="Arial"/>
               </a:rPr>
-              <a:t>Interpretation and development priorities</a:t>
+              <a:t>Actual area review</a:t>
             </a:r>
           </a:p>
         </p:txBody>
@@ -8784,7 +10355,7 @@
           <p:cNvPr id="2" name="">
             <a:extLst xmlns:a="http://schemas.openxmlformats.org/drawingml/2006/main">
               <a:ext uri="{FF2B5EF4-FFF2-40B4-BE49-F238E27FC236}">
-                <a16:creationId xmlns:a16="http://schemas.microsoft.com/office/drawing/2014/main" id="{6D84353A-5732-4E62-8552-93175C187544}"/>
+                <a16:creationId xmlns:a16="http://schemas.microsoft.com/office/drawing/2014/main" id="{01163914-2F62-4F44-B55C-A3CD864D3D78}"/>
               </a:ext>
             </a:extLst>
           </p:cNvPr>
@@ -8814,7 +10385,7 @@
           <p:cNvPr id="3" name="">
             <a:extLst xmlns:a="http://schemas.openxmlformats.org/drawingml/2006/main">
               <a:ext uri="{FF2B5EF4-FFF2-40B4-BE49-F238E27FC236}">
-                <a16:creationId xmlns:a16="http://schemas.microsoft.com/office/drawing/2014/main" id="{29F20556-D136-49FF-8883-0D60F0156555}"/>
+                <a16:creationId xmlns:a16="http://schemas.microsoft.com/office/drawing/2014/main" id="{BA5FFF62-E3E8-4286-A7E3-0D4464712582}"/>
               </a:ext>
             </a:extLst>
           </p:cNvPr>
@@ -8866,24 +10437,46 @@
           </a:p>
         </p:txBody>
       </p:sp>
-      <p:sp>
-        <p:nvSpPr>
-          <p:cNvPr id="4" name="">
-            <a:extLst xmlns:a="http://schemas.openxmlformats.org/drawingml/2006/main">
-              <a:ext uri="{FF2B5EF4-FFF2-40B4-BE49-F238E27FC236}">
-                <a16:creationId xmlns:a16="http://schemas.microsoft.com/office/drawing/2014/main" id="{6A63C40C-1C58-4860-971E-E6F299D0C9CF}"/>
-              </a:ext>
-            </a:extLst>
-          </p:cNvPr>
-          <p:cNvSpPr>
-            <a:spLocks xmlns:a="http://schemas.openxmlformats.org/drawingml/2006/main" noGrp="1"/>
-          </p:cNvSpPr>
-          <p:nvPr/>
-        </p:nvSpPr>
-        <p:spPr>
-          <a:xfrm xmlns:a="http://schemas.openxmlformats.org/drawingml/2006/main">
-            <a:off x="609600" y="1790700"/>
-            <a:ext cx="5048250" cy="523875"/>
+      <p:pic>
+        <p:nvPicPr>
+          <p:cNvPr id="11" name=""/>
+          <p:cNvPicPr>
+            <a:picLocks xmlns:a="http://schemas.openxmlformats.org/drawingml/2006/main" noChangeAspect="1"/>
+          </p:cNvPicPr>
+          <p:nvPr/>
+        </p:nvPicPr>
+        <p:blipFill>
+          <a:blip xmlns:r="http://schemas.openxmlformats.org/officeDocument/2006/relationships" xmlns:a="http://schemas.openxmlformats.org/drawingml/2006/main" r:embed="Ra8013aadfb314f53"/>
+          <a:stretch xmlns:a="http://schemas.openxmlformats.org/drawingml/2006/main"/>
+        </p:blipFill>
+        <p:spPr>
+          <a:xfrm xmlns:a="http://schemas.openxmlformats.org/drawingml/2006/main">
+            <a:off x="883660" y="1685925"/>
+            <a:ext cx="6405130" cy="4333875"/>
+          </a:xfrm>
+          <a:prstGeom xmlns:a="http://schemas.openxmlformats.org/drawingml/2006/main" prst="rect">
+            <a:avLst/>
+          </a:prstGeom>
+        </p:spPr>
+      </p:pic>
+      <p:sp>
+        <p:nvSpPr>
+          <p:cNvPr id="5" name="">
+            <a:extLst xmlns:a="http://schemas.openxmlformats.org/drawingml/2006/main">
+              <a:ext uri="{FF2B5EF4-FFF2-40B4-BE49-F238E27FC236}">
+                <a16:creationId xmlns:a16="http://schemas.microsoft.com/office/drawing/2014/main" id="{71BA24F5-3393-4F39-81CB-3ECD95AD7627}"/>
+              </a:ext>
+            </a:extLst>
+          </p:cNvPr>
+          <p:cNvSpPr>
+            <a:spLocks xmlns:a="http://schemas.openxmlformats.org/drawingml/2006/main" noGrp="1"/>
+          </p:cNvSpPr>
+          <p:nvPr/>
+        </p:nvSpPr>
+        <p:spPr>
+          <a:xfrm xmlns:a="http://schemas.openxmlformats.org/drawingml/2006/main">
+            <a:off x="7991475" y="1857375"/>
+            <a:ext cx="3486150" cy="428625"/>
           </a:xfrm>
           <a:prstGeom xmlns:a="http://schemas.openxmlformats.org/drawingml/2006/main" prst="rect">
             <a:avLst/>
@@ -8900,7 +10493,7 @@
           <a:lstStyle xmlns:a="http://schemas.openxmlformats.org/drawingml/2006/main"/>
           <a:p xmlns:a="http://schemas.openxmlformats.org/drawingml/2006/main">
             <a:pPr>
-              <a:defRPr sz="2400" b="1">
+              <a:defRPr sz="2325" b="1">
                 <a:solidFill>
                   <a:srgbClr val="0C554E"/>
                 </a:solidFill>
@@ -8910,7 +10503,7 @@
               </a:defRPr>
             </a:pPr>
             <a:r>
-              <a:rPr sz="2400" b="1">
+              <a:rPr sz="2325" b="1">
                 <a:solidFill>
                   <a:srgbClr val="0C554E"/>
                 </a:solidFill>
@@ -8918,29 +10511,29 @@
                 <a:ea typeface="Arial"/>
                 <a:cs typeface="Arial"/>
               </a:rPr>
-              <a:t>Current limits</a:t>
-            </a:r>
-          </a:p>
-        </p:txBody>
-      </p:sp>
-      <p:sp>
-        <p:nvSpPr>
-          <p:cNvPr id="5" name="">
-            <a:extLst xmlns:a="http://schemas.openxmlformats.org/drawingml/2006/main">
-              <a:ext uri="{FF2B5EF4-FFF2-40B4-BE49-F238E27FC236}">
-                <a16:creationId xmlns:a16="http://schemas.microsoft.com/office/drawing/2014/main" id="{DEF8A415-831F-4902-A395-E34B1226FF74}"/>
-              </a:ext>
-            </a:extLst>
-          </p:cNvPr>
-          <p:cNvSpPr>
-            <a:spLocks xmlns:a="http://schemas.openxmlformats.org/drawingml/2006/main" noGrp="1"/>
-          </p:cNvSpPr>
-          <p:nvPr/>
-        </p:nvSpPr>
-        <p:spPr>
-          <a:xfrm xmlns:a="http://schemas.openxmlformats.org/drawingml/2006/main">
-            <a:off x="609600" y="2571750"/>
-            <a:ext cx="5219700" cy="2667000"/>
+              <a:t>Dubai · NO₂</a:t>
+            </a:r>
+          </a:p>
+        </p:txBody>
+      </p:sp>
+      <p:sp>
+        <p:nvSpPr>
+          <p:cNvPr id="6" name="">
+            <a:extLst xmlns:a="http://schemas.openxmlformats.org/drawingml/2006/main">
+              <a:ext uri="{FF2B5EF4-FFF2-40B4-BE49-F238E27FC236}">
+                <a16:creationId xmlns:a16="http://schemas.microsoft.com/office/drawing/2014/main" id="{F354465E-A97E-450C-99A1-ED8E989595EB}"/>
+              </a:ext>
+            </a:extLst>
+          </p:cNvPr>
+          <p:cNvSpPr>
+            <a:spLocks xmlns:a="http://schemas.openxmlformats.org/drawingml/2006/main" noGrp="1"/>
+          </p:cNvSpPr>
+          <p:nvPr/>
+        </p:nvSpPr>
+        <p:spPr>
+          <a:xfrm xmlns:a="http://schemas.openxmlformats.org/drawingml/2006/main">
+            <a:off x="7991475" y="2524125"/>
+            <a:ext cx="3476625" cy="1381125"/>
           </a:xfrm>
           <a:prstGeom xmlns:a="http://schemas.openxmlformats.org/drawingml/2006/main" prst="rect">
             <a:avLst/>
@@ -8975,7 +10568,7 @@
                 <a:ea typeface="Arial"/>
                 <a:cs typeface="Arial"/>
               </a:rPr>
-              <a:t>Columns do not give ground-level exposure,</a:t>
+              <a:t>207.85 µmol/m²</a:t>
             </a:r>
           </a:p>
           <a:p xmlns:a="http://schemas.openxmlformats.org/drawingml/2006/main">
@@ -8998,12 +10591,7 @@
                 <a:ea typeface="Arial"/>
                 <a:cs typeface="Arial"/>
               </a:rPr>
-              <a:t>AQI, emission rates or a safety verdict.</a:t>
-            </a:r>
-          </a:p>
-          <a:p xmlns:a="http://schemas.openxmlformats.org/drawingml/2006/main">
-            <a:r>
-              <a:t/>
+              <a:t>226 / 243 usable days</a:t>
             </a:r>
           </a:p>
           <a:p xmlns:a="http://schemas.openxmlformats.org/drawingml/2006/main">
@@ -9026,80 +10614,29 @@
                 <a:ea typeface="Arial"/>
                 <a:cs typeface="Arial"/>
               </a:rPr>
-              <a:t>Candidates need analyst review. Clouds,</a:t>
-            </a:r>
-          </a:p>
-          <a:p xmlns:a="http://schemas.openxmlformats.org/drawingml/2006/main">
-            <a:pPr>
-              <a:defRPr sz="2100" b="0">
-                <a:solidFill>
-                  <a:srgbClr val="103D36"/>
-                </a:solidFill>
-                <a:latin typeface="Arial"/>
-                <a:ea typeface="Arial"/>
-                <a:cs typeface="Arial"/>
-              </a:defRPr>
-            </a:pPr>
-            <a:r>
-              <a:rPr sz="2100" b="0">
-                <a:solidFill>
-                  <a:srgbClr val="103D36"/>
-                </a:solidFill>
-                <a:latin typeface="Arial"/>
-                <a:ea typeface="Arial"/>
-                <a:cs typeface="Arial"/>
-              </a:rPr>
-              <a:t>wind and reference uncertainty matter.</a:t>
-            </a:r>
-          </a:p>
-          <a:p xmlns:a="http://schemas.openxmlformats.org/drawingml/2006/main">
-            <a:r>
-              <a:t/>
-            </a:r>
-          </a:p>
-          <a:p xmlns:a="http://schemas.openxmlformats.org/drawingml/2006/main">
-            <a:pPr>
-              <a:defRPr sz="2100" b="0">
-                <a:solidFill>
-                  <a:srgbClr val="103D36"/>
-                </a:solidFill>
-                <a:latin typeface="Arial"/>
-                <a:ea typeface="Arial"/>
-                <a:cs typeface="Arial"/>
-              </a:defRPr>
-            </a:pPr>
-            <a:r>
-              <a:rPr sz="2100" b="0">
-                <a:solidFill>
-                  <a:srgbClr val="103D36"/>
-                </a:solidFill>
-                <a:latin typeface="Arial"/>
-                <a:ea typeface="Arial"/>
-                <a:cs typeface="Arial"/>
-              </a:rPr>
-              <a:t>UAE forecasting is not validated.</a:t>
-            </a:r>
-          </a:p>
-        </p:txBody>
-      </p:sp>
-      <p:sp>
-        <p:nvSpPr>
-          <p:cNvPr id="6" name="">
-            <a:extLst xmlns:a="http://schemas.openxmlformats.org/drawingml/2006/main">
-              <a:ext uri="{FF2B5EF4-FFF2-40B4-BE49-F238E27FC236}">
-                <a16:creationId xmlns:a16="http://schemas.microsoft.com/office/drawing/2014/main" id="{0FAE7FB8-B268-41BA-B99F-D8CEC4079303}"/>
-              </a:ext>
-            </a:extLst>
-          </p:cNvPr>
-          <p:cNvSpPr>
-            <a:spLocks xmlns:a="http://schemas.openxmlformats.org/drawingml/2006/main" noGrp="1"/>
-          </p:cNvSpPr>
-          <p:nvPr/>
-        </p:nvSpPr>
-        <p:spPr>
-          <a:xfrm xmlns:a="http://schemas.openxmlformats.org/drawingml/2006/main">
-            <a:off x="6477000" y="1790700"/>
-            <a:ext cx="5095875" cy="523875"/>
+              <a:t>January–August 2026</a:t>
+            </a:r>
+          </a:p>
+        </p:txBody>
+      </p:sp>
+      <p:sp>
+        <p:nvSpPr>
+          <p:cNvPr id="7" name="">
+            <a:extLst xmlns:a="http://schemas.openxmlformats.org/drawingml/2006/main">
+              <a:ext uri="{FF2B5EF4-FFF2-40B4-BE49-F238E27FC236}">
+                <a16:creationId xmlns:a16="http://schemas.microsoft.com/office/drawing/2014/main" id="{9480DA71-96C1-4B9E-BFE0-00398970B97D}"/>
+              </a:ext>
+            </a:extLst>
+          </p:cNvPr>
+          <p:cNvSpPr>
+            <a:spLocks xmlns:a="http://schemas.openxmlformats.org/drawingml/2006/main" noGrp="1"/>
+          </p:cNvSpPr>
+          <p:nvPr/>
+        </p:nvSpPr>
+        <p:spPr>
+          <a:xfrm xmlns:a="http://schemas.openxmlformats.org/drawingml/2006/main">
+            <a:off x="7991475" y="4191000"/>
+            <a:ext cx="3476625" cy="1809750"/>
           </a:xfrm>
           <a:prstGeom xmlns:a="http://schemas.openxmlformats.org/drawingml/2006/main" prst="rect">
             <a:avLst/>
@@ -9116,105 +10653,48 @@
           <a:lstStyle xmlns:a="http://schemas.openxmlformats.org/drawingml/2006/main"/>
           <a:p xmlns:a="http://schemas.openxmlformats.org/drawingml/2006/main">
             <a:pPr>
-              <a:defRPr sz="2400" b="1">
-                <a:solidFill>
-                  <a:srgbClr val="0C554E"/>
-                </a:solidFill>
-                <a:latin typeface="Arial"/>
-                <a:ea typeface="Arial"/>
-                <a:cs typeface="Arial"/>
-              </a:defRPr>
-            </a:pPr>
-            <a:r>
-              <a:rPr sz="2400" b="1">
-                <a:solidFill>
-                  <a:srgbClr val="0C554E"/>
-                </a:solidFill>
-                <a:latin typeface="Arial"/>
-                <a:ea typeface="Arial"/>
-                <a:cs typeface="Arial"/>
-              </a:rPr>
-              <a:t>Next evidence needed</a:t>
-            </a:r>
-          </a:p>
-        </p:txBody>
-      </p:sp>
-      <p:sp>
-        <p:nvSpPr>
-          <p:cNvPr id="7" name="">
-            <a:extLst xmlns:a="http://schemas.openxmlformats.org/drawingml/2006/main">
-              <a:ext uri="{FF2B5EF4-FFF2-40B4-BE49-F238E27FC236}">
-                <a16:creationId xmlns:a16="http://schemas.microsoft.com/office/drawing/2014/main" id="{93FD9B87-B6CE-48B8-920E-C2F5B5EE92CA}"/>
-              </a:ext>
-            </a:extLst>
-          </p:cNvPr>
-          <p:cNvSpPr>
-            <a:spLocks xmlns:a="http://schemas.openxmlformats.org/drawingml/2006/main" noGrp="1"/>
-          </p:cNvSpPr>
-          <p:nvPr/>
-        </p:nvSpPr>
-        <p:spPr>
-          <a:xfrm xmlns:a="http://schemas.openxmlformats.org/drawingml/2006/main">
-            <a:off x="6477000" y="2571750"/>
-            <a:ext cx="5095875" cy="3048000"/>
-          </a:xfrm>
-          <a:prstGeom xmlns:a="http://schemas.openxmlformats.org/drawingml/2006/main" prst="rect">
-            <a:avLst/>
-          </a:prstGeom>
-          <a:noFill xmlns:a="http://schemas.openxmlformats.org/drawingml/2006/main"/>
-          <a:ln xmlns:a="http://schemas.openxmlformats.org/drawingml/2006/main" w="0">
-            <a:noFill/>
-          </a:ln>
-        </p:spPr>
-        <p:txBody>
-          <a:bodyPr xmlns:a="http://schemas.openxmlformats.org/drawingml/2006/main">
-            <a:noAutofit/>
-          </a:bodyPr>
-          <a:lstStyle xmlns:a="http://schemas.openxmlformats.org/drawingml/2006/main"/>
-          <a:p xmlns:a="http://schemas.openxmlformats.org/drawingml/2006/main">
-            <a:pPr>
-              <a:defRPr sz="2100" b="0">
-                <a:solidFill>
-                  <a:srgbClr val="103D36"/>
-                </a:solidFill>
-                <a:latin typeface="Arial"/>
-                <a:ea typeface="Arial"/>
-                <a:cs typeface="Arial"/>
-              </a:defRPr>
-            </a:pPr>
-            <a:r>
-              <a:rPr sz="2100" b="0">
-                <a:solidFill>
-                  <a:srgbClr val="103D36"/>
-                </a:solidFill>
-                <a:latin typeface="Arial"/>
-                <a:ea typeface="Arial"/>
-                <a:cs typeface="Arial"/>
-              </a:rPr>
-              <a:t>Pair satellite observations with</a:t>
-            </a:r>
-          </a:p>
-          <a:p xmlns:a="http://schemas.openxmlformats.org/drawingml/2006/main">
-            <a:pPr>
-              <a:defRPr sz="2100" b="0">
-                <a:solidFill>
-                  <a:srgbClr val="103D36"/>
-                </a:solidFill>
-                <a:latin typeface="Arial"/>
-                <a:ea typeface="Arial"/>
-                <a:cs typeface="Arial"/>
-              </a:defRPr>
-            </a:pPr>
-            <a:r>
-              <a:rPr sz="2100" b="0">
-                <a:solidFill>
-                  <a:srgbClr val="103D36"/>
-                </a:solidFill>
-                <a:latin typeface="Arial"/>
-                <a:ea typeface="Arial"/>
-                <a:cs typeface="Arial"/>
-              </a:rPr>
-              <a:t>calibrated, gas-specific field inputs.</a:t>
+              <a:defRPr sz="1950" b="0">
+                <a:solidFill>
+                  <a:srgbClr val="103D36"/>
+                </a:solidFill>
+                <a:latin typeface="Arial"/>
+                <a:ea typeface="Arial"/>
+                <a:cs typeface="Arial"/>
+              </a:defRPr>
+            </a:pPr>
+            <a:r>
+              <a:rPr sz="1950" b="0">
+                <a:solidFill>
+                  <a:srgbClr val="103D36"/>
+                </a:solidFill>
+                <a:latin typeface="Arial"/>
+                <a:ea typeface="Arial"/>
+                <a:cs typeface="Arial"/>
+              </a:rPr>
+              <a:t>The methane record belongs</a:t>
+            </a:r>
+          </a:p>
+          <a:p xmlns:a="http://schemas.openxmlformats.org/drawingml/2006/main">
+            <a:pPr>
+              <a:defRPr sz="1950" b="0">
+                <a:solidFill>
+                  <a:srgbClr val="103D36"/>
+                </a:solidFill>
+                <a:latin typeface="Arial"/>
+                <a:ea typeface="Arial"/>
+                <a:cs typeface="Arial"/>
+              </a:defRPr>
+            </a:pPr>
+            <a:r>
+              <a:rPr sz="1950" b="0">
+                <a:solidFill>
+                  <a:srgbClr val="103D36"/>
+                </a:solidFill>
+                <a:latin typeface="Arial"/>
+                <a:ea typeface="Arial"/>
+                <a:cs typeface="Arial"/>
+              </a:rPr>
+              <a:t>to another selected location.</a:t>
             </a:r>
           </a:p>
           <a:p xmlns:a="http://schemas.openxmlformats.org/drawingml/2006/main">
@@ -9224,117 +10704,9 @@
           </a:p>
           <a:p xmlns:a="http://schemas.openxmlformats.org/drawingml/2006/main">
             <a:pPr>
-              <a:defRPr sz="2100" b="0">
-                <a:solidFill>
-                  <a:srgbClr val="103D36"/>
-                </a:solidFill>
-                <a:latin typeface="Arial"/>
-                <a:ea typeface="Arial"/>
-                <a:cs typeface="Arial"/>
-              </a:defRPr>
-            </a:pPr>
-            <a:r>
-              <a:rPr sz="2100" b="0">
-                <a:solidFill>
-                  <a:srgbClr val="103D36"/>
-                </a:solidFill>
-                <a:latin typeface="Arial"/>
-                <a:ea typeface="Arial"/>
-                <a:cs typeface="Arial"/>
-              </a:rPr>
-              <a:t>Build reviewed plume/no-plume history</a:t>
-            </a:r>
-          </a:p>
-          <a:p xmlns:a="http://schemas.openxmlformats.org/drawingml/2006/main">
-            <a:pPr>
-              <a:defRPr sz="2100" b="0">
-                <a:solidFill>
-                  <a:srgbClr val="103D36"/>
-                </a:solidFill>
-                <a:latin typeface="Arial"/>
-                <a:ea typeface="Arial"/>
-                <a:cs typeface="Arial"/>
-              </a:defRPr>
-            </a:pPr>
-            <a:r>
-              <a:rPr sz="2100" b="0">
-                <a:solidFill>
-                  <a:srgbClr val="103D36"/>
-                </a:solidFill>
-                <a:latin typeface="Arial"/>
-                <a:ea typeface="Arial"/>
-                <a:cs typeface="Arial"/>
-              </a:rPr>
-              <a:t>and test on held-out dates and locations.</a:t>
-            </a:r>
-          </a:p>
-          <a:p xmlns:a="http://schemas.openxmlformats.org/drawingml/2006/main">
-            <a:r>
-              <a:t/>
-            </a:r>
-          </a:p>
-          <a:p xmlns:a="http://schemas.openxmlformats.org/drawingml/2006/main">
-            <a:pPr>
-              <a:defRPr sz="2100" b="0">
-                <a:solidFill>
-                  <a:srgbClr val="103D36"/>
-                </a:solidFill>
-                <a:latin typeface="Arial"/>
-                <a:ea typeface="Arial"/>
-                <a:cs typeface="Arial"/>
-              </a:defRPr>
-            </a:pPr>
-            <a:r>
-              <a:rPr sz="2100" b="0">
-                <a:solidFill>
-                  <a:srgbClr val="103D36"/>
-                </a:solidFill>
-                <a:latin typeface="Arial"/>
-                <a:ea typeface="Arial"/>
-                <a:cs typeface="Arial"/>
-              </a:rPr>
-              <a:t>Use persistent hosting for unattended checks.</a:t>
-            </a:r>
-          </a:p>
-        </p:txBody>
-      </p:sp>
-      <p:sp>
-        <p:nvSpPr>
-          <p:cNvPr id="8" name="">
-            <a:extLst xmlns:a="http://schemas.openxmlformats.org/drawingml/2006/main">
-              <a:ext uri="{FF2B5EF4-FFF2-40B4-BE49-F238E27FC236}">
-                <a16:creationId xmlns:a16="http://schemas.microsoft.com/office/drawing/2014/main" id="{28FA1E05-451A-4E3E-8AEF-6503EE335697}"/>
-              </a:ext>
-            </a:extLst>
-          </p:cNvPr>
-          <p:cNvSpPr>
-            <a:spLocks xmlns:a="http://schemas.openxmlformats.org/drawingml/2006/main" noGrp="1"/>
-          </p:cNvSpPr>
-          <p:nvPr/>
-        </p:nvSpPr>
-        <p:spPr>
-          <a:xfrm xmlns:a="http://schemas.openxmlformats.org/drawingml/2006/main">
-            <a:off x="609600" y="6010275"/>
-            <a:ext cx="10953750" cy="381000"/>
-          </a:xfrm>
-          <a:prstGeom xmlns:a="http://schemas.openxmlformats.org/drawingml/2006/main" prst="rect">
-            <a:avLst/>
-          </a:prstGeom>
-          <a:noFill xmlns:a="http://schemas.openxmlformats.org/drawingml/2006/main"/>
-          <a:ln xmlns:a="http://schemas.openxmlformats.org/drawingml/2006/main" w="0">
-            <a:noFill/>
-          </a:ln>
-        </p:spPr>
-        <p:txBody>
-          <a:bodyPr xmlns:a="http://schemas.openxmlformats.org/drawingml/2006/main">
-            <a:noAutofit/>
-          </a:bodyPr>
-          <a:lstStyle xmlns:a="http://schemas.openxmlformats.org/drawingml/2006/main"/>
-          <a:p xmlns:a="http://schemas.openxmlformats.org/drawingml/2006/main">
-            <a:pPr>
               <a:defRPr sz="1950" b="0">
                 <a:solidFill>
-                  <a:srgbClr val="53716A"/>
+                  <a:srgbClr val="103D36"/>
                 </a:solidFill>
                 <a:latin typeface="Arial"/>
                 <a:ea typeface="Arial"/>
@@ -9344,13 +10716,36 @@
             <a:r>
               <a:rPr sz="1950" b="0">
                 <a:solidFill>
-                  <a:srgbClr val="53716A"/>
-                </a:solidFill>
-                <a:latin typeface="Arial"/>
-                <a:ea typeface="Arial"/>
-                <a:cs typeface="Arial"/>
-              </a:rPr>
-              <a:t>The PoC supports environmental investigation; it does not confirm emissions.</a:t>
+                  <a:srgbClr val="103D36"/>
+                </a:solidFill>
+                <a:latin typeface="Arial"/>
+                <a:ea typeface="Arial"/>
+                <a:cs typeface="Arial"/>
+              </a:rPr>
+              <a:t>The analyst receives dated</a:t>
+            </a:r>
+          </a:p>
+          <a:p xmlns:a="http://schemas.openxmlformats.org/drawingml/2006/main">
+            <a:pPr>
+              <a:defRPr sz="1950" b="0">
+                <a:solidFill>
+                  <a:srgbClr val="103D36"/>
+                </a:solidFill>
+                <a:latin typeface="Arial"/>
+                <a:ea typeface="Arial"/>
+                <a:cs typeface="Arial"/>
+              </a:defRPr>
+            </a:pPr>
+            <a:r>
+              <a:rPr sz="1950" b="0">
+                <a:solidFill>
+                  <a:srgbClr val="103D36"/>
+                </a:solidFill>
+                <a:latin typeface="Arial"/>
+                <a:ea typeface="Arial"/>
+                <a:cs typeface="Arial"/>
+              </a:rPr>
+              <a:t>evidence, not a source verdict.</a:t>
             </a:r>
           </a:p>
         </p:txBody>
@@ -9358,7 +10753,7 @@
     </p:spTree>
     <p:extLst>
       <p:ext uri="{BB962C8B-B14F-4D97-AF65-F5344CB8AC3E}">
-        <p14:creationId xmlns:p14="http://schemas.microsoft.com/office/powerpoint/2010/main" val="424679640"/>
+        <p14:creationId xmlns:p14="http://schemas.microsoft.com/office/powerpoint/2010/main" val="2123935914"/>
       </p:ext>
     </p:extLst>
   </p:cSld>

--- a/presentation/GeoGuard.pptx
+++ b/presentation/GeoGuard.pptx
@@ -2,25 +2,25 @@
 <file path=ppt/presentation.xml><?xml version="1.0" encoding="utf-8"?>
 <p:presentation xmlns:p="http://schemas.openxmlformats.org/presentationml/2006/main">
   <p:sldMasterIdLst>
-    <p:sldMasterId xmlns:r="http://schemas.openxmlformats.org/officeDocument/2006/relationships" id="2147483648" r:id="R59753d3cbd3b4160"/>
+    <p:sldMasterId xmlns:r="http://schemas.openxmlformats.org/officeDocument/2006/relationships" id="2147483648" r:id="Rcf042a5b33e44554"/>
   </p:sldMasterIdLst>
   <p:notesMasterIdLst>
-    <p:notesMasterId xmlns:r="http://schemas.openxmlformats.org/officeDocument/2006/relationships" r:id="R8aa82f9e74a14696"/>
+    <p:notesMasterId xmlns:r="http://schemas.openxmlformats.org/officeDocument/2006/relationships" r:id="Ra0e13f9b86e040c6"/>
   </p:notesMasterIdLst>
   <p:sldIdLst>
-    <p:sldId xmlns:r="http://schemas.openxmlformats.org/officeDocument/2006/relationships" id="256" r:id="R3d62b40e5427459b"/>
-    <p:sldId xmlns:r="http://schemas.openxmlformats.org/officeDocument/2006/relationships" id="257" r:id="R95fad0d398a84dee"/>
-    <p:sldId xmlns:r="http://schemas.openxmlformats.org/officeDocument/2006/relationships" id="258" r:id="R01be252ab9074992"/>
-    <p:sldId xmlns:r="http://schemas.openxmlformats.org/officeDocument/2006/relationships" id="259" r:id="Rda825094e9294128"/>
-    <p:sldId xmlns:r="http://schemas.openxmlformats.org/officeDocument/2006/relationships" id="260" r:id="Re94d39905815428a"/>
-    <p:sldId xmlns:r="http://schemas.openxmlformats.org/officeDocument/2006/relationships" id="261" r:id="R9b9bebaff3834896"/>
-    <p:sldId xmlns:r="http://schemas.openxmlformats.org/officeDocument/2006/relationships" id="262" r:id="R8d52800434a34079"/>
-    <p:sldId xmlns:r="http://schemas.openxmlformats.org/officeDocument/2006/relationships" id="263" r:id="R835c13802a064267"/>
-    <p:sldId xmlns:r="http://schemas.openxmlformats.org/officeDocument/2006/relationships" id="264" r:id="R79926f1bf45f435d"/>
-    <p:sldId xmlns:r="http://schemas.openxmlformats.org/officeDocument/2006/relationships" id="265" r:id="Re7fd04ecfc734bb2"/>
-    <p:sldId xmlns:r="http://schemas.openxmlformats.org/officeDocument/2006/relationships" id="266" r:id="R414d5e84c67b4133"/>
-    <p:sldId xmlns:r="http://schemas.openxmlformats.org/officeDocument/2006/relationships" id="267" r:id="R21b2fcb3490c41fc"/>
-    <p:sldId xmlns:r="http://schemas.openxmlformats.org/officeDocument/2006/relationships" id="268" r:id="R81e007cfdf0d41e4"/>
+    <p:sldId xmlns:r="http://schemas.openxmlformats.org/officeDocument/2006/relationships" id="256" r:id="R5e63187618f64d5b"/>
+    <p:sldId xmlns:r="http://schemas.openxmlformats.org/officeDocument/2006/relationships" id="257" r:id="R1e3982195ce74dd5"/>
+    <p:sldId xmlns:r="http://schemas.openxmlformats.org/officeDocument/2006/relationships" id="258" r:id="R1e1083055dc24e2f"/>
+    <p:sldId xmlns:r="http://schemas.openxmlformats.org/officeDocument/2006/relationships" id="259" r:id="R19c1444e0291443e"/>
+    <p:sldId xmlns:r="http://schemas.openxmlformats.org/officeDocument/2006/relationships" id="260" r:id="Rb8acc2b0c4c34000"/>
+    <p:sldId xmlns:r="http://schemas.openxmlformats.org/officeDocument/2006/relationships" id="261" r:id="Read0f22d825e42ed"/>
+    <p:sldId xmlns:r="http://schemas.openxmlformats.org/officeDocument/2006/relationships" id="262" r:id="Re598ebfb36a64308"/>
+    <p:sldId xmlns:r="http://schemas.openxmlformats.org/officeDocument/2006/relationships" id="263" r:id="R3eecb4aab4f74cba"/>
+    <p:sldId xmlns:r="http://schemas.openxmlformats.org/officeDocument/2006/relationships" id="264" r:id="R97fcec9305884d74"/>
+    <p:sldId xmlns:r="http://schemas.openxmlformats.org/officeDocument/2006/relationships" id="265" r:id="R0f9a7b45a6e54b48"/>
+    <p:sldId xmlns:r="http://schemas.openxmlformats.org/officeDocument/2006/relationships" id="266" r:id="R23e05ad03a414190"/>
+    <p:sldId xmlns:r="http://schemas.openxmlformats.org/officeDocument/2006/relationships" id="267" r:id="R124cc0cba99a432b"/>
+    <p:sldId xmlns:r="http://schemas.openxmlformats.org/officeDocument/2006/relationships" id="268" r:id="R2177c7635e7a45b8"/>
   </p:sldIdLst>
   <p:sldSz cx="12192000" cy="6858000"/>
   <p:notesSz cx="6858000" cy="9144000"/>
@@ -1412,7 +1412,7 @@
   </p:cSld>
   <p:clrMap bg1="lt1" tx1="dk1" bg2="lt2" tx2="dk2" accent1="accent1" accent2="accent2" accent3="accent3" accent4="accent4" accent5="accent5" accent6="accent6" hlink="hlink" folHlink="folHlink"/>
   <p:sldLayoutIdLst>
-    <p:sldLayoutId xmlns:r="http://schemas.openxmlformats.org/officeDocument/2006/relationships" id="2147483649" r:id="R01131c271cc24342"/>
+    <p:sldLayoutId xmlns:r="http://schemas.openxmlformats.org/officeDocument/2006/relationships" id="2147483649" r:id="R8d89c74faf0c4536"/>
   </p:sldLayoutIdLst>
   <p:txStyles>
     <p:titleStyle>
@@ -3488,7 +3488,7 @@
                 <a:ea typeface="Arial"/>
                 <a:cs typeface="Arial"/>
               </a:rPr>
-              <a:t>Team and pilot support</a:t>
+              <a:t>Team and demonstration</a:t>
             </a:r>
           </a:p>
         </p:txBody>
@@ -4054,7 +4054,7 @@
                 <a:ea typeface="Arial"/>
                 <a:cs typeface="Arial"/>
               </a:rPr>
-              <a:t>Requested support</a:t>
+              <a:t/>
             </a:r>
           </a:p>
         </p:txBody>
@@ -4094,7 +4094,7 @@
           <a:p xmlns:a="http://schemas.openxmlformats.org/drawingml/2006/main">
             <a:pPr>
               <a:buNone/>
-              <a:defRPr sz="2025" b="0">
+              <a:defRPr sz="2625" b="0">
                 <a:solidFill>
                   <a:srgbClr val="0C554E"/>
                 </a:solidFill>
@@ -4104,7 +4104,7 @@
               </a:defRPr>
             </a:pPr>
             <a:r>
-              <a:rPr sz="2025" b="0">
+              <a:rPr sz="2625" b="0">
                 <a:solidFill>
                   <a:srgbClr val="0C554E"/>
                 </a:solidFill>
@@ -4112,7 +4112,7 @@
                 <a:ea typeface="Arial"/>
                 <a:cs typeface="Arial"/>
               </a:rPr>
-              <a:t>A monitoring partner, independently reviewed cases and analyst feedback</a:t>
+              <a:t/>
             </a:r>
           </a:p>
         </p:txBody>
@@ -5467,7 +5467,7 @@
           <p:cNvPr id="9" name="">
             <a:extLst xmlns:a="http://schemas.openxmlformats.org/drawingml/2006/main">
               <a:ext uri="{FF2B5EF4-FFF2-40B4-BE49-F238E27FC236}">
-                <a16:creationId xmlns:a16="http://schemas.microsoft.com/office/drawing/2014/main" id="{E106C940-DD0D-4ACF-8723-E84499939F3D}"/>
+                <a16:creationId xmlns:a16="http://schemas.microsoft.com/office/drawing/2014/main" id="{10498C99-3141-4A09-BA9E-F806E61FE6AA}"/>
               </a:ext>
             </a:extLst>
           </p:cNvPr>
@@ -5524,7 +5524,7 @@
           <p:cNvPr id="2" name="">
             <a:extLst xmlns:a="http://schemas.openxmlformats.org/drawingml/2006/main">
               <a:ext uri="{FF2B5EF4-FFF2-40B4-BE49-F238E27FC236}">
-                <a16:creationId xmlns:a16="http://schemas.microsoft.com/office/drawing/2014/main" id="{70AC330C-6C7F-4CDD-AFB8-B03E58F64314}"/>
+                <a16:creationId xmlns:a16="http://schemas.microsoft.com/office/drawing/2014/main" id="{7829CE5C-688D-4971-8112-F57F68EBDC95}"/>
               </a:ext>
             </a:extLst>
           </p:cNvPr>
@@ -5554,7 +5554,7 @@
           <p:cNvPr id="3" name="">
             <a:extLst xmlns:a="http://schemas.openxmlformats.org/drawingml/2006/main">
               <a:ext uri="{FF2B5EF4-FFF2-40B4-BE49-F238E27FC236}">
-                <a16:creationId xmlns:a16="http://schemas.microsoft.com/office/drawing/2014/main" id="{B1285734-D2FD-492F-A607-58F340E31656}"/>
+                <a16:creationId xmlns:a16="http://schemas.microsoft.com/office/drawing/2014/main" id="{4A263D63-C7EA-4D3F-B5A5-8F27F656E959}"/>
               </a:ext>
             </a:extLst>
           </p:cNvPr>
@@ -5611,7 +5611,7 @@
           <p:cNvPr id="4" name="">
             <a:extLst xmlns:a="http://schemas.openxmlformats.org/drawingml/2006/main">
               <a:ext uri="{FF2B5EF4-FFF2-40B4-BE49-F238E27FC236}">
-                <a16:creationId xmlns:a16="http://schemas.microsoft.com/office/drawing/2014/main" id="{41CB3B77-5E1D-4204-8D4E-27DEA9E0F0EB}"/>
+                <a16:creationId xmlns:a16="http://schemas.microsoft.com/office/drawing/2014/main" id="{9D5B664F-148F-4F5C-8422-5E9D99742646}"/>
               </a:ext>
             </a:extLst>
           </p:cNvPr>
@@ -5668,7 +5668,7 @@
           <p:cNvPr id="5" name="">
             <a:extLst xmlns:a="http://schemas.openxmlformats.org/drawingml/2006/main">
               <a:ext uri="{FF2B5EF4-FFF2-40B4-BE49-F238E27FC236}">
-                <a16:creationId xmlns:a16="http://schemas.microsoft.com/office/drawing/2014/main" id="{1D8EA754-9C5A-468D-800A-D28E1BA574AB}"/>
+                <a16:creationId xmlns:a16="http://schemas.microsoft.com/office/drawing/2014/main" id="{4E82C12F-71C3-44B2-A336-B334EF74AE70}"/>
               </a:ext>
             </a:extLst>
           </p:cNvPr>
@@ -5776,7 +5776,7 @@
           <p:cNvPr id="6" name="">
             <a:extLst xmlns:a="http://schemas.openxmlformats.org/drawingml/2006/main">
               <a:ext uri="{FF2B5EF4-FFF2-40B4-BE49-F238E27FC236}">
-                <a16:creationId xmlns:a16="http://schemas.microsoft.com/office/drawing/2014/main" id="{A1D169F1-4D32-44CD-83D3-992535DA137B}"/>
+                <a16:creationId xmlns:a16="http://schemas.microsoft.com/office/drawing/2014/main" id="{98B6A8A2-5115-4C48-AECD-5203F78FF89B}"/>
               </a:ext>
             </a:extLst>
           </p:cNvPr>
@@ -5833,7 +5833,7 @@
           <p:cNvPr id="7" name="">
             <a:extLst xmlns:a="http://schemas.openxmlformats.org/drawingml/2006/main">
               <a:ext uri="{FF2B5EF4-FFF2-40B4-BE49-F238E27FC236}">
-                <a16:creationId xmlns:a16="http://schemas.microsoft.com/office/drawing/2014/main" id="{54820E75-07D2-4CE4-9067-183B56A4EB1B}"/>
+                <a16:creationId xmlns:a16="http://schemas.microsoft.com/office/drawing/2014/main" id="{F85FE87D-9B21-4051-B331-064C59F94BB8}"/>
               </a:ext>
             </a:extLst>
           </p:cNvPr>
@@ -5946,7 +5946,7 @@
           <p:cNvPr id="8" name="">
             <a:extLst xmlns:a="http://schemas.openxmlformats.org/drawingml/2006/main">
               <a:ext uri="{FF2B5EF4-FFF2-40B4-BE49-F238E27FC236}">
-                <a16:creationId xmlns:a16="http://schemas.microsoft.com/office/drawing/2014/main" id="{38AF1D14-4179-4CAE-A90F-BEC2DAE8E823}"/>
+                <a16:creationId xmlns:a16="http://schemas.microsoft.com/office/drawing/2014/main" id="{7E81C113-63D3-4582-986C-DC9F26B90BC5}"/>
               </a:ext>
             </a:extLst>
           </p:cNvPr>
@@ -6024,7 +6024,7 @@
     </p:spTree>
     <p:extLst>
       <p:ext uri="{BB962C8B-B14F-4D97-AF65-F5344CB8AC3E}">
-        <p14:creationId xmlns:p14="http://schemas.microsoft.com/office/powerpoint/2010/main" val="993510542"/>
+        <p14:creationId xmlns:p14="http://schemas.microsoft.com/office/powerpoint/2010/main" val="1192729649"/>
       </p:ext>
     </p:extLst>
   </p:cSld>
@@ -9032,7 +9032,7 @@
           <p:nvPr/>
         </p:nvPicPr>
         <p:blipFill>
-          <a:blip xmlns:r="http://schemas.openxmlformats.org/officeDocument/2006/relationships" xmlns:a="http://schemas.openxmlformats.org/drawingml/2006/main" r:embed="R04c2459abb234318"/>
+          <a:blip xmlns:r="http://schemas.openxmlformats.org/officeDocument/2006/relationships" xmlns:a="http://schemas.openxmlformats.org/drawingml/2006/main" r:embed="R5befafd6b5214306"/>
           <a:stretch xmlns:a="http://schemas.openxmlformats.org/drawingml/2006/main"/>
         </p:blipFill>
         <p:spPr>
@@ -10298,7 +10298,7 @@
           <p:cNvPr id="8" name="">
             <a:extLst xmlns:a="http://schemas.openxmlformats.org/drawingml/2006/main">
               <a:ext uri="{FF2B5EF4-FFF2-40B4-BE49-F238E27FC236}">
-                <a16:creationId xmlns:a16="http://schemas.microsoft.com/office/drawing/2014/main" id="{7271D439-67E0-48EF-B59F-0CBD49AB2BD3}"/>
+                <a16:creationId xmlns:a16="http://schemas.microsoft.com/office/drawing/2014/main" id="{0A78F1A3-1468-4515-8135-F75E0C15D35A}"/>
               </a:ext>
             </a:extLst>
           </p:cNvPr>
@@ -10355,7 +10355,7 @@
           <p:cNvPr id="2" name="">
             <a:extLst xmlns:a="http://schemas.openxmlformats.org/drawingml/2006/main">
               <a:ext uri="{FF2B5EF4-FFF2-40B4-BE49-F238E27FC236}">
-                <a16:creationId xmlns:a16="http://schemas.microsoft.com/office/drawing/2014/main" id="{01163914-2F62-4F44-B55C-A3CD864D3D78}"/>
+                <a16:creationId xmlns:a16="http://schemas.microsoft.com/office/drawing/2014/main" id="{3E1B28E4-49FB-4AF1-A3D5-9BDDB5B23DFC}"/>
               </a:ext>
             </a:extLst>
           </p:cNvPr>
@@ -10385,7 +10385,7 @@
           <p:cNvPr id="3" name="">
             <a:extLst xmlns:a="http://schemas.openxmlformats.org/drawingml/2006/main">
               <a:ext uri="{FF2B5EF4-FFF2-40B4-BE49-F238E27FC236}">
-                <a16:creationId xmlns:a16="http://schemas.microsoft.com/office/drawing/2014/main" id="{BA5FFF62-E3E8-4286-A7E3-0D4464712582}"/>
+                <a16:creationId xmlns:a16="http://schemas.microsoft.com/office/drawing/2014/main" id="{B000BB5C-5F90-4488-80EA-2FBC6BD83157}"/>
               </a:ext>
             </a:extLst>
           </p:cNvPr>
@@ -10446,7 +10446,7 @@
           <p:nvPr/>
         </p:nvPicPr>
         <p:blipFill>
-          <a:blip xmlns:r="http://schemas.openxmlformats.org/officeDocument/2006/relationships" xmlns:a="http://schemas.openxmlformats.org/drawingml/2006/main" r:embed="Ra8013aadfb314f53"/>
+          <a:blip xmlns:r="http://schemas.openxmlformats.org/officeDocument/2006/relationships" xmlns:a="http://schemas.openxmlformats.org/drawingml/2006/main" r:embed="Re1b366e8d25443df"/>
           <a:stretch xmlns:a="http://schemas.openxmlformats.org/drawingml/2006/main"/>
         </p:blipFill>
         <p:spPr>
@@ -10464,7 +10464,7 @@
           <p:cNvPr id="5" name="">
             <a:extLst xmlns:a="http://schemas.openxmlformats.org/drawingml/2006/main">
               <a:ext uri="{FF2B5EF4-FFF2-40B4-BE49-F238E27FC236}">
-                <a16:creationId xmlns:a16="http://schemas.microsoft.com/office/drawing/2014/main" id="{71BA24F5-3393-4F39-81CB-3ECD95AD7627}"/>
+                <a16:creationId xmlns:a16="http://schemas.microsoft.com/office/drawing/2014/main" id="{566DA33E-7004-40C1-BE1A-AFA0F0D27875}"/>
               </a:ext>
             </a:extLst>
           </p:cNvPr>
@@ -10521,7 +10521,7 @@
           <p:cNvPr id="6" name="">
             <a:extLst xmlns:a="http://schemas.openxmlformats.org/drawingml/2006/main">
               <a:ext uri="{FF2B5EF4-FFF2-40B4-BE49-F238E27FC236}">
-                <a16:creationId xmlns:a16="http://schemas.microsoft.com/office/drawing/2014/main" id="{F354465E-A97E-450C-99A1-ED8E989595EB}"/>
+                <a16:creationId xmlns:a16="http://schemas.microsoft.com/office/drawing/2014/main" id="{266B99CE-AC46-4A4E-BCF1-0FCF163A980E}"/>
               </a:ext>
             </a:extLst>
           </p:cNvPr>
@@ -10624,7 +10624,7 @@
           <p:cNvPr id="7" name="">
             <a:extLst xmlns:a="http://schemas.openxmlformats.org/drawingml/2006/main">
               <a:ext uri="{FF2B5EF4-FFF2-40B4-BE49-F238E27FC236}">
-                <a16:creationId xmlns:a16="http://schemas.microsoft.com/office/drawing/2014/main" id="{9480DA71-96C1-4B9E-BFE0-00398970B97D}"/>
+                <a16:creationId xmlns:a16="http://schemas.microsoft.com/office/drawing/2014/main" id="{ABD0F22E-E128-4F84-BA8B-B237FEB2DD5B}"/>
               </a:ext>
             </a:extLst>
           </p:cNvPr>
@@ -10753,7 +10753,7 @@
     </p:spTree>
     <p:extLst>
       <p:ext uri="{BB962C8B-B14F-4D97-AF65-F5344CB8AC3E}">
-        <p14:creationId xmlns:p14="http://schemas.microsoft.com/office/powerpoint/2010/main" val="2123935914"/>
+        <p14:creationId xmlns:p14="http://schemas.microsoft.com/office/powerpoint/2010/main" val="1074048494"/>
       </p:ext>
     </p:extLst>
   </p:cSld>
